--- a/public/fun/pack/pptx/review/보장점검양식_25_사업장점검_연꽃연못.pptx
+++ b/public/fun/pack/pptx/review/보장점검양식_25_사업장점검_연꽃연못.pptx
@@ -3286,14 +3286,6 @@
 <file path=ppt/slides/slide1.xml><?xml version="1.0" encoding="utf-8"?>
 <p:sld xmlns:a="http://schemas.openxmlformats.org/drawingml/2006/main" xmlns:p="http://schemas.openxmlformats.org/presentationml/2006/main" xmlns:r="http://schemas.openxmlformats.org/officeDocument/2006/relationships">
   <p:cSld>
-    <p:bg>
-      <p:bgPr>
-        <a:solidFill>
-          <a:srgbClr val="7B3759"/>
-        </a:solidFill>
-        <a:effectLst/>
-      </p:bgPr>
-    </p:bg>
     <p:spTree>
       <p:nvGrpSpPr>
         <p:cNvPr id="1" name=""/>
@@ -3301,559 +3293,30 @@
         <p:nvPr/>
       </p:nvGrpSpPr>
       <p:grpSpPr/>
-      <p:sp>
-        <p:nvSpPr>
-          <p:cNvPr id="3" name="장식"/>
-          <p:cNvSpPr/>
+      <p:pic>
+        <p:nvPicPr>
+          <p:cNvPr id="3" name="표지 그림" descr="review-25.jpg"/>
+          <p:cNvPicPr>
+            <a:picLocks noChangeAspect="1"/>
+          </p:cNvPicPr>
           <p:nvPr/>
-        </p:nvSpPr>
-        <p:spPr>
-          <a:xfrm>
-            <a:off x="457200" y="457200"/>
-            <a:ext cx="11277295" cy="5943600"/>
-          </a:xfrm>
-          <a:prstGeom prst="roundRect">
-            <a:avLst>
-              <a:gd name="adj" fmla="val 5000"/>
-            </a:avLst>
-          </a:prstGeom>
-          <a:solidFill>
-            <a:srgbClr val="FFFFFF"/>
-          </a:solidFill>
-          <a:ln>
-            <a:noFill/>
-          </a:ln>
-        </p:spPr>
-        <p:txBody>
-          <a:bodyPr rtlCol="0" anchor="ctr"/>
-          <a:lstStyle/>
-          <a:p>
-            <a:pPr algn="ctr"/>
-          </a:p>
-        </p:txBody>
-      </p:sp>
-      <p:sp>
-        <p:nvSpPr>
-          <p:cNvPr id="4" name="장식"/>
-          <p:cNvSpPr/>
-          <p:nvPr/>
-        </p:nvSpPr>
-        <p:spPr>
-          <a:xfrm>
-            <a:off x="5892165" y="662482"/>
-            <a:ext cx="407365" cy="633679"/>
-          </a:xfrm>
-          <a:prstGeom prst="ellipse">
+        </p:nvPicPr>
+        <p:blipFill>
+          <a:blip r:embed="rId2"/>
+          <a:stretch>
+            <a:fillRect/>
+          </a:stretch>
+        </p:blipFill>
+        <p:spPr>
+          <a:xfrm>
+            <a:off x="0" y="0"/>
+            <a:ext cx="12191695" cy="6858000"/>
+          </a:xfrm>
+          <a:prstGeom prst="rect">
             <a:avLst/>
           </a:prstGeom>
-          <a:solidFill>
-            <a:srgbClr val="B8618C"/>
-          </a:solidFill>
-          <a:ln>
-            <a:noFill/>
-          </a:ln>
-        </p:spPr>
-        <p:txBody>
-          <a:bodyPr rtlCol="0" anchor="ctr"/>
-          <a:lstStyle/>
-          <a:p>
-            <a:pPr algn="ctr"/>
-          </a:p>
-        </p:txBody>
-      </p:sp>
-      <p:sp>
-        <p:nvSpPr>
-          <p:cNvPr id="5" name="장식"/>
-          <p:cNvSpPr/>
-          <p:nvPr/>
-        </p:nvSpPr>
-        <p:spPr>
-          <a:xfrm rot="4320000">
-            <a:off x="6265243" y="933539"/>
-            <a:ext cx="407365" cy="633679"/>
-          </a:xfrm>
-          <a:prstGeom prst="ellipse">
-            <a:avLst/>
-          </a:prstGeom>
-          <a:solidFill>
-            <a:srgbClr val="EED3E0"/>
-          </a:solidFill>
-          <a:ln>
-            <a:noFill/>
-          </a:ln>
-        </p:spPr>
-        <p:txBody>
-          <a:bodyPr rtlCol="0" anchor="ctr"/>
-          <a:lstStyle/>
-          <a:p>
-            <a:pPr algn="ctr"/>
-          </a:p>
-        </p:txBody>
-      </p:sp>
-      <p:sp>
-        <p:nvSpPr>
-          <p:cNvPr id="6" name="장식"/>
-          <p:cNvSpPr/>
-          <p:nvPr/>
-        </p:nvSpPr>
-        <p:spPr>
-          <a:xfrm rot="8640000">
-            <a:off x="6122739" y="1372119"/>
-            <a:ext cx="407365" cy="633679"/>
-          </a:xfrm>
-          <a:prstGeom prst="ellipse">
-            <a:avLst/>
-          </a:prstGeom>
-          <a:solidFill>
-            <a:srgbClr val="B8618C"/>
-          </a:solidFill>
-          <a:ln>
-            <a:noFill/>
-          </a:ln>
-        </p:spPr>
-        <p:txBody>
-          <a:bodyPr rtlCol="0" anchor="ctr"/>
-          <a:lstStyle/>
-          <a:p>
-            <a:pPr algn="ctr"/>
-          </a:p>
-        </p:txBody>
-      </p:sp>
-      <p:sp>
-        <p:nvSpPr>
-          <p:cNvPr id="7" name="장식"/>
-          <p:cNvSpPr/>
-          <p:nvPr/>
-        </p:nvSpPr>
-        <p:spPr>
-          <a:xfrm rot="12960000">
-            <a:off x="5661590" y="1372119"/>
-            <a:ext cx="407365" cy="633679"/>
-          </a:xfrm>
-          <a:prstGeom prst="ellipse">
-            <a:avLst/>
-          </a:prstGeom>
-          <a:solidFill>
-            <a:srgbClr val="EED3E0"/>
-          </a:solidFill>
-          <a:ln>
-            <a:noFill/>
-          </a:ln>
-        </p:spPr>
-        <p:txBody>
-          <a:bodyPr rtlCol="0" anchor="ctr"/>
-          <a:lstStyle/>
-          <a:p>
-            <a:pPr algn="ctr"/>
-          </a:p>
-        </p:txBody>
-      </p:sp>
-      <p:sp>
-        <p:nvSpPr>
-          <p:cNvPr id="8" name="장식"/>
-          <p:cNvSpPr/>
-          <p:nvPr/>
-        </p:nvSpPr>
-        <p:spPr>
-          <a:xfrm rot="17280000">
-            <a:off x="5519086" y="933539"/>
-            <a:ext cx="407365" cy="633679"/>
-          </a:xfrm>
-          <a:prstGeom prst="ellipse">
-            <a:avLst/>
-          </a:prstGeom>
-          <a:solidFill>
-            <a:srgbClr val="B8618C"/>
-          </a:solidFill>
-          <a:ln>
-            <a:noFill/>
-          </a:ln>
-        </p:spPr>
-        <p:txBody>
-          <a:bodyPr rtlCol="0" anchor="ctr"/>
-          <a:lstStyle/>
-          <a:p>
-            <a:pPr algn="ctr"/>
-          </a:p>
-        </p:txBody>
-      </p:sp>
-      <p:sp>
-        <p:nvSpPr>
-          <p:cNvPr id="9" name="장식"/>
-          <p:cNvSpPr/>
-          <p:nvPr/>
-        </p:nvSpPr>
-        <p:spPr>
-          <a:xfrm>
-            <a:off x="5960059" y="1235811"/>
-            <a:ext cx="271576" cy="271576"/>
-          </a:xfrm>
-          <a:prstGeom prst="ellipse">
-            <a:avLst/>
-          </a:prstGeom>
-          <a:solidFill>
-            <a:srgbClr val="3F8D3F"/>
-          </a:solidFill>
-          <a:ln>
-            <a:noFill/>
-          </a:ln>
-        </p:spPr>
-        <p:txBody>
-          <a:bodyPr rtlCol="0" anchor="ctr"/>
-          <a:lstStyle/>
-          <a:p>
-            <a:pPr algn="ctr"/>
-          </a:p>
-        </p:txBody>
-      </p:sp>
-      <p:sp>
-        <p:nvSpPr>
-          <p:cNvPr id="10" name="장식"/>
-          <p:cNvSpPr/>
-          <p:nvPr/>
-        </p:nvSpPr>
-        <p:spPr>
-          <a:xfrm rot="1200000">
-            <a:off x="5231271" y="1707812"/>
-            <a:ext cx="203682" cy="316839"/>
-          </a:xfrm>
-          <a:prstGeom prst="ellipse">
-            <a:avLst/>
-          </a:prstGeom>
-          <a:solidFill>
-            <a:srgbClr val="B8618C"/>
-          </a:solidFill>
-          <a:ln>
-            <a:noFill/>
-          </a:ln>
-        </p:spPr>
-        <p:txBody>
-          <a:bodyPr rtlCol="0" anchor="ctr"/>
-          <a:lstStyle/>
-          <a:p>
-            <a:pPr algn="ctr"/>
-          </a:p>
-        </p:txBody>
-      </p:sp>
-      <p:sp>
-        <p:nvSpPr>
-          <p:cNvPr id="11" name="장식"/>
-          <p:cNvSpPr/>
-          <p:nvPr/>
-        </p:nvSpPr>
-        <p:spPr>
-          <a:xfrm rot="5520000">
-            <a:off x="5360207" y="1898967"/>
-            <a:ext cx="203682" cy="316839"/>
-          </a:xfrm>
-          <a:prstGeom prst="ellipse">
-            <a:avLst/>
-          </a:prstGeom>
-          <a:solidFill>
-            <a:srgbClr val="EED3E0"/>
-          </a:solidFill>
-          <a:ln>
-            <a:noFill/>
-          </a:ln>
-        </p:spPr>
-        <p:txBody>
-          <a:bodyPr rtlCol="0" anchor="ctr"/>
-          <a:lstStyle/>
-          <a:p>
-            <a:pPr algn="ctr"/>
-          </a:p>
-        </p:txBody>
-      </p:sp>
-      <p:sp>
-        <p:nvSpPr>
-          <p:cNvPr id="12" name="장식"/>
-          <p:cNvSpPr/>
-          <p:nvPr/>
-        </p:nvSpPr>
-        <p:spPr>
-          <a:xfrm rot="9840000">
-            <a:off x="5218251" y="2080662"/>
-            <a:ext cx="203682" cy="316839"/>
-          </a:xfrm>
-          <a:prstGeom prst="ellipse">
-            <a:avLst/>
-          </a:prstGeom>
-          <a:solidFill>
-            <a:srgbClr val="B8618C"/>
-          </a:solidFill>
-          <a:ln>
-            <a:noFill/>
-          </a:ln>
-        </p:spPr>
-        <p:txBody>
-          <a:bodyPr rtlCol="0" anchor="ctr"/>
-          <a:lstStyle/>
-          <a:p>
-            <a:pPr algn="ctr"/>
-          </a:p>
-        </p:txBody>
-      </p:sp>
-      <p:sp>
-        <p:nvSpPr>
-          <p:cNvPr id="13" name="장식"/>
-          <p:cNvSpPr/>
-          <p:nvPr/>
-        </p:nvSpPr>
-        <p:spPr>
-          <a:xfrm rot="14160000">
-            <a:off x="5001581" y="2001801"/>
-            <a:ext cx="203682" cy="316839"/>
-          </a:xfrm>
-          <a:prstGeom prst="ellipse">
-            <a:avLst/>
-          </a:prstGeom>
-          <a:solidFill>
-            <a:srgbClr val="EED3E0"/>
-          </a:solidFill>
-          <a:ln>
-            <a:noFill/>
-          </a:ln>
-        </p:spPr>
-        <p:txBody>
-          <a:bodyPr rtlCol="0" anchor="ctr"/>
-          <a:lstStyle/>
-          <a:p>
-            <a:pPr algn="ctr"/>
-          </a:p>
-        </p:txBody>
-      </p:sp>
-      <p:sp>
-        <p:nvSpPr>
-          <p:cNvPr id="14" name="장식"/>
-          <p:cNvSpPr/>
-          <p:nvPr/>
-        </p:nvSpPr>
-        <p:spPr>
-          <a:xfrm rot="18480000">
-            <a:off x="5009628" y="1771367"/>
-            <a:ext cx="203682" cy="316839"/>
-          </a:xfrm>
-          <a:prstGeom prst="ellipse">
-            <a:avLst/>
-          </a:prstGeom>
-          <a:solidFill>
-            <a:srgbClr val="B8618C"/>
-          </a:solidFill>
-          <a:ln>
-            <a:noFill/>
-          </a:ln>
-        </p:spPr>
-        <p:txBody>
-          <a:bodyPr rtlCol="0" anchor="ctr"/>
-          <a:lstStyle/>
-          <a:p>
-            <a:pPr algn="ctr"/>
-          </a:p>
-        </p:txBody>
-      </p:sp>
-      <p:sp>
-        <p:nvSpPr>
-          <p:cNvPr id="15" name="장식"/>
-          <p:cNvSpPr/>
-          <p:nvPr/>
-        </p:nvSpPr>
-        <p:spPr>
-          <a:xfrm>
-            <a:off x="5198135" y="1982647"/>
-            <a:ext cx="135788" cy="135788"/>
-          </a:xfrm>
-          <a:prstGeom prst="ellipse">
-            <a:avLst/>
-          </a:prstGeom>
-          <a:solidFill>
-            <a:srgbClr val="3F8D3F"/>
-          </a:solidFill>
-          <a:ln>
-            <a:noFill/>
-          </a:ln>
-        </p:spPr>
-        <p:txBody>
-          <a:bodyPr rtlCol="0" anchor="ctr"/>
-          <a:lstStyle/>
-          <a:p>
-            <a:pPr algn="ctr"/>
-          </a:p>
-        </p:txBody>
-      </p:sp>
-      <p:sp>
-        <p:nvSpPr>
-          <p:cNvPr id="16" name="장식"/>
-          <p:cNvSpPr/>
-          <p:nvPr/>
-        </p:nvSpPr>
-        <p:spPr>
-          <a:xfrm rot="2400000">
-            <a:off x="6946022" y="1866696"/>
-            <a:ext cx="171093" cy="266145"/>
-          </a:xfrm>
-          <a:prstGeom prst="ellipse">
-            <a:avLst/>
-          </a:prstGeom>
-          <a:solidFill>
-            <a:srgbClr val="B8618C"/>
-          </a:solidFill>
-          <a:ln>
-            <a:noFill/>
-          </a:ln>
-        </p:spPr>
-        <p:txBody>
-          <a:bodyPr rtlCol="0" anchor="ctr"/>
-          <a:lstStyle/>
-          <a:p>
-            <a:pPr algn="ctr"/>
-          </a:p>
-        </p:txBody>
-      </p:sp>
-      <p:sp>
-        <p:nvSpPr>
-          <p:cNvPr id="17" name="장식"/>
-          <p:cNvSpPr/>
-          <p:nvPr/>
-        </p:nvSpPr>
-        <p:spPr>
-          <a:xfrm rot="6720000">
-            <a:off x="6992878" y="2054626"/>
-            <a:ext cx="171093" cy="266145"/>
-          </a:xfrm>
-          <a:prstGeom prst="ellipse">
-            <a:avLst/>
-          </a:prstGeom>
-          <a:solidFill>
-            <a:srgbClr val="EED3E0"/>
-          </a:solidFill>
-          <a:ln>
-            <a:noFill/>
-          </a:ln>
-        </p:spPr>
-        <p:txBody>
-          <a:bodyPr rtlCol="0" anchor="ctr"/>
-          <a:lstStyle/>
-          <a:p>
-            <a:pPr algn="ctr"/>
-          </a:p>
-        </p:txBody>
-      </p:sp>
-      <p:sp>
-        <p:nvSpPr>
-          <p:cNvPr id="18" name="장식"/>
-          <p:cNvSpPr/>
-          <p:nvPr/>
-        </p:nvSpPr>
-        <p:spPr>
-          <a:xfrm rot="11040000">
-            <a:off x="6828626" y="2157262"/>
-            <a:ext cx="171093" cy="266145"/>
-          </a:xfrm>
-          <a:prstGeom prst="ellipse">
-            <a:avLst/>
-          </a:prstGeom>
-          <a:solidFill>
-            <a:srgbClr val="B8618C"/>
-          </a:solidFill>
-          <a:ln>
-            <a:noFill/>
-          </a:ln>
-        </p:spPr>
-        <p:txBody>
-          <a:bodyPr rtlCol="0" anchor="ctr"/>
-          <a:lstStyle/>
-          <a:p>
-            <a:pPr algn="ctr"/>
-          </a:p>
-        </p:txBody>
-      </p:sp>
-      <p:sp>
-        <p:nvSpPr>
-          <p:cNvPr id="19" name="장식"/>
-          <p:cNvSpPr/>
-          <p:nvPr/>
-        </p:nvSpPr>
-        <p:spPr>
-          <a:xfrm rot="15360000">
-            <a:off x="6680256" y="2032765"/>
-            <a:ext cx="171093" cy="266145"/>
-          </a:xfrm>
-          <a:prstGeom prst="ellipse">
-            <a:avLst/>
-          </a:prstGeom>
-          <a:solidFill>
-            <a:srgbClr val="EED3E0"/>
-          </a:solidFill>
-          <a:ln>
-            <a:noFill/>
-          </a:ln>
-        </p:spPr>
-        <p:txBody>
-          <a:bodyPr rtlCol="0" anchor="ctr"/>
-          <a:lstStyle/>
-          <a:p>
-            <a:pPr algn="ctr"/>
-          </a:p>
-        </p:txBody>
-      </p:sp>
-      <p:sp>
-        <p:nvSpPr>
-          <p:cNvPr id="20" name="장식"/>
-          <p:cNvSpPr/>
-          <p:nvPr/>
-        </p:nvSpPr>
-        <p:spPr>
-          <a:xfrm rot="19680000">
-            <a:off x="6752811" y="1853185"/>
-            <a:ext cx="171093" cy="266145"/>
-          </a:xfrm>
-          <a:prstGeom prst="ellipse">
-            <a:avLst/>
-          </a:prstGeom>
-          <a:solidFill>
-            <a:srgbClr val="B8618C"/>
-          </a:solidFill>
-          <a:ln>
-            <a:noFill/>
-          </a:ln>
-        </p:spPr>
-        <p:txBody>
-          <a:bodyPr rtlCol="0" anchor="ctr"/>
-          <a:lstStyle/>
-          <a:p>
-            <a:pPr algn="ctr"/>
-          </a:p>
-        </p:txBody>
-      </p:sp>
-      <p:sp>
-        <p:nvSpPr>
-          <p:cNvPr id="21" name="장식"/>
-          <p:cNvSpPr/>
-          <p:nvPr/>
-        </p:nvSpPr>
-        <p:spPr>
-          <a:xfrm>
-            <a:off x="6868634" y="2068948"/>
-            <a:ext cx="114062" cy="114062"/>
-          </a:xfrm>
-          <a:prstGeom prst="ellipse">
-            <a:avLst/>
-          </a:prstGeom>
-          <a:solidFill>
-            <a:srgbClr val="3F8D3F"/>
-          </a:solidFill>
-          <a:ln>
-            <a:noFill/>
-          </a:ln>
-        </p:spPr>
-        <p:txBody>
-          <a:bodyPr rtlCol="0" anchor="ctr"/>
-          <a:lstStyle/>
-          <a:p>
-            <a:pPr algn="ctr"/>
-          </a:p>
-        </p:txBody>
-      </p:sp>
+        </p:spPr>
+      </p:pic>
       <p:sp>
         <p:nvSpPr>
           <p:cNvPr id="2" name="Title 1"/>
@@ -3866,8 +3329,8 @@
         </p:nvSpPr>
         <p:spPr>
           <a:xfrm>
-            <a:off x="1463003" y="2263140"/>
-            <a:ext cx="9265688" cy="1371600"/>
+            <a:off x="853418" y="2057400"/>
+            <a:ext cx="6095847" cy="1554480"/>
           </a:xfrm>
         </p:spPr>
         <p:txBody>
@@ -3876,7 +3339,7 @@
           </a:bodyPr>
           <a:lstStyle/>
           <a:p>
-            <a:pPr algn="ctr">
+            <a:pPr algn="l">
               <a:lnSpc>
                 <a:spcPct val="105000"/>
               </a:lnSpc>
@@ -3894,14 +3357,14 @@
       </p:sp>
       <p:sp>
         <p:nvSpPr>
-          <p:cNvPr id="22" name="한 줄 문구"/>
+          <p:cNvPr id="4" name="한 줄 문구"/>
           <p:cNvSpPr txBox="1"/>
           <p:nvPr/>
         </p:nvSpPr>
         <p:spPr>
           <a:xfrm>
-            <a:off x="1463003" y="3726180"/>
-            <a:ext cx="9265688" cy="822960"/>
+            <a:off x="853418" y="3749039"/>
+            <a:ext cx="6095847" cy="822960"/>
           </a:xfrm>
           <a:prstGeom prst="rect">
             <a:avLst/>
@@ -3914,7 +3377,7 @@
           </a:bodyPr>
           <a:lstStyle/>
           <a:p>
-            <a:pPr algn="ctr">
+            <a:pPr algn="l">
               <a:lnSpc>
                 <a:spcPct val="115000"/>
               </a:lnSpc>
@@ -3925,21 +3388,21 @@
                   <a:srgbClr val="7B3759"/>
                 </a:solidFill>
               </a:rPr>
-              <a:t>연꽃처럼 단정하게 정리된 표</a:t>
+              <a:t>성수기 전에 점검해 둡니다</a:t>
             </a:r>
           </a:p>
         </p:txBody>
       </p:sp>
       <p:sp>
         <p:nvSpPr>
-          <p:cNvPr id="23" name="안내 문구"/>
+          <p:cNvPr id="5" name="안내 문구"/>
           <p:cNvSpPr txBox="1"/>
           <p:nvPr/>
         </p:nvSpPr>
         <p:spPr>
           <a:xfrm>
-            <a:off x="1463003" y="4594860"/>
-            <a:ext cx="9265688" cy="914400"/>
+            <a:off x="853418" y="4617720"/>
+            <a:ext cx="6095847" cy="914400"/>
           </a:xfrm>
           <a:prstGeom prst="rect">
             <a:avLst/>
@@ -3952,7 +3415,7 @@
           </a:bodyPr>
           <a:lstStyle/>
           <a:p>
-            <a:pPr algn="ctr">
+            <a:pPr algn="l">
               <a:lnSpc>
                 <a:spcPct val="115000"/>
               </a:lnSpc>
@@ -3963,11 +3426,11 @@
                   <a:srgbClr val="666666"/>
                 </a:solidFill>
               </a:rPr>
-              <a:t>사업장 점검 · 2026. 00. 00</a:t>
+              <a:t>사업장 점검 · 2027. 00. 00</a:t>
             </a:r>
           </a:p>
           <a:p>
-            <a:pPr algn="ctr">
+            <a:pPr algn="l">
               <a:lnSpc>
                 <a:spcPct val="115000"/>
               </a:lnSpc>
@@ -4042,528 +3505,6 @@
       </p:sp>
       <p:sp>
         <p:nvSpPr>
-          <p:cNvPr id="4" name="장식"/>
-          <p:cNvSpPr/>
-          <p:nvPr/>
-        </p:nvSpPr>
-        <p:spPr>
-          <a:xfrm>
-            <a:off x="10879531" y="530352"/>
-            <a:ext cx="246888" cy="384048"/>
-          </a:xfrm>
-          <a:prstGeom prst="ellipse">
-            <a:avLst/>
-          </a:prstGeom>
-          <a:solidFill>
-            <a:srgbClr val="B8618C"/>
-          </a:solidFill>
-          <a:ln>
-            <a:noFill/>
-          </a:ln>
-        </p:spPr>
-        <p:txBody>
-          <a:bodyPr rtlCol="0" anchor="ctr"/>
-          <a:lstStyle/>
-          <a:p>
-            <a:pPr algn="ctr"/>
-          </a:p>
-        </p:txBody>
-      </p:sp>
-      <p:sp>
-        <p:nvSpPr>
-          <p:cNvPr id="5" name="장식"/>
-          <p:cNvSpPr/>
-          <p:nvPr/>
-        </p:nvSpPr>
-        <p:spPr>
-          <a:xfrm rot="4320000">
-            <a:off x="11105639" y="694629"/>
-            <a:ext cx="246888" cy="384048"/>
-          </a:xfrm>
-          <a:prstGeom prst="ellipse">
-            <a:avLst/>
-          </a:prstGeom>
-          <a:solidFill>
-            <a:srgbClr val="EED3E0"/>
-          </a:solidFill>
-          <a:ln>
-            <a:noFill/>
-          </a:ln>
-        </p:spPr>
-        <p:txBody>
-          <a:bodyPr rtlCol="0" anchor="ctr"/>
-          <a:lstStyle/>
-          <a:p>
-            <a:pPr algn="ctr"/>
-          </a:p>
-        </p:txBody>
-      </p:sp>
-      <p:sp>
-        <p:nvSpPr>
-          <p:cNvPr id="6" name="장식"/>
-          <p:cNvSpPr/>
-          <p:nvPr/>
-        </p:nvSpPr>
-        <p:spPr>
-          <a:xfrm rot="8640000">
-            <a:off x="11019273" y="960434"/>
-            <a:ext cx="246888" cy="384048"/>
-          </a:xfrm>
-          <a:prstGeom prst="ellipse">
-            <a:avLst/>
-          </a:prstGeom>
-          <a:solidFill>
-            <a:srgbClr val="B8618C"/>
-          </a:solidFill>
-          <a:ln>
-            <a:noFill/>
-          </a:ln>
-        </p:spPr>
-        <p:txBody>
-          <a:bodyPr rtlCol="0" anchor="ctr"/>
-          <a:lstStyle/>
-          <a:p>
-            <a:pPr algn="ctr"/>
-          </a:p>
-        </p:txBody>
-      </p:sp>
-      <p:sp>
-        <p:nvSpPr>
-          <p:cNvPr id="7" name="장식"/>
-          <p:cNvSpPr/>
-          <p:nvPr/>
-        </p:nvSpPr>
-        <p:spPr>
-          <a:xfrm rot="12960000">
-            <a:off x="10739788" y="960434"/>
-            <a:ext cx="246888" cy="384048"/>
-          </a:xfrm>
-          <a:prstGeom prst="ellipse">
-            <a:avLst/>
-          </a:prstGeom>
-          <a:solidFill>
-            <a:srgbClr val="EED3E0"/>
-          </a:solidFill>
-          <a:ln>
-            <a:noFill/>
-          </a:ln>
-        </p:spPr>
-        <p:txBody>
-          <a:bodyPr rtlCol="0" anchor="ctr"/>
-          <a:lstStyle/>
-          <a:p>
-            <a:pPr algn="ctr"/>
-          </a:p>
-        </p:txBody>
-      </p:sp>
-      <p:sp>
-        <p:nvSpPr>
-          <p:cNvPr id="8" name="장식"/>
-          <p:cNvSpPr/>
-          <p:nvPr/>
-        </p:nvSpPr>
-        <p:spPr>
-          <a:xfrm rot="17280000">
-            <a:off x="10653423" y="694629"/>
-            <a:ext cx="246888" cy="384048"/>
-          </a:xfrm>
-          <a:prstGeom prst="ellipse">
-            <a:avLst/>
-          </a:prstGeom>
-          <a:solidFill>
-            <a:srgbClr val="B8618C"/>
-          </a:solidFill>
-          <a:ln>
-            <a:noFill/>
-          </a:ln>
-        </p:spPr>
-        <p:txBody>
-          <a:bodyPr rtlCol="0" anchor="ctr"/>
-          <a:lstStyle/>
-          <a:p>
-            <a:pPr algn="ctr"/>
-          </a:p>
-        </p:txBody>
-      </p:sp>
-      <p:sp>
-        <p:nvSpPr>
-          <p:cNvPr id="9" name="장식"/>
-          <p:cNvSpPr/>
-          <p:nvPr/>
-        </p:nvSpPr>
-        <p:spPr>
-          <a:xfrm>
-            <a:off x="10920679" y="877824"/>
-            <a:ext cx="164592" cy="164592"/>
-          </a:xfrm>
-          <a:prstGeom prst="ellipse">
-            <a:avLst/>
-          </a:prstGeom>
-          <a:solidFill>
-            <a:srgbClr val="3F8D3F"/>
-          </a:solidFill>
-          <a:ln>
-            <a:noFill/>
-          </a:ln>
-        </p:spPr>
-        <p:txBody>
-          <a:bodyPr rtlCol="0" anchor="ctr"/>
-          <a:lstStyle/>
-          <a:p>
-            <a:pPr algn="ctr"/>
-          </a:p>
-        </p:txBody>
-      </p:sp>
-      <p:sp>
-        <p:nvSpPr>
-          <p:cNvPr id="10" name="장식"/>
-          <p:cNvSpPr/>
-          <p:nvPr/>
-        </p:nvSpPr>
-        <p:spPr>
-          <a:xfrm rot="1200000">
-            <a:off x="10478989" y="1163884"/>
-            <a:ext cx="123444" cy="192024"/>
-          </a:xfrm>
-          <a:prstGeom prst="ellipse">
-            <a:avLst/>
-          </a:prstGeom>
-          <a:solidFill>
-            <a:srgbClr val="B8618C"/>
-          </a:solidFill>
-          <a:ln>
-            <a:noFill/>
-          </a:ln>
-        </p:spPr>
-        <p:txBody>
-          <a:bodyPr rtlCol="0" anchor="ctr"/>
-          <a:lstStyle/>
-          <a:p>
-            <a:pPr algn="ctr"/>
-          </a:p>
-        </p:txBody>
-      </p:sp>
-      <p:sp>
-        <p:nvSpPr>
-          <p:cNvPr id="11" name="장식"/>
-          <p:cNvSpPr/>
-          <p:nvPr/>
-        </p:nvSpPr>
-        <p:spPr>
-          <a:xfrm rot="5520000">
-            <a:off x="10557132" y="1279736"/>
-            <a:ext cx="123444" cy="192024"/>
-          </a:xfrm>
-          <a:prstGeom prst="ellipse">
-            <a:avLst/>
-          </a:prstGeom>
-          <a:solidFill>
-            <a:srgbClr val="EED3E0"/>
-          </a:solidFill>
-          <a:ln>
-            <a:noFill/>
-          </a:ln>
-        </p:spPr>
-        <p:txBody>
-          <a:bodyPr rtlCol="0" anchor="ctr"/>
-          <a:lstStyle/>
-          <a:p>
-            <a:pPr algn="ctr"/>
-          </a:p>
-        </p:txBody>
-      </p:sp>
-      <p:sp>
-        <p:nvSpPr>
-          <p:cNvPr id="12" name="장식"/>
-          <p:cNvSpPr/>
-          <p:nvPr/>
-        </p:nvSpPr>
-        <p:spPr>
-          <a:xfrm rot="9840000">
-            <a:off x="10471098" y="1389855"/>
-            <a:ext cx="123444" cy="192024"/>
-          </a:xfrm>
-          <a:prstGeom prst="ellipse">
-            <a:avLst/>
-          </a:prstGeom>
-          <a:solidFill>
-            <a:srgbClr val="B8618C"/>
-          </a:solidFill>
-          <a:ln>
-            <a:noFill/>
-          </a:ln>
-        </p:spPr>
-        <p:txBody>
-          <a:bodyPr rtlCol="0" anchor="ctr"/>
-          <a:lstStyle/>
-          <a:p>
-            <a:pPr algn="ctr"/>
-          </a:p>
-        </p:txBody>
-      </p:sp>
-      <p:sp>
-        <p:nvSpPr>
-          <p:cNvPr id="13" name="장식"/>
-          <p:cNvSpPr/>
-          <p:nvPr/>
-        </p:nvSpPr>
-        <p:spPr>
-          <a:xfrm rot="14160000">
-            <a:off x="10339783" y="1342060"/>
-            <a:ext cx="123444" cy="192024"/>
-          </a:xfrm>
-          <a:prstGeom prst="ellipse">
-            <a:avLst/>
-          </a:prstGeom>
-          <a:solidFill>
-            <a:srgbClr val="EED3E0"/>
-          </a:solidFill>
-          <a:ln>
-            <a:noFill/>
-          </a:ln>
-        </p:spPr>
-        <p:txBody>
-          <a:bodyPr rtlCol="0" anchor="ctr"/>
-          <a:lstStyle/>
-          <a:p>
-            <a:pPr algn="ctr"/>
-          </a:p>
-        </p:txBody>
-      </p:sp>
-      <p:sp>
-        <p:nvSpPr>
-          <p:cNvPr id="14" name="장식"/>
-          <p:cNvSpPr/>
-          <p:nvPr/>
-        </p:nvSpPr>
-        <p:spPr>
-          <a:xfrm rot="18480000">
-            <a:off x="10344660" y="1202403"/>
-            <a:ext cx="123444" cy="192024"/>
-          </a:xfrm>
-          <a:prstGeom prst="ellipse">
-            <a:avLst/>
-          </a:prstGeom>
-          <a:solidFill>
-            <a:srgbClr val="B8618C"/>
-          </a:solidFill>
-          <a:ln>
-            <a:noFill/>
-          </a:ln>
-        </p:spPr>
-        <p:txBody>
-          <a:bodyPr rtlCol="0" anchor="ctr"/>
-          <a:lstStyle/>
-          <a:p>
-            <a:pPr algn="ctr"/>
-          </a:p>
-        </p:txBody>
-      </p:sp>
-      <p:sp>
-        <p:nvSpPr>
-          <p:cNvPr id="15" name="장식"/>
-          <p:cNvSpPr/>
-          <p:nvPr/>
-        </p:nvSpPr>
-        <p:spPr>
-          <a:xfrm>
-            <a:off x="10458907" y="1330452"/>
-            <a:ext cx="82296" cy="82296"/>
-          </a:xfrm>
-          <a:prstGeom prst="ellipse">
-            <a:avLst/>
-          </a:prstGeom>
-          <a:solidFill>
-            <a:srgbClr val="3F8D3F"/>
-          </a:solidFill>
-          <a:ln>
-            <a:noFill/>
-          </a:ln>
-        </p:spPr>
-        <p:txBody>
-          <a:bodyPr rtlCol="0" anchor="ctr"/>
-          <a:lstStyle/>
-          <a:p>
-            <a:pPr algn="ctr"/>
-          </a:p>
-        </p:txBody>
-      </p:sp>
-      <p:sp>
-        <p:nvSpPr>
-          <p:cNvPr id="16" name="장식"/>
-          <p:cNvSpPr/>
-          <p:nvPr/>
-        </p:nvSpPr>
-        <p:spPr>
-          <a:xfrm rot="2400000">
-            <a:off x="11518232" y="1260178"/>
-            <a:ext cx="103692" cy="161300"/>
-          </a:xfrm>
-          <a:prstGeom prst="ellipse">
-            <a:avLst/>
-          </a:prstGeom>
-          <a:solidFill>
-            <a:srgbClr val="B8618C"/>
-          </a:solidFill>
-          <a:ln>
-            <a:noFill/>
-          </a:ln>
-        </p:spPr>
-        <p:txBody>
-          <a:bodyPr rtlCol="0" anchor="ctr"/>
-          <a:lstStyle/>
-          <a:p>
-            <a:pPr algn="ctr"/>
-          </a:p>
-        </p:txBody>
-      </p:sp>
-      <p:sp>
-        <p:nvSpPr>
-          <p:cNvPr id="17" name="장식"/>
-          <p:cNvSpPr/>
-          <p:nvPr/>
-        </p:nvSpPr>
-        <p:spPr>
-          <a:xfrm rot="6720000">
-            <a:off x="11546630" y="1374075"/>
-            <a:ext cx="103692" cy="161300"/>
-          </a:xfrm>
-          <a:prstGeom prst="ellipse">
-            <a:avLst/>
-          </a:prstGeom>
-          <a:solidFill>
-            <a:srgbClr val="EED3E0"/>
-          </a:solidFill>
-          <a:ln>
-            <a:noFill/>
-          </a:ln>
-        </p:spPr>
-        <p:txBody>
-          <a:bodyPr rtlCol="0" anchor="ctr"/>
-          <a:lstStyle/>
-          <a:p>
-            <a:pPr algn="ctr"/>
-          </a:p>
-        </p:txBody>
-      </p:sp>
-      <p:sp>
-        <p:nvSpPr>
-          <p:cNvPr id="18" name="장식"/>
-          <p:cNvSpPr/>
-          <p:nvPr/>
-        </p:nvSpPr>
-        <p:spPr>
-          <a:xfrm rot="11040000">
-            <a:off x="11447083" y="1436279"/>
-            <a:ext cx="103692" cy="161300"/>
-          </a:xfrm>
-          <a:prstGeom prst="ellipse">
-            <a:avLst/>
-          </a:prstGeom>
-          <a:solidFill>
-            <a:srgbClr val="B8618C"/>
-          </a:solidFill>
-          <a:ln>
-            <a:noFill/>
-          </a:ln>
-        </p:spPr>
-        <p:txBody>
-          <a:bodyPr rtlCol="0" anchor="ctr"/>
-          <a:lstStyle/>
-          <a:p>
-            <a:pPr algn="ctr"/>
-          </a:p>
-        </p:txBody>
-      </p:sp>
-      <p:sp>
-        <p:nvSpPr>
-          <p:cNvPr id="19" name="장식"/>
-          <p:cNvSpPr/>
-          <p:nvPr/>
-        </p:nvSpPr>
-        <p:spPr>
-          <a:xfrm rot="15360000">
-            <a:off x="11357162" y="1360826"/>
-            <a:ext cx="103692" cy="161300"/>
-          </a:xfrm>
-          <a:prstGeom prst="ellipse">
-            <a:avLst/>
-          </a:prstGeom>
-          <a:solidFill>
-            <a:srgbClr val="EED3E0"/>
-          </a:solidFill>
-          <a:ln>
-            <a:noFill/>
-          </a:ln>
-        </p:spPr>
-        <p:txBody>
-          <a:bodyPr rtlCol="0" anchor="ctr"/>
-          <a:lstStyle/>
-          <a:p>
-            <a:pPr algn="ctr"/>
-          </a:p>
-        </p:txBody>
-      </p:sp>
-      <p:sp>
-        <p:nvSpPr>
-          <p:cNvPr id="20" name="장식"/>
-          <p:cNvSpPr/>
-          <p:nvPr/>
-        </p:nvSpPr>
-        <p:spPr>
-          <a:xfrm rot="19680000">
-            <a:off x="11401134" y="1251990"/>
-            <a:ext cx="103692" cy="161300"/>
-          </a:xfrm>
-          <a:prstGeom prst="ellipse">
-            <a:avLst/>
-          </a:prstGeom>
-          <a:solidFill>
-            <a:srgbClr val="B8618C"/>
-          </a:solidFill>
-          <a:ln>
-            <a:noFill/>
-          </a:ln>
-        </p:spPr>
-        <p:txBody>
-          <a:bodyPr rtlCol="0" anchor="ctr"/>
-          <a:lstStyle/>
-          <a:p>
-            <a:pPr algn="ctr"/>
-          </a:p>
-        </p:txBody>
-      </p:sp>
-      <p:sp>
-        <p:nvSpPr>
-          <p:cNvPr id="21" name="장식"/>
-          <p:cNvSpPr/>
-          <p:nvPr/>
-        </p:nvSpPr>
-        <p:spPr>
-          <a:xfrm>
-            <a:off x="11471330" y="1382755"/>
-            <a:ext cx="69128" cy="69128"/>
-          </a:xfrm>
-          <a:prstGeom prst="ellipse">
-            <a:avLst/>
-          </a:prstGeom>
-          <a:solidFill>
-            <a:srgbClr val="3F8D3F"/>
-          </a:solidFill>
-          <a:ln>
-            <a:noFill/>
-          </a:ln>
-        </p:spPr>
-        <p:txBody>
-          <a:bodyPr rtlCol="0" anchor="ctr"/>
-          <a:lstStyle/>
-          <a:p>
-            <a:pPr algn="ctr"/>
-          </a:p>
-        </p:txBody>
-      </p:sp>
-      <p:sp>
-        <p:nvSpPr>
           <p:cNvPr id="2" name="Title 1"/>
           <p:cNvSpPr>
             <a:spLocks noGrp="1"/>
@@ -4602,7 +3543,7 @@
       </p:sp>
       <p:graphicFrame>
         <p:nvGraphicFramePr>
-          <p:cNvPr id="22" name="표"/>
+          <p:cNvPr id="4" name="표"/>
           <p:cNvGraphicFramePr>
             <a:graphicFrameLocks noGrp="1"/>
           </p:cNvGraphicFramePr>
@@ -5155,528 +4096,6 @@
       </p:sp>
       <p:sp>
         <p:nvSpPr>
-          <p:cNvPr id="4" name="장식"/>
-          <p:cNvSpPr/>
-          <p:nvPr/>
-        </p:nvSpPr>
-        <p:spPr>
-          <a:xfrm>
-            <a:off x="10879531" y="530352"/>
-            <a:ext cx="246888" cy="384048"/>
-          </a:xfrm>
-          <a:prstGeom prst="ellipse">
-            <a:avLst/>
-          </a:prstGeom>
-          <a:solidFill>
-            <a:srgbClr val="B8618C"/>
-          </a:solidFill>
-          <a:ln>
-            <a:noFill/>
-          </a:ln>
-        </p:spPr>
-        <p:txBody>
-          <a:bodyPr rtlCol="0" anchor="ctr"/>
-          <a:lstStyle/>
-          <a:p>
-            <a:pPr algn="ctr"/>
-          </a:p>
-        </p:txBody>
-      </p:sp>
-      <p:sp>
-        <p:nvSpPr>
-          <p:cNvPr id="5" name="장식"/>
-          <p:cNvSpPr/>
-          <p:nvPr/>
-        </p:nvSpPr>
-        <p:spPr>
-          <a:xfrm rot="4320000">
-            <a:off x="11105639" y="694629"/>
-            <a:ext cx="246888" cy="384048"/>
-          </a:xfrm>
-          <a:prstGeom prst="ellipse">
-            <a:avLst/>
-          </a:prstGeom>
-          <a:solidFill>
-            <a:srgbClr val="EED3E0"/>
-          </a:solidFill>
-          <a:ln>
-            <a:noFill/>
-          </a:ln>
-        </p:spPr>
-        <p:txBody>
-          <a:bodyPr rtlCol="0" anchor="ctr"/>
-          <a:lstStyle/>
-          <a:p>
-            <a:pPr algn="ctr"/>
-          </a:p>
-        </p:txBody>
-      </p:sp>
-      <p:sp>
-        <p:nvSpPr>
-          <p:cNvPr id="6" name="장식"/>
-          <p:cNvSpPr/>
-          <p:nvPr/>
-        </p:nvSpPr>
-        <p:spPr>
-          <a:xfrm rot="8640000">
-            <a:off x="11019273" y="960434"/>
-            <a:ext cx="246888" cy="384048"/>
-          </a:xfrm>
-          <a:prstGeom prst="ellipse">
-            <a:avLst/>
-          </a:prstGeom>
-          <a:solidFill>
-            <a:srgbClr val="B8618C"/>
-          </a:solidFill>
-          <a:ln>
-            <a:noFill/>
-          </a:ln>
-        </p:spPr>
-        <p:txBody>
-          <a:bodyPr rtlCol="0" anchor="ctr"/>
-          <a:lstStyle/>
-          <a:p>
-            <a:pPr algn="ctr"/>
-          </a:p>
-        </p:txBody>
-      </p:sp>
-      <p:sp>
-        <p:nvSpPr>
-          <p:cNvPr id="7" name="장식"/>
-          <p:cNvSpPr/>
-          <p:nvPr/>
-        </p:nvSpPr>
-        <p:spPr>
-          <a:xfrm rot="12960000">
-            <a:off x="10739788" y="960434"/>
-            <a:ext cx="246888" cy="384048"/>
-          </a:xfrm>
-          <a:prstGeom prst="ellipse">
-            <a:avLst/>
-          </a:prstGeom>
-          <a:solidFill>
-            <a:srgbClr val="EED3E0"/>
-          </a:solidFill>
-          <a:ln>
-            <a:noFill/>
-          </a:ln>
-        </p:spPr>
-        <p:txBody>
-          <a:bodyPr rtlCol="0" anchor="ctr"/>
-          <a:lstStyle/>
-          <a:p>
-            <a:pPr algn="ctr"/>
-          </a:p>
-        </p:txBody>
-      </p:sp>
-      <p:sp>
-        <p:nvSpPr>
-          <p:cNvPr id="8" name="장식"/>
-          <p:cNvSpPr/>
-          <p:nvPr/>
-        </p:nvSpPr>
-        <p:spPr>
-          <a:xfrm rot="17280000">
-            <a:off x="10653423" y="694629"/>
-            <a:ext cx="246888" cy="384048"/>
-          </a:xfrm>
-          <a:prstGeom prst="ellipse">
-            <a:avLst/>
-          </a:prstGeom>
-          <a:solidFill>
-            <a:srgbClr val="B8618C"/>
-          </a:solidFill>
-          <a:ln>
-            <a:noFill/>
-          </a:ln>
-        </p:spPr>
-        <p:txBody>
-          <a:bodyPr rtlCol="0" anchor="ctr"/>
-          <a:lstStyle/>
-          <a:p>
-            <a:pPr algn="ctr"/>
-          </a:p>
-        </p:txBody>
-      </p:sp>
-      <p:sp>
-        <p:nvSpPr>
-          <p:cNvPr id="9" name="장식"/>
-          <p:cNvSpPr/>
-          <p:nvPr/>
-        </p:nvSpPr>
-        <p:spPr>
-          <a:xfrm>
-            <a:off x="10920679" y="877824"/>
-            <a:ext cx="164592" cy="164592"/>
-          </a:xfrm>
-          <a:prstGeom prst="ellipse">
-            <a:avLst/>
-          </a:prstGeom>
-          <a:solidFill>
-            <a:srgbClr val="3F8D3F"/>
-          </a:solidFill>
-          <a:ln>
-            <a:noFill/>
-          </a:ln>
-        </p:spPr>
-        <p:txBody>
-          <a:bodyPr rtlCol="0" anchor="ctr"/>
-          <a:lstStyle/>
-          <a:p>
-            <a:pPr algn="ctr"/>
-          </a:p>
-        </p:txBody>
-      </p:sp>
-      <p:sp>
-        <p:nvSpPr>
-          <p:cNvPr id="10" name="장식"/>
-          <p:cNvSpPr/>
-          <p:nvPr/>
-        </p:nvSpPr>
-        <p:spPr>
-          <a:xfrm rot="1200000">
-            <a:off x="10478989" y="1163884"/>
-            <a:ext cx="123444" cy="192024"/>
-          </a:xfrm>
-          <a:prstGeom prst="ellipse">
-            <a:avLst/>
-          </a:prstGeom>
-          <a:solidFill>
-            <a:srgbClr val="B8618C"/>
-          </a:solidFill>
-          <a:ln>
-            <a:noFill/>
-          </a:ln>
-        </p:spPr>
-        <p:txBody>
-          <a:bodyPr rtlCol="0" anchor="ctr"/>
-          <a:lstStyle/>
-          <a:p>
-            <a:pPr algn="ctr"/>
-          </a:p>
-        </p:txBody>
-      </p:sp>
-      <p:sp>
-        <p:nvSpPr>
-          <p:cNvPr id="11" name="장식"/>
-          <p:cNvSpPr/>
-          <p:nvPr/>
-        </p:nvSpPr>
-        <p:spPr>
-          <a:xfrm rot="5520000">
-            <a:off x="10557132" y="1279736"/>
-            <a:ext cx="123444" cy="192024"/>
-          </a:xfrm>
-          <a:prstGeom prst="ellipse">
-            <a:avLst/>
-          </a:prstGeom>
-          <a:solidFill>
-            <a:srgbClr val="EED3E0"/>
-          </a:solidFill>
-          <a:ln>
-            <a:noFill/>
-          </a:ln>
-        </p:spPr>
-        <p:txBody>
-          <a:bodyPr rtlCol="0" anchor="ctr"/>
-          <a:lstStyle/>
-          <a:p>
-            <a:pPr algn="ctr"/>
-          </a:p>
-        </p:txBody>
-      </p:sp>
-      <p:sp>
-        <p:nvSpPr>
-          <p:cNvPr id="12" name="장식"/>
-          <p:cNvSpPr/>
-          <p:nvPr/>
-        </p:nvSpPr>
-        <p:spPr>
-          <a:xfrm rot="9840000">
-            <a:off x="10471098" y="1389855"/>
-            <a:ext cx="123444" cy="192024"/>
-          </a:xfrm>
-          <a:prstGeom prst="ellipse">
-            <a:avLst/>
-          </a:prstGeom>
-          <a:solidFill>
-            <a:srgbClr val="B8618C"/>
-          </a:solidFill>
-          <a:ln>
-            <a:noFill/>
-          </a:ln>
-        </p:spPr>
-        <p:txBody>
-          <a:bodyPr rtlCol="0" anchor="ctr"/>
-          <a:lstStyle/>
-          <a:p>
-            <a:pPr algn="ctr"/>
-          </a:p>
-        </p:txBody>
-      </p:sp>
-      <p:sp>
-        <p:nvSpPr>
-          <p:cNvPr id="13" name="장식"/>
-          <p:cNvSpPr/>
-          <p:nvPr/>
-        </p:nvSpPr>
-        <p:spPr>
-          <a:xfrm rot="14160000">
-            <a:off x="10339783" y="1342060"/>
-            <a:ext cx="123444" cy="192024"/>
-          </a:xfrm>
-          <a:prstGeom prst="ellipse">
-            <a:avLst/>
-          </a:prstGeom>
-          <a:solidFill>
-            <a:srgbClr val="EED3E0"/>
-          </a:solidFill>
-          <a:ln>
-            <a:noFill/>
-          </a:ln>
-        </p:spPr>
-        <p:txBody>
-          <a:bodyPr rtlCol="0" anchor="ctr"/>
-          <a:lstStyle/>
-          <a:p>
-            <a:pPr algn="ctr"/>
-          </a:p>
-        </p:txBody>
-      </p:sp>
-      <p:sp>
-        <p:nvSpPr>
-          <p:cNvPr id="14" name="장식"/>
-          <p:cNvSpPr/>
-          <p:nvPr/>
-        </p:nvSpPr>
-        <p:spPr>
-          <a:xfrm rot="18480000">
-            <a:off x="10344660" y="1202403"/>
-            <a:ext cx="123444" cy="192024"/>
-          </a:xfrm>
-          <a:prstGeom prst="ellipse">
-            <a:avLst/>
-          </a:prstGeom>
-          <a:solidFill>
-            <a:srgbClr val="B8618C"/>
-          </a:solidFill>
-          <a:ln>
-            <a:noFill/>
-          </a:ln>
-        </p:spPr>
-        <p:txBody>
-          <a:bodyPr rtlCol="0" anchor="ctr"/>
-          <a:lstStyle/>
-          <a:p>
-            <a:pPr algn="ctr"/>
-          </a:p>
-        </p:txBody>
-      </p:sp>
-      <p:sp>
-        <p:nvSpPr>
-          <p:cNvPr id="15" name="장식"/>
-          <p:cNvSpPr/>
-          <p:nvPr/>
-        </p:nvSpPr>
-        <p:spPr>
-          <a:xfrm>
-            <a:off x="10458907" y="1330452"/>
-            <a:ext cx="82296" cy="82296"/>
-          </a:xfrm>
-          <a:prstGeom prst="ellipse">
-            <a:avLst/>
-          </a:prstGeom>
-          <a:solidFill>
-            <a:srgbClr val="3F8D3F"/>
-          </a:solidFill>
-          <a:ln>
-            <a:noFill/>
-          </a:ln>
-        </p:spPr>
-        <p:txBody>
-          <a:bodyPr rtlCol="0" anchor="ctr"/>
-          <a:lstStyle/>
-          <a:p>
-            <a:pPr algn="ctr"/>
-          </a:p>
-        </p:txBody>
-      </p:sp>
-      <p:sp>
-        <p:nvSpPr>
-          <p:cNvPr id="16" name="장식"/>
-          <p:cNvSpPr/>
-          <p:nvPr/>
-        </p:nvSpPr>
-        <p:spPr>
-          <a:xfrm rot="2400000">
-            <a:off x="11518232" y="1260178"/>
-            <a:ext cx="103692" cy="161300"/>
-          </a:xfrm>
-          <a:prstGeom prst="ellipse">
-            <a:avLst/>
-          </a:prstGeom>
-          <a:solidFill>
-            <a:srgbClr val="B8618C"/>
-          </a:solidFill>
-          <a:ln>
-            <a:noFill/>
-          </a:ln>
-        </p:spPr>
-        <p:txBody>
-          <a:bodyPr rtlCol="0" anchor="ctr"/>
-          <a:lstStyle/>
-          <a:p>
-            <a:pPr algn="ctr"/>
-          </a:p>
-        </p:txBody>
-      </p:sp>
-      <p:sp>
-        <p:nvSpPr>
-          <p:cNvPr id="17" name="장식"/>
-          <p:cNvSpPr/>
-          <p:nvPr/>
-        </p:nvSpPr>
-        <p:spPr>
-          <a:xfrm rot="6720000">
-            <a:off x="11546630" y="1374075"/>
-            <a:ext cx="103692" cy="161300"/>
-          </a:xfrm>
-          <a:prstGeom prst="ellipse">
-            <a:avLst/>
-          </a:prstGeom>
-          <a:solidFill>
-            <a:srgbClr val="EED3E0"/>
-          </a:solidFill>
-          <a:ln>
-            <a:noFill/>
-          </a:ln>
-        </p:spPr>
-        <p:txBody>
-          <a:bodyPr rtlCol="0" anchor="ctr"/>
-          <a:lstStyle/>
-          <a:p>
-            <a:pPr algn="ctr"/>
-          </a:p>
-        </p:txBody>
-      </p:sp>
-      <p:sp>
-        <p:nvSpPr>
-          <p:cNvPr id="18" name="장식"/>
-          <p:cNvSpPr/>
-          <p:nvPr/>
-        </p:nvSpPr>
-        <p:spPr>
-          <a:xfrm rot="11040000">
-            <a:off x="11447083" y="1436279"/>
-            <a:ext cx="103692" cy="161300"/>
-          </a:xfrm>
-          <a:prstGeom prst="ellipse">
-            <a:avLst/>
-          </a:prstGeom>
-          <a:solidFill>
-            <a:srgbClr val="B8618C"/>
-          </a:solidFill>
-          <a:ln>
-            <a:noFill/>
-          </a:ln>
-        </p:spPr>
-        <p:txBody>
-          <a:bodyPr rtlCol="0" anchor="ctr"/>
-          <a:lstStyle/>
-          <a:p>
-            <a:pPr algn="ctr"/>
-          </a:p>
-        </p:txBody>
-      </p:sp>
-      <p:sp>
-        <p:nvSpPr>
-          <p:cNvPr id="19" name="장식"/>
-          <p:cNvSpPr/>
-          <p:nvPr/>
-        </p:nvSpPr>
-        <p:spPr>
-          <a:xfrm rot="15360000">
-            <a:off x="11357162" y="1360826"/>
-            <a:ext cx="103692" cy="161300"/>
-          </a:xfrm>
-          <a:prstGeom prst="ellipse">
-            <a:avLst/>
-          </a:prstGeom>
-          <a:solidFill>
-            <a:srgbClr val="EED3E0"/>
-          </a:solidFill>
-          <a:ln>
-            <a:noFill/>
-          </a:ln>
-        </p:spPr>
-        <p:txBody>
-          <a:bodyPr rtlCol="0" anchor="ctr"/>
-          <a:lstStyle/>
-          <a:p>
-            <a:pPr algn="ctr"/>
-          </a:p>
-        </p:txBody>
-      </p:sp>
-      <p:sp>
-        <p:nvSpPr>
-          <p:cNvPr id="20" name="장식"/>
-          <p:cNvSpPr/>
-          <p:nvPr/>
-        </p:nvSpPr>
-        <p:spPr>
-          <a:xfrm rot="19680000">
-            <a:off x="11401134" y="1251990"/>
-            <a:ext cx="103692" cy="161300"/>
-          </a:xfrm>
-          <a:prstGeom prst="ellipse">
-            <a:avLst/>
-          </a:prstGeom>
-          <a:solidFill>
-            <a:srgbClr val="B8618C"/>
-          </a:solidFill>
-          <a:ln>
-            <a:noFill/>
-          </a:ln>
-        </p:spPr>
-        <p:txBody>
-          <a:bodyPr rtlCol="0" anchor="ctr"/>
-          <a:lstStyle/>
-          <a:p>
-            <a:pPr algn="ctr"/>
-          </a:p>
-        </p:txBody>
-      </p:sp>
-      <p:sp>
-        <p:nvSpPr>
-          <p:cNvPr id="21" name="장식"/>
-          <p:cNvSpPr/>
-          <p:nvPr/>
-        </p:nvSpPr>
-        <p:spPr>
-          <a:xfrm>
-            <a:off x="11471330" y="1382755"/>
-            <a:ext cx="69128" cy="69128"/>
-          </a:xfrm>
-          <a:prstGeom prst="ellipse">
-            <a:avLst/>
-          </a:prstGeom>
-          <a:solidFill>
-            <a:srgbClr val="3F8D3F"/>
-          </a:solidFill>
-          <a:ln>
-            <a:noFill/>
-          </a:ln>
-        </p:spPr>
-        <p:txBody>
-          <a:bodyPr rtlCol="0" anchor="ctr"/>
-          <a:lstStyle/>
-          <a:p>
-            <a:pPr algn="ctr"/>
-          </a:p>
-        </p:txBody>
-      </p:sp>
-      <p:sp>
-        <p:nvSpPr>
           <p:cNvPr id="2" name="Title 1"/>
           <p:cNvSpPr>
             <a:spLocks noGrp="1"/>
@@ -5715,7 +4134,7 @@
       </p:sp>
       <p:graphicFrame>
         <p:nvGraphicFramePr>
-          <p:cNvPr id="22" name="표"/>
+          <p:cNvPr id="4" name="표"/>
           <p:cNvGraphicFramePr>
             <a:graphicFrameLocks noGrp="1"/>
           </p:cNvGraphicFramePr>
@@ -7425,528 +5844,6 @@
       </p:sp>
       <p:sp>
         <p:nvSpPr>
-          <p:cNvPr id="4" name="장식"/>
-          <p:cNvSpPr/>
-          <p:nvPr/>
-        </p:nvSpPr>
-        <p:spPr>
-          <a:xfrm>
-            <a:off x="10879531" y="530352"/>
-            <a:ext cx="246888" cy="384048"/>
-          </a:xfrm>
-          <a:prstGeom prst="ellipse">
-            <a:avLst/>
-          </a:prstGeom>
-          <a:solidFill>
-            <a:srgbClr val="B8618C"/>
-          </a:solidFill>
-          <a:ln>
-            <a:noFill/>
-          </a:ln>
-        </p:spPr>
-        <p:txBody>
-          <a:bodyPr rtlCol="0" anchor="ctr"/>
-          <a:lstStyle/>
-          <a:p>
-            <a:pPr algn="ctr"/>
-          </a:p>
-        </p:txBody>
-      </p:sp>
-      <p:sp>
-        <p:nvSpPr>
-          <p:cNvPr id="5" name="장식"/>
-          <p:cNvSpPr/>
-          <p:nvPr/>
-        </p:nvSpPr>
-        <p:spPr>
-          <a:xfrm rot="4320000">
-            <a:off x="11105639" y="694629"/>
-            <a:ext cx="246888" cy="384048"/>
-          </a:xfrm>
-          <a:prstGeom prst="ellipse">
-            <a:avLst/>
-          </a:prstGeom>
-          <a:solidFill>
-            <a:srgbClr val="EED3E0"/>
-          </a:solidFill>
-          <a:ln>
-            <a:noFill/>
-          </a:ln>
-        </p:spPr>
-        <p:txBody>
-          <a:bodyPr rtlCol="0" anchor="ctr"/>
-          <a:lstStyle/>
-          <a:p>
-            <a:pPr algn="ctr"/>
-          </a:p>
-        </p:txBody>
-      </p:sp>
-      <p:sp>
-        <p:nvSpPr>
-          <p:cNvPr id="6" name="장식"/>
-          <p:cNvSpPr/>
-          <p:nvPr/>
-        </p:nvSpPr>
-        <p:spPr>
-          <a:xfrm rot="8640000">
-            <a:off x="11019273" y="960434"/>
-            <a:ext cx="246888" cy="384048"/>
-          </a:xfrm>
-          <a:prstGeom prst="ellipse">
-            <a:avLst/>
-          </a:prstGeom>
-          <a:solidFill>
-            <a:srgbClr val="B8618C"/>
-          </a:solidFill>
-          <a:ln>
-            <a:noFill/>
-          </a:ln>
-        </p:spPr>
-        <p:txBody>
-          <a:bodyPr rtlCol="0" anchor="ctr"/>
-          <a:lstStyle/>
-          <a:p>
-            <a:pPr algn="ctr"/>
-          </a:p>
-        </p:txBody>
-      </p:sp>
-      <p:sp>
-        <p:nvSpPr>
-          <p:cNvPr id="7" name="장식"/>
-          <p:cNvSpPr/>
-          <p:nvPr/>
-        </p:nvSpPr>
-        <p:spPr>
-          <a:xfrm rot="12960000">
-            <a:off x="10739788" y="960434"/>
-            <a:ext cx="246888" cy="384048"/>
-          </a:xfrm>
-          <a:prstGeom prst="ellipse">
-            <a:avLst/>
-          </a:prstGeom>
-          <a:solidFill>
-            <a:srgbClr val="EED3E0"/>
-          </a:solidFill>
-          <a:ln>
-            <a:noFill/>
-          </a:ln>
-        </p:spPr>
-        <p:txBody>
-          <a:bodyPr rtlCol="0" anchor="ctr"/>
-          <a:lstStyle/>
-          <a:p>
-            <a:pPr algn="ctr"/>
-          </a:p>
-        </p:txBody>
-      </p:sp>
-      <p:sp>
-        <p:nvSpPr>
-          <p:cNvPr id="8" name="장식"/>
-          <p:cNvSpPr/>
-          <p:nvPr/>
-        </p:nvSpPr>
-        <p:spPr>
-          <a:xfrm rot="17280000">
-            <a:off x="10653423" y="694629"/>
-            <a:ext cx="246888" cy="384048"/>
-          </a:xfrm>
-          <a:prstGeom prst="ellipse">
-            <a:avLst/>
-          </a:prstGeom>
-          <a:solidFill>
-            <a:srgbClr val="B8618C"/>
-          </a:solidFill>
-          <a:ln>
-            <a:noFill/>
-          </a:ln>
-        </p:spPr>
-        <p:txBody>
-          <a:bodyPr rtlCol="0" anchor="ctr"/>
-          <a:lstStyle/>
-          <a:p>
-            <a:pPr algn="ctr"/>
-          </a:p>
-        </p:txBody>
-      </p:sp>
-      <p:sp>
-        <p:nvSpPr>
-          <p:cNvPr id="9" name="장식"/>
-          <p:cNvSpPr/>
-          <p:nvPr/>
-        </p:nvSpPr>
-        <p:spPr>
-          <a:xfrm>
-            <a:off x="10920679" y="877824"/>
-            <a:ext cx="164592" cy="164592"/>
-          </a:xfrm>
-          <a:prstGeom prst="ellipse">
-            <a:avLst/>
-          </a:prstGeom>
-          <a:solidFill>
-            <a:srgbClr val="3F8D3F"/>
-          </a:solidFill>
-          <a:ln>
-            <a:noFill/>
-          </a:ln>
-        </p:spPr>
-        <p:txBody>
-          <a:bodyPr rtlCol="0" anchor="ctr"/>
-          <a:lstStyle/>
-          <a:p>
-            <a:pPr algn="ctr"/>
-          </a:p>
-        </p:txBody>
-      </p:sp>
-      <p:sp>
-        <p:nvSpPr>
-          <p:cNvPr id="10" name="장식"/>
-          <p:cNvSpPr/>
-          <p:nvPr/>
-        </p:nvSpPr>
-        <p:spPr>
-          <a:xfrm rot="1200000">
-            <a:off x="10478989" y="1163884"/>
-            <a:ext cx="123444" cy="192024"/>
-          </a:xfrm>
-          <a:prstGeom prst="ellipse">
-            <a:avLst/>
-          </a:prstGeom>
-          <a:solidFill>
-            <a:srgbClr val="B8618C"/>
-          </a:solidFill>
-          <a:ln>
-            <a:noFill/>
-          </a:ln>
-        </p:spPr>
-        <p:txBody>
-          <a:bodyPr rtlCol="0" anchor="ctr"/>
-          <a:lstStyle/>
-          <a:p>
-            <a:pPr algn="ctr"/>
-          </a:p>
-        </p:txBody>
-      </p:sp>
-      <p:sp>
-        <p:nvSpPr>
-          <p:cNvPr id="11" name="장식"/>
-          <p:cNvSpPr/>
-          <p:nvPr/>
-        </p:nvSpPr>
-        <p:spPr>
-          <a:xfrm rot="5520000">
-            <a:off x="10557132" y="1279736"/>
-            <a:ext cx="123444" cy="192024"/>
-          </a:xfrm>
-          <a:prstGeom prst="ellipse">
-            <a:avLst/>
-          </a:prstGeom>
-          <a:solidFill>
-            <a:srgbClr val="EED3E0"/>
-          </a:solidFill>
-          <a:ln>
-            <a:noFill/>
-          </a:ln>
-        </p:spPr>
-        <p:txBody>
-          <a:bodyPr rtlCol="0" anchor="ctr"/>
-          <a:lstStyle/>
-          <a:p>
-            <a:pPr algn="ctr"/>
-          </a:p>
-        </p:txBody>
-      </p:sp>
-      <p:sp>
-        <p:nvSpPr>
-          <p:cNvPr id="12" name="장식"/>
-          <p:cNvSpPr/>
-          <p:nvPr/>
-        </p:nvSpPr>
-        <p:spPr>
-          <a:xfrm rot="9840000">
-            <a:off x="10471098" y="1389855"/>
-            <a:ext cx="123444" cy="192024"/>
-          </a:xfrm>
-          <a:prstGeom prst="ellipse">
-            <a:avLst/>
-          </a:prstGeom>
-          <a:solidFill>
-            <a:srgbClr val="B8618C"/>
-          </a:solidFill>
-          <a:ln>
-            <a:noFill/>
-          </a:ln>
-        </p:spPr>
-        <p:txBody>
-          <a:bodyPr rtlCol="0" anchor="ctr"/>
-          <a:lstStyle/>
-          <a:p>
-            <a:pPr algn="ctr"/>
-          </a:p>
-        </p:txBody>
-      </p:sp>
-      <p:sp>
-        <p:nvSpPr>
-          <p:cNvPr id="13" name="장식"/>
-          <p:cNvSpPr/>
-          <p:nvPr/>
-        </p:nvSpPr>
-        <p:spPr>
-          <a:xfrm rot="14160000">
-            <a:off x="10339783" y="1342060"/>
-            <a:ext cx="123444" cy="192024"/>
-          </a:xfrm>
-          <a:prstGeom prst="ellipse">
-            <a:avLst/>
-          </a:prstGeom>
-          <a:solidFill>
-            <a:srgbClr val="EED3E0"/>
-          </a:solidFill>
-          <a:ln>
-            <a:noFill/>
-          </a:ln>
-        </p:spPr>
-        <p:txBody>
-          <a:bodyPr rtlCol="0" anchor="ctr"/>
-          <a:lstStyle/>
-          <a:p>
-            <a:pPr algn="ctr"/>
-          </a:p>
-        </p:txBody>
-      </p:sp>
-      <p:sp>
-        <p:nvSpPr>
-          <p:cNvPr id="14" name="장식"/>
-          <p:cNvSpPr/>
-          <p:nvPr/>
-        </p:nvSpPr>
-        <p:spPr>
-          <a:xfrm rot="18480000">
-            <a:off x="10344660" y="1202403"/>
-            <a:ext cx="123444" cy="192024"/>
-          </a:xfrm>
-          <a:prstGeom prst="ellipse">
-            <a:avLst/>
-          </a:prstGeom>
-          <a:solidFill>
-            <a:srgbClr val="B8618C"/>
-          </a:solidFill>
-          <a:ln>
-            <a:noFill/>
-          </a:ln>
-        </p:spPr>
-        <p:txBody>
-          <a:bodyPr rtlCol="0" anchor="ctr"/>
-          <a:lstStyle/>
-          <a:p>
-            <a:pPr algn="ctr"/>
-          </a:p>
-        </p:txBody>
-      </p:sp>
-      <p:sp>
-        <p:nvSpPr>
-          <p:cNvPr id="15" name="장식"/>
-          <p:cNvSpPr/>
-          <p:nvPr/>
-        </p:nvSpPr>
-        <p:spPr>
-          <a:xfrm>
-            <a:off x="10458907" y="1330452"/>
-            <a:ext cx="82296" cy="82296"/>
-          </a:xfrm>
-          <a:prstGeom prst="ellipse">
-            <a:avLst/>
-          </a:prstGeom>
-          <a:solidFill>
-            <a:srgbClr val="3F8D3F"/>
-          </a:solidFill>
-          <a:ln>
-            <a:noFill/>
-          </a:ln>
-        </p:spPr>
-        <p:txBody>
-          <a:bodyPr rtlCol="0" anchor="ctr"/>
-          <a:lstStyle/>
-          <a:p>
-            <a:pPr algn="ctr"/>
-          </a:p>
-        </p:txBody>
-      </p:sp>
-      <p:sp>
-        <p:nvSpPr>
-          <p:cNvPr id="16" name="장식"/>
-          <p:cNvSpPr/>
-          <p:nvPr/>
-        </p:nvSpPr>
-        <p:spPr>
-          <a:xfrm rot="2400000">
-            <a:off x="11518232" y="1260178"/>
-            <a:ext cx="103692" cy="161300"/>
-          </a:xfrm>
-          <a:prstGeom prst="ellipse">
-            <a:avLst/>
-          </a:prstGeom>
-          <a:solidFill>
-            <a:srgbClr val="B8618C"/>
-          </a:solidFill>
-          <a:ln>
-            <a:noFill/>
-          </a:ln>
-        </p:spPr>
-        <p:txBody>
-          <a:bodyPr rtlCol="0" anchor="ctr"/>
-          <a:lstStyle/>
-          <a:p>
-            <a:pPr algn="ctr"/>
-          </a:p>
-        </p:txBody>
-      </p:sp>
-      <p:sp>
-        <p:nvSpPr>
-          <p:cNvPr id="17" name="장식"/>
-          <p:cNvSpPr/>
-          <p:nvPr/>
-        </p:nvSpPr>
-        <p:spPr>
-          <a:xfrm rot="6720000">
-            <a:off x="11546630" y="1374075"/>
-            <a:ext cx="103692" cy="161300"/>
-          </a:xfrm>
-          <a:prstGeom prst="ellipse">
-            <a:avLst/>
-          </a:prstGeom>
-          <a:solidFill>
-            <a:srgbClr val="EED3E0"/>
-          </a:solidFill>
-          <a:ln>
-            <a:noFill/>
-          </a:ln>
-        </p:spPr>
-        <p:txBody>
-          <a:bodyPr rtlCol="0" anchor="ctr"/>
-          <a:lstStyle/>
-          <a:p>
-            <a:pPr algn="ctr"/>
-          </a:p>
-        </p:txBody>
-      </p:sp>
-      <p:sp>
-        <p:nvSpPr>
-          <p:cNvPr id="18" name="장식"/>
-          <p:cNvSpPr/>
-          <p:nvPr/>
-        </p:nvSpPr>
-        <p:spPr>
-          <a:xfrm rot="11040000">
-            <a:off x="11447083" y="1436279"/>
-            <a:ext cx="103692" cy="161300"/>
-          </a:xfrm>
-          <a:prstGeom prst="ellipse">
-            <a:avLst/>
-          </a:prstGeom>
-          <a:solidFill>
-            <a:srgbClr val="B8618C"/>
-          </a:solidFill>
-          <a:ln>
-            <a:noFill/>
-          </a:ln>
-        </p:spPr>
-        <p:txBody>
-          <a:bodyPr rtlCol="0" anchor="ctr"/>
-          <a:lstStyle/>
-          <a:p>
-            <a:pPr algn="ctr"/>
-          </a:p>
-        </p:txBody>
-      </p:sp>
-      <p:sp>
-        <p:nvSpPr>
-          <p:cNvPr id="19" name="장식"/>
-          <p:cNvSpPr/>
-          <p:nvPr/>
-        </p:nvSpPr>
-        <p:spPr>
-          <a:xfrm rot="15360000">
-            <a:off x="11357162" y="1360826"/>
-            <a:ext cx="103692" cy="161300"/>
-          </a:xfrm>
-          <a:prstGeom prst="ellipse">
-            <a:avLst/>
-          </a:prstGeom>
-          <a:solidFill>
-            <a:srgbClr val="EED3E0"/>
-          </a:solidFill>
-          <a:ln>
-            <a:noFill/>
-          </a:ln>
-        </p:spPr>
-        <p:txBody>
-          <a:bodyPr rtlCol="0" anchor="ctr"/>
-          <a:lstStyle/>
-          <a:p>
-            <a:pPr algn="ctr"/>
-          </a:p>
-        </p:txBody>
-      </p:sp>
-      <p:sp>
-        <p:nvSpPr>
-          <p:cNvPr id="20" name="장식"/>
-          <p:cNvSpPr/>
-          <p:nvPr/>
-        </p:nvSpPr>
-        <p:spPr>
-          <a:xfrm rot="19680000">
-            <a:off x="11401134" y="1251990"/>
-            <a:ext cx="103692" cy="161300"/>
-          </a:xfrm>
-          <a:prstGeom prst="ellipse">
-            <a:avLst/>
-          </a:prstGeom>
-          <a:solidFill>
-            <a:srgbClr val="B8618C"/>
-          </a:solidFill>
-          <a:ln>
-            <a:noFill/>
-          </a:ln>
-        </p:spPr>
-        <p:txBody>
-          <a:bodyPr rtlCol="0" anchor="ctr"/>
-          <a:lstStyle/>
-          <a:p>
-            <a:pPr algn="ctr"/>
-          </a:p>
-        </p:txBody>
-      </p:sp>
-      <p:sp>
-        <p:nvSpPr>
-          <p:cNvPr id="21" name="장식"/>
-          <p:cNvSpPr/>
-          <p:nvPr/>
-        </p:nvSpPr>
-        <p:spPr>
-          <a:xfrm>
-            <a:off x="11471330" y="1382755"/>
-            <a:ext cx="69128" cy="69128"/>
-          </a:xfrm>
-          <a:prstGeom prst="ellipse">
-            <a:avLst/>
-          </a:prstGeom>
-          <a:solidFill>
-            <a:srgbClr val="3F8D3F"/>
-          </a:solidFill>
-          <a:ln>
-            <a:noFill/>
-          </a:ln>
-        </p:spPr>
-        <p:txBody>
-          <a:bodyPr rtlCol="0" anchor="ctr"/>
-          <a:lstStyle/>
-          <a:p>
-            <a:pPr algn="ctr"/>
-          </a:p>
-        </p:txBody>
-      </p:sp>
-      <p:sp>
-        <p:nvSpPr>
           <p:cNvPr id="2" name="Title 1"/>
           <p:cNvSpPr>
             <a:spLocks noGrp="1"/>
@@ -7985,7 +5882,7 @@
       </p:sp>
       <p:graphicFrame>
         <p:nvGraphicFramePr>
-          <p:cNvPr id="22" name="표"/>
+          <p:cNvPr id="4" name="표"/>
           <p:cNvGraphicFramePr>
             <a:graphicFrameLocks noGrp="1"/>
           </p:cNvGraphicFramePr>
@@ -9744,528 +7641,6 @@
       </p:sp>
       <p:sp>
         <p:nvSpPr>
-          <p:cNvPr id="4" name="장식"/>
-          <p:cNvSpPr/>
-          <p:nvPr/>
-        </p:nvSpPr>
-        <p:spPr>
-          <a:xfrm>
-            <a:off x="10879531" y="530352"/>
-            <a:ext cx="246888" cy="384048"/>
-          </a:xfrm>
-          <a:prstGeom prst="ellipse">
-            <a:avLst/>
-          </a:prstGeom>
-          <a:solidFill>
-            <a:srgbClr val="B8618C"/>
-          </a:solidFill>
-          <a:ln>
-            <a:noFill/>
-          </a:ln>
-        </p:spPr>
-        <p:txBody>
-          <a:bodyPr rtlCol="0" anchor="ctr"/>
-          <a:lstStyle/>
-          <a:p>
-            <a:pPr algn="ctr"/>
-          </a:p>
-        </p:txBody>
-      </p:sp>
-      <p:sp>
-        <p:nvSpPr>
-          <p:cNvPr id="5" name="장식"/>
-          <p:cNvSpPr/>
-          <p:nvPr/>
-        </p:nvSpPr>
-        <p:spPr>
-          <a:xfrm rot="4320000">
-            <a:off x="11105639" y="694629"/>
-            <a:ext cx="246888" cy="384048"/>
-          </a:xfrm>
-          <a:prstGeom prst="ellipse">
-            <a:avLst/>
-          </a:prstGeom>
-          <a:solidFill>
-            <a:srgbClr val="EED3E0"/>
-          </a:solidFill>
-          <a:ln>
-            <a:noFill/>
-          </a:ln>
-        </p:spPr>
-        <p:txBody>
-          <a:bodyPr rtlCol="0" anchor="ctr"/>
-          <a:lstStyle/>
-          <a:p>
-            <a:pPr algn="ctr"/>
-          </a:p>
-        </p:txBody>
-      </p:sp>
-      <p:sp>
-        <p:nvSpPr>
-          <p:cNvPr id="6" name="장식"/>
-          <p:cNvSpPr/>
-          <p:nvPr/>
-        </p:nvSpPr>
-        <p:spPr>
-          <a:xfrm rot="8640000">
-            <a:off x="11019273" y="960434"/>
-            <a:ext cx="246888" cy="384048"/>
-          </a:xfrm>
-          <a:prstGeom prst="ellipse">
-            <a:avLst/>
-          </a:prstGeom>
-          <a:solidFill>
-            <a:srgbClr val="B8618C"/>
-          </a:solidFill>
-          <a:ln>
-            <a:noFill/>
-          </a:ln>
-        </p:spPr>
-        <p:txBody>
-          <a:bodyPr rtlCol="0" anchor="ctr"/>
-          <a:lstStyle/>
-          <a:p>
-            <a:pPr algn="ctr"/>
-          </a:p>
-        </p:txBody>
-      </p:sp>
-      <p:sp>
-        <p:nvSpPr>
-          <p:cNvPr id="7" name="장식"/>
-          <p:cNvSpPr/>
-          <p:nvPr/>
-        </p:nvSpPr>
-        <p:spPr>
-          <a:xfrm rot="12960000">
-            <a:off x="10739788" y="960434"/>
-            <a:ext cx="246888" cy="384048"/>
-          </a:xfrm>
-          <a:prstGeom prst="ellipse">
-            <a:avLst/>
-          </a:prstGeom>
-          <a:solidFill>
-            <a:srgbClr val="EED3E0"/>
-          </a:solidFill>
-          <a:ln>
-            <a:noFill/>
-          </a:ln>
-        </p:spPr>
-        <p:txBody>
-          <a:bodyPr rtlCol="0" anchor="ctr"/>
-          <a:lstStyle/>
-          <a:p>
-            <a:pPr algn="ctr"/>
-          </a:p>
-        </p:txBody>
-      </p:sp>
-      <p:sp>
-        <p:nvSpPr>
-          <p:cNvPr id="8" name="장식"/>
-          <p:cNvSpPr/>
-          <p:nvPr/>
-        </p:nvSpPr>
-        <p:spPr>
-          <a:xfrm rot="17280000">
-            <a:off x="10653423" y="694629"/>
-            <a:ext cx="246888" cy="384048"/>
-          </a:xfrm>
-          <a:prstGeom prst="ellipse">
-            <a:avLst/>
-          </a:prstGeom>
-          <a:solidFill>
-            <a:srgbClr val="B8618C"/>
-          </a:solidFill>
-          <a:ln>
-            <a:noFill/>
-          </a:ln>
-        </p:spPr>
-        <p:txBody>
-          <a:bodyPr rtlCol="0" anchor="ctr"/>
-          <a:lstStyle/>
-          <a:p>
-            <a:pPr algn="ctr"/>
-          </a:p>
-        </p:txBody>
-      </p:sp>
-      <p:sp>
-        <p:nvSpPr>
-          <p:cNvPr id="9" name="장식"/>
-          <p:cNvSpPr/>
-          <p:nvPr/>
-        </p:nvSpPr>
-        <p:spPr>
-          <a:xfrm>
-            <a:off x="10920679" y="877824"/>
-            <a:ext cx="164592" cy="164592"/>
-          </a:xfrm>
-          <a:prstGeom prst="ellipse">
-            <a:avLst/>
-          </a:prstGeom>
-          <a:solidFill>
-            <a:srgbClr val="3F8D3F"/>
-          </a:solidFill>
-          <a:ln>
-            <a:noFill/>
-          </a:ln>
-        </p:spPr>
-        <p:txBody>
-          <a:bodyPr rtlCol="0" anchor="ctr"/>
-          <a:lstStyle/>
-          <a:p>
-            <a:pPr algn="ctr"/>
-          </a:p>
-        </p:txBody>
-      </p:sp>
-      <p:sp>
-        <p:nvSpPr>
-          <p:cNvPr id="10" name="장식"/>
-          <p:cNvSpPr/>
-          <p:nvPr/>
-        </p:nvSpPr>
-        <p:spPr>
-          <a:xfrm rot="1200000">
-            <a:off x="10478989" y="1163884"/>
-            <a:ext cx="123444" cy="192024"/>
-          </a:xfrm>
-          <a:prstGeom prst="ellipse">
-            <a:avLst/>
-          </a:prstGeom>
-          <a:solidFill>
-            <a:srgbClr val="B8618C"/>
-          </a:solidFill>
-          <a:ln>
-            <a:noFill/>
-          </a:ln>
-        </p:spPr>
-        <p:txBody>
-          <a:bodyPr rtlCol="0" anchor="ctr"/>
-          <a:lstStyle/>
-          <a:p>
-            <a:pPr algn="ctr"/>
-          </a:p>
-        </p:txBody>
-      </p:sp>
-      <p:sp>
-        <p:nvSpPr>
-          <p:cNvPr id="11" name="장식"/>
-          <p:cNvSpPr/>
-          <p:nvPr/>
-        </p:nvSpPr>
-        <p:spPr>
-          <a:xfrm rot="5520000">
-            <a:off x="10557132" y="1279736"/>
-            <a:ext cx="123444" cy="192024"/>
-          </a:xfrm>
-          <a:prstGeom prst="ellipse">
-            <a:avLst/>
-          </a:prstGeom>
-          <a:solidFill>
-            <a:srgbClr val="EED3E0"/>
-          </a:solidFill>
-          <a:ln>
-            <a:noFill/>
-          </a:ln>
-        </p:spPr>
-        <p:txBody>
-          <a:bodyPr rtlCol="0" anchor="ctr"/>
-          <a:lstStyle/>
-          <a:p>
-            <a:pPr algn="ctr"/>
-          </a:p>
-        </p:txBody>
-      </p:sp>
-      <p:sp>
-        <p:nvSpPr>
-          <p:cNvPr id="12" name="장식"/>
-          <p:cNvSpPr/>
-          <p:nvPr/>
-        </p:nvSpPr>
-        <p:spPr>
-          <a:xfrm rot="9840000">
-            <a:off x="10471098" y="1389855"/>
-            <a:ext cx="123444" cy="192024"/>
-          </a:xfrm>
-          <a:prstGeom prst="ellipse">
-            <a:avLst/>
-          </a:prstGeom>
-          <a:solidFill>
-            <a:srgbClr val="B8618C"/>
-          </a:solidFill>
-          <a:ln>
-            <a:noFill/>
-          </a:ln>
-        </p:spPr>
-        <p:txBody>
-          <a:bodyPr rtlCol="0" anchor="ctr"/>
-          <a:lstStyle/>
-          <a:p>
-            <a:pPr algn="ctr"/>
-          </a:p>
-        </p:txBody>
-      </p:sp>
-      <p:sp>
-        <p:nvSpPr>
-          <p:cNvPr id="13" name="장식"/>
-          <p:cNvSpPr/>
-          <p:nvPr/>
-        </p:nvSpPr>
-        <p:spPr>
-          <a:xfrm rot="14160000">
-            <a:off x="10339783" y="1342060"/>
-            <a:ext cx="123444" cy="192024"/>
-          </a:xfrm>
-          <a:prstGeom prst="ellipse">
-            <a:avLst/>
-          </a:prstGeom>
-          <a:solidFill>
-            <a:srgbClr val="EED3E0"/>
-          </a:solidFill>
-          <a:ln>
-            <a:noFill/>
-          </a:ln>
-        </p:spPr>
-        <p:txBody>
-          <a:bodyPr rtlCol="0" anchor="ctr"/>
-          <a:lstStyle/>
-          <a:p>
-            <a:pPr algn="ctr"/>
-          </a:p>
-        </p:txBody>
-      </p:sp>
-      <p:sp>
-        <p:nvSpPr>
-          <p:cNvPr id="14" name="장식"/>
-          <p:cNvSpPr/>
-          <p:nvPr/>
-        </p:nvSpPr>
-        <p:spPr>
-          <a:xfrm rot="18480000">
-            <a:off x="10344660" y="1202403"/>
-            <a:ext cx="123444" cy="192024"/>
-          </a:xfrm>
-          <a:prstGeom prst="ellipse">
-            <a:avLst/>
-          </a:prstGeom>
-          <a:solidFill>
-            <a:srgbClr val="B8618C"/>
-          </a:solidFill>
-          <a:ln>
-            <a:noFill/>
-          </a:ln>
-        </p:spPr>
-        <p:txBody>
-          <a:bodyPr rtlCol="0" anchor="ctr"/>
-          <a:lstStyle/>
-          <a:p>
-            <a:pPr algn="ctr"/>
-          </a:p>
-        </p:txBody>
-      </p:sp>
-      <p:sp>
-        <p:nvSpPr>
-          <p:cNvPr id="15" name="장식"/>
-          <p:cNvSpPr/>
-          <p:nvPr/>
-        </p:nvSpPr>
-        <p:spPr>
-          <a:xfrm>
-            <a:off x="10458907" y="1330452"/>
-            <a:ext cx="82296" cy="82296"/>
-          </a:xfrm>
-          <a:prstGeom prst="ellipse">
-            <a:avLst/>
-          </a:prstGeom>
-          <a:solidFill>
-            <a:srgbClr val="3F8D3F"/>
-          </a:solidFill>
-          <a:ln>
-            <a:noFill/>
-          </a:ln>
-        </p:spPr>
-        <p:txBody>
-          <a:bodyPr rtlCol="0" anchor="ctr"/>
-          <a:lstStyle/>
-          <a:p>
-            <a:pPr algn="ctr"/>
-          </a:p>
-        </p:txBody>
-      </p:sp>
-      <p:sp>
-        <p:nvSpPr>
-          <p:cNvPr id="16" name="장식"/>
-          <p:cNvSpPr/>
-          <p:nvPr/>
-        </p:nvSpPr>
-        <p:spPr>
-          <a:xfrm rot="2400000">
-            <a:off x="11518232" y="1260178"/>
-            <a:ext cx="103692" cy="161300"/>
-          </a:xfrm>
-          <a:prstGeom prst="ellipse">
-            <a:avLst/>
-          </a:prstGeom>
-          <a:solidFill>
-            <a:srgbClr val="B8618C"/>
-          </a:solidFill>
-          <a:ln>
-            <a:noFill/>
-          </a:ln>
-        </p:spPr>
-        <p:txBody>
-          <a:bodyPr rtlCol="0" anchor="ctr"/>
-          <a:lstStyle/>
-          <a:p>
-            <a:pPr algn="ctr"/>
-          </a:p>
-        </p:txBody>
-      </p:sp>
-      <p:sp>
-        <p:nvSpPr>
-          <p:cNvPr id="17" name="장식"/>
-          <p:cNvSpPr/>
-          <p:nvPr/>
-        </p:nvSpPr>
-        <p:spPr>
-          <a:xfrm rot="6720000">
-            <a:off x="11546630" y="1374075"/>
-            <a:ext cx="103692" cy="161300"/>
-          </a:xfrm>
-          <a:prstGeom prst="ellipse">
-            <a:avLst/>
-          </a:prstGeom>
-          <a:solidFill>
-            <a:srgbClr val="EED3E0"/>
-          </a:solidFill>
-          <a:ln>
-            <a:noFill/>
-          </a:ln>
-        </p:spPr>
-        <p:txBody>
-          <a:bodyPr rtlCol="0" anchor="ctr"/>
-          <a:lstStyle/>
-          <a:p>
-            <a:pPr algn="ctr"/>
-          </a:p>
-        </p:txBody>
-      </p:sp>
-      <p:sp>
-        <p:nvSpPr>
-          <p:cNvPr id="18" name="장식"/>
-          <p:cNvSpPr/>
-          <p:nvPr/>
-        </p:nvSpPr>
-        <p:spPr>
-          <a:xfrm rot="11040000">
-            <a:off x="11447083" y="1436279"/>
-            <a:ext cx="103692" cy="161300"/>
-          </a:xfrm>
-          <a:prstGeom prst="ellipse">
-            <a:avLst/>
-          </a:prstGeom>
-          <a:solidFill>
-            <a:srgbClr val="B8618C"/>
-          </a:solidFill>
-          <a:ln>
-            <a:noFill/>
-          </a:ln>
-        </p:spPr>
-        <p:txBody>
-          <a:bodyPr rtlCol="0" anchor="ctr"/>
-          <a:lstStyle/>
-          <a:p>
-            <a:pPr algn="ctr"/>
-          </a:p>
-        </p:txBody>
-      </p:sp>
-      <p:sp>
-        <p:nvSpPr>
-          <p:cNvPr id="19" name="장식"/>
-          <p:cNvSpPr/>
-          <p:nvPr/>
-        </p:nvSpPr>
-        <p:spPr>
-          <a:xfrm rot="15360000">
-            <a:off x="11357162" y="1360826"/>
-            <a:ext cx="103692" cy="161300"/>
-          </a:xfrm>
-          <a:prstGeom prst="ellipse">
-            <a:avLst/>
-          </a:prstGeom>
-          <a:solidFill>
-            <a:srgbClr val="EED3E0"/>
-          </a:solidFill>
-          <a:ln>
-            <a:noFill/>
-          </a:ln>
-        </p:spPr>
-        <p:txBody>
-          <a:bodyPr rtlCol="0" anchor="ctr"/>
-          <a:lstStyle/>
-          <a:p>
-            <a:pPr algn="ctr"/>
-          </a:p>
-        </p:txBody>
-      </p:sp>
-      <p:sp>
-        <p:nvSpPr>
-          <p:cNvPr id="20" name="장식"/>
-          <p:cNvSpPr/>
-          <p:nvPr/>
-        </p:nvSpPr>
-        <p:spPr>
-          <a:xfrm rot="19680000">
-            <a:off x="11401134" y="1251990"/>
-            <a:ext cx="103692" cy="161300"/>
-          </a:xfrm>
-          <a:prstGeom prst="ellipse">
-            <a:avLst/>
-          </a:prstGeom>
-          <a:solidFill>
-            <a:srgbClr val="B8618C"/>
-          </a:solidFill>
-          <a:ln>
-            <a:noFill/>
-          </a:ln>
-        </p:spPr>
-        <p:txBody>
-          <a:bodyPr rtlCol="0" anchor="ctr"/>
-          <a:lstStyle/>
-          <a:p>
-            <a:pPr algn="ctr"/>
-          </a:p>
-        </p:txBody>
-      </p:sp>
-      <p:sp>
-        <p:nvSpPr>
-          <p:cNvPr id="21" name="장식"/>
-          <p:cNvSpPr/>
-          <p:nvPr/>
-        </p:nvSpPr>
-        <p:spPr>
-          <a:xfrm>
-            <a:off x="11471330" y="1382755"/>
-            <a:ext cx="69128" cy="69128"/>
-          </a:xfrm>
-          <a:prstGeom prst="ellipse">
-            <a:avLst/>
-          </a:prstGeom>
-          <a:solidFill>
-            <a:srgbClr val="3F8D3F"/>
-          </a:solidFill>
-          <a:ln>
-            <a:noFill/>
-          </a:ln>
-        </p:spPr>
-        <p:txBody>
-          <a:bodyPr rtlCol="0" anchor="ctr"/>
-          <a:lstStyle/>
-          <a:p>
-            <a:pPr algn="ctr"/>
-          </a:p>
-        </p:txBody>
-      </p:sp>
-      <p:sp>
-        <p:nvSpPr>
           <p:cNvPr id="2" name="Title 1"/>
           <p:cNvSpPr>
             <a:spLocks noGrp="1"/>
@@ -10304,7 +7679,7 @@
       </p:sp>
       <p:sp>
         <p:nvSpPr>
-          <p:cNvPr id="22" name="카드 1"/>
+          <p:cNvPr id="4" name="카드 1"/>
           <p:cNvSpPr/>
           <p:nvPr/>
         </p:nvSpPr>
@@ -10337,7 +7712,7 @@
       </p:sp>
       <p:sp>
         <p:nvSpPr>
-          <p:cNvPr id="23" name="번호 1"/>
+          <p:cNvPr id="5" name="번호 1"/>
           <p:cNvSpPr/>
           <p:nvPr/>
         </p:nvSpPr>
@@ -10380,7 +7755,7 @@
       </p:sp>
       <p:sp>
         <p:nvSpPr>
-          <p:cNvPr id="24" name="TextBox 23"/>
+          <p:cNvPr id="6" name="TextBox 5"/>
           <p:cNvSpPr txBox="1"/>
           <p:nvPr/>
         </p:nvSpPr>
@@ -10418,7 +7793,7 @@
       </p:sp>
       <p:sp>
         <p:nvSpPr>
-          <p:cNvPr id="25" name="TextBox 24"/>
+          <p:cNvPr id="7" name="TextBox 6"/>
           <p:cNvSpPr txBox="1"/>
           <p:nvPr/>
         </p:nvSpPr>
@@ -10456,7 +7831,7 @@
       </p:sp>
       <p:sp>
         <p:nvSpPr>
-          <p:cNvPr id="26" name="카드 2"/>
+          <p:cNvPr id="8" name="카드 2"/>
           <p:cNvSpPr/>
           <p:nvPr/>
         </p:nvSpPr>
@@ -10489,7 +7864,7 @@
       </p:sp>
       <p:sp>
         <p:nvSpPr>
-          <p:cNvPr id="27" name="번호 2"/>
+          <p:cNvPr id="9" name="번호 2"/>
           <p:cNvSpPr/>
           <p:nvPr/>
         </p:nvSpPr>
@@ -10532,7 +7907,7 @@
       </p:sp>
       <p:sp>
         <p:nvSpPr>
-          <p:cNvPr id="28" name="TextBox 27"/>
+          <p:cNvPr id="10" name="TextBox 9"/>
           <p:cNvSpPr txBox="1"/>
           <p:nvPr/>
         </p:nvSpPr>
@@ -10570,7 +7945,7 @@
       </p:sp>
       <p:sp>
         <p:nvSpPr>
-          <p:cNvPr id="29" name="TextBox 28"/>
+          <p:cNvPr id="11" name="TextBox 10"/>
           <p:cNvSpPr txBox="1"/>
           <p:nvPr/>
         </p:nvSpPr>
@@ -10608,7 +7983,7 @@
       </p:sp>
       <p:sp>
         <p:nvSpPr>
-          <p:cNvPr id="30" name="카드 3"/>
+          <p:cNvPr id="12" name="카드 3"/>
           <p:cNvSpPr/>
           <p:nvPr/>
         </p:nvSpPr>
@@ -10641,7 +8016,7 @@
       </p:sp>
       <p:sp>
         <p:nvSpPr>
-          <p:cNvPr id="31" name="번호 3"/>
+          <p:cNvPr id="13" name="번호 3"/>
           <p:cNvSpPr/>
           <p:nvPr/>
         </p:nvSpPr>
@@ -10684,7 +8059,7 @@
       </p:sp>
       <p:sp>
         <p:nvSpPr>
-          <p:cNvPr id="32" name="TextBox 31"/>
+          <p:cNvPr id="14" name="TextBox 13"/>
           <p:cNvSpPr txBox="1"/>
           <p:nvPr/>
         </p:nvSpPr>
@@ -10722,7 +8097,7 @@
       </p:sp>
       <p:sp>
         <p:nvSpPr>
-          <p:cNvPr id="33" name="TextBox 32"/>
+          <p:cNvPr id="15" name="TextBox 14"/>
           <p:cNvSpPr txBox="1"/>
           <p:nvPr/>
         </p:nvSpPr>
@@ -10760,7 +8135,7 @@
       </p:sp>
       <p:sp>
         <p:nvSpPr>
-          <p:cNvPr id="34" name="안내"/>
+          <p:cNvPr id="16" name="안내"/>
           <p:cNvSpPr txBox="1"/>
           <p:nvPr/>
         </p:nvSpPr>
@@ -10855,528 +8230,6 @@
       </p:sp>
       <p:sp>
         <p:nvSpPr>
-          <p:cNvPr id="4" name="장식"/>
-          <p:cNvSpPr/>
-          <p:nvPr/>
-        </p:nvSpPr>
-        <p:spPr>
-          <a:xfrm>
-            <a:off x="10879531" y="530352"/>
-            <a:ext cx="246888" cy="384048"/>
-          </a:xfrm>
-          <a:prstGeom prst="ellipse">
-            <a:avLst/>
-          </a:prstGeom>
-          <a:solidFill>
-            <a:srgbClr val="B8618C"/>
-          </a:solidFill>
-          <a:ln>
-            <a:noFill/>
-          </a:ln>
-        </p:spPr>
-        <p:txBody>
-          <a:bodyPr rtlCol="0" anchor="ctr"/>
-          <a:lstStyle/>
-          <a:p>
-            <a:pPr algn="ctr"/>
-          </a:p>
-        </p:txBody>
-      </p:sp>
-      <p:sp>
-        <p:nvSpPr>
-          <p:cNvPr id="5" name="장식"/>
-          <p:cNvSpPr/>
-          <p:nvPr/>
-        </p:nvSpPr>
-        <p:spPr>
-          <a:xfrm rot="4320000">
-            <a:off x="11105639" y="694629"/>
-            <a:ext cx="246888" cy="384048"/>
-          </a:xfrm>
-          <a:prstGeom prst="ellipse">
-            <a:avLst/>
-          </a:prstGeom>
-          <a:solidFill>
-            <a:srgbClr val="EED3E0"/>
-          </a:solidFill>
-          <a:ln>
-            <a:noFill/>
-          </a:ln>
-        </p:spPr>
-        <p:txBody>
-          <a:bodyPr rtlCol="0" anchor="ctr"/>
-          <a:lstStyle/>
-          <a:p>
-            <a:pPr algn="ctr"/>
-          </a:p>
-        </p:txBody>
-      </p:sp>
-      <p:sp>
-        <p:nvSpPr>
-          <p:cNvPr id="6" name="장식"/>
-          <p:cNvSpPr/>
-          <p:nvPr/>
-        </p:nvSpPr>
-        <p:spPr>
-          <a:xfrm rot="8640000">
-            <a:off x="11019273" y="960434"/>
-            <a:ext cx="246888" cy="384048"/>
-          </a:xfrm>
-          <a:prstGeom prst="ellipse">
-            <a:avLst/>
-          </a:prstGeom>
-          <a:solidFill>
-            <a:srgbClr val="B8618C"/>
-          </a:solidFill>
-          <a:ln>
-            <a:noFill/>
-          </a:ln>
-        </p:spPr>
-        <p:txBody>
-          <a:bodyPr rtlCol="0" anchor="ctr"/>
-          <a:lstStyle/>
-          <a:p>
-            <a:pPr algn="ctr"/>
-          </a:p>
-        </p:txBody>
-      </p:sp>
-      <p:sp>
-        <p:nvSpPr>
-          <p:cNvPr id="7" name="장식"/>
-          <p:cNvSpPr/>
-          <p:nvPr/>
-        </p:nvSpPr>
-        <p:spPr>
-          <a:xfrm rot="12960000">
-            <a:off x="10739788" y="960434"/>
-            <a:ext cx="246888" cy="384048"/>
-          </a:xfrm>
-          <a:prstGeom prst="ellipse">
-            <a:avLst/>
-          </a:prstGeom>
-          <a:solidFill>
-            <a:srgbClr val="EED3E0"/>
-          </a:solidFill>
-          <a:ln>
-            <a:noFill/>
-          </a:ln>
-        </p:spPr>
-        <p:txBody>
-          <a:bodyPr rtlCol="0" anchor="ctr"/>
-          <a:lstStyle/>
-          <a:p>
-            <a:pPr algn="ctr"/>
-          </a:p>
-        </p:txBody>
-      </p:sp>
-      <p:sp>
-        <p:nvSpPr>
-          <p:cNvPr id="8" name="장식"/>
-          <p:cNvSpPr/>
-          <p:nvPr/>
-        </p:nvSpPr>
-        <p:spPr>
-          <a:xfrm rot="17280000">
-            <a:off x="10653423" y="694629"/>
-            <a:ext cx="246888" cy="384048"/>
-          </a:xfrm>
-          <a:prstGeom prst="ellipse">
-            <a:avLst/>
-          </a:prstGeom>
-          <a:solidFill>
-            <a:srgbClr val="B8618C"/>
-          </a:solidFill>
-          <a:ln>
-            <a:noFill/>
-          </a:ln>
-        </p:spPr>
-        <p:txBody>
-          <a:bodyPr rtlCol="0" anchor="ctr"/>
-          <a:lstStyle/>
-          <a:p>
-            <a:pPr algn="ctr"/>
-          </a:p>
-        </p:txBody>
-      </p:sp>
-      <p:sp>
-        <p:nvSpPr>
-          <p:cNvPr id="9" name="장식"/>
-          <p:cNvSpPr/>
-          <p:nvPr/>
-        </p:nvSpPr>
-        <p:spPr>
-          <a:xfrm>
-            <a:off x="10920679" y="877824"/>
-            <a:ext cx="164592" cy="164592"/>
-          </a:xfrm>
-          <a:prstGeom prst="ellipse">
-            <a:avLst/>
-          </a:prstGeom>
-          <a:solidFill>
-            <a:srgbClr val="3F8D3F"/>
-          </a:solidFill>
-          <a:ln>
-            <a:noFill/>
-          </a:ln>
-        </p:spPr>
-        <p:txBody>
-          <a:bodyPr rtlCol="0" anchor="ctr"/>
-          <a:lstStyle/>
-          <a:p>
-            <a:pPr algn="ctr"/>
-          </a:p>
-        </p:txBody>
-      </p:sp>
-      <p:sp>
-        <p:nvSpPr>
-          <p:cNvPr id="10" name="장식"/>
-          <p:cNvSpPr/>
-          <p:nvPr/>
-        </p:nvSpPr>
-        <p:spPr>
-          <a:xfrm rot="1200000">
-            <a:off x="10478989" y="1163884"/>
-            <a:ext cx="123444" cy="192024"/>
-          </a:xfrm>
-          <a:prstGeom prst="ellipse">
-            <a:avLst/>
-          </a:prstGeom>
-          <a:solidFill>
-            <a:srgbClr val="B8618C"/>
-          </a:solidFill>
-          <a:ln>
-            <a:noFill/>
-          </a:ln>
-        </p:spPr>
-        <p:txBody>
-          <a:bodyPr rtlCol="0" anchor="ctr"/>
-          <a:lstStyle/>
-          <a:p>
-            <a:pPr algn="ctr"/>
-          </a:p>
-        </p:txBody>
-      </p:sp>
-      <p:sp>
-        <p:nvSpPr>
-          <p:cNvPr id="11" name="장식"/>
-          <p:cNvSpPr/>
-          <p:nvPr/>
-        </p:nvSpPr>
-        <p:spPr>
-          <a:xfrm rot="5520000">
-            <a:off x="10557132" y="1279736"/>
-            <a:ext cx="123444" cy="192024"/>
-          </a:xfrm>
-          <a:prstGeom prst="ellipse">
-            <a:avLst/>
-          </a:prstGeom>
-          <a:solidFill>
-            <a:srgbClr val="EED3E0"/>
-          </a:solidFill>
-          <a:ln>
-            <a:noFill/>
-          </a:ln>
-        </p:spPr>
-        <p:txBody>
-          <a:bodyPr rtlCol="0" anchor="ctr"/>
-          <a:lstStyle/>
-          <a:p>
-            <a:pPr algn="ctr"/>
-          </a:p>
-        </p:txBody>
-      </p:sp>
-      <p:sp>
-        <p:nvSpPr>
-          <p:cNvPr id="12" name="장식"/>
-          <p:cNvSpPr/>
-          <p:nvPr/>
-        </p:nvSpPr>
-        <p:spPr>
-          <a:xfrm rot="9840000">
-            <a:off x="10471098" y="1389855"/>
-            <a:ext cx="123444" cy="192024"/>
-          </a:xfrm>
-          <a:prstGeom prst="ellipse">
-            <a:avLst/>
-          </a:prstGeom>
-          <a:solidFill>
-            <a:srgbClr val="B8618C"/>
-          </a:solidFill>
-          <a:ln>
-            <a:noFill/>
-          </a:ln>
-        </p:spPr>
-        <p:txBody>
-          <a:bodyPr rtlCol="0" anchor="ctr"/>
-          <a:lstStyle/>
-          <a:p>
-            <a:pPr algn="ctr"/>
-          </a:p>
-        </p:txBody>
-      </p:sp>
-      <p:sp>
-        <p:nvSpPr>
-          <p:cNvPr id="13" name="장식"/>
-          <p:cNvSpPr/>
-          <p:nvPr/>
-        </p:nvSpPr>
-        <p:spPr>
-          <a:xfrm rot="14160000">
-            <a:off x="10339783" y="1342060"/>
-            <a:ext cx="123444" cy="192024"/>
-          </a:xfrm>
-          <a:prstGeom prst="ellipse">
-            <a:avLst/>
-          </a:prstGeom>
-          <a:solidFill>
-            <a:srgbClr val="EED3E0"/>
-          </a:solidFill>
-          <a:ln>
-            <a:noFill/>
-          </a:ln>
-        </p:spPr>
-        <p:txBody>
-          <a:bodyPr rtlCol="0" anchor="ctr"/>
-          <a:lstStyle/>
-          <a:p>
-            <a:pPr algn="ctr"/>
-          </a:p>
-        </p:txBody>
-      </p:sp>
-      <p:sp>
-        <p:nvSpPr>
-          <p:cNvPr id="14" name="장식"/>
-          <p:cNvSpPr/>
-          <p:nvPr/>
-        </p:nvSpPr>
-        <p:spPr>
-          <a:xfrm rot="18480000">
-            <a:off x="10344660" y="1202403"/>
-            <a:ext cx="123444" cy="192024"/>
-          </a:xfrm>
-          <a:prstGeom prst="ellipse">
-            <a:avLst/>
-          </a:prstGeom>
-          <a:solidFill>
-            <a:srgbClr val="B8618C"/>
-          </a:solidFill>
-          <a:ln>
-            <a:noFill/>
-          </a:ln>
-        </p:spPr>
-        <p:txBody>
-          <a:bodyPr rtlCol="0" anchor="ctr"/>
-          <a:lstStyle/>
-          <a:p>
-            <a:pPr algn="ctr"/>
-          </a:p>
-        </p:txBody>
-      </p:sp>
-      <p:sp>
-        <p:nvSpPr>
-          <p:cNvPr id="15" name="장식"/>
-          <p:cNvSpPr/>
-          <p:nvPr/>
-        </p:nvSpPr>
-        <p:spPr>
-          <a:xfrm>
-            <a:off x="10458907" y="1330452"/>
-            <a:ext cx="82296" cy="82296"/>
-          </a:xfrm>
-          <a:prstGeom prst="ellipse">
-            <a:avLst/>
-          </a:prstGeom>
-          <a:solidFill>
-            <a:srgbClr val="3F8D3F"/>
-          </a:solidFill>
-          <a:ln>
-            <a:noFill/>
-          </a:ln>
-        </p:spPr>
-        <p:txBody>
-          <a:bodyPr rtlCol="0" anchor="ctr"/>
-          <a:lstStyle/>
-          <a:p>
-            <a:pPr algn="ctr"/>
-          </a:p>
-        </p:txBody>
-      </p:sp>
-      <p:sp>
-        <p:nvSpPr>
-          <p:cNvPr id="16" name="장식"/>
-          <p:cNvSpPr/>
-          <p:nvPr/>
-        </p:nvSpPr>
-        <p:spPr>
-          <a:xfrm rot="2400000">
-            <a:off x="11518232" y="1260178"/>
-            <a:ext cx="103692" cy="161300"/>
-          </a:xfrm>
-          <a:prstGeom prst="ellipse">
-            <a:avLst/>
-          </a:prstGeom>
-          <a:solidFill>
-            <a:srgbClr val="B8618C"/>
-          </a:solidFill>
-          <a:ln>
-            <a:noFill/>
-          </a:ln>
-        </p:spPr>
-        <p:txBody>
-          <a:bodyPr rtlCol="0" anchor="ctr"/>
-          <a:lstStyle/>
-          <a:p>
-            <a:pPr algn="ctr"/>
-          </a:p>
-        </p:txBody>
-      </p:sp>
-      <p:sp>
-        <p:nvSpPr>
-          <p:cNvPr id="17" name="장식"/>
-          <p:cNvSpPr/>
-          <p:nvPr/>
-        </p:nvSpPr>
-        <p:spPr>
-          <a:xfrm rot="6720000">
-            <a:off x="11546630" y="1374075"/>
-            <a:ext cx="103692" cy="161300"/>
-          </a:xfrm>
-          <a:prstGeom prst="ellipse">
-            <a:avLst/>
-          </a:prstGeom>
-          <a:solidFill>
-            <a:srgbClr val="EED3E0"/>
-          </a:solidFill>
-          <a:ln>
-            <a:noFill/>
-          </a:ln>
-        </p:spPr>
-        <p:txBody>
-          <a:bodyPr rtlCol="0" anchor="ctr"/>
-          <a:lstStyle/>
-          <a:p>
-            <a:pPr algn="ctr"/>
-          </a:p>
-        </p:txBody>
-      </p:sp>
-      <p:sp>
-        <p:nvSpPr>
-          <p:cNvPr id="18" name="장식"/>
-          <p:cNvSpPr/>
-          <p:nvPr/>
-        </p:nvSpPr>
-        <p:spPr>
-          <a:xfrm rot="11040000">
-            <a:off x="11447083" y="1436279"/>
-            <a:ext cx="103692" cy="161300"/>
-          </a:xfrm>
-          <a:prstGeom prst="ellipse">
-            <a:avLst/>
-          </a:prstGeom>
-          <a:solidFill>
-            <a:srgbClr val="B8618C"/>
-          </a:solidFill>
-          <a:ln>
-            <a:noFill/>
-          </a:ln>
-        </p:spPr>
-        <p:txBody>
-          <a:bodyPr rtlCol="0" anchor="ctr"/>
-          <a:lstStyle/>
-          <a:p>
-            <a:pPr algn="ctr"/>
-          </a:p>
-        </p:txBody>
-      </p:sp>
-      <p:sp>
-        <p:nvSpPr>
-          <p:cNvPr id="19" name="장식"/>
-          <p:cNvSpPr/>
-          <p:nvPr/>
-        </p:nvSpPr>
-        <p:spPr>
-          <a:xfrm rot="15360000">
-            <a:off x="11357162" y="1360826"/>
-            <a:ext cx="103692" cy="161300"/>
-          </a:xfrm>
-          <a:prstGeom prst="ellipse">
-            <a:avLst/>
-          </a:prstGeom>
-          <a:solidFill>
-            <a:srgbClr val="EED3E0"/>
-          </a:solidFill>
-          <a:ln>
-            <a:noFill/>
-          </a:ln>
-        </p:spPr>
-        <p:txBody>
-          <a:bodyPr rtlCol="0" anchor="ctr"/>
-          <a:lstStyle/>
-          <a:p>
-            <a:pPr algn="ctr"/>
-          </a:p>
-        </p:txBody>
-      </p:sp>
-      <p:sp>
-        <p:nvSpPr>
-          <p:cNvPr id="20" name="장식"/>
-          <p:cNvSpPr/>
-          <p:nvPr/>
-        </p:nvSpPr>
-        <p:spPr>
-          <a:xfrm rot="19680000">
-            <a:off x="11401134" y="1251990"/>
-            <a:ext cx="103692" cy="161300"/>
-          </a:xfrm>
-          <a:prstGeom prst="ellipse">
-            <a:avLst/>
-          </a:prstGeom>
-          <a:solidFill>
-            <a:srgbClr val="B8618C"/>
-          </a:solidFill>
-          <a:ln>
-            <a:noFill/>
-          </a:ln>
-        </p:spPr>
-        <p:txBody>
-          <a:bodyPr rtlCol="0" anchor="ctr"/>
-          <a:lstStyle/>
-          <a:p>
-            <a:pPr algn="ctr"/>
-          </a:p>
-        </p:txBody>
-      </p:sp>
-      <p:sp>
-        <p:nvSpPr>
-          <p:cNvPr id="21" name="장식"/>
-          <p:cNvSpPr/>
-          <p:nvPr/>
-        </p:nvSpPr>
-        <p:spPr>
-          <a:xfrm>
-            <a:off x="11471330" y="1382755"/>
-            <a:ext cx="69128" cy="69128"/>
-          </a:xfrm>
-          <a:prstGeom prst="ellipse">
-            <a:avLst/>
-          </a:prstGeom>
-          <a:solidFill>
-            <a:srgbClr val="3F8D3F"/>
-          </a:solidFill>
-          <a:ln>
-            <a:noFill/>
-          </a:ln>
-        </p:spPr>
-        <p:txBody>
-          <a:bodyPr rtlCol="0" anchor="ctr"/>
-          <a:lstStyle/>
-          <a:p>
-            <a:pPr algn="ctr"/>
-          </a:p>
-        </p:txBody>
-      </p:sp>
-      <p:sp>
-        <p:nvSpPr>
           <p:cNvPr id="2" name="Title 1"/>
           <p:cNvSpPr>
             <a:spLocks noGrp="1"/>
@@ -11415,7 +8268,7 @@
       </p:sp>
       <p:sp>
         <p:nvSpPr>
-          <p:cNvPr id="22" name="카드 1"/>
+          <p:cNvPr id="4" name="카드 1"/>
           <p:cNvSpPr/>
           <p:nvPr/>
         </p:nvSpPr>
@@ -11448,7 +8301,7 @@
       </p:sp>
       <p:sp>
         <p:nvSpPr>
-          <p:cNvPr id="23" name="번호 1"/>
+          <p:cNvPr id="5" name="번호 1"/>
           <p:cNvSpPr/>
           <p:nvPr/>
         </p:nvSpPr>
@@ -11491,7 +8344,7 @@
       </p:sp>
       <p:sp>
         <p:nvSpPr>
-          <p:cNvPr id="24" name="TextBox 23"/>
+          <p:cNvPr id="6" name="TextBox 5"/>
           <p:cNvSpPr txBox="1"/>
           <p:nvPr/>
         </p:nvSpPr>
@@ -11529,7 +8382,7 @@
       </p:sp>
       <p:sp>
         <p:nvSpPr>
-          <p:cNvPr id="25" name="TextBox 24"/>
+          <p:cNvPr id="7" name="TextBox 6"/>
           <p:cNvSpPr txBox="1"/>
           <p:nvPr/>
         </p:nvSpPr>
@@ -11567,7 +8420,7 @@
       </p:sp>
       <p:sp>
         <p:nvSpPr>
-          <p:cNvPr id="26" name="카드 2"/>
+          <p:cNvPr id="8" name="카드 2"/>
           <p:cNvSpPr/>
           <p:nvPr/>
         </p:nvSpPr>
@@ -11600,7 +8453,7 @@
       </p:sp>
       <p:sp>
         <p:nvSpPr>
-          <p:cNvPr id="27" name="번호 2"/>
+          <p:cNvPr id="9" name="번호 2"/>
           <p:cNvSpPr/>
           <p:nvPr/>
         </p:nvSpPr>
@@ -11643,7 +8496,7 @@
       </p:sp>
       <p:sp>
         <p:nvSpPr>
-          <p:cNvPr id="28" name="TextBox 27"/>
+          <p:cNvPr id="10" name="TextBox 9"/>
           <p:cNvSpPr txBox="1"/>
           <p:nvPr/>
         </p:nvSpPr>
@@ -11681,7 +8534,7 @@
       </p:sp>
       <p:sp>
         <p:nvSpPr>
-          <p:cNvPr id="29" name="TextBox 28"/>
+          <p:cNvPr id="11" name="TextBox 10"/>
           <p:cNvSpPr txBox="1"/>
           <p:nvPr/>
         </p:nvSpPr>
@@ -11719,7 +8572,7 @@
       </p:sp>
       <p:sp>
         <p:nvSpPr>
-          <p:cNvPr id="30" name="카드 3"/>
+          <p:cNvPr id="12" name="카드 3"/>
           <p:cNvSpPr/>
           <p:nvPr/>
         </p:nvSpPr>
@@ -11752,7 +8605,7 @@
       </p:sp>
       <p:sp>
         <p:nvSpPr>
-          <p:cNvPr id="31" name="번호 3"/>
+          <p:cNvPr id="13" name="번호 3"/>
           <p:cNvSpPr/>
           <p:nvPr/>
         </p:nvSpPr>
@@ -11795,7 +8648,7 @@
       </p:sp>
       <p:sp>
         <p:nvSpPr>
-          <p:cNvPr id="32" name="TextBox 31"/>
+          <p:cNvPr id="14" name="TextBox 13"/>
           <p:cNvSpPr txBox="1"/>
           <p:nvPr/>
         </p:nvSpPr>
@@ -11833,7 +8686,7 @@
       </p:sp>
       <p:sp>
         <p:nvSpPr>
-          <p:cNvPr id="33" name="TextBox 32"/>
+          <p:cNvPr id="15" name="TextBox 14"/>
           <p:cNvSpPr txBox="1"/>
           <p:nvPr/>
         </p:nvSpPr>
@@ -11871,7 +8724,7 @@
       </p:sp>
       <p:sp>
         <p:nvSpPr>
-          <p:cNvPr id="34" name="안내 문구"/>
+          <p:cNvPr id="16" name="안내 문구"/>
           <p:cNvSpPr txBox="1"/>
           <p:nvPr/>
         </p:nvSpPr>

--- a/public/fun/pack/pptx/review/보장점검양식_25_사업장점검_연꽃연못.pptx
+++ b/public/fun/pack/pptx/review/보장점검양식_25_사업장점검_연꽃연못.pptx
@@ -3347,7 +3347,7 @@
             <a:r>
               <a:rPr sz="3600" b="1" i="0">
                 <a:solidFill>
-                  <a:srgbClr val="7B3759"/>
+                  <a:srgbClr val="1D115F"/>
                 </a:solidFill>
               </a:rPr>
               <a:t>우리 보험 점검 시간</a:t>
@@ -3385,7 +3385,7 @@
             <a:r>
               <a:rPr sz="1700" b="0" i="1">
                 <a:solidFill>
-                  <a:srgbClr val="7B3759"/>
+                  <a:srgbClr val="1D115F"/>
                 </a:solidFill>
               </a:rPr>
               <a:t>성수기 전에 점검해 둡니다</a:t>
@@ -3460,7 +3460,7 @@
     <p:bg>
       <p:bgPr>
         <a:solidFill>
-          <a:srgbClr val="B8618C"/>
+          <a:srgbClr val="3D26C5"/>
         </a:solidFill>
         <a:effectLst/>
       </p:bgPr>
@@ -3533,7 +3533,7 @@
             <a:r>
               <a:rPr sz="3000" b="1" i="0">
                 <a:solidFill>
-                  <a:srgbClr val="7B3759"/>
+                  <a:srgbClr val="1D115F"/>
                 </a:solidFill>
               </a:rPr>
               <a:t>점검 대상 현황</a:t>
@@ -3583,30 +3583,30 @@
                   <a:tcPr anchor="ctr" marL="73152" marR="73152">
                     <a:lnL w="9525" cap="flat" cmpd="sng" algn="ctr">
                       <a:solidFill>
-                        <a:srgbClr val="B8618C"/>
+                        <a:srgbClr val="3D26C5"/>
                       </a:solidFill>
                       <a:prstDash val="solid"/>
                     </a:lnL>
                     <a:lnR w="9525" cap="flat" cmpd="sng" algn="ctr">
                       <a:solidFill>
-                        <a:srgbClr val="B8618C"/>
+                        <a:srgbClr val="3D26C5"/>
                       </a:solidFill>
                       <a:prstDash val="solid"/>
                     </a:lnR>
                     <a:lnT w="9525" cap="flat" cmpd="sng" algn="ctr">
                       <a:solidFill>
-                        <a:srgbClr val="B8618C"/>
+                        <a:srgbClr val="3D26C5"/>
                       </a:solidFill>
                       <a:prstDash val="solid"/>
                     </a:lnT>
                     <a:lnB w="9525" cap="flat" cmpd="sng" algn="ctr">
                       <a:solidFill>
-                        <a:srgbClr val="B8618C"/>
+                        <a:srgbClr val="3D26C5"/>
                       </a:solidFill>
                       <a:prstDash val="solid"/>
                     </a:lnB>
                     <a:solidFill>
-                      <a:srgbClr val="B8618C"/>
+                      <a:srgbClr val="3D26C5"/>
                     </a:solidFill>
                   </a:tcPr>
                 </a:tc>
@@ -3629,30 +3629,30 @@
                   <a:tcPr anchor="ctr" marL="73152" marR="73152">
                     <a:lnL w="9525" cap="flat" cmpd="sng" algn="ctr">
                       <a:solidFill>
-                        <a:srgbClr val="B8618C"/>
+                        <a:srgbClr val="3D26C5"/>
                       </a:solidFill>
                       <a:prstDash val="solid"/>
                     </a:lnL>
                     <a:lnR w="9525" cap="flat" cmpd="sng" algn="ctr">
                       <a:solidFill>
-                        <a:srgbClr val="B8618C"/>
+                        <a:srgbClr val="3D26C5"/>
                       </a:solidFill>
                       <a:prstDash val="solid"/>
                     </a:lnR>
                     <a:lnT w="9525" cap="flat" cmpd="sng" algn="ctr">
                       <a:solidFill>
-                        <a:srgbClr val="B8618C"/>
+                        <a:srgbClr val="3D26C5"/>
                       </a:solidFill>
                       <a:prstDash val="solid"/>
                     </a:lnT>
                     <a:lnB w="9525" cap="flat" cmpd="sng" algn="ctr">
                       <a:solidFill>
-                        <a:srgbClr val="B8618C"/>
+                        <a:srgbClr val="3D26C5"/>
                       </a:solidFill>
                       <a:prstDash val="solid"/>
                     </a:lnB>
                     <a:solidFill>
-                      <a:srgbClr val="B8618C"/>
+                      <a:srgbClr val="3D26C5"/>
                     </a:solidFill>
                   </a:tcPr>
                 </a:tc>
@@ -3667,7 +3667,7 @@
                       <a:r>
                         <a:rPr sz="1600" b="1">
                           <a:solidFill>
-                            <a:srgbClr val="7B3759"/>
+                            <a:srgbClr val="1D115F"/>
                           </a:solidFill>
                         </a:rPr>
                         <a:t>상호</a:t>
@@ -3677,30 +3677,30 @@
                   <a:tcPr anchor="ctr" marL="73152" marR="73152">
                     <a:lnL w="9525" cap="flat" cmpd="sng" algn="ctr">
                       <a:solidFill>
-                        <a:srgbClr val="EED3E0"/>
+                        <a:srgbClr val="D7D1FA"/>
                       </a:solidFill>
                       <a:prstDash val="solid"/>
                     </a:lnL>
                     <a:lnR w="9525" cap="flat" cmpd="sng" algn="ctr">
                       <a:solidFill>
-                        <a:srgbClr val="EED3E0"/>
+                        <a:srgbClr val="D7D1FA"/>
                       </a:solidFill>
                       <a:prstDash val="solid"/>
                     </a:lnR>
                     <a:lnT w="9525" cap="flat" cmpd="sng" algn="ctr">
                       <a:solidFill>
-                        <a:srgbClr val="EED3E0"/>
+                        <a:srgbClr val="D7D1FA"/>
                       </a:solidFill>
                       <a:prstDash val="solid"/>
                     </a:lnT>
                     <a:lnB w="9525" cap="flat" cmpd="sng" algn="ctr">
                       <a:solidFill>
-                        <a:srgbClr val="EED3E0"/>
+                        <a:srgbClr val="D7D1FA"/>
                       </a:solidFill>
                       <a:prstDash val="solid"/>
                     </a:lnB>
                     <a:solidFill>
-                      <a:srgbClr val="EED3E0"/>
+                      <a:srgbClr val="D7D1FA"/>
                     </a:solidFill>
                   </a:tcPr>
                 </a:tc>
@@ -3723,25 +3723,25 @@
                   <a:tcPr anchor="ctr" marL="73152" marR="73152">
                     <a:lnL w="9525" cap="flat" cmpd="sng" algn="ctr">
                       <a:solidFill>
-                        <a:srgbClr val="EED3E0"/>
+                        <a:srgbClr val="D7D1FA"/>
                       </a:solidFill>
                       <a:prstDash val="solid"/>
                     </a:lnL>
                     <a:lnR w="9525" cap="flat" cmpd="sng" algn="ctr">
                       <a:solidFill>
-                        <a:srgbClr val="EED3E0"/>
+                        <a:srgbClr val="D7D1FA"/>
                       </a:solidFill>
                       <a:prstDash val="solid"/>
                     </a:lnR>
                     <a:lnT w="9525" cap="flat" cmpd="sng" algn="ctr">
                       <a:solidFill>
-                        <a:srgbClr val="EED3E0"/>
+                        <a:srgbClr val="D7D1FA"/>
                       </a:solidFill>
                       <a:prstDash val="solid"/>
                     </a:lnT>
                     <a:lnB w="9525" cap="flat" cmpd="sng" algn="ctr">
                       <a:solidFill>
-                        <a:srgbClr val="EED3E0"/>
+                        <a:srgbClr val="D7D1FA"/>
                       </a:solidFill>
                       <a:prstDash val="solid"/>
                     </a:lnB>
@@ -3761,7 +3761,7 @@
                       <a:r>
                         <a:rPr sz="1600" b="1">
                           <a:solidFill>
-                            <a:srgbClr val="7B3759"/>
+                            <a:srgbClr val="1D115F"/>
                           </a:solidFill>
                         </a:rPr>
                         <a:t>업종</a:t>
@@ -3771,30 +3771,30 @@
                   <a:tcPr anchor="ctr" marL="73152" marR="73152">
                     <a:lnL w="9525" cap="flat" cmpd="sng" algn="ctr">
                       <a:solidFill>
-                        <a:srgbClr val="EED3E0"/>
+                        <a:srgbClr val="D7D1FA"/>
                       </a:solidFill>
                       <a:prstDash val="solid"/>
                     </a:lnL>
                     <a:lnR w="9525" cap="flat" cmpd="sng" algn="ctr">
                       <a:solidFill>
-                        <a:srgbClr val="EED3E0"/>
+                        <a:srgbClr val="D7D1FA"/>
                       </a:solidFill>
                       <a:prstDash val="solid"/>
                     </a:lnR>
                     <a:lnT w="9525" cap="flat" cmpd="sng" algn="ctr">
                       <a:solidFill>
-                        <a:srgbClr val="EED3E0"/>
+                        <a:srgbClr val="D7D1FA"/>
                       </a:solidFill>
                       <a:prstDash val="solid"/>
                     </a:lnT>
                     <a:lnB w="9525" cap="flat" cmpd="sng" algn="ctr">
                       <a:solidFill>
-                        <a:srgbClr val="EED3E0"/>
+                        <a:srgbClr val="D7D1FA"/>
                       </a:solidFill>
                       <a:prstDash val="solid"/>
                     </a:lnB>
                     <a:solidFill>
-                      <a:srgbClr val="EED3E0"/>
+                      <a:srgbClr val="D7D1FA"/>
                     </a:solidFill>
                   </a:tcPr>
                 </a:tc>
@@ -3817,30 +3817,30 @@
                   <a:tcPr anchor="ctr" marL="73152" marR="73152">
                     <a:lnL w="9525" cap="flat" cmpd="sng" algn="ctr">
                       <a:solidFill>
-                        <a:srgbClr val="EED3E0"/>
+                        <a:srgbClr val="D7D1FA"/>
                       </a:solidFill>
                       <a:prstDash val="solid"/>
                     </a:lnL>
                     <a:lnR w="9525" cap="flat" cmpd="sng" algn="ctr">
                       <a:solidFill>
-                        <a:srgbClr val="EED3E0"/>
+                        <a:srgbClr val="D7D1FA"/>
                       </a:solidFill>
                       <a:prstDash val="solid"/>
                     </a:lnR>
                     <a:lnT w="9525" cap="flat" cmpd="sng" algn="ctr">
                       <a:solidFill>
-                        <a:srgbClr val="EED3E0"/>
+                        <a:srgbClr val="D7D1FA"/>
                       </a:solidFill>
                       <a:prstDash val="solid"/>
                     </a:lnT>
                     <a:lnB w="9525" cap="flat" cmpd="sng" algn="ctr">
                       <a:solidFill>
-                        <a:srgbClr val="EED3E0"/>
+                        <a:srgbClr val="D7D1FA"/>
                       </a:solidFill>
                       <a:prstDash val="solid"/>
                     </a:lnB>
                     <a:solidFill>
-                      <a:srgbClr val="F9F1F5"/>
+                      <a:srgbClr val="F0EEFC"/>
                     </a:solidFill>
                   </a:tcPr>
                 </a:tc>
@@ -3855,7 +3855,7 @@
                       <a:r>
                         <a:rPr sz="1600" b="1">
                           <a:solidFill>
-                            <a:srgbClr val="7B3759"/>
+                            <a:srgbClr val="1D115F"/>
                           </a:solidFill>
                         </a:rPr>
                         <a:t>직원 수</a:t>
@@ -3865,30 +3865,30 @@
                   <a:tcPr anchor="ctr" marL="73152" marR="73152">
                     <a:lnL w="9525" cap="flat" cmpd="sng" algn="ctr">
                       <a:solidFill>
-                        <a:srgbClr val="EED3E0"/>
+                        <a:srgbClr val="D7D1FA"/>
                       </a:solidFill>
                       <a:prstDash val="solid"/>
                     </a:lnL>
                     <a:lnR w="9525" cap="flat" cmpd="sng" algn="ctr">
                       <a:solidFill>
-                        <a:srgbClr val="EED3E0"/>
+                        <a:srgbClr val="D7D1FA"/>
                       </a:solidFill>
                       <a:prstDash val="solid"/>
                     </a:lnR>
                     <a:lnT w="9525" cap="flat" cmpd="sng" algn="ctr">
                       <a:solidFill>
-                        <a:srgbClr val="EED3E0"/>
+                        <a:srgbClr val="D7D1FA"/>
                       </a:solidFill>
                       <a:prstDash val="solid"/>
                     </a:lnT>
                     <a:lnB w="9525" cap="flat" cmpd="sng" algn="ctr">
                       <a:solidFill>
-                        <a:srgbClr val="EED3E0"/>
+                        <a:srgbClr val="D7D1FA"/>
                       </a:solidFill>
                       <a:prstDash val="solid"/>
                     </a:lnB>
                     <a:solidFill>
-                      <a:srgbClr val="EED3E0"/>
+                      <a:srgbClr val="D7D1FA"/>
                     </a:solidFill>
                   </a:tcPr>
                 </a:tc>
@@ -3911,25 +3911,25 @@
                   <a:tcPr anchor="ctr" marL="73152" marR="73152">
                     <a:lnL w="9525" cap="flat" cmpd="sng" algn="ctr">
                       <a:solidFill>
-                        <a:srgbClr val="EED3E0"/>
+                        <a:srgbClr val="D7D1FA"/>
                       </a:solidFill>
                       <a:prstDash val="solid"/>
                     </a:lnL>
                     <a:lnR w="9525" cap="flat" cmpd="sng" algn="ctr">
                       <a:solidFill>
-                        <a:srgbClr val="EED3E0"/>
+                        <a:srgbClr val="D7D1FA"/>
                       </a:solidFill>
                       <a:prstDash val="solid"/>
                     </a:lnR>
                     <a:lnT w="9525" cap="flat" cmpd="sng" algn="ctr">
                       <a:solidFill>
-                        <a:srgbClr val="EED3E0"/>
+                        <a:srgbClr val="D7D1FA"/>
                       </a:solidFill>
                       <a:prstDash val="solid"/>
                     </a:lnT>
                     <a:lnB w="9525" cap="flat" cmpd="sng" algn="ctr">
                       <a:solidFill>
-                        <a:srgbClr val="EED3E0"/>
+                        <a:srgbClr val="D7D1FA"/>
                       </a:solidFill>
                       <a:prstDash val="solid"/>
                     </a:lnB>
@@ -3949,7 +3949,7 @@
                       <a:r>
                         <a:rPr sz="1600" b="1">
                           <a:solidFill>
-                            <a:srgbClr val="7B3759"/>
+                            <a:srgbClr val="1D115F"/>
                           </a:solidFill>
                         </a:rPr>
                         <a:t>확인할 것</a:t>
@@ -3959,30 +3959,30 @@
                   <a:tcPr anchor="ctr" marL="73152" marR="73152">
                     <a:lnL w="9525" cap="flat" cmpd="sng" algn="ctr">
                       <a:solidFill>
-                        <a:srgbClr val="EED3E0"/>
+                        <a:srgbClr val="D7D1FA"/>
                       </a:solidFill>
                       <a:prstDash val="solid"/>
                     </a:lnL>
                     <a:lnR w="9525" cap="flat" cmpd="sng" algn="ctr">
                       <a:solidFill>
-                        <a:srgbClr val="EED3E0"/>
+                        <a:srgbClr val="D7D1FA"/>
                       </a:solidFill>
                       <a:prstDash val="solid"/>
                     </a:lnR>
                     <a:lnT w="9525" cap="flat" cmpd="sng" algn="ctr">
                       <a:solidFill>
-                        <a:srgbClr val="EED3E0"/>
+                        <a:srgbClr val="D7D1FA"/>
                       </a:solidFill>
                       <a:prstDash val="solid"/>
                     </a:lnT>
                     <a:lnB w="9525" cap="flat" cmpd="sng" algn="ctr">
                       <a:solidFill>
-                        <a:srgbClr val="EED3E0"/>
+                        <a:srgbClr val="D7D1FA"/>
                       </a:solidFill>
                       <a:prstDash val="solid"/>
                     </a:lnB>
                     <a:solidFill>
-                      <a:srgbClr val="EED3E0"/>
+                      <a:srgbClr val="D7D1FA"/>
                     </a:solidFill>
                   </a:tcPr>
                 </a:tc>
@@ -4005,30 +4005,30 @@
                   <a:tcPr anchor="ctr" marL="73152" marR="73152">
                     <a:lnL w="9525" cap="flat" cmpd="sng" algn="ctr">
                       <a:solidFill>
-                        <a:srgbClr val="EED3E0"/>
+                        <a:srgbClr val="D7D1FA"/>
                       </a:solidFill>
                       <a:prstDash val="solid"/>
                     </a:lnL>
                     <a:lnR w="9525" cap="flat" cmpd="sng" algn="ctr">
                       <a:solidFill>
-                        <a:srgbClr val="EED3E0"/>
+                        <a:srgbClr val="D7D1FA"/>
                       </a:solidFill>
                       <a:prstDash val="solid"/>
                     </a:lnR>
                     <a:lnT w="9525" cap="flat" cmpd="sng" algn="ctr">
                       <a:solidFill>
-                        <a:srgbClr val="EED3E0"/>
+                        <a:srgbClr val="D7D1FA"/>
                       </a:solidFill>
                       <a:prstDash val="solid"/>
                     </a:lnT>
                     <a:lnB w="9525" cap="flat" cmpd="sng" algn="ctr">
                       <a:solidFill>
-                        <a:srgbClr val="EED3E0"/>
+                        <a:srgbClr val="D7D1FA"/>
                       </a:solidFill>
                       <a:prstDash val="solid"/>
                     </a:lnB>
                     <a:solidFill>
-                      <a:srgbClr val="F9F1F5"/>
+                      <a:srgbClr val="F0EEFC"/>
                     </a:solidFill>
                   </a:tcPr>
                 </a:tc>
@@ -4051,7 +4051,7 @@
     <p:bg>
       <p:bgPr>
         <a:solidFill>
-          <a:srgbClr val="B8618C"/>
+          <a:srgbClr val="3D26C5"/>
         </a:solidFill>
         <a:effectLst/>
       </p:bgPr>
@@ -4124,7 +4124,7 @@
             <a:r>
               <a:rPr sz="3000" b="1" i="0">
                 <a:solidFill>
-                  <a:srgbClr val="7B3759"/>
+                  <a:srgbClr val="1D115F"/>
                 </a:solidFill>
               </a:rPr>
               <a:t>가입한 보험 목록</a:t>
@@ -4177,30 +4177,30 @@
                   <a:tcPr anchor="ctr" marL="73152" marR="73152">
                     <a:lnL w="9525" cap="flat" cmpd="sng" algn="ctr">
                       <a:solidFill>
-                        <a:srgbClr val="B8618C"/>
+                        <a:srgbClr val="3D26C5"/>
                       </a:solidFill>
                       <a:prstDash val="solid"/>
                     </a:lnL>
                     <a:lnR w="9525" cap="flat" cmpd="sng" algn="ctr">
                       <a:solidFill>
-                        <a:srgbClr val="B8618C"/>
+                        <a:srgbClr val="3D26C5"/>
                       </a:solidFill>
                       <a:prstDash val="solid"/>
                     </a:lnR>
                     <a:lnT w="9525" cap="flat" cmpd="sng" algn="ctr">
                       <a:solidFill>
-                        <a:srgbClr val="B8618C"/>
+                        <a:srgbClr val="3D26C5"/>
                       </a:solidFill>
                       <a:prstDash val="solid"/>
                     </a:lnT>
                     <a:lnB w="9525" cap="flat" cmpd="sng" algn="ctr">
                       <a:solidFill>
-                        <a:srgbClr val="B8618C"/>
+                        <a:srgbClr val="3D26C5"/>
                       </a:solidFill>
                       <a:prstDash val="solid"/>
                     </a:lnB>
                     <a:solidFill>
-                      <a:srgbClr val="B8618C"/>
+                      <a:srgbClr val="3D26C5"/>
                     </a:solidFill>
                   </a:tcPr>
                 </a:tc>
@@ -4223,30 +4223,30 @@
                   <a:tcPr anchor="ctr" marL="73152" marR="73152">
                     <a:lnL w="9525" cap="flat" cmpd="sng" algn="ctr">
                       <a:solidFill>
-                        <a:srgbClr val="B8618C"/>
+                        <a:srgbClr val="3D26C5"/>
                       </a:solidFill>
                       <a:prstDash val="solid"/>
                     </a:lnL>
                     <a:lnR w="9525" cap="flat" cmpd="sng" algn="ctr">
                       <a:solidFill>
-                        <a:srgbClr val="B8618C"/>
+                        <a:srgbClr val="3D26C5"/>
                       </a:solidFill>
                       <a:prstDash val="solid"/>
                     </a:lnR>
                     <a:lnT w="9525" cap="flat" cmpd="sng" algn="ctr">
                       <a:solidFill>
-                        <a:srgbClr val="B8618C"/>
+                        <a:srgbClr val="3D26C5"/>
                       </a:solidFill>
                       <a:prstDash val="solid"/>
                     </a:lnT>
                     <a:lnB w="9525" cap="flat" cmpd="sng" algn="ctr">
                       <a:solidFill>
-                        <a:srgbClr val="B8618C"/>
+                        <a:srgbClr val="3D26C5"/>
                       </a:solidFill>
                       <a:prstDash val="solid"/>
                     </a:lnB>
                     <a:solidFill>
-                      <a:srgbClr val="B8618C"/>
+                      <a:srgbClr val="3D26C5"/>
                     </a:solidFill>
                   </a:tcPr>
                 </a:tc>
@@ -4269,30 +4269,30 @@
                   <a:tcPr anchor="ctr" marL="73152" marR="73152">
                     <a:lnL w="9525" cap="flat" cmpd="sng" algn="ctr">
                       <a:solidFill>
-                        <a:srgbClr val="B8618C"/>
+                        <a:srgbClr val="3D26C5"/>
                       </a:solidFill>
                       <a:prstDash val="solid"/>
                     </a:lnL>
                     <a:lnR w="9525" cap="flat" cmpd="sng" algn="ctr">
                       <a:solidFill>
-                        <a:srgbClr val="B8618C"/>
+                        <a:srgbClr val="3D26C5"/>
                       </a:solidFill>
                       <a:prstDash val="solid"/>
                     </a:lnR>
                     <a:lnT w="9525" cap="flat" cmpd="sng" algn="ctr">
                       <a:solidFill>
-                        <a:srgbClr val="B8618C"/>
+                        <a:srgbClr val="3D26C5"/>
                       </a:solidFill>
                       <a:prstDash val="solid"/>
                     </a:lnT>
                     <a:lnB w="9525" cap="flat" cmpd="sng" algn="ctr">
                       <a:solidFill>
-                        <a:srgbClr val="B8618C"/>
+                        <a:srgbClr val="3D26C5"/>
                       </a:solidFill>
                       <a:prstDash val="solid"/>
                     </a:lnB>
                     <a:solidFill>
-                      <a:srgbClr val="B8618C"/>
+                      <a:srgbClr val="3D26C5"/>
                     </a:solidFill>
                   </a:tcPr>
                 </a:tc>
@@ -4315,30 +4315,30 @@
                   <a:tcPr anchor="ctr" marL="73152" marR="73152">
                     <a:lnL w="9525" cap="flat" cmpd="sng" algn="ctr">
                       <a:solidFill>
-                        <a:srgbClr val="B8618C"/>
+                        <a:srgbClr val="3D26C5"/>
                       </a:solidFill>
                       <a:prstDash val="solid"/>
                     </a:lnL>
                     <a:lnR w="9525" cap="flat" cmpd="sng" algn="ctr">
                       <a:solidFill>
-                        <a:srgbClr val="B8618C"/>
+                        <a:srgbClr val="3D26C5"/>
                       </a:solidFill>
                       <a:prstDash val="solid"/>
                     </a:lnR>
                     <a:lnT w="9525" cap="flat" cmpd="sng" algn="ctr">
                       <a:solidFill>
-                        <a:srgbClr val="B8618C"/>
+                        <a:srgbClr val="3D26C5"/>
                       </a:solidFill>
                       <a:prstDash val="solid"/>
                     </a:lnT>
                     <a:lnB w="9525" cap="flat" cmpd="sng" algn="ctr">
                       <a:solidFill>
-                        <a:srgbClr val="B8618C"/>
+                        <a:srgbClr val="3D26C5"/>
                       </a:solidFill>
                       <a:prstDash val="solid"/>
                     </a:lnB>
                     <a:solidFill>
-                      <a:srgbClr val="B8618C"/>
+                      <a:srgbClr val="3D26C5"/>
                     </a:solidFill>
                   </a:tcPr>
                 </a:tc>
@@ -4361,30 +4361,30 @@
                   <a:tcPr anchor="ctr" marL="73152" marR="73152">
                     <a:lnL w="9525" cap="flat" cmpd="sng" algn="ctr">
                       <a:solidFill>
-                        <a:srgbClr val="B8618C"/>
+                        <a:srgbClr val="3D26C5"/>
                       </a:solidFill>
                       <a:prstDash val="solid"/>
                     </a:lnL>
                     <a:lnR w="9525" cap="flat" cmpd="sng" algn="ctr">
                       <a:solidFill>
-                        <a:srgbClr val="B8618C"/>
+                        <a:srgbClr val="3D26C5"/>
                       </a:solidFill>
                       <a:prstDash val="solid"/>
                     </a:lnR>
                     <a:lnT w="9525" cap="flat" cmpd="sng" algn="ctr">
                       <a:solidFill>
-                        <a:srgbClr val="B8618C"/>
+                        <a:srgbClr val="3D26C5"/>
                       </a:solidFill>
                       <a:prstDash val="solid"/>
                     </a:lnT>
                     <a:lnB w="9525" cap="flat" cmpd="sng" algn="ctr">
                       <a:solidFill>
-                        <a:srgbClr val="B8618C"/>
+                        <a:srgbClr val="3D26C5"/>
                       </a:solidFill>
                       <a:prstDash val="solid"/>
                     </a:lnB>
                     <a:solidFill>
-                      <a:srgbClr val="B8618C"/>
+                      <a:srgbClr val="3D26C5"/>
                     </a:solidFill>
                   </a:tcPr>
                 </a:tc>
@@ -4409,25 +4409,25 @@
                   <a:tcPr anchor="ctr" marL="73152" marR="73152">
                     <a:lnL w="9525" cap="flat" cmpd="sng" algn="ctr">
                       <a:solidFill>
-                        <a:srgbClr val="EED3E0"/>
+                        <a:srgbClr val="D7D1FA"/>
                       </a:solidFill>
                       <a:prstDash val="solid"/>
                     </a:lnL>
                     <a:lnR w="9525" cap="flat" cmpd="sng" algn="ctr">
                       <a:solidFill>
-                        <a:srgbClr val="EED3E0"/>
+                        <a:srgbClr val="D7D1FA"/>
                       </a:solidFill>
                       <a:prstDash val="solid"/>
                     </a:lnR>
                     <a:lnT w="9525" cap="flat" cmpd="sng" algn="ctr">
                       <a:solidFill>
-                        <a:srgbClr val="EED3E0"/>
+                        <a:srgbClr val="D7D1FA"/>
                       </a:solidFill>
                       <a:prstDash val="solid"/>
                     </a:lnT>
                     <a:lnB w="9525" cap="flat" cmpd="sng" algn="ctr">
                       <a:solidFill>
-                        <a:srgbClr val="EED3E0"/>
+                        <a:srgbClr val="D7D1FA"/>
                       </a:solidFill>
                       <a:prstDash val="solid"/>
                     </a:lnB>
@@ -4455,25 +4455,25 @@
                   <a:tcPr anchor="ctr" marL="73152" marR="73152">
                     <a:lnL w="9525" cap="flat" cmpd="sng" algn="ctr">
                       <a:solidFill>
-                        <a:srgbClr val="EED3E0"/>
+                        <a:srgbClr val="D7D1FA"/>
                       </a:solidFill>
                       <a:prstDash val="solid"/>
                     </a:lnL>
                     <a:lnR w="9525" cap="flat" cmpd="sng" algn="ctr">
                       <a:solidFill>
-                        <a:srgbClr val="EED3E0"/>
+                        <a:srgbClr val="D7D1FA"/>
                       </a:solidFill>
                       <a:prstDash val="solid"/>
                     </a:lnR>
                     <a:lnT w="9525" cap="flat" cmpd="sng" algn="ctr">
                       <a:solidFill>
-                        <a:srgbClr val="EED3E0"/>
+                        <a:srgbClr val="D7D1FA"/>
                       </a:solidFill>
                       <a:prstDash val="solid"/>
                     </a:lnT>
                     <a:lnB w="9525" cap="flat" cmpd="sng" algn="ctr">
                       <a:solidFill>
-                        <a:srgbClr val="EED3E0"/>
+                        <a:srgbClr val="D7D1FA"/>
                       </a:solidFill>
                       <a:prstDash val="solid"/>
                     </a:lnB>
@@ -4501,25 +4501,25 @@
                   <a:tcPr anchor="ctr" marL="73152" marR="73152">
                     <a:lnL w="9525" cap="flat" cmpd="sng" algn="ctr">
                       <a:solidFill>
-                        <a:srgbClr val="EED3E0"/>
+                        <a:srgbClr val="D7D1FA"/>
                       </a:solidFill>
                       <a:prstDash val="solid"/>
                     </a:lnL>
                     <a:lnR w="9525" cap="flat" cmpd="sng" algn="ctr">
                       <a:solidFill>
-                        <a:srgbClr val="EED3E0"/>
+                        <a:srgbClr val="D7D1FA"/>
                       </a:solidFill>
                       <a:prstDash val="solid"/>
                     </a:lnR>
                     <a:lnT w="9525" cap="flat" cmpd="sng" algn="ctr">
                       <a:solidFill>
-                        <a:srgbClr val="EED3E0"/>
+                        <a:srgbClr val="D7D1FA"/>
                       </a:solidFill>
                       <a:prstDash val="solid"/>
                     </a:lnT>
                     <a:lnB w="9525" cap="flat" cmpd="sng" algn="ctr">
                       <a:solidFill>
-                        <a:srgbClr val="EED3E0"/>
+                        <a:srgbClr val="D7D1FA"/>
                       </a:solidFill>
                       <a:prstDash val="solid"/>
                     </a:lnB>
@@ -4547,25 +4547,25 @@
                   <a:tcPr anchor="ctr" marL="73152" marR="73152">
                     <a:lnL w="9525" cap="flat" cmpd="sng" algn="ctr">
                       <a:solidFill>
-                        <a:srgbClr val="EED3E0"/>
+                        <a:srgbClr val="D7D1FA"/>
                       </a:solidFill>
                       <a:prstDash val="solid"/>
                     </a:lnL>
                     <a:lnR w="9525" cap="flat" cmpd="sng" algn="ctr">
                       <a:solidFill>
-                        <a:srgbClr val="EED3E0"/>
+                        <a:srgbClr val="D7D1FA"/>
                       </a:solidFill>
                       <a:prstDash val="solid"/>
                     </a:lnR>
                     <a:lnT w="9525" cap="flat" cmpd="sng" algn="ctr">
                       <a:solidFill>
-                        <a:srgbClr val="EED3E0"/>
+                        <a:srgbClr val="D7D1FA"/>
                       </a:solidFill>
                       <a:prstDash val="solid"/>
                     </a:lnT>
                     <a:lnB w="9525" cap="flat" cmpd="sng" algn="ctr">
                       <a:solidFill>
-                        <a:srgbClr val="EED3E0"/>
+                        <a:srgbClr val="D7D1FA"/>
                       </a:solidFill>
                       <a:prstDash val="solid"/>
                     </a:lnB>
@@ -4593,25 +4593,25 @@
                   <a:tcPr anchor="ctr" marL="73152" marR="73152">
                     <a:lnL w="9525" cap="flat" cmpd="sng" algn="ctr">
                       <a:solidFill>
-                        <a:srgbClr val="EED3E0"/>
+                        <a:srgbClr val="D7D1FA"/>
                       </a:solidFill>
                       <a:prstDash val="solid"/>
                     </a:lnL>
                     <a:lnR w="9525" cap="flat" cmpd="sng" algn="ctr">
                       <a:solidFill>
-                        <a:srgbClr val="EED3E0"/>
+                        <a:srgbClr val="D7D1FA"/>
                       </a:solidFill>
                       <a:prstDash val="solid"/>
                     </a:lnR>
                     <a:lnT w="9525" cap="flat" cmpd="sng" algn="ctr">
                       <a:solidFill>
-                        <a:srgbClr val="EED3E0"/>
+                        <a:srgbClr val="D7D1FA"/>
                       </a:solidFill>
                       <a:prstDash val="solid"/>
                     </a:lnT>
                     <a:lnB w="9525" cap="flat" cmpd="sng" algn="ctr">
                       <a:solidFill>
-                        <a:srgbClr val="EED3E0"/>
+                        <a:srgbClr val="D7D1FA"/>
                       </a:solidFill>
                       <a:prstDash val="solid"/>
                     </a:lnB>
@@ -4641,30 +4641,30 @@
                   <a:tcPr anchor="ctr" marL="73152" marR="73152">
                     <a:lnL w="9525" cap="flat" cmpd="sng" algn="ctr">
                       <a:solidFill>
-                        <a:srgbClr val="EED3E0"/>
+                        <a:srgbClr val="D7D1FA"/>
                       </a:solidFill>
                       <a:prstDash val="solid"/>
                     </a:lnL>
                     <a:lnR w="9525" cap="flat" cmpd="sng" algn="ctr">
                       <a:solidFill>
-                        <a:srgbClr val="EED3E0"/>
+                        <a:srgbClr val="D7D1FA"/>
                       </a:solidFill>
                       <a:prstDash val="solid"/>
                     </a:lnR>
                     <a:lnT w="9525" cap="flat" cmpd="sng" algn="ctr">
                       <a:solidFill>
-                        <a:srgbClr val="EED3E0"/>
+                        <a:srgbClr val="D7D1FA"/>
                       </a:solidFill>
                       <a:prstDash val="solid"/>
                     </a:lnT>
                     <a:lnB w="9525" cap="flat" cmpd="sng" algn="ctr">
                       <a:solidFill>
-                        <a:srgbClr val="EED3E0"/>
+                        <a:srgbClr val="D7D1FA"/>
                       </a:solidFill>
                       <a:prstDash val="solid"/>
                     </a:lnB>
                     <a:solidFill>
-                      <a:srgbClr val="F9F1F5"/>
+                      <a:srgbClr val="F0EEFC"/>
                     </a:solidFill>
                   </a:tcPr>
                 </a:tc>
@@ -4687,30 +4687,30 @@
                   <a:tcPr anchor="ctr" marL="73152" marR="73152">
                     <a:lnL w="9525" cap="flat" cmpd="sng" algn="ctr">
                       <a:solidFill>
-                        <a:srgbClr val="EED3E0"/>
+                        <a:srgbClr val="D7D1FA"/>
                       </a:solidFill>
                       <a:prstDash val="solid"/>
                     </a:lnL>
                     <a:lnR w="9525" cap="flat" cmpd="sng" algn="ctr">
                       <a:solidFill>
-                        <a:srgbClr val="EED3E0"/>
+                        <a:srgbClr val="D7D1FA"/>
                       </a:solidFill>
                       <a:prstDash val="solid"/>
                     </a:lnR>
                     <a:lnT w="9525" cap="flat" cmpd="sng" algn="ctr">
                       <a:solidFill>
-                        <a:srgbClr val="EED3E0"/>
+                        <a:srgbClr val="D7D1FA"/>
                       </a:solidFill>
                       <a:prstDash val="solid"/>
                     </a:lnT>
                     <a:lnB w="9525" cap="flat" cmpd="sng" algn="ctr">
                       <a:solidFill>
-                        <a:srgbClr val="EED3E0"/>
+                        <a:srgbClr val="D7D1FA"/>
                       </a:solidFill>
                       <a:prstDash val="solid"/>
                     </a:lnB>
                     <a:solidFill>
-                      <a:srgbClr val="F9F1F5"/>
+                      <a:srgbClr val="F0EEFC"/>
                     </a:solidFill>
                   </a:tcPr>
                 </a:tc>
@@ -4733,30 +4733,30 @@
                   <a:tcPr anchor="ctr" marL="73152" marR="73152">
                     <a:lnL w="9525" cap="flat" cmpd="sng" algn="ctr">
                       <a:solidFill>
-                        <a:srgbClr val="EED3E0"/>
+                        <a:srgbClr val="D7D1FA"/>
                       </a:solidFill>
                       <a:prstDash val="solid"/>
                     </a:lnL>
                     <a:lnR w="9525" cap="flat" cmpd="sng" algn="ctr">
                       <a:solidFill>
-                        <a:srgbClr val="EED3E0"/>
+                        <a:srgbClr val="D7D1FA"/>
                       </a:solidFill>
                       <a:prstDash val="solid"/>
                     </a:lnR>
                     <a:lnT w="9525" cap="flat" cmpd="sng" algn="ctr">
                       <a:solidFill>
-                        <a:srgbClr val="EED3E0"/>
+                        <a:srgbClr val="D7D1FA"/>
                       </a:solidFill>
                       <a:prstDash val="solid"/>
                     </a:lnT>
                     <a:lnB w="9525" cap="flat" cmpd="sng" algn="ctr">
                       <a:solidFill>
-                        <a:srgbClr val="EED3E0"/>
+                        <a:srgbClr val="D7D1FA"/>
                       </a:solidFill>
                       <a:prstDash val="solid"/>
                     </a:lnB>
                     <a:solidFill>
-                      <a:srgbClr val="F9F1F5"/>
+                      <a:srgbClr val="F0EEFC"/>
                     </a:solidFill>
                   </a:tcPr>
                 </a:tc>
@@ -4779,30 +4779,30 @@
                   <a:tcPr anchor="ctr" marL="73152" marR="73152">
                     <a:lnL w="9525" cap="flat" cmpd="sng" algn="ctr">
                       <a:solidFill>
-                        <a:srgbClr val="EED3E0"/>
+                        <a:srgbClr val="D7D1FA"/>
                       </a:solidFill>
                       <a:prstDash val="solid"/>
                     </a:lnL>
                     <a:lnR w="9525" cap="flat" cmpd="sng" algn="ctr">
                       <a:solidFill>
-                        <a:srgbClr val="EED3E0"/>
+                        <a:srgbClr val="D7D1FA"/>
                       </a:solidFill>
                       <a:prstDash val="solid"/>
                     </a:lnR>
                     <a:lnT w="9525" cap="flat" cmpd="sng" algn="ctr">
                       <a:solidFill>
-                        <a:srgbClr val="EED3E0"/>
+                        <a:srgbClr val="D7D1FA"/>
                       </a:solidFill>
                       <a:prstDash val="solid"/>
                     </a:lnT>
                     <a:lnB w="9525" cap="flat" cmpd="sng" algn="ctr">
                       <a:solidFill>
-                        <a:srgbClr val="EED3E0"/>
+                        <a:srgbClr val="D7D1FA"/>
                       </a:solidFill>
                       <a:prstDash val="solid"/>
                     </a:lnB>
                     <a:solidFill>
-                      <a:srgbClr val="F9F1F5"/>
+                      <a:srgbClr val="F0EEFC"/>
                     </a:solidFill>
                   </a:tcPr>
                 </a:tc>
@@ -4825,30 +4825,30 @@
                   <a:tcPr anchor="ctr" marL="73152" marR="73152">
                     <a:lnL w="9525" cap="flat" cmpd="sng" algn="ctr">
                       <a:solidFill>
-                        <a:srgbClr val="EED3E0"/>
+                        <a:srgbClr val="D7D1FA"/>
                       </a:solidFill>
                       <a:prstDash val="solid"/>
                     </a:lnL>
                     <a:lnR w="9525" cap="flat" cmpd="sng" algn="ctr">
                       <a:solidFill>
-                        <a:srgbClr val="EED3E0"/>
+                        <a:srgbClr val="D7D1FA"/>
                       </a:solidFill>
                       <a:prstDash val="solid"/>
                     </a:lnR>
                     <a:lnT w="9525" cap="flat" cmpd="sng" algn="ctr">
                       <a:solidFill>
-                        <a:srgbClr val="EED3E0"/>
+                        <a:srgbClr val="D7D1FA"/>
                       </a:solidFill>
                       <a:prstDash val="solid"/>
                     </a:lnT>
                     <a:lnB w="9525" cap="flat" cmpd="sng" algn="ctr">
                       <a:solidFill>
-                        <a:srgbClr val="EED3E0"/>
+                        <a:srgbClr val="D7D1FA"/>
                       </a:solidFill>
                       <a:prstDash val="solid"/>
                     </a:lnB>
                     <a:solidFill>
-                      <a:srgbClr val="F9F1F5"/>
+                      <a:srgbClr val="F0EEFC"/>
                     </a:solidFill>
                   </a:tcPr>
                 </a:tc>
@@ -4873,25 +4873,25 @@
                   <a:tcPr anchor="ctr" marL="73152" marR="73152">
                     <a:lnL w="9525" cap="flat" cmpd="sng" algn="ctr">
                       <a:solidFill>
-                        <a:srgbClr val="EED3E0"/>
+                        <a:srgbClr val="D7D1FA"/>
                       </a:solidFill>
                       <a:prstDash val="solid"/>
                     </a:lnL>
                     <a:lnR w="9525" cap="flat" cmpd="sng" algn="ctr">
                       <a:solidFill>
-                        <a:srgbClr val="EED3E0"/>
+                        <a:srgbClr val="D7D1FA"/>
                       </a:solidFill>
                       <a:prstDash val="solid"/>
                     </a:lnR>
                     <a:lnT w="9525" cap="flat" cmpd="sng" algn="ctr">
                       <a:solidFill>
-                        <a:srgbClr val="EED3E0"/>
+                        <a:srgbClr val="D7D1FA"/>
                       </a:solidFill>
                       <a:prstDash val="solid"/>
                     </a:lnT>
                     <a:lnB w="9525" cap="flat" cmpd="sng" algn="ctr">
                       <a:solidFill>
-                        <a:srgbClr val="EED3E0"/>
+                        <a:srgbClr val="D7D1FA"/>
                       </a:solidFill>
                       <a:prstDash val="solid"/>
                     </a:lnB>
@@ -4919,25 +4919,25 @@
                   <a:tcPr anchor="ctr" marL="73152" marR="73152">
                     <a:lnL w="9525" cap="flat" cmpd="sng" algn="ctr">
                       <a:solidFill>
-                        <a:srgbClr val="EED3E0"/>
+                        <a:srgbClr val="D7D1FA"/>
                       </a:solidFill>
                       <a:prstDash val="solid"/>
                     </a:lnL>
                     <a:lnR w="9525" cap="flat" cmpd="sng" algn="ctr">
                       <a:solidFill>
-                        <a:srgbClr val="EED3E0"/>
+                        <a:srgbClr val="D7D1FA"/>
                       </a:solidFill>
                       <a:prstDash val="solid"/>
                     </a:lnR>
                     <a:lnT w="9525" cap="flat" cmpd="sng" algn="ctr">
                       <a:solidFill>
-                        <a:srgbClr val="EED3E0"/>
+                        <a:srgbClr val="D7D1FA"/>
                       </a:solidFill>
                       <a:prstDash val="solid"/>
                     </a:lnT>
                     <a:lnB w="9525" cap="flat" cmpd="sng" algn="ctr">
                       <a:solidFill>
-                        <a:srgbClr val="EED3E0"/>
+                        <a:srgbClr val="D7D1FA"/>
                       </a:solidFill>
                       <a:prstDash val="solid"/>
                     </a:lnB>
@@ -4965,25 +4965,25 @@
                   <a:tcPr anchor="ctr" marL="73152" marR="73152">
                     <a:lnL w="9525" cap="flat" cmpd="sng" algn="ctr">
                       <a:solidFill>
-                        <a:srgbClr val="EED3E0"/>
+                        <a:srgbClr val="D7D1FA"/>
                       </a:solidFill>
                       <a:prstDash val="solid"/>
                     </a:lnL>
                     <a:lnR w="9525" cap="flat" cmpd="sng" algn="ctr">
                       <a:solidFill>
-                        <a:srgbClr val="EED3E0"/>
+                        <a:srgbClr val="D7D1FA"/>
                       </a:solidFill>
                       <a:prstDash val="solid"/>
                     </a:lnR>
                     <a:lnT w="9525" cap="flat" cmpd="sng" algn="ctr">
                       <a:solidFill>
-                        <a:srgbClr val="EED3E0"/>
+                        <a:srgbClr val="D7D1FA"/>
                       </a:solidFill>
                       <a:prstDash val="solid"/>
                     </a:lnT>
                     <a:lnB w="9525" cap="flat" cmpd="sng" algn="ctr">
                       <a:solidFill>
-                        <a:srgbClr val="EED3E0"/>
+                        <a:srgbClr val="D7D1FA"/>
                       </a:solidFill>
                       <a:prstDash val="solid"/>
                     </a:lnB>
@@ -5011,25 +5011,25 @@
                   <a:tcPr anchor="ctr" marL="73152" marR="73152">
                     <a:lnL w="9525" cap="flat" cmpd="sng" algn="ctr">
                       <a:solidFill>
-                        <a:srgbClr val="EED3E0"/>
+                        <a:srgbClr val="D7D1FA"/>
                       </a:solidFill>
                       <a:prstDash val="solid"/>
                     </a:lnL>
                     <a:lnR w="9525" cap="flat" cmpd="sng" algn="ctr">
                       <a:solidFill>
-                        <a:srgbClr val="EED3E0"/>
+                        <a:srgbClr val="D7D1FA"/>
                       </a:solidFill>
                       <a:prstDash val="solid"/>
                     </a:lnR>
                     <a:lnT w="9525" cap="flat" cmpd="sng" algn="ctr">
                       <a:solidFill>
-                        <a:srgbClr val="EED3E0"/>
+                        <a:srgbClr val="D7D1FA"/>
                       </a:solidFill>
                       <a:prstDash val="solid"/>
                     </a:lnT>
                     <a:lnB w="9525" cap="flat" cmpd="sng" algn="ctr">
                       <a:solidFill>
-                        <a:srgbClr val="EED3E0"/>
+                        <a:srgbClr val="D7D1FA"/>
                       </a:solidFill>
                       <a:prstDash val="solid"/>
                     </a:lnB>
@@ -5057,25 +5057,25 @@
                   <a:tcPr anchor="ctr" marL="73152" marR="73152">
                     <a:lnL w="9525" cap="flat" cmpd="sng" algn="ctr">
                       <a:solidFill>
-                        <a:srgbClr val="EED3E0"/>
+                        <a:srgbClr val="D7D1FA"/>
                       </a:solidFill>
                       <a:prstDash val="solid"/>
                     </a:lnL>
                     <a:lnR w="9525" cap="flat" cmpd="sng" algn="ctr">
                       <a:solidFill>
-                        <a:srgbClr val="EED3E0"/>
+                        <a:srgbClr val="D7D1FA"/>
                       </a:solidFill>
                       <a:prstDash val="solid"/>
                     </a:lnR>
                     <a:lnT w="9525" cap="flat" cmpd="sng" algn="ctr">
                       <a:solidFill>
-                        <a:srgbClr val="EED3E0"/>
+                        <a:srgbClr val="D7D1FA"/>
                       </a:solidFill>
                       <a:prstDash val="solid"/>
                     </a:lnT>
                     <a:lnB w="9525" cap="flat" cmpd="sng" algn="ctr">
                       <a:solidFill>
-                        <a:srgbClr val="EED3E0"/>
+                        <a:srgbClr val="D7D1FA"/>
                       </a:solidFill>
                       <a:prstDash val="solid"/>
                     </a:lnB>
@@ -5105,30 +5105,30 @@
                   <a:tcPr anchor="ctr" marL="73152" marR="73152">
                     <a:lnL w="9525" cap="flat" cmpd="sng" algn="ctr">
                       <a:solidFill>
-                        <a:srgbClr val="EED3E0"/>
+                        <a:srgbClr val="D7D1FA"/>
                       </a:solidFill>
                       <a:prstDash val="solid"/>
                     </a:lnL>
                     <a:lnR w="9525" cap="flat" cmpd="sng" algn="ctr">
                       <a:solidFill>
-                        <a:srgbClr val="EED3E0"/>
+                        <a:srgbClr val="D7D1FA"/>
                       </a:solidFill>
                       <a:prstDash val="solid"/>
                     </a:lnR>
                     <a:lnT w="9525" cap="flat" cmpd="sng" algn="ctr">
                       <a:solidFill>
-                        <a:srgbClr val="EED3E0"/>
+                        <a:srgbClr val="D7D1FA"/>
                       </a:solidFill>
                       <a:prstDash val="solid"/>
                     </a:lnT>
                     <a:lnB w="9525" cap="flat" cmpd="sng" algn="ctr">
                       <a:solidFill>
-                        <a:srgbClr val="EED3E0"/>
+                        <a:srgbClr val="D7D1FA"/>
                       </a:solidFill>
                       <a:prstDash val="solid"/>
                     </a:lnB>
                     <a:solidFill>
-                      <a:srgbClr val="F9F1F5"/>
+                      <a:srgbClr val="F0EEFC"/>
                     </a:solidFill>
                   </a:tcPr>
                 </a:tc>
@@ -5151,30 +5151,30 @@
                   <a:tcPr anchor="ctr" marL="73152" marR="73152">
                     <a:lnL w="9525" cap="flat" cmpd="sng" algn="ctr">
                       <a:solidFill>
-                        <a:srgbClr val="EED3E0"/>
+                        <a:srgbClr val="D7D1FA"/>
                       </a:solidFill>
                       <a:prstDash val="solid"/>
                     </a:lnL>
                     <a:lnR w="9525" cap="flat" cmpd="sng" algn="ctr">
                       <a:solidFill>
-                        <a:srgbClr val="EED3E0"/>
+                        <a:srgbClr val="D7D1FA"/>
                       </a:solidFill>
                       <a:prstDash val="solid"/>
                     </a:lnR>
                     <a:lnT w="9525" cap="flat" cmpd="sng" algn="ctr">
                       <a:solidFill>
-                        <a:srgbClr val="EED3E0"/>
+                        <a:srgbClr val="D7D1FA"/>
                       </a:solidFill>
                       <a:prstDash val="solid"/>
                     </a:lnT>
                     <a:lnB w="9525" cap="flat" cmpd="sng" algn="ctr">
                       <a:solidFill>
-                        <a:srgbClr val="EED3E0"/>
+                        <a:srgbClr val="D7D1FA"/>
                       </a:solidFill>
                       <a:prstDash val="solid"/>
                     </a:lnB>
                     <a:solidFill>
-                      <a:srgbClr val="F9F1F5"/>
+                      <a:srgbClr val="F0EEFC"/>
                     </a:solidFill>
                   </a:tcPr>
                 </a:tc>
@@ -5197,30 +5197,30 @@
                   <a:tcPr anchor="ctr" marL="73152" marR="73152">
                     <a:lnL w="9525" cap="flat" cmpd="sng" algn="ctr">
                       <a:solidFill>
-                        <a:srgbClr val="EED3E0"/>
+                        <a:srgbClr val="D7D1FA"/>
                       </a:solidFill>
                       <a:prstDash val="solid"/>
                     </a:lnL>
                     <a:lnR w="9525" cap="flat" cmpd="sng" algn="ctr">
                       <a:solidFill>
-                        <a:srgbClr val="EED3E0"/>
+                        <a:srgbClr val="D7D1FA"/>
                       </a:solidFill>
                       <a:prstDash val="solid"/>
                     </a:lnR>
                     <a:lnT w="9525" cap="flat" cmpd="sng" algn="ctr">
                       <a:solidFill>
-                        <a:srgbClr val="EED3E0"/>
+                        <a:srgbClr val="D7D1FA"/>
                       </a:solidFill>
                       <a:prstDash val="solid"/>
                     </a:lnT>
                     <a:lnB w="9525" cap="flat" cmpd="sng" algn="ctr">
                       <a:solidFill>
-                        <a:srgbClr val="EED3E0"/>
+                        <a:srgbClr val="D7D1FA"/>
                       </a:solidFill>
                       <a:prstDash val="solid"/>
                     </a:lnB>
                     <a:solidFill>
-                      <a:srgbClr val="F9F1F5"/>
+                      <a:srgbClr val="F0EEFC"/>
                     </a:solidFill>
                   </a:tcPr>
                 </a:tc>
@@ -5243,30 +5243,30 @@
                   <a:tcPr anchor="ctr" marL="73152" marR="73152">
                     <a:lnL w="9525" cap="flat" cmpd="sng" algn="ctr">
                       <a:solidFill>
-                        <a:srgbClr val="EED3E0"/>
+                        <a:srgbClr val="D7D1FA"/>
                       </a:solidFill>
                       <a:prstDash val="solid"/>
                     </a:lnL>
                     <a:lnR w="9525" cap="flat" cmpd="sng" algn="ctr">
                       <a:solidFill>
-                        <a:srgbClr val="EED3E0"/>
+                        <a:srgbClr val="D7D1FA"/>
                       </a:solidFill>
                       <a:prstDash val="solid"/>
                     </a:lnR>
                     <a:lnT w="9525" cap="flat" cmpd="sng" algn="ctr">
                       <a:solidFill>
-                        <a:srgbClr val="EED3E0"/>
+                        <a:srgbClr val="D7D1FA"/>
                       </a:solidFill>
                       <a:prstDash val="solid"/>
                     </a:lnT>
                     <a:lnB w="9525" cap="flat" cmpd="sng" algn="ctr">
                       <a:solidFill>
-                        <a:srgbClr val="EED3E0"/>
+                        <a:srgbClr val="D7D1FA"/>
                       </a:solidFill>
                       <a:prstDash val="solid"/>
                     </a:lnB>
                     <a:solidFill>
-                      <a:srgbClr val="F9F1F5"/>
+                      <a:srgbClr val="F0EEFC"/>
                     </a:solidFill>
                   </a:tcPr>
                 </a:tc>
@@ -5289,30 +5289,30 @@
                   <a:tcPr anchor="ctr" marL="73152" marR="73152">
                     <a:lnL w="9525" cap="flat" cmpd="sng" algn="ctr">
                       <a:solidFill>
-                        <a:srgbClr val="EED3E0"/>
+                        <a:srgbClr val="D7D1FA"/>
                       </a:solidFill>
                       <a:prstDash val="solid"/>
                     </a:lnL>
                     <a:lnR w="9525" cap="flat" cmpd="sng" algn="ctr">
                       <a:solidFill>
-                        <a:srgbClr val="EED3E0"/>
+                        <a:srgbClr val="D7D1FA"/>
                       </a:solidFill>
                       <a:prstDash val="solid"/>
                     </a:lnR>
                     <a:lnT w="9525" cap="flat" cmpd="sng" algn="ctr">
                       <a:solidFill>
-                        <a:srgbClr val="EED3E0"/>
+                        <a:srgbClr val="D7D1FA"/>
                       </a:solidFill>
                       <a:prstDash val="solid"/>
                     </a:lnT>
                     <a:lnB w="9525" cap="flat" cmpd="sng" algn="ctr">
                       <a:solidFill>
-                        <a:srgbClr val="EED3E0"/>
+                        <a:srgbClr val="D7D1FA"/>
                       </a:solidFill>
                       <a:prstDash val="solid"/>
                     </a:lnB>
                     <a:solidFill>
-                      <a:srgbClr val="F9F1F5"/>
+                      <a:srgbClr val="F0EEFC"/>
                     </a:solidFill>
                   </a:tcPr>
                 </a:tc>
@@ -5337,25 +5337,25 @@
                   <a:tcPr anchor="ctr" marL="73152" marR="73152">
                     <a:lnL w="9525" cap="flat" cmpd="sng" algn="ctr">
                       <a:solidFill>
-                        <a:srgbClr val="EED3E0"/>
+                        <a:srgbClr val="D7D1FA"/>
                       </a:solidFill>
                       <a:prstDash val="solid"/>
                     </a:lnL>
                     <a:lnR w="9525" cap="flat" cmpd="sng" algn="ctr">
                       <a:solidFill>
-                        <a:srgbClr val="EED3E0"/>
+                        <a:srgbClr val="D7D1FA"/>
                       </a:solidFill>
                       <a:prstDash val="solid"/>
                     </a:lnR>
                     <a:lnT w="9525" cap="flat" cmpd="sng" algn="ctr">
                       <a:solidFill>
-                        <a:srgbClr val="EED3E0"/>
+                        <a:srgbClr val="D7D1FA"/>
                       </a:solidFill>
                       <a:prstDash val="solid"/>
                     </a:lnT>
                     <a:lnB w="9525" cap="flat" cmpd="sng" algn="ctr">
                       <a:solidFill>
-                        <a:srgbClr val="EED3E0"/>
+                        <a:srgbClr val="D7D1FA"/>
                       </a:solidFill>
                       <a:prstDash val="solid"/>
                     </a:lnB>
@@ -5383,25 +5383,25 @@
                   <a:tcPr anchor="ctr" marL="73152" marR="73152">
                     <a:lnL w="9525" cap="flat" cmpd="sng" algn="ctr">
                       <a:solidFill>
-                        <a:srgbClr val="EED3E0"/>
+                        <a:srgbClr val="D7D1FA"/>
                       </a:solidFill>
                       <a:prstDash val="solid"/>
                     </a:lnL>
                     <a:lnR w="9525" cap="flat" cmpd="sng" algn="ctr">
                       <a:solidFill>
-                        <a:srgbClr val="EED3E0"/>
+                        <a:srgbClr val="D7D1FA"/>
                       </a:solidFill>
                       <a:prstDash val="solid"/>
                     </a:lnR>
                     <a:lnT w="9525" cap="flat" cmpd="sng" algn="ctr">
                       <a:solidFill>
-                        <a:srgbClr val="EED3E0"/>
+                        <a:srgbClr val="D7D1FA"/>
                       </a:solidFill>
                       <a:prstDash val="solid"/>
                     </a:lnT>
                     <a:lnB w="9525" cap="flat" cmpd="sng" algn="ctr">
                       <a:solidFill>
-                        <a:srgbClr val="EED3E0"/>
+                        <a:srgbClr val="D7D1FA"/>
                       </a:solidFill>
                       <a:prstDash val="solid"/>
                     </a:lnB>
@@ -5429,25 +5429,25 @@
                   <a:tcPr anchor="ctr" marL="73152" marR="73152">
                     <a:lnL w="9525" cap="flat" cmpd="sng" algn="ctr">
                       <a:solidFill>
-                        <a:srgbClr val="EED3E0"/>
+                        <a:srgbClr val="D7D1FA"/>
                       </a:solidFill>
                       <a:prstDash val="solid"/>
                     </a:lnL>
                     <a:lnR w="9525" cap="flat" cmpd="sng" algn="ctr">
                       <a:solidFill>
-                        <a:srgbClr val="EED3E0"/>
+                        <a:srgbClr val="D7D1FA"/>
                       </a:solidFill>
                       <a:prstDash val="solid"/>
                     </a:lnR>
                     <a:lnT w="9525" cap="flat" cmpd="sng" algn="ctr">
                       <a:solidFill>
-                        <a:srgbClr val="EED3E0"/>
+                        <a:srgbClr val="D7D1FA"/>
                       </a:solidFill>
                       <a:prstDash val="solid"/>
                     </a:lnT>
                     <a:lnB w="9525" cap="flat" cmpd="sng" algn="ctr">
                       <a:solidFill>
-                        <a:srgbClr val="EED3E0"/>
+                        <a:srgbClr val="D7D1FA"/>
                       </a:solidFill>
                       <a:prstDash val="solid"/>
                     </a:lnB>
@@ -5475,25 +5475,25 @@
                   <a:tcPr anchor="ctr" marL="73152" marR="73152">
                     <a:lnL w="9525" cap="flat" cmpd="sng" algn="ctr">
                       <a:solidFill>
-                        <a:srgbClr val="EED3E0"/>
+                        <a:srgbClr val="D7D1FA"/>
                       </a:solidFill>
                       <a:prstDash val="solid"/>
                     </a:lnL>
                     <a:lnR w="9525" cap="flat" cmpd="sng" algn="ctr">
                       <a:solidFill>
-                        <a:srgbClr val="EED3E0"/>
+                        <a:srgbClr val="D7D1FA"/>
                       </a:solidFill>
                       <a:prstDash val="solid"/>
                     </a:lnR>
                     <a:lnT w="9525" cap="flat" cmpd="sng" algn="ctr">
                       <a:solidFill>
-                        <a:srgbClr val="EED3E0"/>
+                        <a:srgbClr val="D7D1FA"/>
                       </a:solidFill>
                       <a:prstDash val="solid"/>
                     </a:lnT>
                     <a:lnB w="9525" cap="flat" cmpd="sng" algn="ctr">
                       <a:solidFill>
-                        <a:srgbClr val="EED3E0"/>
+                        <a:srgbClr val="D7D1FA"/>
                       </a:solidFill>
                       <a:prstDash val="solid"/>
                     </a:lnB>
@@ -5521,25 +5521,25 @@
                   <a:tcPr anchor="ctr" marL="73152" marR="73152">
                     <a:lnL w="9525" cap="flat" cmpd="sng" algn="ctr">
                       <a:solidFill>
-                        <a:srgbClr val="EED3E0"/>
+                        <a:srgbClr val="D7D1FA"/>
                       </a:solidFill>
                       <a:prstDash val="solid"/>
                     </a:lnL>
                     <a:lnR w="9525" cap="flat" cmpd="sng" algn="ctr">
                       <a:solidFill>
-                        <a:srgbClr val="EED3E0"/>
+                        <a:srgbClr val="D7D1FA"/>
                       </a:solidFill>
                       <a:prstDash val="solid"/>
                     </a:lnR>
                     <a:lnT w="9525" cap="flat" cmpd="sng" algn="ctr">
                       <a:solidFill>
-                        <a:srgbClr val="EED3E0"/>
+                        <a:srgbClr val="D7D1FA"/>
                       </a:solidFill>
                       <a:prstDash val="solid"/>
                     </a:lnT>
                     <a:lnB w="9525" cap="flat" cmpd="sng" algn="ctr">
                       <a:solidFill>
-                        <a:srgbClr val="EED3E0"/>
+                        <a:srgbClr val="D7D1FA"/>
                       </a:solidFill>
                       <a:prstDash val="solid"/>
                     </a:lnB>
@@ -5569,30 +5569,30 @@
                   <a:tcPr anchor="ctr" marL="73152" marR="73152">
                     <a:lnL w="9525" cap="flat" cmpd="sng" algn="ctr">
                       <a:solidFill>
-                        <a:srgbClr val="EED3E0"/>
+                        <a:srgbClr val="D7D1FA"/>
                       </a:solidFill>
                       <a:prstDash val="solid"/>
                     </a:lnL>
                     <a:lnR w="9525" cap="flat" cmpd="sng" algn="ctr">
                       <a:solidFill>
-                        <a:srgbClr val="EED3E0"/>
+                        <a:srgbClr val="D7D1FA"/>
                       </a:solidFill>
                       <a:prstDash val="solid"/>
                     </a:lnR>
                     <a:lnT w="9525" cap="flat" cmpd="sng" algn="ctr">
                       <a:solidFill>
-                        <a:srgbClr val="EED3E0"/>
+                        <a:srgbClr val="D7D1FA"/>
                       </a:solidFill>
                       <a:prstDash val="solid"/>
                     </a:lnT>
                     <a:lnB w="9525" cap="flat" cmpd="sng" algn="ctr">
                       <a:solidFill>
-                        <a:srgbClr val="EED3E0"/>
+                        <a:srgbClr val="D7D1FA"/>
                       </a:solidFill>
                       <a:prstDash val="solid"/>
                     </a:lnB>
                     <a:solidFill>
-                      <a:srgbClr val="F9F1F5"/>
+                      <a:srgbClr val="F0EEFC"/>
                     </a:solidFill>
                   </a:tcPr>
                 </a:tc>
@@ -5615,30 +5615,30 @@
                   <a:tcPr anchor="ctr" marL="73152" marR="73152">
                     <a:lnL w="9525" cap="flat" cmpd="sng" algn="ctr">
                       <a:solidFill>
-                        <a:srgbClr val="EED3E0"/>
+                        <a:srgbClr val="D7D1FA"/>
                       </a:solidFill>
                       <a:prstDash val="solid"/>
                     </a:lnL>
                     <a:lnR w="9525" cap="flat" cmpd="sng" algn="ctr">
                       <a:solidFill>
-                        <a:srgbClr val="EED3E0"/>
+                        <a:srgbClr val="D7D1FA"/>
                       </a:solidFill>
                       <a:prstDash val="solid"/>
                     </a:lnR>
                     <a:lnT w="9525" cap="flat" cmpd="sng" algn="ctr">
                       <a:solidFill>
-                        <a:srgbClr val="EED3E0"/>
+                        <a:srgbClr val="D7D1FA"/>
                       </a:solidFill>
                       <a:prstDash val="solid"/>
                     </a:lnT>
                     <a:lnB w="9525" cap="flat" cmpd="sng" algn="ctr">
                       <a:solidFill>
-                        <a:srgbClr val="EED3E0"/>
+                        <a:srgbClr val="D7D1FA"/>
                       </a:solidFill>
                       <a:prstDash val="solid"/>
                     </a:lnB>
                     <a:solidFill>
-                      <a:srgbClr val="F9F1F5"/>
+                      <a:srgbClr val="F0EEFC"/>
                     </a:solidFill>
                   </a:tcPr>
                 </a:tc>
@@ -5661,30 +5661,30 @@
                   <a:tcPr anchor="ctr" marL="73152" marR="73152">
                     <a:lnL w="9525" cap="flat" cmpd="sng" algn="ctr">
                       <a:solidFill>
-                        <a:srgbClr val="EED3E0"/>
+                        <a:srgbClr val="D7D1FA"/>
                       </a:solidFill>
                       <a:prstDash val="solid"/>
                     </a:lnL>
                     <a:lnR w="9525" cap="flat" cmpd="sng" algn="ctr">
                       <a:solidFill>
-                        <a:srgbClr val="EED3E0"/>
+                        <a:srgbClr val="D7D1FA"/>
                       </a:solidFill>
                       <a:prstDash val="solid"/>
                     </a:lnR>
                     <a:lnT w="9525" cap="flat" cmpd="sng" algn="ctr">
                       <a:solidFill>
-                        <a:srgbClr val="EED3E0"/>
+                        <a:srgbClr val="D7D1FA"/>
                       </a:solidFill>
                       <a:prstDash val="solid"/>
                     </a:lnT>
                     <a:lnB w="9525" cap="flat" cmpd="sng" algn="ctr">
                       <a:solidFill>
-                        <a:srgbClr val="EED3E0"/>
+                        <a:srgbClr val="D7D1FA"/>
                       </a:solidFill>
                       <a:prstDash val="solid"/>
                     </a:lnB>
                     <a:solidFill>
-                      <a:srgbClr val="F9F1F5"/>
+                      <a:srgbClr val="F0EEFC"/>
                     </a:solidFill>
                   </a:tcPr>
                 </a:tc>
@@ -5707,30 +5707,30 @@
                   <a:tcPr anchor="ctr" marL="73152" marR="73152">
                     <a:lnL w="9525" cap="flat" cmpd="sng" algn="ctr">
                       <a:solidFill>
-                        <a:srgbClr val="EED3E0"/>
+                        <a:srgbClr val="D7D1FA"/>
                       </a:solidFill>
                       <a:prstDash val="solid"/>
                     </a:lnL>
                     <a:lnR w="9525" cap="flat" cmpd="sng" algn="ctr">
                       <a:solidFill>
-                        <a:srgbClr val="EED3E0"/>
+                        <a:srgbClr val="D7D1FA"/>
                       </a:solidFill>
                       <a:prstDash val="solid"/>
                     </a:lnR>
                     <a:lnT w="9525" cap="flat" cmpd="sng" algn="ctr">
                       <a:solidFill>
-                        <a:srgbClr val="EED3E0"/>
+                        <a:srgbClr val="D7D1FA"/>
                       </a:solidFill>
                       <a:prstDash val="solid"/>
                     </a:lnT>
                     <a:lnB w="9525" cap="flat" cmpd="sng" algn="ctr">
                       <a:solidFill>
-                        <a:srgbClr val="EED3E0"/>
+                        <a:srgbClr val="D7D1FA"/>
                       </a:solidFill>
                       <a:prstDash val="solid"/>
                     </a:lnB>
                     <a:solidFill>
-                      <a:srgbClr val="F9F1F5"/>
+                      <a:srgbClr val="F0EEFC"/>
                     </a:solidFill>
                   </a:tcPr>
                 </a:tc>
@@ -5753,30 +5753,30 @@
                   <a:tcPr anchor="ctr" marL="73152" marR="73152">
                     <a:lnL w="9525" cap="flat" cmpd="sng" algn="ctr">
                       <a:solidFill>
-                        <a:srgbClr val="EED3E0"/>
+                        <a:srgbClr val="D7D1FA"/>
                       </a:solidFill>
                       <a:prstDash val="solid"/>
                     </a:lnL>
                     <a:lnR w="9525" cap="flat" cmpd="sng" algn="ctr">
                       <a:solidFill>
-                        <a:srgbClr val="EED3E0"/>
+                        <a:srgbClr val="D7D1FA"/>
                       </a:solidFill>
                       <a:prstDash val="solid"/>
                     </a:lnR>
                     <a:lnT w="9525" cap="flat" cmpd="sng" algn="ctr">
                       <a:solidFill>
-                        <a:srgbClr val="EED3E0"/>
+                        <a:srgbClr val="D7D1FA"/>
                       </a:solidFill>
                       <a:prstDash val="solid"/>
                     </a:lnT>
                     <a:lnB w="9525" cap="flat" cmpd="sng" algn="ctr">
                       <a:solidFill>
-                        <a:srgbClr val="EED3E0"/>
+                        <a:srgbClr val="D7D1FA"/>
                       </a:solidFill>
                       <a:prstDash val="solid"/>
                     </a:lnB>
                     <a:solidFill>
-                      <a:srgbClr val="F9F1F5"/>
+                      <a:srgbClr val="F0EEFC"/>
                     </a:solidFill>
                   </a:tcPr>
                 </a:tc>
@@ -5799,7 +5799,7 @@
     <p:bg>
       <p:bgPr>
         <a:solidFill>
-          <a:srgbClr val="B8618C"/>
+          <a:srgbClr val="3D26C5"/>
         </a:solidFill>
         <a:effectLst/>
       </p:bgPr>
@@ -5872,7 +5872,7 @@
             <a:r>
               <a:rPr sz="3000" b="1" i="0">
                 <a:solidFill>
-                  <a:srgbClr val="7B3759"/>
+                  <a:srgbClr val="1D115F"/>
                 </a:solidFill>
               </a:rPr>
               <a:t>보장 항목 체크</a:t>
@@ -5924,30 +5924,30 @@
                   <a:tcPr anchor="ctr" marL="73152" marR="73152">
                     <a:lnL w="9525" cap="flat" cmpd="sng" algn="ctr">
                       <a:solidFill>
-                        <a:srgbClr val="B8618C"/>
+                        <a:srgbClr val="3D26C5"/>
                       </a:solidFill>
                       <a:prstDash val="solid"/>
                     </a:lnL>
                     <a:lnR w="9525" cap="flat" cmpd="sng" algn="ctr">
                       <a:solidFill>
-                        <a:srgbClr val="B8618C"/>
+                        <a:srgbClr val="3D26C5"/>
                       </a:solidFill>
                       <a:prstDash val="solid"/>
                     </a:lnR>
                     <a:lnT w="9525" cap="flat" cmpd="sng" algn="ctr">
                       <a:solidFill>
-                        <a:srgbClr val="B8618C"/>
+                        <a:srgbClr val="3D26C5"/>
                       </a:solidFill>
                       <a:prstDash val="solid"/>
                     </a:lnT>
                     <a:lnB w="9525" cap="flat" cmpd="sng" algn="ctr">
                       <a:solidFill>
-                        <a:srgbClr val="B8618C"/>
+                        <a:srgbClr val="3D26C5"/>
                       </a:solidFill>
                       <a:prstDash val="solid"/>
                     </a:lnB>
                     <a:solidFill>
-                      <a:srgbClr val="B8618C"/>
+                      <a:srgbClr val="3D26C5"/>
                     </a:solidFill>
                   </a:tcPr>
                 </a:tc>
@@ -5970,30 +5970,30 @@
                   <a:tcPr anchor="ctr" marL="73152" marR="73152">
                     <a:lnL w="9525" cap="flat" cmpd="sng" algn="ctr">
                       <a:solidFill>
-                        <a:srgbClr val="B8618C"/>
+                        <a:srgbClr val="3D26C5"/>
                       </a:solidFill>
                       <a:prstDash val="solid"/>
                     </a:lnL>
                     <a:lnR w="9525" cap="flat" cmpd="sng" algn="ctr">
                       <a:solidFill>
-                        <a:srgbClr val="B8618C"/>
+                        <a:srgbClr val="3D26C5"/>
                       </a:solidFill>
                       <a:prstDash val="solid"/>
                     </a:lnR>
                     <a:lnT w="9525" cap="flat" cmpd="sng" algn="ctr">
                       <a:solidFill>
-                        <a:srgbClr val="B8618C"/>
+                        <a:srgbClr val="3D26C5"/>
                       </a:solidFill>
                       <a:prstDash val="solid"/>
                     </a:lnT>
                     <a:lnB w="9525" cap="flat" cmpd="sng" algn="ctr">
                       <a:solidFill>
-                        <a:srgbClr val="B8618C"/>
+                        <a:srgbClr val="3D26C5"/>
                       </a:solidFill>
                       <a:prstDash val="solid"/>
                     </a:lnB>
                     <a:solidFill>
-                      <a:srgbClr val="B8618C"/>
+                      <a:srgbClr val="3D26C5"/>
                     </a:solidFill>
                   </a:tcPr>
                 </a:tc>
@@ -6016,30 +6016,30 @@
                   <a:tcPr anchor="ctr" marL="73152" marR="73152">
                     <a:lnL w="9525" cap="flat" cmpd="sng" algn="ctr">
                       <a:solidFill>
-                        <a:srgbClr val="B8618C"/>
+                        <a:srgbClr val="3D26C5"/>
                       </a:solidFill>
                       <a:prstDash val="solid"/>
                     </a:lnL>
                     <a:lnR w="9525" cap="flat" cmpd="sng" algn="ctr">
                       <a:solidFill>
-                        <a:srgbClr val="B8618C"/>
+                        <a:srgbClr val="3D26C5"/>
                       </a:solidFill>
                       <a:prstDash val="solid"/>
                     </a:lnR>
                     <a:lnT w="9525" cap="flat" cmpd="sng" algn="ctr">
                       <a:solidFill>
-                        <a:srgbClr val="B8618C"/>
+                        <a:srgbClr val="3D26C5"/>
                       </a:solidFill>
                       <a:prstDash val="solid"/>
                     </a:lnT>
                     <a:lnB w="9525" cap="flat" cmpd="sng" algn="ctr">
                       <a:solidFill>
-                        <a:srgbClr val="B8618C"/>
+                        <a:srgbClr val="3D26C5"/>
                       </a:solidFill>
                       <a:prstDash val="solid"/>
                     </a:lnB>
                     <a:solidFill>
-                      <a:srgbClr val="B8618C"/>
+                      <a:srgbClr val="3D26C5"/>
                     </a:solidFill>
                   </a:tcPr>
                 </a:tc>
@@ -6062,30 +6062,30 @@
                   <a:tcPr anchor="ctr" marL="73152" marR="73152">
                     <a:lnL w="9525" cap="flat" cmpd="sng" algn="ctr">
                       <a:solidFill>
-                        <a:srgbClr val="B8618C"/>
+                        <a:srgbClr val="3D26C5"/>
                       </a:solidFill>
                       <a:prstDash val="solid"/>
                     </a:lnL>
                     <a:lnR w="9525" cap="flat" cmpd="sng" algn="ctr">
                       <a:solidFill>
-                        <a:srgbClr val="B8618C"/>
+                        <a:srgbClr val="3D26C5"/>
                       </a:solidFill>
                       <a:prstDash val="solid"/>
                     </a:lnR>
                     <a:lnT w="9525" cap="flat" cmpd="sng" algn="ctr">
                       <a:solidFill>
-                        <a:srgbClr val="B8618C"/>
+                        <a:srgbClr val="3D26C5"/>
                       </a:solidFill>
                       <a:prstDash val="solid"/>
                     </a:lnT>
                     <a:lnB w="9525" cap="flat" cmpd="sng" algn="ctr">
                       <a:solidFill>
-                        <a:srgbClr val="B8618C"/>
+                        <a:srgbClr val="3D26C5"/>
                       </a:solidFill>
                       <a:prstDash val="solid"/>
                     </a:lnB>
                     <a:solidFill>
-                      <a:srgbClr val="B8618C"/>
+                      <a:srgbClr val="3D26C5"/>
                     </a:solidFill>
                   </a:tcPr>
                 </a:tc>
@@ -6100,7 +6100,7 @@
                       <a:r>
                         <a:rPr sz="1400" b="1">
                           <a:solidFill>
-                            <a:srgbClr val="7B3759"/>
+                            <a:srgbClr val="1D115F"/>
                           </a:solidFill>
                         </a:rPr>
                         <a:t>사망·재해</a:t>
@@ -6110,30 +6110,30 @@
                   <a:tcPr anchor="ctr" marL="73152" marR="73152">
                     <a:lnL w="9525" cap="flat" cmpd="sng" algn="ctr">
                       <a:solidFill>
-                        <a:srgbClr val="EED3E0"/>
+                        <a:srgbClr val="D7D1FA"/>
                       </a:solidFill>
                       <a:prstDash val="solid"/>
                     </a:lnL>
                     <a:lnR w="9525" cap="flat" cmpd="sng" algn="ctr">
                       <a:solidFill>
-                        <a:srgbClr val="EED3E0"/>
+                        <a:srgbClr val="D7D1FA"/>
                       </a:solidFill>
                       <a:prstDash val="solid"/>
                     </a:lnR>
                     <a:lnT w="9525" cap="flat" cmpd="sng" algn="ctr">
                       <a:solidFill>
-                        <a:srgbClr val="EED3E0"/>
+                        <a:srgbClr val="D7D1FA"/>
                       </a:solidFill>
                       <a:prstDash val="solid"/>
                     </a:lnT>
                     <a:lnB w="9525" cap="flat" cmpd="sng" algn="ctr">
                       <a:solidFill>
-                        <a:srgbClr val="EED3E0"/>
+                        <a:srgbClr val="D7D1FA"/>
                       </a:solidFill>
                       <a:prstDash val="solid"/>
                     </a:lnB>
                     <a:solidFill>
-                      <a:srgbClr val="EED3E0"/>
+                      <a:srgbClr val="D7D1FA"/>
                     </a:solidFill>
                   </a:tcPr>
                 </a:tc>
@@ -6156,25 +6156,25 @@
                   <a:tcPr anchor="ctr" marL="73152" marR="73152">
                     <a:lnL w="9525" cap="flat" cmpd="sng" algn="ctr">
                       <a:solidFill>
-                        <a:srgbClr val="EED3E0"/>
+                        <a:srgbClr val="D7D1FA"/>
                       </a:solidFill>
                       <a:prstDash val="solid"/>
                     </a:lnL>
                     <a:lnR w="9525" cap="flat" cmpd="sng" algn="ctr">
                       <a:solidFill>
-                        <a:srgbClr val="EED3E0"/>
+                        <a:srgbClr val="D7D1FA"/>
                       </a:solidFill>
                       <a:prstDash val="solid"/>
                     </a:lnR>
                     <a:lnT w="9525" cap="flat" cmpd="sng" algn="ctr">
                       <a:solidFill>
-                        <a:srgbClr val="EED3E0"/>
+                        <a:srgbClr val="D7D1FA"/>
                       </a:solidFill>
                       <a:prstDash val="solid"/>
                     </a:lnT>
                     <a:lnB w="9525" cap="flat" cmpd="sng" algn="ctr">
                       <a:solidFill>
-                        <a:srgbClr val="EED3E0"/>
+                        <a:srgbClr val="D7D1FA"/>
                       </a:solidFill>
                       <a:prstDash val="solid"/>
                     </a:lnB>
@@ -6202,25 +6202,25 @@
                   <a:tcPr anchor="ctr" marL="73152" marR="73152">
                     <a:lnL w="9525" cap="flat" cmpd="sng" algn="ctr">
                       <a:solidFill>
-                        <a:srgbClr val="EED3E0"/>
+                        <a:srgbClr val="D7D1FA"/>
                       </a:solidFill>
                       <a:prstDash val="solid"/>
                     </a:lnL>
                     <a:lnR w="9525" cap="flat" cmpd="sng" algn="ctr">
                       <a:solidFill>
-                        <a:srgbClr val="EED3E0"/>
+                        <a:srgbClr val="D7D1FA"/>
                       </a:solidFill>
                       <a:prstDash val="solid"/>
                     </a:lnR>
                     <a:lnT w="9525" cap="flat" cmpd="sng" algn="ctr">
                       <a:solidFill>
-                        <a:srgbClr val="EED3E0"/>
+                        <a:srgbClr val="D7D1FA"/>
                       </a:solidFill>
                       <a:prstDash val="solid"/>
                     </a:lnT>
                     <a:lnB w="9525" cap="flat" cmpd="sng" algn="ctr">
                       <a:solidFill>
-                        <a:srgbClr val="EED3E0"/>
+                        <a:srgbClr val="D7D1FA"/>
                       </a:solidFill>
                       <a:prstDash val="solid"/>
                     </a:lnB>
@@ -6248,25 +6248,25 @@
                   <a:tcPr anchor="ctr" marL="73152" marR="73152">
                     <a:lnL w="9525" cap="flat" cmpd="sng" algn="ctr">
                       <a:solidFill>
-                        <a:srgbClr val="EED3E0"/>
+                        <a:srgbClr val="D7D1FA"/>
                       </a:solidFill>
                       <a:prstDash val="solid"/>
                     </a:lnL>
                     <a:lnR w="9525" cap="flat" cmpd="sng" algn="ctr">
                       <a:solidFill>
-                        <a:srgbClr val="EED3E0"/>
+                        <a:srgbClr val="D7D1FA"/>
                       </a:solidFill>
                       <a:prstDash val="solid"/>
                     </a:lnR>
                     <a:lnT w="9525" cap="flat" cmpd="sng" algn="ctr">
                       <a:solidFill>
-                        <a:srgbClr val="EED3E0"/>
+                        <a:srgbClr val="D7D1FA"/>
                       </a:solidFill>
                       <a:prstDash val="solid"/>
                     </a:lnT>
                     <a:lnB w="9525" cap="flat" cmpd="sng" algn="ctr">
                       <a:solidFill>
-                        <a:srgbClr val="EED3E0"/>
+                        <a:srgbClr val="D7D1FA"/>
                       </a:solidFill>
                       <a:prstDash val="solid"/>
                     </a:lnB>
@@ -6286,7 +6286,7 @@
                       <a:r>
                         <a:rPr sz="1400" b="1">
                           <a:solidFill>
-                            <a:srgbClr val="7B3759"/>
+                            <a:srgbClr val="1D115F"/>
                           </a:solidFill>
                         </a:rPr>
                         <a:t>질병 진단</a:t>
@@ -6296,30 +6296,30 @@
                   <a:tcPr anchor="ctr" marL="73152" marR="73152">
                     <a:lnL w="9525" cap="flat" cmpd="sng" algn="ctr">
                       <a:solidFill>
-                        <a:srgbClr val="EED3E0"/>
+                        <a:srgbClr val="D7D1FA"/>
                       </a:solidFill>
                       <a:prstDash val="solid"/>
                     </a:lnL>
                     <a:lnR w="9525" cap="flat" cmpd="sng" algn="ctr">
                       <a:solidFill>
-                        <a:srgbClr val="EED3E0"/>
+                        <a:srgbClr val="D7D1FA"/>
                       </a:solidFill>
                       <a:prstDash val="solid"/>
                     </a:lnR>
                     <a:lnT w="9525" cap="flat" cmpd="sng" algn="ctr">
                       <a:solidFill>
-                        <a:srgbClr val="EED3E0"/>
+                        <a:srgbClr val="D7D1FA"/>
                       </a:solidFill>
                       <a:prstDash val="solid"/>
                     </a:lnT>
                     <a:lnB w="9525" cap="flat" cmpd="sng" algn="ctr">
                       <a:solidFill>
-                        <a:srgbClr val="EED3E0"/>
+                        <a:srgbClr val="D7D1FA"/>
                       </a:solidFill>
                       <a:prstDash val="solid"/>
                     </a:lnB>
                     <a:solidFill>
-                      <a:srgbClr val="EED3E0"/>
+                      <a:srgbClr val="D7D1FA"/>
                     </a:solidFill>
                   </a:tcPr>
                 </a:tc>
@@ -6342,30 +6342,30 @@
                   <a:tcPr anchor="ctr" marL="73152" marR="73152">
                     <a:lnL w="9525" cap="flat" cmpd="sng" algn="ctr">
                       <a:solidFill>
-                        <a:srgbClr val="EED3E0"/>
+                        <a:srgbClr val="D7D1FA"/>
                       </a:solidFill>
                       <a:prstDash val="solid"/>
                     </a:lnL>
                     <a:lnR w="9525" cap="flat" cmpd="sng" algn="ctr">
                       <a:solidFill>
-                        <a:srgbClr val="EED3E0"/>
+                        <a:srgbClr val="D7D1FA"/>
                       </a:solidFill>
                       <a:prstDash val="solid"/>
                     </a:lnR>
                     <a:lnT w="9525" cap="flat" cmpd="sng" algn="ctr">
                       <a:solidFill>
-                        <a:srgbClr val="EED3E0"/>
+                        <a:srgbClr val="D7D1FA"/>
                       </a:solidFill>
                       <a:prstDash val="solid"/>
                     </a:lnT>
                     <a:lnB w="9525" cap="flat" cmpd="sng" algn="ctr">
                       <a:solidFill>
-                        <a:srgbClr val="EED3E0"/>
+                        <a:srgbClr val="D7D1FA"/>
                       </a:solidFill>
                       <a:prstDash val="solid"/>
                     </a:lnB>
                     <a:solidFill>
-                      <a:srgbClr val="F9F1F5"/>
+                      <a:srgbClr val="F0EEFC"/>
                     </a:solidFill>
                   </a:tcPr>
                 </a:tc>
@@ -6388,30 +6388,30 @@
                   <a:tcPr anchor="ctr" marL="73152" marR="73152">
                     <a:lnL w="9525" cap="flat" cmpd="sng" algn="ctr">
                       <a:solidFill>
-                        <a:srgbClr val="EED3E0"/>
+                        <a:srgbClr val="D7D1FA"/>
                       </a:solidFill>
                       <a:prstDash val="solid"/>
                     </a:lnL>
                     <a:lnR w="9525" cap="flat" cmpd="sng" algn="ctr">
                       <a:solidFill>
-                        <a:srgbClr val="EED3E0"/>
+                        <a:srgbClr val="D7D1FA"/>
                       </a:solidFill>
                       <a:prstDash val="solid"/>
                     </a:lnR>
                     <a:lnT w="9525" cap="flat" cmpd="sng" algn="ctr">
                       <a:solidFill>
-                        <a:srgbClr val="EED3E0"/>
+                        <a:srgbClr val="D7D1FA"/>
                       </a:solidFill>
                       <a:prstDash val="solid"/>
                     </a:lnT>
                     <a:lnB w="9525" cap="flat" cmpd="sng" algn="ctr">
                       <a:solidFill>
-                        <a:srgbClr val="EED3E0"/>
+                        <a:srgbClr val="D7D1FA"/>
                       </a:solidFill>
                       <a:prstDash val="solid"/>
                     </a:lnB>
                     <a:solidFill>
-                      <a:srgbClr val="F9F1F5"/>
+                      <a:srgbClr val="F0EEFC"/>
                     </a:solidFill>
                   </a:tcPr>
                 </a:tc>
@@ -6434,30 +6434,30 @@
                   <a:tcPr anchor="ctr" marL="73152" marR="73152">
                     <a:lnL w="9525" cap="flat" cmpd="sng" algn="ctr">
                       <a:solidFill>
-                        <a:srgbClr val="EED3E0"/>
+                        <a:srgbClr val="D7D1FA"/>
                       </a:solidFill>
                       <a:prstDash val="solid"/>
                     </a:lnL>
                     <a:lnR w="9525" cap="flat" cmpd="sng" algn="ctr">
                       <a:solidFill>
-                        <a:srgbClr val="EED3E0"/>
+                        <a:srgbClr val="D7D1FA"/>
                       </a:solidFill>
                       <a:prstDash val="solid"/>
                     </a:lnR>
                     <a:lnT w="9525" cap="flat" cmpd="sng" algn="ctr">
                       <a:solidFill>
-                        <a:srgbClr val="EED3E0"/>
+                        <a:srgbClr val="D7D1FA"/>
                       </a:solidFill>
                       <a:prstDash val="solid"/>
                     </a:lnT>
                     <a:lnB w="9525" cap="flat" cmpd="sng" algn="ctr">
                       <a:solidFill>
-                        <a:srgbClr val="EED3E0"/>
+                        <a:srgbClr val="D7D1FA"/>
                       </a:solidFill>
                       <a:prstDash val="solid"/>
                     </a:lnB>
                     <a:solidFill>
-                      <a:srgbClr val="F9F1F5"/>
+                      <a:srgbClr val="F0EEFC"/>
                     </a:solidFill>
                   </a:tcPr>
                 </a:tc>
@@ -6472,7 +6472,7 @@
                       <a:r>
                         <a:rPr sz="1400" b="1">
                           <a:solidFill>
-                            <a:srgbClr val="7B3759"/>
+                            <a:srgbClr val="1D115F"/>
                           </a:solidFill>
                         </a:rPr>
                         <a:t>암</a:t>
@@ -6482,30 +6482,30 @@
                   <a:tcPr anchor="ctr" marL="73152" marR="73152">
                     <a:lnL w="9525" cap="flat" cmpd="sng" algn="ctr">
                       <a:solidFill>
-                        <a:srgbClr val="EED3E0"/>
+                        <a:srgbClr val="D7D1FA"/>
                       </a:solidFill>
                       <a:prstDash val="solid"/>
                     </a:lnL>
                     <a:lnR w="9525" cap="flat" cmpd="sng" algn="ctr">
                       <a:solidFill>
-                        <a:srgbClr val="EED3E0"/>
+                        <a:srgbClr val="D7D1FA"/>
                       </a:solidFill>
                       <a:prstDash val="solid"/>
                     </a:lnR>
                     <a:lnT w="9525" cap="flat" cmpd="sng" algn="ctr">
                       <a:solidFill>
-                        <a:srgbClr val="EED3E0"/>
+                        <a:srgbClr val="D7D1FA"/>
                       </a:solidFill>
                       <a:prstDash val="solid"/>
                     </a:lnT>
                     <a:lnB w="9525" cap="flat" cmpd="sng" algn="ctr">
                       <a:solidFill>
-                        <a:srgbClr val="EED3E0"/>
+                        <a:srgbClr val="D7D1FA"/>
                       </a:solidFill>
                       <a:prstDash val="solid"/>
                     </a:lnB>
                     <a:solidFill>
-                      <a:srgbClr val="EED3E0"/>
+                      <a:srgbClr val="D7D1FA"/>
                     </a:solidFill>
                   </a:tcPr>
                 </a:tc>
@@ -6528,25 +6528,25 @@
                   <a:tcPr anchor="ctr" marL="73152" marR="73152">
                     <a:lnL w="9525" cap="flat" cmpd="sng" algn="ctr">
                       <a:solidFill>
-                        <a:srgbClr val="EED3E0"/>
+                        <a:srgbClr val="D7D1FA"/>
                       </a:solidFill>
                       <a:prstDash val="solid"/>
                     </a:lnL>
                     <a:lnR w="9525" cap="flat" cmpd="sng" algn="ctr">
                       <a:solidFill>
-                        <a:srgbClr val="EED3E0"/>
+                        <a:srgbClr val="D7D1FA"/>
                       </a:solidFill>
                       <a:prstDash val="solid"/>
                     </a:lnR>
                     <a:lnT w="9525" cap="flat" cmpd="sng" algn="ctr">
                       <a:solidFill>
-                        <a:srgbClr val="EED3E0"/>
+                        <a:srgbClr val="D7D1FA"/>
                       </a:solidFill>
                       <a:prstDash val="solid"/>
                     </a:lnT>
                     <a:lnB w="9525" cap="flat" cmpd="sng" algn="ctr">
                       <a:solidFill>
-                        <a:srgbClr val="EED3E0"/>
+                        <a:srgbClr val="D7D1FA"/>
                       </a:solidFill>
                       <a:prstDash val="solid"/>
                     </a:lnB>
@@ -6574,25 +6574,25 @@
                   <a:tcPr anchor="ctr" marL="73152" marR="73152">
                     <a:lnL w="9525" cap="flat" cmpd="sng" algn="ctr">
                       <a:solidFill>
-                        <a:srgbClr val="EED3E0"/>
+                        <a:srgbClr val="D7D1FA"/>
                       </a:solidFill>
                       <a:prstDash val="solid"/>
                     </a:lnL>
                     <a:lnR w="9525" cap="flat" cmpd="sng" algn="ctr">
                       <a:solidFill>
-                        <a:srgbClr val="EED3E0"/>
+                        <a:srgbClr val="D7D1FA"/>
                       </a:solidFill>
                       <a:prstDash val="solid"/>
                     </a:lnR>
                     <a:lnT w="9525" cap="flat" cmpd="sng" algn="ctr">
                       <a:solidFill>
-                        <a:srgbClr val="EED3E0"/>
+                        <a:srgbClr val="D7D1FA"/>
                       </a:solidFill>
                       <a:prstDash val="solid"/>
                     </a:lnT>
                     <a:lnB w="9525" cap="flat" cmpd="sng" algn="ctr">
                       <a:solidFill>
-                        <a:srgbClr val="EED3E0"/>
+                        <a:srgbClr val="D7D1FA"/>
                       </a:solidFill>
                       <a:prstDash val="solid"/>
                     </a:lnB>
@@ -6620,25 +6620,25 @@
                   <a:tcPr anchor="ctr" marL="73152" marR="73152">
                     <a:lnL w="9525" cap="flat" cmpd="sng" algn="ctr">
                       <a:solidFill>
-                        <a:srgbClr val="EED3E0"/>
+                        <a:srgbClr val="D7D1FA"/>
                       </a:solidFill>
                       <a:prstDash val="solid"/>
                     </a:lnL>
                     <a:lnR w="9525" cap="flat" cmpd="sng" algn="ctr">
                       <a:solidFill>
-                        <a:srgbClr val="EED3E0"/>
+                        <a:srgbClr val="D7D1FA"/>
                       </a:solidFill>
                       <a:prstDash val="solid"/>
                     </a:lnR>
                     <a:lnT w="9525" cap="flat" cmpd="sng" algn="ctr">
                       <a:solidFill>
-                        <a:srgbClr val="EED3E0"/>
+                        <a:srgbClr val="D7D1FA"/>
                       </a:solidFill>
                       <a:prstDash val="solid"/>
                     </a:lnT>
                     <a:lnB w="9525" cap="flat" cmpd="sng" algn="ctr">
                       <a:solidFill>
-                        <a:srgbClr val="EED3E0"/>
+                        <a:srgbClr val="D7D1FA"/>
                       </a:solidFill>
                       <a:prstDash val="solid"/>
                     </a:lnB>
@@ -6658,7 +6658,7 @@
                       <a:r>
                         <a:rPr sz="1400" b="1">
                           <a:solidFill>
-                            <a:srgbClr val="7B3759"/>
+                            <a:srgbClr val="1D115F"/>
                           </a:solidFill>
                         </a:rPr>
                         <a:t>뇌·심장</a:t>
@@ -6668,30 +6668,30 @@
                   <a:tcPr anchor="ctr" marL="73152" marR="73152">
                     <a:lnL w="9525" cap="flat" cmpd="sng" algn="ctr">
                       <a:solidFill>
-                        <a:srgbClr val="EED3E0"/>
+                        <a:srgbClr val="D7D1FA"/>
                       </a:solidFill>
                       <a:prstDash val="solid"/>
                     </a:lnL>
                     <a:lnR w="9525" cap="flat" cmpd="sng" algn="ctr">
                       <a:solidFill>
-                        <a:srgbClr val="EED3E0"/>
+                        <a:srgbClr val="D7D1FA"/>
                       </a:solidFill>
                       <a:prstDash val="solid"/>
                     </a:lnR>
                     <a:lnT w="9525" cap="flat" cmpd="sng" algn="ctr">
                       <a:solidFill>
-                        <a:srgbClr val="EED3E0"/>
+                        <a:srgbClr val="D7D1FA"/>
                       </a:solidFill>
                       <a:prstDash val="solid"/>
                     </a:lnT>
                     <a:lnB w="9525" cap="flat" cmpd="sng" algn="ctr">
                       <a:solidFill>
-                        <a:srgbClr val="EED3E0"/>
+                        <a:srgbClr val="D7D1FA"/>
                       </a:solidFill>
                       <a:prstDash val="solid"/>
                     </a:lnB>
                     <a:solidFill>
-                      <a:srgbClr val="EED3E0"/>
+                      <a:srgbClr val="D7D1FA"/>
                     </a:solidFill>
                   </a:tcPr>
                 </a:tc>
@@ -6714,30 +6714,30 @@
                   <a:tcPr anchor="ctr" marL="73152" marR="73152">
                     <a:lnL w="9525" cap="flat" cmpd="sng" algn="ctr">
                       <a:solidFill>
-                        <a:srgbClr val="EED3E0"/>
+                        <a:srgbClr val="D7D1FA"/>
                       </a:solidFill>
                       <a:prstDash val="solid"/>
                     </a:lnL>
                     <a:lnR w="9525" cap="flat" cmpd="sng" algn="ctr">
                       <a:solidFill>
-                        <a:srgbClr val="EED3E0"/>
+                        <a:srgbClr val="D7D1FA"/>
                       </a:solidFill>
                       <a:prstDash val="solid"/>
                     </a:lnR>
                     <a:lnT w="9525" cap="flat" cmpd="sng" algn="ctr">
                       <a:solidFill>
-                        <a:srgbClr val="EED3E0"/>
+                        <a:srgbClr val="D7D1FA"/>
                       </a:solidFill>
                       <a:prstDash val="solid"/>
                     </a:lnT>
                     <a:lnB w="9525" cap="flat" cmpd="sng" algn="ctr">
                       <a:solidFill>
-                        <a:srgbClr val="EED3E0"/>
+                        <a:srgbClr val="D7D1FA"/>
                       </a:solidFill>
                       <a:prstDash val="solid"/>
                     </a:lnB>
                     <a:solidFill>
-                      <a:srgbClr val="F9F1F5"/>
+                      <a:srgbClr val="F0EEFC"/>
                     </a:solidFill>
                   </a:tcPr>
                 </a:tc>
@@ -6760,30 +6760,30 @@
                   <a:tcPr anchor="ctr" marL="73152" marR="73152">
                     <a:lnL w="9525" cap="flat" cmpd="sng" algn="ctr">
                       <a:solidFill>
-                        <a:srgbClr val="EED3E0"/>
+                        <a:srgbClr val="D7D1FA"/>
                       </a:solidFill>
                       <a:prstDash val="solid"/>
                     </a:lnL>
                     <a:lnR w="9525" cap="flat" cmpd="sng" algn="ctr">
                       <a:solidFill>
-                        <a:srgbClr val="EED3E0"/>
+                        <a:srgbClr val="D7D1FA"/>
                       </a:solidFill>
                       <a:prstDash val="solid"/>
                     </a:lnR>
                     <a:lnT w="9525" cap="flat" cmpd="sng" algn="ctr">
                       <a:solidFill>
-                        <a:srgbClr val="EED3E0"/>
+                        <a:srgbClr val="D7D1FA"/>
                       </a:solidFill>
                       <a:prstDash val="solid"/>
                     </a:lnT>
                     <a:lnB w="9525" cap="flat" cmpd="sng" algn="ctr">
                       <a:solidFill>
-                        <a:srgbClr val="EED3E0"/>
+                        <a:srgbClr val="D7D1FA"/>
                       </a:solidFill>
                       <a:prstDash val="solid"/>
                     </a:lnB>
                     <a:solidFill>
-                      <a:srgbClr val="F9F1F5"/>
+                      <a:srgbClr val="F0EEFC"/>
                     </a:solidFill>
                   </a:tcPr>
                 </a:tc>
@@ -6806,30 +6806,30 @@
                   <a:tcPr anchor="ctr" marL="73152" marR="73152">
                     <a:lnL w="9525" cap="flat" cmpd="sng" algn="ctr">
                       <a:solidFill>
-                        <a:srgbClr val="EED3E0"/>
+                        <a:srgbClr val="D7D1FA"/>
                       </a:solidFill>
                       <a:prstDash val="solid"/>
                     </a:lnL>
                     <a:lnR w="9525" cap="flat" cmpd="sng" algn="ctr">
                       <a:solidFill>
-                        <a:srgbClr val="EED3E0"/>
+                        <a:srgbClr val="D7D1FA"/>
                       </a:solidFill>
                       <a:prstDash val="solid"/>
                     </a:lnR>
                     <a:lnT w="9525" cap="flat" cmpd="sng" algn="ctr">
                       <a:solidFill>
-                        <a:srgbClr val="EED3E0"/>
+                        <a:srgbClr val="D7D1FA"/>
                       </a:solidFill>
                       <a:prstDash val="solid"/>
                     </a:lnT>
                     <a:lnB w="9525" cap="flat" cmpd="sng" algn="ctr">
                       <a:solidFill>
-                        <a:srgbClr val="EED3E0"/>
+                        <a:srgbClr val="D7D1FA"/>
                       </a:solidFill>
                       <a:prstDash val="solid"/>
                     </a:lnB>
                     <a:solidFill>
-                      <a:srgbClr val="F9F1F5"/>
+                      <a:srgbClr val="F0EEFC"/>
                     </a:solidFill>
                   </a:tcPr>
                 </a:tc>
@@ -6844,7 +6844,7 @@
                       <a:r>
                         <a:rPr sz="1400" b="1">
                           <a:solidFill>
-                            <a:srgbClr val="7B3759"/>
+                            <a:srgbClr val="1D115F"/>
                           </a:solidFill>
                         </a:rPr>
                         <a:t>입원·수술</a:t>
@@ -6854,30 +6854,30 @@
                   <a:tcPr anchor="ctr" marL="73152" marR="73152">
                     <a:lnL w="9525" cap="flat" cmpd="sng" algn="ctr">
                       <a:solidFill>
-                        <a:srgbClr val="EED3E0"/>
+                        <a:srgbClr val="D7D1FA"/>
                       </a:solidFill>
                       <a:prstDash val="solid"/>
                     </a:lnL>
                     <a:lnR w="9525" cap="flat" cmpd="sng" algn="ctr">
                       <a:solidFill>
-                        <a:srgbClr val="EED3E0"/>
+                        <a:srgbClr val="D7D1FA"/>
                       </a:solidFill>
                       <a:prstDash val="solid"/>
                     </a:lnR>
                     <a:lnT w="9525" cap="flat" cmpd="sng" algn="ctr">
                       <a:solidFill>
-                        <a:srgbClr val="EED3E0"/>
+                        <a:srgbClr val="D7D1FA"/>
                       </a:solidFill>
                       <a:prstDash val="solid"/>
                     </a:lnT>
                     <a:lnB w="9525" cap="flat" cmpd="sng" algn="ctr">
                       <a:solidFill>
-                        <a:srgbClr val="EED3E0"/>
+                        <a:srgbClr val="D7D1FA"/>
                       </a:solidFill>
                       <a:prstDash val="solid"/>
                     </a:lnB>
                     <a:solidFill>
-                      <a:srgbClr val="EED3E0"/>
+                      <a:srgbClr val="D7D1FA"/>
                     </a:solidFill>
                   </a:tcPr>
                 </a:tc>
@@ -6900,25 +6900,25 @@
                   <a:tcPr anchor="ctr" marL="73152" marR="73152">
                     <a:lnL w="9525" cap="flat" cmpd="sng" algn="ctr">
                       <a:solidFill>
-                        <a:srgbClr val="EED3E0"/>
+                        <a:srgbClr val="D7D1FA"/>
                       </a:solidFill>
                       <a:prstDash val="solid"/>
                     </a:lnL>
                     <a:lnR w="9525" cap="flat" cmpd="sng" algn="ctr">
                       <a:solidFill>
-                        <a:srgbClr val="EED3E0"/>
+                        <a:srgbClr val="D7D1FA"/>
                       </a:solidFill>
                       <a:prstDash val="solid"/>
                     </a:lnR>
                     <a:lnT w="9525" cap="flat" cmpd="sng" algn="ctr">
                       <a:solidFill>
-                        <a:srgbClr val="EED3E0"/>
+                        <a:srgbClr val="D7D1FA"/>
                       </a:solidFill>
                       <a:prstDash val="solid"/>
                     </a:lnT>
                     <a:lnB w="9525" cap="flat" cmpd="sng" algn="ctr">
                       <a:solidFill>
-                        <a:srgbClr val="EED3E0"/>
+                        <a:srgbClr val="D7D1FA"/>
                       </a:solidFill>
                       <a:prstDash val="solid"/>
                     </a:lnB>
@@ -6946,25 +6946,25 @@
                   <a:tcPr anchor="ctr" marL="73152" marR="73152">
                     <a:lnL w="9525" cap="flat" cmpd="sng" algn="ctr">
                       <a:solidFill>
-                        <a:srgbClr val="EED3E0"/>
+                        <a:srgbClr val="D7D1FA"/>
                       </a:solidFill>
                       <a:prstDash val="solid"/>
                     </a:lnL>
                     <a:lnR w="9525" cap="flat" cmpd="sng" algn="ctr">
                       <a:solidFill>
-                        <a:srgbClr val="EED3E0"/>
+                        <a:srgbClr val="D7D1FA"/>
                       </a:solidFill>
                       <a:prstDash val="solid"/>
                     </a:lnR>
                     <a:lnT w="9525" cap="flat" cmpd="sng" algn="ctr">
                       <a:solidFill>
-                        <a:srgbClr val="EED3E0"/>
+                        <a:srgbClr val="D7D1FA"/>
                       </a:solidFill>
                       <a:prstDash val="solid"/>
                     </a:lnT>
                     <a:lnB w="9525" cap="flat" cmpd="sng" algn="ctr">
                       <a:solidFill>
-                        <a:srgbClr val="EED3E0"/>
+                        <a:srgbClr val="D7D1FA"/>
                       </a:solidFill>
                       <a:prstDash val="solid"/>
                     </a:lnB>
@@ -6992,25 +6992,25 @@
                   <a:tcPr anchor="ctr" marL="73152" marR="73152">
                     <a:lnL w="9525" cap="flat" cmpd="sng" algn="ctr">
                       <a:solidFill>
-                        <a:srgbClr val="EED3E0"/>
+                        <a:srgbClr val="D7D1FA"/>
                       </a:solidFill>
                       <a:prstDash val="solid"/>
                     </a:lnL>
                     <a:lnR w="9525" cap="flat" cmpd="sng" algn="ctr">
                       <a:solidFill>
-                        <a:srgbClr val="EED3E0"/>
+                        <a:srgbClr val="D7D1FA"/>
                       </a:solidFill>
                       <a:prstDash val="solid"/>
                     </a:lnR>
                     <a:lnT w="9525" cap="flat" cmpd="sng" algn="ctr">
                       <a:solidFill>
-                        <a:srgbClr val="EED3E0"/>
+                        <a:srgbClr val="D7D1FA"/>
                       </a:solidFill>
                       <a:prstDash val="solid"/>
                     </a:lnT>
                     <a:lnB w="9525" cap="flat" cmpd="sng" algn="ctr">
                       <a:solidFill>
-                        <a:srgbClr val="EED3E0"/>
+                        <a:srgbClr val="D7D1FA"/>
                       </a:solidFill>
                       <a:prstDash val="solid"/>
                     </a:lnB>
@@ -7030,7 +7030,7 @@
                       <a:r>
                         <a:rPr sz="1400" b="1">
                           <a:solidFill>
-                            <a:srgbClr val="7B3759"/>
+                            <a:srgbClr val="1D115F"/>
                           </a:solidFill>
                         </a:rPr>
                         <a:t>상해</a:t>
@@ -7040,30 +7040,30 @@
                   <a:tcPr anchor="ctr" marL="73152" marR="73152">
                     <a:lnL w="9525" cap="flat" cmpd="sng" algn="ctr">
                       <a:solidFill>
-                        <a:srgbClr val="EED3E0"/>
+                        <a:srgbClr val="D7D1FA"/>
                       </a:solidFill>
                       <a:prstDash val="solid"/>
                     </a:lnL>
                     <a:lnR w="9525" cap="flat" cmpd="sng" algn="ctr">
                       <a:solidFill>
-                        <a:srgbClr val="EED3E0"/>
+                        <a:srgbClr val="D7D1FA"/>
                       </a:solidFill>
                       <a:prstDash val="solid"/>
                     </a:lnR>
                     <a:lnT w="9525" cap="flat" cmpd="sng" algn="ctr">
                       <a:solidFill>
-                        <a:srgbClr val="EED3E0"/>
+                        <a:srgbClr val="D7D1FA"/>
                       </a:solidFill>
                       <a:prstDash val="solid"/>
                     </a:lnT>
                     <a:lnB w="9525" cap="flat" cmpd="sng" algn="ctr">
                       <a:solidFill>
-                        <a:srgbClr val="EED3E0"/>
+                        <a:srgbClr val="D7D1FA"/>
                       </a:solidFill>
                       <a:prstDash val="solid"/>
                     </a:lnB>
                     <a:solidFill>
-                      <a:srgbClr val="EED3E0"/>
+                      <a:srgbClr val="D7D1FA"/>
                     </a:solidFill>
                   </a:tcPr>
                 </a:tc>
@@ -7086,30 +7086,30 @@
                   <a:tcPr anchor="ctr" marL="73152" marR="73152">
                     <a:lnL w="9525" cap="flat" cmpd="sng" algn="ctr">
                       <a:solidFill>
-                        <a:srgbClr val="EED3E0"/>
+                        <a:srgbClr val="D7D1FA"/>
                       </a:solidFill>
                       <a:prstDash val="solid"/>
                     </a:lnL>
                     <a:lnR w="9525" cap="flat" cmpd="sng" algn="ctr">
                       <a:solidFill>
-                        <a:srgbClr val="EED3E0"/>
+                        <a:srgbClr val="D7D1FA"/>
                       </a:solidFill>
                       <a:prstDash val="solid"/>
                     </a:lnR>
                     <a:lnT w="9525" cap="flat" cmpd="sng" algn="ctr">
                       <a:solidFill>
-                        <a:srgbClr val="EED3E0"/>
+                        <a:srgbClr val="D7D1FA"/>
                       </a:solidFill>
                       <a:prstDash val="solid"/>
                     </a:lnT>
                     <a:lnB w="9525" cap="flat" cmpd="sng" algn="ctr">
                       <a:solidFill>
-                        <a:srgbClr val="EED3E0"/>
+                        <a:srgbClr val="D7D1FA"/>
                       </a:solidFill>
                       <a:prstDash val="solid"/>
                     </a:lnB>
                     <a:solidFill>
-                      <a:srgbClr val="F9F1F5"/>
+                      <a:srgbClr val="F0EEFC"/>
                     </a:solidFill>
                   </a:tcPr>
                 </a:tc>
@@ -7132,30 +7132,30 @@
                   <a:tcPr anchor="ctr" marL="73152" marR="73152">
                     <a:lnL w="9525" cap="flat" cmpd="sng" algn="ctr">
                       <a:solidFill>
-                        <a:srgbClr val="EED3E0"/>
+                        <a:srgbClr val="D7D1FA"/>
                       </a:solidFill>
                       <a:prstDash val="solid"/>
                     </a:lnL>
                     <a:lnR w="9525" cap="flat" cmpd="sng" algn="ctr">
                       <a:solidFill>
-                        <a:srgbClr val="EED3E0"/>
+                        <a:srgbClr val="D7D1FA"/>
                       </a:solidFill>
                       <a:prstDash val="solid"/>
                     </a:lnR>
                     <a:lnT w="9525" cap="flat" cmpd="sng" algn="ctr">
                       <a:solidFill>
-                        <a:srgbClr val="EED3E0"/>
+                        <a:srgbClr val="D7D1FA"/>
                       </a:solidFill>
                       <a:prstDash val="solid"/>
                     </a:lnT>
                     <a:lnB w="9525" cap="flat" cmpd="sng" algn="ctr">
                       <a:solidFill>
-                        <a:srgbClr val="EED3E0"/>
+                        <a:srgbClr val="D7D1FA"/>
                       </a:solidFill>
                       <a:prstDash val="solid"/>
                     </a:lnB>
                     <a:solidFill>
-                      <a:srgbClr val="F9F1F5"/>
+                      <a:srgbClr val="F0EEFC"/>
                     </a:solidFill>
                   </a:tcPr>
                 </a:tc>
@@ -7178,30 +7178,30 @@
                   <a:tcPr anchor="ctr" marL="73152" marR="73152">
                     <a:lnL w="9525" cap="flat" cmpd="sng" algn="ctr">
                       <a:solidFill>
-                        <a:srgbClr val="EED3E0"/>
+                        <a:srgbClr val="D7D1FA"/>
                       </a:solidFill>
                       <a:prstDash val="solid"/>
                     </a:lnL>
                     <a:lnR w="9525" cap="flat" cmpd="sng" algn="ctr">
                       <a:solidFill>
-                        <a:srgbClr val="EED3E0"/>
+                        <a:srgbClr val="D7D1FA"/>
                       </a:solidFill>
                       <a:prstDash val="solid"/>
                     </a:lnR>
                     <a:lnT w="9525" cap="flat" cmpd="sng" algn="ctr">
                       <a:solidFill>
-                        <a:srgbClr val="EED3E0"/>
+                        <a:srgbClr val="D7D1FA"/>
                       </a:solidFill>
                       <a:prstDash val="solid"/>
                     </a:lnT>
                     <a:lnB w="9525" cap="flat" cmpd="sng" algn="ctr">
                       <a:solidFill>
-                        <a:srgbClr val="EED3E0"/>
+                        <a:srgbClr val="D7D1FA"/>
                       </a:solidFill>
                       <a:prstDash val="solid"/>
                     </a:lnB>
                     <a:solidFill>
-                      <a:srgbClr val="F9F1F5"/>
+                      <a:srgbClr val="F0EEFC"/>
                     </a:solidFill>
                   </a:tcPr>
                 </a:tc>
@@ -7216,7 +7216,7 @@
                       <a:r>
                         <a:rPr sz="1400" b="1">
                           <a:solidFill>
-                            <a:srgbClr val="7B3759"/>
+                            <a:srgbClr val="1D115F"/>
                           </a:solidFill>
                         </a:rPr>
                         <a:t>실손의료</a:t>
@@ -7226,30 +7226,30 @@
                   <a:tcPr anchor="ctr" marL="73152" marR="73152">
                     <a:lnL w="9525" cap="flat" cmpd="sng" algn="ctr">
                       <a:solidFill>
-                        <a:srgbClr val="EED3E0"/>
+                        <a:srgbClr val="D7D1FA"/>
                       </a:solidFill>
                       <a:prstDash val="solid"/>
                     </a:lnL>
                     <a:lnR w="9525" cap="flat" cmpd="sng" algn="ctr">
                       <a:solidFill>
-                        <a:srgbClr val="EED3E0"/>
+                        <a:srgbClr val="D7D1FA"/>
                       </a:solidFill>
                       <a:prstDash val="solid"/>
                     </a:lnR>
                     <a:lnT w="9525" cap="flat" cmpd="sng" algn="ctr">
                       <a:solidFill>
-                        <a:srgbClr val="EED3E0"/>
+                        <a:srgbClr val="D7D1FA"/>
                       </a:solidFill>
                       <a:prstDash val="solid"/>
                     </a:lnT>
                     <a:lnB w="9525" cap="flat" cmpd="sng" algn="ctr">
                       <a:solidFill>
-                        <a:srgbClr val="EED3E0"/>
+                        <a:srgbClr val="D7D1FA"/>
                       </a:solidFill>
                       <a:prstDash val="solid"/>
                     </a:lnB>
                     <a:solidFill>
-                      <a:srgbClr val="EED3E0"/>
+                      <a:srgbClr val="D7D1FA"/>
                     </a:solidFill>
                   </a:tcPr>
                 </a:tc>
@@ -7272,25 +7272,25 @@
                   <a:tcPr anchor="ctr" marL="73152" marR="73152">
                     <a:lnL w="9525" cap="flat" cmpd="sng" algn="ctr">
                       <a:solidFill>
-                        <a:srgbClr val="EED3E0"/>
+                        <a:srgbClr val="D7D1FA"/>
                       </a:solidFill>
                       <a:prstDash val="solid"/>
                     </a:lnL>
                     <a:lnR w="9525" cap="flat" cmpd="sng" algn="ctr">
                       <a:solidFill>
-                        <a:srgbClr val="EED3E0"/>
+                        <a:srgbClr val="D7D1FA"/>
                       </a:solidFill>
                       <a:prstDash val="solid"/>
                     </a:lnR>
                     <a:lnT w="9525" cap="flat" cmpd="sng" algn="ctr">
                       <a:solidFill>
-                        <a:srgbClr val="EED3E0"/>
+                        <a:srgbClr val="D7D1FA"/>
                       </a:solidFill>
                       <a:prstDash val="solid"/>
                     </a:lnT>
                     <a:lnB w="9525" cap="flat" cmpd="sng" algn="ctr">
                       <a:solidFill>
-                        <a:srgbClr val="EED3E0"/>
+                        <a:srgbClr val="D7D1FA"/>
                       </a:solidFill>
                       <a:prstDash val="solid"/>
                     </a:lnB>
@@ -7318,25 +7318,25 @@
                   <a:tcPr anchor="ctr" marL="73152" marR="73152">
                     <a:lnL w="9525" cap="flat" cmpd="sng" algn="ctr">
                       <a:solidFill>
-                        <a:srgbClr val="EED3E0"/>
+                        <a:srgbClr val="D7D1FA"/>
                       </a:solidFill>
                       <a:prstDash val="solid"/>
                     </a:lnL>
                     <a:lnR w="9525" cap="flat" cmpd="sng" algn="ctr">
                       <a:solidFill>
-                        <a:srgbClr val="EED3E0"/>
+                        <a:srgbClr val="D7D1FA"/>
                       </a:solidFill>
                       <a:prstDash val="solid"/>
                     </a:lnR>
                     <a:lnT w="9525" cap="flat" cmpd="sng" algn="ctr">
                       <a:solidFill>
-                        <a:srgbClr val="EED3E0"/>
+                        <a:srgbClr val="D7D1FA"/>
                       </a:solidFill>
                       <a:prstDash val="solid"/>
                     </a:lnT>
                     <a:lnB w="9525" cap="flat" cmpd="sng" algn="ctr">
                       <a:solidFill>
-                        <a:srgbClr val="EED3E0"/>
+                        <a:srgbClr val="D7D1FA"/>
                       </a:solidFill>
                       <a:prstDash val="solid"/>
                     </a:lnB>
@@ -7364,25 +7364,25 @@
                   <a:tcPr anchor="ctr" marL="73152" marR="73152">
                     <a:lnL w="9525" cap="flat" cmpd="sng" algn="ctr">
                       <a:solidFill>
-                        <a:srgbClr val="EED3E0"/>
+                        <a:srgbClr val="D7D1FA"/>
                       </a:solidFill>
                       <a:prstDash val="solid"/>
                     </a:lnL>
                     <a:lnR w="9525" cap="flat" cmpd="sng" algn="ctr">
                       <a:solidFill>
-                        <a:srgbClr val="EED3E0"/>
+                        <a:srgbClr val="D7D1FA"/>
                       </a:solidFill>
                       <a:prstDash val="solid"/>
                     </a:lnR>
                     <a:lnT w="9525" cap="flat" cmpd="sng" algn="ctr">
                       <a:solidFill>
-                        <a:srgbClr val="EED3E0"/>
+                        <a:srgbClr val="D7D1FA"/>
                       </a:solidFill>
                       <a:prstDash val="solid"/>
                     </a:lnT>
                     <a:lnB w="9525" cap="flat" cmpd="sng" algn="ctr">
                       <a:solidFill>
-                        <a:srgbClr val="EED3E0"/>
+                        <a:srgbClr val="D7D1FA"/>
                       </a:solidFill>
                       <a:prstDash val="solid"/>
                     </a:lnB>
@@ -7402,7 +7402,7 @@
                       <a:r>
                         <a:rPr sz="1400" b="1">
                           <a:solidFill>
-                            <a:srgbClr val="7B3759"/>
+                            <a:srgbClr val="1D115F"/>
                           </a:solidFill>
                         </a:rPr>
                         <a:t>연금·노후자금</a:t>
@@ -7412,30 +7412,30 @@
                   <a:tcPr anchor="ctr" marL="73152" marR="73152">
                     <a:lnL w="9525" cap="flat" cmpd="sng" algn="ctr">
                       <a:solidFill>
-                        <a:srgbClr val="EED3E0"/>
+                        <a:srgbClr val="D7D1FA"/>
                       </a:solidFill>
                       <a:prstDash val="solid"/>
                     </a:lnL>
                     <a:lnR w="9525" cap="flat" cmpd="sng" algn="ctr">
                       <a:solidFill>
-                        <a:srgbClr val="EED3E0"/>
+                        <a:srgbClr val="D7D1FA"/>
                       </a:solidFill>
                       <a:prstDash val="solid"/>
                     </a:lnR>
                     <a:lnT w="9525" cap="flat" cmpd="sng" algn="ctr">
                       <a:solidFill>
-                        <a:srgbClr val="EED3E0"/>
+                        <a:srgbClr val="D7D1FA"/>
                       </a:solidFill>
                       <a:prstDash val="solid"/>
                     </a:lnT>
                     <a:lnB w="9525" cap="flat" cmpd="sng" algn="ctr">
                       <a:solidFill>
-                        <a:srgbClr val="EED3E0"/>
+                        <a:srgbClr val="D7D1FA"/>
                       </a:solidFill>
                       <a:prstDash val="solid"/>
                     </a:lnB>
                     <a:solidFill>
-                      <a:srgbClr val="EED3E0"/>
+                      <a:srgbClr val="D7D1FA"/>
                     </a:solidFill>
                   </a:tcPr>
                 </a:tc>
@@ -7458,30 +7458,30 @@
                   <a:tcPr anchor="ctr" marL="73152" marR="73152">
                     <a:lnL w="9525" cap="flat" cmpd="sng" algn="ctr">
                       <a:solidFill>
-                        <a:srgbClr val="EED3E0"/>
+                        <a:srgbClr val="D7D1FA"/>
                       </a:solidFill>
                       <a:prstDash val="solid"/>
                     </a:lnL>
                     <a:lnR w="9525" cap="flat" cmpd="sng" algn="ctr">
                       <a:solidFill>
-                        <a:srgbClr val="EED3E0"/>
+                        <a:srgbClr val="D7D1FA"/>
                       </a:solidFill>
                       <a:prstDash val="solid"/>
                     </a:lnR>
                     <a:lnT w="9525" cap="flat" cmpd="sng" algn="ctr">
                       <a:solidFill>
-                        <a:srgbClr val="EED3E0"/>
+                        <a:srgbClr val="D7D1FA"/>
                       </a:solidFill>
                       <a:prstDash val="solid"/>
                     </a:lnT>
                     <a:lnB w="9525" cap="flat" cmpd="sng" algn="ctr">
                       <a:solidFill>
-                        <a:srgbClr val="EED3E0"/>
+                        <a:srgbClr val="D7D1FA"/>
                       </a:solidFill>
                       <a:prstDash val="solid"/>
                     </a:lnB>
                     <a:solidFill>
-                      <a:srgbClr val="F9F1F5"/>
+                      <a:srgbClr val="F0EEFC"/>
                     </a:solidFill>
                   </a:tcPr>
                 </a:tc>
@@ -7504,30 +7504,30 @@
                   <a:tcPr anchor="ctr" marL="73152" marR="73152">
                     <a:lnL w="9525" cap="flat" cmpd="sng" algn="ctr">
                       <a:solidFill>
-                        <a:srgbClr val="EED3E0"/>
+                        <a:srgbClr val="D7D1FA"/>
                       </a:solidFill>
                       <a:prstDash val="solid"/>
                     </a:lnL>
                     <a:lnR w="9525" cap="flat" cmpd="sng" algn="ctr">
                       <a:solidFill>
-                        <a:srgbClr val="EED3E0"/>
+                        <a:srgbClr val="D7D1FA"/>
                       </a:solidFill>
                       <a:prstDash val="solid"/>
                     </a:lnR>
                     <a:lnT w="9525" cap="flat" cmpd="sng" algn="ctr">
                       <a:solidFill>
-                        <a:srgbClr val="EED3E0"/>
+                        <a:srgbClr val="D7D1FA"/>
                       </a:solidFill>
                       <a:prstDash val="solid"/>
                     </a:lnT>
                     <a:lnB w="9525" cap="flat" cmpd="sng" algn="ctr">
                       <a:solidFill>
-                        <a:srgbClr val="EED3E0"/>
+                        <a:srgbClr val="D7D1FA"/>
                       </a:solidFill>
                       <a:prstDash val="solid"/>
                     </a:lnB>
                     <a:solidFill>
-                      <a:srgbClr val="F9F1F5"/>
+                      <a:srgbClr val="F0EEFC"/>
                     </a:solidFill>
                   </a:tcPr>
                 </a:tc>
@@ -7550,30 +7550,30 @@
                   <a:tcPr anchor="ctr" marL="73152" marR="73152">
                     <a:lnL w="9525" cap="flat" cmpd="sng" algn="ctr">
                       <a:solidFill>
-                        <a:srgbClr val="EED3E0"/>
+                        <a:srgbClr val="D7D1FA"/>
                       </a:solidFill>
                       <a:prstDash val="solid"/>
                     </a:lnL>
                     <a:lnR w="9525" cap="flat" cmpd="sng" algn="ctr">
                       <a:solidFill>
-                        <a:srgbClr val="EED3E0"/>
+                        <a:srgbClr val="D7D1FA"/>
                       </a:solidFill>
                       <a:prstDash val="solid"/>
                     </a:lnR>
                     <a:lnT w="9525" cap="flat" cmpd="sng" algn="ctr">
                       <a:solidFill>
-                        <a:srgbClr val="EED3E0"/>
+                        <a:srgbClr val="D7D1FA"/>
                       </a:solidFill>
                       <a:prstDash val="solid"/>
                     </a:lnT>
                     <a:lnB w="9525" cap="flat" cmpd="sng" algn="ctr">
                       <a:solidFill>
-                        <a:srgbClr val="EED3E0"/>
+                        <a:srgbClr val="D7D1FA"/>
                       </a:solidFill>
                       <a:prstDash val="solid"/>
                     </a:lnB>
                     <a:solidFill>
-                      <a:srgbClr val="F9F1F5"/>
+                      <a:srgbClr val="F0EEFC"/>
                     </a:solidFill>
                   </a:tcPr>
                 </a:tc>
@@ -7596,7 +7596,7 @@
     <p:bg>
       <p:bgPr>
         <a:solidFill>
-          <a:srgbClr val="B8618C"/>
+          <a:srgbClr val="3D26C5"/>
         </a:solidFill>
         <a:effectLst/>
       </p:bgPr>
@@ -7669,7 +7669,7 @@
             <a:r>
               <a:rPr sz="3000" b="1" i="0">
                 <a:solidFill>
-                  <a:srgbClr val="7B3759"/>
+                  <a:srgbClr val="1D115F"/>
                 </a:solidFill>
               </a:rPr>
               <a:t>월 보험료 한눈에</a:t>
@@ -7694,11 +7694,11 @@
             </a:avLst>
           </a:prstGeom>
           <a:solidFill>
-            <a:srgbClr val="F9F1F5"/>
+            <a:srgbClr val="F0EEFC"/>
           </a:solidFill>
           <a:ln w="15875">
             <a:solidFill>
-              <a:srgbClr val="EED3E0"/>
+              <a:srgbClr val="D7D1FA"/>
             </a:solidFill>
           </a:ln>
         </p:spPr>
@@ -7725,7 +7725,7 @@
             <a:avLst/>
           </a:prstGeom>
           <a:solidFill>
-            <a:srgbClr val="B8618C"/>
+            <a:srgbClr val="3D26C5"/>
           </a:solidFill>
           <a:ln>
             <a:noFill/>
@@ -7783,7 +7783,7 @@
             <a:r>
               <a:rPr sz="1700" b="1" i="0">
                 <a:solidFill>
-                  <a:srgbClr val="7B3759"/>
+                  <a:srgbClr val="1D115F"/>
                 </a:solidFill>
               </a:rPr>
               <a:t>월 보험료 합계</a:t>
@@ -7846,11 +7846,11 @@
             </a:avLst>
           </a:prstGeom>
           <a:solidFill>
-            <a:srgbClr val="F9F1F5"/>
+            <a:srgbClr val="F0EEFC"/>
           </a:solidFill>
           <a:ln w="15875">
             <a:solidFill>
-              <a:srgbClr val="EED3E0"/>
+              <a:srgbClr val="D7D1FA"/>
             </a:solidFill>
           </a:ln>
         </p:spPr>
@@ -7877,7 +7877,7 @@
             <a:avLst/>
           </a:prstGeom>
           <a:solidFill>
-            <a:srgbClr val="B8618C"/>
+            <a:srgbClr val="3D26C5"/>
           </a:solidFill>
           <a:ln>
             <a:noFill/>
@@ -7935,7 +7935,7 @@
             <a:r>
               <a:rPr sz="1700" b="1" i="0">
                 <a:solidFill>
-                  <a:srgbClr val="7B3759"/>
+                  <a:srgbClr val="1D115F"/>
                 </a:solidFill>
               </a:rPr>
               <a:t>연 보험료 합계</a:t>
@@ -7998,11 +7998,11 @@
             </a:avLst>
           </a:prstGeom>
           <a:solidFill>
-            <a:srgbClr val="F9F1F5"/>
+            <a:srgbClr val="F0EEFC"/>
           </a:solidFill>
           <a:ln w="15875">
             <a:solidFill>
-              <a:srgbClr val="EED3E0"/>
+              <a:srgbClr val="D7D1FA"/>
             </a:solidFill>
           </a:ln>
         </p:spPr>
@@ -8029,7 +8029,7 @@
             <a:avLst/>
           </a:prstGeom>
           <a:solidFill>
-            <a:srgbClr val="B8618C"/>
+            <a:srgbClr val="3D26C5"/>
           </a:solidFill>
           <a:ln>
             <a:noFill/>
@@ -8087,7 +8087,7 @@
             <a:r>
               <a:rPr sz="1700" b="1" i="0">
                 <a:solidFill>
-                  <a:srgbClr val="7B3759"/>
+                  <a:srgbClr val="1D115F"/>
                 </a:solidFill>
               </a:rPr>
               <a:t>월 소득 대비</a:t>
@@ -8185,7 +8185,7 @@
     <p:bg>
       <p:bgPr>
         <a:solidFill>
-          <a:srgbClr val="B8618C"/>
+          <a:srgbClr val="3D26C5"/>
         </a:solidFill>
         <a:effectLst/>
       </p:bgPr>
@@ -8258,7 +8258,7 @@
             <a:r>
               <a:rPr sz="3000" b="1" i="0">
                 <a:solidFill>
-                  <a:srgbClr val="7B3759"/>
+                  <a:srgbClr val="1D115F"/>
                 </a:solidFill>
               </a:rPr>
               <a:t>점검 메모와 다음 할 일</a:t>
@@ -8283,11 +8283,11 @@
             </a:avLst>
           </a:prstGeom>
           <a:solidFill>
-            <a:srgbClr val="F9F1F5"/>
+            <a:srgbClr val="F0EEFC"/>
           </a:solidFill>
           <a:ln w="15875">
             <a:solidFill>
-              <a:srgbClr val="EED3E0"/>
+              <a:srgbClr val="D7D1FA"/>
             </a:solidFill>
           </a:ln>
         </p:spPr>
@@ -8314,7 +8314,7 @@
             <a:avLst/>
           </a:prstGeom>
           <a:solidFill>
-            <a:srgbClr val="B8618C"/>
+            <a:srgbClr val="3D26C5"/>
           </a:solidFill>
           <a:ln>
             <a:noFill/>
@@ -8372,7 +8372,7 @@
             <a:r>
               <a:rPr sz="1800" b="1" i="0">
                 <a:solidFill>
-                  <a:srgbClr val="7B3759"/>
+                  <a:srgbClr val="1D115F"/>
                 </a:solidFill>
               </a:rPr>
               <a:t>확인할 것</a:t>
@@ -8435,11 +8435,11 @@
             </a:avLst>
           </a:prstGeom>
           <a:solidFill>
-            <a:srgbClr val="F9F1F5"/>
+            <a:srgbClr val="F0EEFC"/>
           </a:solidFill>
           <a:ln w="15875">
             <a:solidFill>
-              <a:srgbClr val="EED3E0"/>
+              <a:srgbClr val="D7D1FA"/>
             </a:solidFill>
           </a:ln>
         </p:spPr>
@@ -8466,7 +8466,7 @@
             <a:avLst/>
           </a:prstGeom>
           <a:solidFill>
-            <a:srgbClr val="B8618C"/>
+            <a:srgbClr val="3D26C5"/>
           </a:solidFill>
           <a:ln>
             <a:noFill/>
@@ -8524,7 +8524,7 @@
             <a:r>
               <a:rPr sz="1800" b="1" i="0">
                 <a:solidFill>
-                  <a:srgbClr val="7B3759"/>
+                  <a:srgbClr val="1D115F"/>
                 </a:solidFill>
               </a:rPr>
               <a:t>문의할 것</a:t>
@@ -8587,11 +8587,11 @@
             </a:avLst>
           </a:prstGeom>
           <a:solidFill>
-            <a:srgbClr val="F9F1F5"/>
+            <a:srgbClr val="F0EEFC"/>
           </a:solidFill>
           <a:ln w="15875">
             <a:solidFill>
-              <a:srgbClr val="EED3E0"/>
+              <a:srgbClr val="D7D1FA"/>
             </a:solidFill>
           </a:ln>
         </p:spPr>
@@ -8618,7 +8618,7 @@
             <a:avLst/>
           </a:prstGeom>
           <a:solidFill>
-            <a:srgbClr val="B8618C"/>
+            <a:srgbClr val="3D26C5"/>
           </a:solidFill>
           <a:ln>
             <a:noFill/>
@@ -8676,7 +8676,7 @@
             <a:r>
               <a:rPr sz="1800" b="1" i="0">
                 <a:solidFill>
-                  <a:srgbClr val="7B3759"/>
+                  <a:srgbClr val="1D115F"/>
                 </a:solidFill>
               </a:rPr>
               <a:t>정리할 날짜</a:t>
@@ -8779,34 +8779,34 @@
         <a:sysClr val="window" lastClr="FFFFFF"/>
       </a:lt1>
       <a:dk2>
-        <a:srgbClr val="7B3759"/>
+        <a:srgbClr val="1D115F"/>
       </a:dk2>
       <a:lt2>
-        <a:srgbClr val="F9F1F5"/>
+        <a:srgbClr val="F0EEFC"/>
       </a:lt2>
       <a:accent1>
-        <a:srgbClr val="B8618C"/>
+        <a:srgbClr val="3D26C5"/>
       </a:accent1>
       <a:accent2>
-        <a:srgbClr val="3F8D3F"/>
+        <a:srgbClr val="209DB6"/>
       </a:accent2>
       <a:accent3>
-        <a:srgbClr val="7B3759"/>
+        <a:srgbClr val="1D115F"/>
       </a:accent3>
       <a:accent4>
-        <a:srgbClr val="EED3E0"/>
+        <a:srgbClr val="D7D1FA"/>
       </a:accent4>
       <a:accent5>
-        <a:srgbClr val="7C7766"/>
+        <a:srgbClr val="2E62BE"/>
       </a:accent5>
       <a:accent6>
-        <a:srgbClr val="B0879B"/>
+        <a:srgbClr val="77709F"/>
       </a:accent6>
       <a:hlink>
-        <a:srgbClr val="B8618C"/>
+        <a:srgbClr val="3D26C5"/>
       </a:hlink>
       <a:folHlink>
-        <a:srgbClr val="7B3759"/>
+        <a:srgbClr val="1D115F"/>
       </a:folHlink>
     </a:clrScheme>
     <a:fontScheme name="Office">

--- a/public/fun/pack/pptx/review/보장점검양식_25_사업장점검_연꽃연못.pptx
+++ b/public/fun/pack/pptx/review/보장점검양식_25_사업장점검_연꽃연못.pptx
@@ -3286,6 +3286,14 @@
 <file path=ppt/slides/slide1.xml><?xml version="1.0" encoding="utf-8"?>
 <p:sld xmlns:a="http://schemas.openxmlformats.org/drawingml/2006/main" xmlns:p="http://schemas.openxmlformats.org/presentationml/2006/main" xmlns:r="http://schemas.openxmlformats.org/officeDocument/2006/relationships">
   <p:cSld>
+    <p:bg>
+      <p:bgPr>
+        <a:solidFill>
+          <a:srgbClr val="492738"/>
+        </a:solidFill>
+        <a:effectLst/>
+      </p:bgPr>
+    </p:bg>
     <p:spTree>
       <p:nvGrpSpPr>
         <p:cNvPr id="1" name=""/>
@@ -3293,30 +3301,131 @@
         <p:nvPr/>
       </p:nvGrpSpPr>
       <p:grpSpPr/>
-      <p:pic>
-        <p:nvPicPr>
-          <p:cNvPr id="3" name="표지 그림" descr="review-25.jpg"/>
-          <p:cNvPicPr>
-            <a:picLocks noChangeAspect="1"/>
-          </p:cNvPicPr>
+      <p:sp>
+        <p:nvSpPr>
+          <p:cNvPr id="3" name="장식"/>
+          <p:cNvSpPr/>
           <p:nvPr/>
-        </p:nvPicPr>
-        <p:blipFill>
-          <a:blip r:embed="rId2"/>
-          <a:stretch>
-            <a:fillRect/>
-          </a:stretch>
-        </p:blipFill>
-        <p:spPr>
-          <a:xfrm>
-            <a:off x="0" y="0"/>
-            <a:ext cx="12191695" cy="6858000"/>
+        </p:nvSpPr>
+        <p:spPr>
+          <a:xfrm>
+            <a:off x="-1463040" y="3749039"/>
+            <a:ext cx="5486400" cy="5486400"/>
+          </a:xfrm>
+          <a:prstGeom prst="ellipse">
+            <a:avLst/>
+          </a:prstGeom>
+          <a:solidFill>
+            <a:srgbClr val="EA7BB3"/>
+          </a:solidFill>
+          <a:ln>
+            <a:noFill/>
+          </a:ln>
+        </p:spPr>
+        <p:txBody>
+          <a:bodyPr rtlCol="0" anchor="ctr"/>
+          <a:lstStyle/>
+          <a:p>
+            <a:pPr algn="ctr"/>
+          </a:p>
+        </p:txBody>
+      </p:sp>
+      <p:sp>
+        <p:nvSpPr>
+          <p:cNvPr id="4" name="장식"/>
+          <p:cNvSpPr/>
+          <p:nvPr/>
+        </p:nvSpPr>
+        <p:spPr>
+          <a:xfrm>
+            <a:off x="9997190" y="1371600"/>
+            <a:ext cx="457200" cy="457200"/>
+          </a:xfrm>
+          <a:prstGeom prst="ellipse">
+            <a:avLst/>
+          </a:prstGeom>
+          <a:solidFill>
+            <a:srgbClr val="B25E88"/>
+          </a:solidFill>
+          <a:ln>
+            <a:noFill/>
+          </a:ln>
+        </p:spPr>
+        <p:txBody>
+          <a:bodyPr rtlCol="0" anchor="ctr"/>
+          <a:lstStyle/>
+          <a:p>
+            <a:pPr algn="ctr"/>
+          </a:p>
+        </p:txBody>
+      </p:sp>
+      <p:sp>
+        <p:nvSpPr>
+          <p:cNvPr id="5" name="장식"/>
+          <p:cNvSpPr/>
+          <p:nvPr/>
+        </p:nvSpPr>
+        <p:spPr>
+          <a:xfrm>
+            <a:off x="10972525" y="2468879"/>
+            <a:ext cx="182880" cy="182880"/>
+          </a:xfrm>
+          <a:prstGeom prst="ellipse">
+            <a:avLst/>
+          </a:prstGeom>
+          <a:solidFill>
+            <a:srgbClr val="EA7BB3"/>
+          </a:solidFill>
+          <a:ln>
+            <a:noFill/>
+          </a:ln>
+        </p:spPr>
+        <p:txBody>
+          <a:bodyPr rtlCol="0" anchor="ctr"/>
+          <a:lstStyle/>
+          <a:p>
+            <a:pPr algn="ctr"/>
+          </a:p>
+        </p:txBody>
+      </p:sp>
+      <p:sp>
+        <p:nvSpPr>
+          <p:cNvPr id="6" name="라벨"/>
+          <p:cNvSpPr txBox="1"/>
+          <p:nvPr/>
+        </p:nvSpPr>
+        <p:spPr>
+          <a:xfrm>
+            <a:off x="822960" y="1600200"/>
+            <a:ext cx="5608179" cy="274320"/>
           </a:xfrm>
           <a:prstGeom prst="rect">
             <a:avLst/>
           </a:prstGeom>
-        </p:spPr>
-      </p:pic>
+          <a:noFill/>
+        </p:spPr>
+        <p:txBody>
+          <a:bodyPr wrap="square" lIns="54864" rIns="54864" tIns="27432" bIns="27432" anchor="t">
+            <a:noAutofit/>
+          </a:bodyPr>
+          <a:lstStyle/>
+          <a:p>
+            <a:pPr algn="l">
+              <a:lnSpc>
+                <a:spcPct val="115000"/>
+              </a:lnSpc>
+            </a:pPr>
+            <a:r>
+              <a:rPr sz="1000" b="1" i="0" spc="250">
+                <a:solidFill>
+                  <a:srgbClr val="FFFFFF"/>
+                </a:solidFill>
+              </a:rPr>
+              <a:t>INSURANCE CHECK</a:t>
+            </a:r>
+          </a:p>
+        </p:txBody>
+      </p:sp>
       <p:sp>
         <p:nvSpPr>
           <p:cNvPr id="2" name="Title 1"/>
@@ -3329,8 +3438,8 @@
         </p:nvSpPr>
         <p:spPr>
           <a:xfrm>
-            <a:off x="853418" y="2057400"/>
-            <a:ext cx="6095847" cy="1554480"/>
+            <a:off x="822960" y="2057400"/>
+            <a:ext cx="5608179" cy="1188720"/>
           </a:xfrm>
         </p:spPr>
         <p:txBody>
@@ -3347,7 +3456,7 @@
             <a:r>
               <a:rPr sz="3600" b="1" i="0">
                 <a:solidFill>
-                  <a:srgbClr val="1D115F"/>
+                  <a:srgbClr val="FFFFFF"/>
                 </a:solidFill>
               </a:rPr>
               <a:t>우리 보험 점검 시간</a:t>
@@ -3357,14 +3466,14 @@
       </p:sp>
       <p:sp>
         <p:nvSpPr>
-          <p:cNvPr id="4" name="한 줄 문구"/>
+          <p:cNvPr id="7" name="한 줄 문구"/>
           <p:cNvSpPr txBox="1"/>
           <p:nvPr/>
         </p:nvSpPr>
         <p:spPr>
           <a:xfrm>
-            <a:off x="853418" y="3749039"/>
-            <a:ext cx="6095847" cy="822960"/>
+            <a:off x="822960" y="3337560"/>
+            <a:ext cx="5608179" cy="822960"/>
           </a:xfrm>
           <a:prstGeom prst="rect">
             <a:avLst/>
@@ -3383,9 +3492,9 @@
               </a:lnSpc>
             </a:pPr>
             <a:r>
-              <a:rPr sz="1700" b="0" i="1">
+              <a:rPr sz="1700" b="0" i="0">
                 <a:solidFill>
-                  <a:srgbClr val="1D115F"/>
+                  <a:srgbClr val="FFFFFF"/>
                 </a:solidFill>
               </a:rPr>
               <a:t>성수기 전에 점검해 둡니다</a:t>
@@ -3395,14 +3504,14 @@
       </p:sp>
       <p:sp>
         <p:nvSpPr>
-          <p:cNvPr id="5" name="안내 문구"/>
+          <p:cNvPr id="8" name="안내 문구"/>
           <p:cNvSpPr txBox="1"/>
           <p:nvPr/>
         </p:nvSpPr>
         <p:spPr>
           <a:xfrm>
-            <a:off x="853418" y="4617720"/>
-            <a:ext cx="6095847" cy="914400"/>
+            <a:off x="822960" y="4206240"/>
+            <a:ext cx="5608179" cy="914400"/>
           </a:xfrm>
           <a:prstGeom prst="rect">
             <a:avLst/>
@@ -3423,10 +3532,10 @@
             <a:r>
               <a:rPr sz="1400" b="0" i="0">
                 <a:solidFill>
-                  <a:srgbClr val="666666"/>
+                  <a:srgbClr val="FFFFFF"/>
                 </a:solidFill>
               </a:rPr>
-              <a:t>사업장 점검 · 2027. 00. 00</a:t>
+              <a:t>사업장 점검 · 날짜 입력</a:t>
             </a:r>
           </a:p>
           <a:p>
@@ -3438,7 +3547,7 @@
             <a:r>
               <a:rPr sz="1400" b="0" i="0">
                 <a:solidFill>
-                  <a:srgbClr val="666666"/>
+                  <a:srgbClr val="FFFFFF"/>
                 </a:solidFill>
               </a:rPr>
               <a:t>가입 내용을 정리하고 함께 확인하는 양식</a:t>
@@ -3460,7 +3569,7 @@
     <p:bg>
       <p:bgPr>
         <a:solidFill>
-          <a:srgbClr val="3D26C5"/>
+          <a:srgbClr val="FDEAF4"/>
         </a:solidFill>
         <a:effectLst/>
       </p:bgPr>
@@ -3480,16 +3589,81 @@
         </p:nvSpPr>
         <p:spPr>
           <a:xfrm>
-            <a:off x="274320" y="274320"/>
-            <a:ext cx="11643055" cy="6309360"/>
-          </a:xfrm>
-          <a:prstGeom prst="roundRect">
-            <a:avLst>
-              <a:gd name="adj" fmla="val 3500"/>
-            </a:avLst>
+            <a:off x="640080" y="6400800"/>
+            <a:ext cx="10911535" cy="10972"/>
+          </a:xfrm>
+          <a:prstGeom prst="rect">
+            <a:avLst/>
           </a:prstGeom>
           <a:solidFill>
-            <a:srgbClr val="FFFFFF"/>
+            <a:srgbClr val="26231F"/>
+          </a:solidFill>
+          <a:ln>
+            <a:noFill/>
+          </a:ln>
+        </p:spPr>
+        <p:txBody>
+          <a:bodyPr rtlCol="0" anchor="ctr"/>
+          <a:lstStyle/>
+          <a:p>
+            <a:pPr algn="ctr"/>
+          </a:p>
+        </p:txBody>
+      </p:sp>
+      <p:sp>
+        <p:nvSpPr>
+          <p:cNvPr id="4" name="하단 라벨"/>
+          <p:cNvSpPr txBox="1"/>
+          <p:nvPr/>
+        </p:nvSpPr>
+        <p:spPr>
+          <a:xfrm>
+            <a:off x="640080" y="6437376"/>
+            <a:ext cx="5486400" cy="274320"/>
+          </a:xfrm>
+          <a:prstGeom prst="rect">
+            <a:avLst/>
+          </a:prstGeom>
+          <a:noFill/>
+        </p:spPr>
+        <p:txBody>
+          <a:bodyPr wrap="square" lIns="54864" rIns="54864" tIns="27432" bIns="27432" anchor="ctr">
+            <a:noAutofit/>
+          </a:bodyPr>
+          <a:lstStyle/>
+          <a:p>
+            <a:pPr algn="l">
+              <a:lnSpc>
+                <a:spcPct val="115000"/>
+              </a:lnSpc>
+            </a:pPr>
+            <a:r>
+              <a:rPr sz="900" b="1" i="0" spc="250">
+                <a:solidFill>
+                  <a:srgbClr val="26231F"/>
+                </a:solidFill>
+              </a:rPr>
+              <a:t>INSURANCE CHECK</a:t>
+            </a:r>
+          </a:p>
+        </p:txBody>
+      </p:sp>
+      <p:sp>
+        <p:nvSpPr>
+          <p:cNvPr id="5" name="포인트"/>
+          <p:cNvSpPr/>
+          <p:nvPr/>
+        </p:nvSpPr>
+        <p:spPr>
+          <a:xfrm>
+            <a:off x="11213287" y="6473952"/>
+            <a:ext cx="219456" cy="219456"/>
+          </a:xfrm>
+          <a:prstGeom prst="mathPlus">
+            <a:avLst/>
+          </a:prstGeom>
+          <a:solidFill>
+            <a:srgbClr val="EA7BB3"/>
           </a:solidFill>
           <a:ln>
             <a:noFill/>
@@ -3515,8 +3689,8 @@
         </p:nvSpPr>
         <p:spPr>
           <a:xfrm>
-            <a:off x="731520" y="548640"/>
-            <a:ext cx="9448495" cy="868680"/>
+            <a:off x="640080" y="502920"/>
+            <a:ext cx="10911535" cy="914400"/>
           </a:xfrm>
         </p:spPr>
         <p:txBody>
@@ -3533,7 +3707,7 @@
             <a:r>
               <a:rPr sz="3000" b="1" i="0">
                 <a:solidFill>
-                  <a:srgbClr val="1D115F"/>
+                  <a:srgbClr val="26231F"/>
                 </a:solidFill>
               </a:rPr>
               <a:t>점검 대상 현황</a:t>
@@ -3543,15 +3717,15 @@
       </p:sp>
       <p:graphicFrame>
         <p:nvGraphicFramePr>
-          <p:cNvPr id="4" name="표"/>
+          <p:cNvPr id="6" name="표"/>
           <p:cNvGraphicFramePr>
             <a:graphicFrameLocks noGrp="1"/>
           </p:cNvGraphicFramePr>
           <p:nvPr/>
         </p:nvGraphicFramePr>
         <p:xfrm>
-          <a:off x="731520" y="1600200"/>
-          <a:ext cx="10728654" cy="3657600"/>
+          <a:off x="640080" y="1600200"/>
+          <a:ext cx="10911534" cy="3657600"/>
         </p:xfrm>
         <a:graphic>
           <a:graphicData uri="http://schemas.openxmlformats.org/drawingml/2006/table">
@@ -3560,8 +3734,8 @@
                 <a:tableStyleId>{5C22544A-7EE6-4342-B048-85BDC9FD1C3A}</a:tableStyleId>
               </a:tblPr>
               <a:tblGrid>
-                <a:gridCol w="5364327"/>
-                <a:gridCol w="5364327"/>
+                <a:gridCol w="5455767"/>
+                <a:gridCol w="5455767"/>
               </a:tblGrid>
               <a:tr h="731520">
                 <a:tc>
@@ -3573,7 +3747,7 @@
                       <a:r>
                         <a:rPr sz="1600" b="1">
                           <a:solidFill>
-                            <a:srgbClr val="FFFFFF"/>
+                            <a:srgbClr val="26231F"/>
                           </a:solidFill>
                         </a:rPr>
                         <a:t>구분</a:t>
@@ -3583,30 +3757,30 @@
                   <a:tcPr anchor="ctr" marL="73152" marR="73152">
                     <a:lnL w="9525" cap="flat" cmpd="sng" algn="ctr">
                       <a:solidFill>
-                        <a:srgbClr val="3D26C5"/>
+                        <a:srgbClr val="EA7BB3"/>
                       </a:solidFill>
                       <a:prstDash val="solid"/>
                     </a:lnL>
                     <a:lnR w="9525" cap="flat" cmpd="sng" algn="ctr">
                       <a:solidFill>
-                        <a:srgbClr val="3D26C5"/>
+                        <a:srgbClr val="EA7BB3"/>
                       </a:solidFill>
                       <a:prstDash val="solid"/>
                     </a:lnR>
                     <a:lnT w="9525" cap="flat" cmpd="sng" algn="ctr">
                       <a:solidFill>
-                        <a:srgbClr val="3D26C5"/>
+                        <a:srgbClr val="EA7BB3"/>
                       </a:solidFill>
                       <a:prstDash val="solid"/>
                     </a:lnT>
                     <a:lnB w="9525" cap="flat" cmpd="sng" algn="ctr">
                       <a:solidFill>
-                        <a:srgbClr val="3D26C5"/>
+                        <a:srgbClr val="EA7BB3"/>
                       </a:solidFill>
                       <a:prstDash val="solid"/>
                     </a:lnB>
                     <a:solidFill>
-                      <a:srgbClr val="3D26C5"/>
+                      <a:srgbClr val="EA7BB3"/>
                     </a:solidFill>
                   </a:tcPr>
                 </a:tc>
@@ -3619,7 +3793,7 @@
                       <a:r>
                         <a:rPr sz="1600" b="1">
                           <a:solidFill>
-                            <a:srgbClr val="FFFFFF"/>
+                            <a:srgbClr val="26231F"/>
                           </a:solidFill>
                         </a:rPr>
                         <a:t>내용</a:t>
@@ -3629,30 +3803,30 @@
                   <a:tcPr anchor="ctr" marL="73152" marR="73152">
                     <a:lnL w="9525" cap="flat" cmpd="sng" algn="ctr">
                       <a:solidFill>
-                        <a:srgbClr val="3D26C5"/>
+                        <a:srgbClr val="EA7BB3"/>
                       </a:solidFill>
                       <a:prstDash val="solid"/>
                     </a:lnL>
                     <a:lnR w="9525" cap="flat" cmpd="sng" algn="ctr">
                       <a:solidFill>
-                        <a:srgbClr val="3D26C5"/>
+                        <a:srgbClr val="EA7BB3"/>
                       </a:solidFill>
                       <a:prstDash val="solid"/>
                     </a:lnR>
                     <a:lnT w="9525" cap="flat" cmpd="sng" algn="ctr">
                       <a:solidFill>
-                        <a:srgbClr val="3D26C5"/>
+                        <a:srgbClr val="EA7BB3"/>
                       </a:solidFill>
                       <a:prstDash val="solid"/>
                     </a:lnT>
                     <a:lnB w="9525" cap="flat" cmpd="sng" algn="ctr">
                       <a:solidFill>
-                        <a:srgbClr val="3D26C5"/>
+                        <a:srgbClr val="EA7BB3"/>
                       </a:solidFill>
                       <a:prstDash val="solid"/>
                     </a:lnB>
                     <a:solidFill>
-                      <a:srgbClr val="3D26C5"/>
+                      <a:srgbClr val="EA7BB3"/>
                     </a:solidFill>
                   </a:tcPr>
                 </a:tc>
@@ -3667,7 +3841,7 @@
                       <a:r>
                         <a:rPr sz="1600" b="1">
                           <a:solidFill>
-                            <a:srgbClr val="1D115F"/>
+                            <a:srgbClr val="492738"/>
                           </a:solidFill>
                         </a:rPr>
                         <a:t>상호</a:t>
@@ -3677,30 +3851,30 @@
                   <a:tcPr anchor="ctr" marL="73152" marR="73152">
                     <a:lnL w="9525" cap="flat" cmpd="sng" algn="ctr">
                       <a:solidFill>
-                        <a:srgbClr val="D7D1FA"/>
+                        <a:srgbClr val="FAD1E6"/>
                       </a:solidFill>
                       <a:prstDash val="solid"/>
                     </a:lnL>
                     <a:lnR w="9525" cap="flat" cmpd="sng" algn="ctr">
                       <a:solidFill>
-                        <a:srgbClr val="D7D1FA"/>
+                        <a:srgbClr val="FAD1E6"/>
                       </a:solidFill>
                       <a:prstDash val="solid"/>
                     </a:lnR>
                     <a:lnT w="9525" cap="flat" cmpd="sng" algn="ctr">
                       <a:solidFill>
-                        <a:srgbClr val="D7D1FA"/>
+                        <a:srgbClr val="FAD1E6"/>
                       </a:solidFill>
                       <a:prstDash val="solid"/>
                     </a:lnT>
                     <a:lnB w="9525" cap="flat" cmpd="sng" algn="ctr">
                       <a:solidFill>
-                        <a:srgbClr val="D7D1FA"/>
+                        <a:srgbClr val="FAD1E6"/>
                       </a:solidFill>
                       <a:prstDash val="solid"/>
                     </a:lnB>
                     <a:solidFill>
-                      <a:srgbClr val="D7D1FA"/>
+                      <a:srgbClr val="FAD1E6"/>
                     </a:solidFill>
                   </a:tcPr>
                 </a:tc>
@@ -3713,7 +3887,7 @@
                       <a:r>
                         <a:rPr sz="1600" b="0">
                           <a:solidFill>
-                            <a:srgbClr val="2B2B2B"/>
+                            <a:srgbClr val="26231F"/>
                           </a:solidFill>
                         </a:rPr>
                         <a:t/>
@@ -3723,25 +3897,25 @@
                   <a:tcPr anchor="ctr" marL="73152" marR="73152">
                     <a:lnL w="9525" cap="flat" cmpd="sng" algn="ctr">
                       <a:solidFill>
-                        <a:srgbClr val="D7D1FA"/>
+                        <a:srgbClr val="FAD1E6"/>
                       </a:solidFill>
                       <a:prstDash val="solid"/>
                     </a:lnL>
                     <a:lnR w="9525" cap="flat" cmpd="sng" algn="ctr">
                       <a:solidFill>
-                        <a:srgbClr val="D7D1FA"/>
+                        <a:srgbClr val="FAD1E6"/>
                       </a:solidFill>
                       <a:prstDash val="solid"/>
                     </a:lnR>
                     <a:lnT w="9525" cap="flat" cmpd="sng" algn="ctr">
                       <a:solidFill>
-                        <a:srgbClr val="D7D1FA"/>
+                        <a:srgbClr val="FAD1E6"/>
                       </a:solidFill>
                       <a:prstDash val="solid"/>
                     </a:lnT>
                     <a:lnB w="9525" cap="flat" cmpd="sng" algn="ctr">
                       <a:solidFill>
-                        <a:srgbClr val="D7D1FA"/>
+                        <a:srgbClr val="FAD1E6"/>
                       </a:solidFill>
                       <a:prstDash val="solid"/>
                     </a:lnB>
@@ -3761,7 +3935,7 @@
                       <a:r>
                         <a:rPr sz="1600" b="1">
                           <a:solidFill>
-                            <a:srgbClr val="1D115F"/>
+                            <a:srgbClr val="492738"/>
                           </a:solidFill>
                         </a:rPr>
                         <a:t>업종</a:t>
@@ -3771,30 +3945,30 @@
                   <a:tcPr anchor="ctr" marL="73152" marR="73152">
                     <a:lnL w="9525" cap="flat" cmpd="sng" algn="ctr">
                       <a:solidFill>
-                        <a:srgbClr val="D7D1FA"/>
+                        <a:srgbClr val="FAD1E6"/>
                       </a:solidFill>
                       <a:prstDash val="solid"/>
                     </a:lnL>
                     <a:lnR w="9525" cap="flat" cmpd="sng" algn="ctr">
                       <a:solidFill>
-                        <a:srgbClr val="D7D1FA"/>
+                        <a:srgbClr val="FAD1E6"/>
                       </a:solidFill>
                       <a:prstDash val="solid"/>
                     </a:lnR>
                     <a:lnT w="9525" cap="flat" cmpd="sng" algn="ctr">
                       <a:solidFill>
-                        <a:srgbClr val="D7D1FA"/>
+                        <a:srgbClr val="FAD1E6"/>
                       </a:solidFill>
                       <a:prstDash val="solid"/>
                     </a:lnT>
                     <a:lnB w="9525" cap="flat" cmpd="sng" algn="ctr">
                       <a:solidFill>
-                        <a:srgbClr val="D7D1FA"/>
+                        <a:srgbClr val="FAD1E6"/>
                       </a:solidFill>
                       <a:prstDash val="solid"/>
                     </a:lnB>
                     <a:solidFill>
-                      <a:srgbClr val="D7D1FA"/>
+                      <a:srgbClr val="FAD1E6"/>
                     </a:solidFill>
                   </a:tcPr>
                 </a:tc>
@@ -3807,7 +3981,7 @@
                       <a:r>
                         <a:rPr sz="1600" b="0">
                           <a:solidFill>
-                            <a:srgbClr val="2B2B2B"/>
+                            <a:srgbClr val="26231F"/>
                           </a:solidFill>
                         </a:rPr>
                         <a:t/>
@@ -3817,30 +3991,30 @@
                   <a:tcPr anchor="ctr" marL="73152" marR="73152">
                     <a:lnL w="9525" cap="flat" cmpd="sng" algn="ctr">
                       <a:solidFill>
-                        <a:srgbClr val="D7D1FA"/>
+                        <a:srgbClr val="FAD1E6"/>
                       </a:solidFill>
                       <a:prstDash val="solid"/>
                     </a:lnL>
                     <a:lnR w="9525" cap="flat" cmpd="sng" algn="ctr">
                       <a:solidFill>
-                        <a:srgbClr val="D7D1FA"/>
+                        <a:srgbClr val="FAD1E6"/>
                       </a:solidFill>
                       <a:prstDash val="solid"/>
                     </a:lnR>
                     <a:lnT w="9525" cap="flat" cmpd="sng" algn="ctr">
                       <a:solidFill>
-                        <a:srgbClr val="D7D1FA"/>
+                        <a:srgbClr val="FAD1E6"/>
                       </a:solidFill>
                       <a:prstDash val="solid"/>
                     </a:lnT>
                     <a:lnB w="9525" cap="flat" cmpd="sng" algn="ctr">
                       <a:solidFill>
-                        <a:srgbClr val="D7D1FA"/>
+                        <a:srgbClr val="FAD1E6"/>
                       </a:solidFill>
                       <a:prstDash val="solid"/>
                     </a:lnB>
                     <a:solidFill>
-                      <a:srgbClr val="F0EEFC"/>
+                      <a:srgbClr val="FDEAF4"/>
                     </a:solidFill>
                   </a:tcPr>
                 </a:tc>
@@ -3855,7 +4029,7 @@
                       <a:r>
                         <a:rPr sz="1600" b="1">
                           <a:solidFill>
-                            <a:srgbClr val="1D115F"/>
+                            <a:srgbClr val="492738"/>
                           </a:solidFill>
                         </a:rPr>
                         <a:t>직원 수</a:t>
@@ -3865,30 +4039,30 @@
                   <a:tcPr anchor="ctr" marL="73152" marR="73152">
                     <a:lnL w="9525" cap="flat" cmpd="sng" algn="ctr">
                       <a:solidFill>
-                        <a:srgbClr val="D7D1FA"/>
+                        <a:srgbClr val="FAD1E6"/>
                       </a:solidFill>
                       <a:prstDash val="solid"/>
                     </a:lnL>
                     <a:lnR w="9525" cap="flat" cmpd="sng" algn="ctr">
                       <a:solidFill>
-                        <a:srgbClr val="D7D1FA"/>
+                        <a:srgbClr val="FAD1E6"/>
                       </a:solidFill>
                       <a:prstDash val="solid"/>
                     </a:lnR>
                     <a:lnT w="9525" cap="flat" cmpd="sng" algn="ctr">
                       <a:solidFill>
-                        <a:srgbClr val="D7D1FA"/>
+                        <a:srgbClr val="FAD1E6"/>
                       </a:solidFill>
                       <a:prstDash val="solid"/>
                     </a:lnT>
                     <a:lnB w="9525" cap="flat" cmpd="sng" algn="ctr">
                       <a:solidFill>
-                        <a:srgbClr val="D7D1FA"/>
+                        <a:srgbClr val="FAD1E6"/>
                       </a:solidFill>
                       <a:prstDash val="solid"/>
                     </a:lnB>
                     <a:solidFill>
-                      <a:srgbClr val="D7D1FA"/>
+                      <a:srgbClr val="FAD1E6"/>
                     </a:solidFill>
                   </a:tcPr>
                 </a:tc>
@@ -3901,7 +4075,7 @@
                       <a:r>
                         <a:rPr sz="1600" b="0">
                           <a:solidFill>
-                            <a:srgbClr val="2B2B2B"/>
+                            <a:srgbClr val="26231F"/>
                           </a:solidFill>
                         </a:rPr>
                         <a:t/>
@@ -3911,25 +4085,25 @@
                   <a:tcPr anchor="ctr" marL="73152" marR="73152">
                     <a:lnL w="9525" cap="flat" cmpd="sng" algn="ctr">
                       <a:solidFill>
-                        <a:srgbClr val="D7D1FA"/>
+                        <a:srgbClr val="FAD1E6"/>
                       </a:solidFill>
                       <a:prstDash val="solid"/>
                     </a:lnL>
                     <a:lnR w="9525" cap="flat" cmpd="sng" algn="ctr">
                       <a:solidFill>
-                        <a:srgbClr val="D7D1FA"/>
+                        <a:srgbClr val="FAD1E6"/>
                       </a:solidFill>
                       <a:prstDash val="solid"/>
                     </a:lnR>
                     <a:lnT w="9525" cap="flat" cmpd="sng" algn="ctr">
                       <a:solidFill>
-                        <a:srgbClr val="D7D1FA"/>
+                        <a:srgbClr val="FAD1E6"/>
                       </a:solidFill>
                       <a:prstDash val="solid"/>
                     </a:lnT>
                     <a:lnB w="9525" cap="flat" cmpd="sng" algn="ctr">
                       <a:solidFill>
-                        <a:srgbClr val="D7D1FA"/>
+                        <a:srgbClr val="FAD1E6"/>
                       </a:solidFill>
                       <a:prstDash val="solid"/>
                     </a:lnB>
@@ -3949,7 +4123,7 @@
                       <a:r>
                         <a:rPr sz="1600" b="1">
                           <a:solidFill>
-                            <a:srgbClr val="1D115F"/>
+                            <a:srgbClr val="492738"/>
                           </a:solidFill>
                         </a:rPr>
                         <a:t>확인할 것</a:t>
@@ -3959,30 +4133,30 @@
                   <a:tcPr anchor="ctr" marL="73152" marR="73152">
                     <a:lnL w="9525" cap="flat" cmpd="sng" algn="ctr">
                       <a:solidFill>
-                        <a:srgbClr val="D7D1FA"/>
+                        <a:srgbClr val="FAD1E6"/>
                       </a:solidFill>
                       <a:prstDash val="solid"/>
                     </a:lnL>
                     <a:lnR w="9525" cap="flat" cmpd="sng" algn="ctr">
                       <a:solidFill>
-                        <a:srgbClr val="D7D1FA"/>
+                        <a:srgbClr val="FAD1E6"/>
                       </a:solidFill>
                       <a:prstDash val="solid"/>
                     </a:lnR>
                     <a:lnT w="9525" cap="flat" cmpd="sng" algn="ctr">
                       <a:solidFill>
-                        <a:srgbClr val="D7D1FA"/>
+                        <a:srgbClr val="FAD1E6"/>
                       </a:solidFill>
                       <a:prstDash val="solid"/>
                     </a:lnT>
                     <a:lnB w="9525" cap="flat" cmpd="sng" algn="ctr">
                       <a:solidFill>
-                        <a:srgbClr val="D7D1FA"/>
+                        <a:srgbClr val="FAD1E6"/>
                       </a:solidFill>
                       <a:prstDash val="solid"/>
                     </a:lnB>
                     <a:solidFill>
-                      <a:srgbClr val="D7D1FA"/>
+                      <a:srgbClr val="FAD1E6"/>
                     </a:solidFill>
                   </a:tcPr>
                 </a:tc>
@@ -3995,7 +4169,7 @@
                       <a:r>
                         <a:rPr sz="1600" b="0">
                           <a:solidFill>
-                            <a:srgbClr val="2B2B2B"/>
+                            <a:srgbClr val="26231F"/>
                           </a:solidFill>
                         </a:rPr>
                         <a:t/>
@@ -4005,30 +4179,30 @@
                   <a:tcPr anchor="ctr" marL="73152" marR="73152">
                     <a:lnL w="9525" cap="flat" cmpd="sng" algn="ctr">
                       <a:solidFill>
-                        <a:srgbClr val="D7D1FA"/>
+                        <a:srgbClr val="FAD1E6"/>
                       </a:solidFill>
                       <a:prstDash val="solid"/>
                     </a:lnL>
                     <a:lnR w="9525" cap="flat" cmpd="sng" algn="ctr">
                       <a:solidFill>
-                        <a:srgbClr val="D7D1FA"/>
+                        <a:srgbClr val="FAD1E6"/>
                       </a:solidFill>
                       <a:prstDash val="solid"/>
                     </a:lnR>
                     <a:lnT w="9525" cap="flat" cmpd="sng" algn="ctr">
                       <a:solidFill>
-                        <a:srgbClr val="D7D1FA"/>
+                        <a:srgbClr val="FAD1E6"/>
                       </a:solidFill>
                       <a:prstDash val="solid"/>
                     </a:lnT>
                     <a:lnB w="9525" cap="flat" cmpd="sng" algn="ctr">
                       <a:solidFill>
-                        <a:srgbClr val="D7D1FA"/>
+                        <a:srgbClr val="FAD1E6"/>
                       </a:solidFill>
                       <a:prstDash val="solid"/>
                     </a:lnB>
                     <a:solidFill>
-                      <a:srgbClr val="F0EEFC"/>
+                      <a:srgbClr val="FDEAF4"/>
                     </a:solidFill>
                   </a:tcPr>
                 </a:tc>
@@ -4051,7 +4225,7 @@
     <p:bg>
       <p:bgPr>
         <a:solidFill>
-          <a:srgbClr val="3D26C5"/>
+          <a:srgbClr val="FDEAF4"/>
         </a:solidFill>
         <a:effectLst/>
       </p:bgPr>
@@ -4071,16 +4245,81 @@
         </p:nvSpPr>
         <p:spPr>
           <a:xfrm>
-            <a:off x="274320" y="274320"/>
-            <a:ext cx="11643055" cy="6309360"/>
-          </a:xfrm>
-          <a:prstGeom prst="roundRect">
-            <a:avLst>
-              <a:gd name="adj" fmla="val 3500"/>
-            </a:avLst>
+            <a:off x="640080" y="6400800"/>
+            <a:ext cx="10911535" cy="10972"/>
+          </a:xfrm>
+          <a:prstGeom prst="rect">
+            <a:avLst/>
           </a:prstGeom>
           <a:solidFill>
-            <a:srgbClr val="FFFFFF"/>
+            <a:srgbClr val="26231F"/>
+          </a:solidFill>
+          <a:ln>
+            <a:noFill/>
+          </a:ln>
+        </p:spPr>
+        <p:txBody>
+          <a:bodyPr rtlCol="0" anchor="ctr"/>
+          <a:lstStyle/>
+          <a:p>
+            <a:pPr algn="ctr"/>
+          </a:p>
+        </p:txBody>
+      </p:sp>
+      <p:sp>
+        <p:nvSpPr>
+          <p:cNvPr id="4" name="하단 라벨"/>
+          <p:cNvSpPr txBox="1"/>
+          <p:nvPr/>
+        </p:nvSpPr>
+        <p:spPr>
+          <a:xfrm>
+            <a:off x="640080" y="6437376"/>
+            <a:ext cx="5486400" cy="274320"/>
+          </a:xfrm>
+          <a:prstGeom prst="rect">
+            <a:avLst/>
+          </a:prstGeom>
+          <a:noFill/>
+        </p:spPr>
+        <p:txBody>
+          <a:bodyPr wrap="square" lIns="54864" rIns="54864" tIns="27432" bIns="27432" anchor="ctr">
+            <a:noAutofit/>
+          </a:bodyPr>
+          <a:lstStyle/>
+          <a:p>
+            <a:pPr algn="l">
+              <a:lnSpc>
+                <a:spcPct val="115000"/>
+              </a:lnSpc>
+            </a:pPr>
+            <a:r>
+              <a:rPr sz="900" b="1" i="0" spc="250">
+                <a:solidFill>
+                  <a:srgbClr val="26231F"/>
+                </a:solidFill>
+              </a:rPr>
+              <a:t>INSURANCE CHECK</a:t>
+            </a:r>
+          </a:p>
+        </p:txBody>
+      </p:sp>
+      <p:sp>
+        <p:nvSpPr>
+          <p:cNvPr id="5" name="포인트"/>
+          <p:cNvSpPr/>
+          <p:nvPr/>
+        </p:nvSpPr>
+        <p:spPr>
+          <a:xfrm>
+            <a:off x="11213287" y="6473952"/>
+            <a:ext cx="219456" cy="219456"/>
+          </a:xfrm>
+          <a:prstGeom prst="mathPlus">
+            <a:avLst/>
+          </a:prstGeom>
+          <a:solidFill>
+            <a:srgbClr val="EA7BB3"/>
           </a:solidFill>
           <a:ln>
             <a:noFill/>
@@ -4106,8 +4345,8 @@
         </p:nvSpPr>
         <p:spPr>
           <a:xfrm>
-            <a:off x="731520" y="548640"/>
-            <a:ext cx="9448495" cy="868680"/>
+            <a:off x="640080" y="502920"/>
+            <a:ext cx="10911535" cy="914400"/>
           </a:xfrm>
         </p:spPr>
         <p:txBody>
@@ -4124,7 +4363,7 @@
             <a:r>
               <a:rPr sz="3000" b="1" i="0">
                 <a:solidFill>
-                  <a:srgbClr val="1D115F"/>
+                  <a:srgbClr val="26231F"/>
                 </a:solidFill>
               </a:rPr>
               <a:t>가입한 보험 목록</a:t>
@@ -4134,15 +4373,15 @@
       </p:sp>
       <p:graphicFrame>
         <p:nvGraphicFramePr>
-          <p:cNvPr id="4" name="표"/>
+          <p:cNvPr id="6" name="표"/>
           <p:cNvGraphicFramePr>
             <a:graphicFrameLocks noGrp="1"/>
           </p:cNvGraphicFramePr>
           <p:nvPr/>
         </p:nvGraphicFramePr>
         <p:xfrm>
-          <a:off x="731520" y="1600200"/>
-          <a:ext cx="10728655" cy="4224528"/>
+          <a:off x="640080" y="1600200"/>
+          <a:ext cx="10911535" cy="4224528"/>
         </p:xfrm>
         <a:graphic>
           <a:graphicData uri="http://schemas.openxmlformats.org/drawingml/2006/table">
@@ -4155,7 +4394,7 @@
                 <a:gridCol w="3108960"/>
                 <a:gridCol w="1828800"/>
                 <a:gridCol w="1828800"/>
-                <a:gridCol w="1950415"/>
+                <a:gridCol w="2133295"/>
               </a:tblGrid>
               <a:tr h="603504">
                 <a:tc>
@@ -4167,7 +4406,7 @@
                       <a:r>
                         <a:rPr sz="1400" b="1">
                           <a:solidFill>
-                            <a:srgbClr val="FFFFFF"/>
+                            <a:srgbClr val="26231F"/>
                           </a:solidFill>
                         </a:rPr>
                         <a:t>보험회사</a:t>
@@ -4177,30 +4416,30 @@
                   <a:tcPr anchor="ctr" marL="73152" marR="73152">
                     <a:lnL w="9525" cap="flat" cmpd="sng" algn="ctr">
                       <a:solidFill>
-                        <a:srgbClr val="3D26C5"/>
+                        <a:srgbClr val="EA7BB3"/>
                       </a:solidFill>
                       <a:prstDash val="solid"/>
                     </a:lnL>
                     <a:lnR w="9525" cap="flat" cmpd="sng" algn="ctr">
                       <a:solidFill>
-                        <a:srgbClr val="3D26C5"/>
+                        <a:srgbClr val="EA7BB3"/>
                       </a:solidFill>
                       <a:prstDash val="solid"/>
                     </a:lnR>
                     <a:lnT w="9525" cap="flat" cmpd="sng" algn="ctr">
                       <a:solidFill>
-                        <a:srgbClr val="3D26C5"/>
+                        <a:srgbClr val="EA7BB3"/>
                       </a:solidFill>
                       <a:prstDash val="solid"/>
                     </a:lnT>
                     <a:lnB w="9525" cap="flat" cmpd="sng" algn="ctr">
                       <a:solidFill>
-                        <a:srgbClr val="3D26C5"/>
+                        <a:srgbClr val="EA7BB3"/>
                       </a:solidFill>
                       <a:prstDash val="solid"/>
                     </a:lnB>
                     <a:solidFill>
-                      <a:srgbClr val="3D26C5"/>
+                      <a:srgbClr val="EA7BB3"/>
                     </a:solidFill>
                   </a:tcPr>
                 </a:tc>
@@ -4213,7 +4452,7 @@
                       <a:r>
                         <a:rPr sz="1400" b="1">
                           <a:solidFill>
-                            <a:srgbClr val="FFFFFF"/>
+                            <a:srgbClr val="26231F"/>
                           </a:solidFill>
                         </a:rPr>
                         <a:t>상품명</a:t>
@@ -4223,30 +4462,30 @@
                   <a:tcPr anchor="ctr" marL="73152" marR="73152">
                     <a:lnL w="9525" cap="flat" cmpd="sng" algn="ctr">
                       <a:solidFill>
-                        <a:srgbClr val="3D26C5"/>
+                        <a:srgbClr val="EA7BB3"/>
                       </a:solidFill>
                       <a:prstDash val="solid"/>
                     </a:lnL>
                     <a:lnR w="9525" cap="flat" cmpd="sng" algn="ctr">
                       <a:solidFill>
-                        <a:srgbClr val="3D26C5"/>
+                        <a:srgbClr val="EA7BB3"/>
                       </a:solidFill>
                       <a:prstDash val="solid"/>
                     </a:lnR>
                     <a:lnT w="9525" cap="flat" cmpd="sng" algn="ctr">
                       <a:solidFill>
-                        <a:srgbClr val="3D26C5"/>
+                        <a:srgbClr val="EA7BB3"/>
                       </a:solidFill>
                       <a:prstDash val="solid"/>
                     </a:lnT>
                     <a:lnB w="9525" cap="flat" cmpd="sng" algn="ctr">
                       <a:solidFill>
-                        <a:srgbClr val="3D26C5"/>
+                        <a:srgbClr val="EA7BB3"/>
                       </a:solidFill>
                       <a:prstDash val="solid"/>
                     </a:lnB>
                     <a:solidFill>
-                      <a:srgbClr val="3D26C5"/>
+                      <a:srgbClr val="EA7BB3"/>
                     </a:solidFill>
                   </a:tcPr>
                 </a:tc>
@@ -4259,7 +4498,7 @@
                       <a:r>
                         <a:rPr sz="1400" b="1">
                           <a:solidFill>
-                            <a:srgbClr val="FFFFFF"/>
+                            <a:srgbClr val="26231F"/>
                           </a:solidFill>
                         </a:rPr>
                         <a:t>종류</a:t>
@@ -4269,30 +4508,30 @@
                   <a:tcPr anchor="ctr" marL="73152" marR="73152">
                     <a:lnL w="9525" cap="flat" cmpd="sng" algn="ctr">
                       <a:solidFill>
-                        <a:srgbClr val="3D26C5"/>
+                        <a:srgbClr val="EA7BB3"/>
                       </a:solidFill>
                       <a:prstDash val="solid"/>
                     </a:lnL>
                     <a:lnR w="9525" cap="flat" cmpd="sng" algn="ctr">
                       <a:solidFill>
-                        <a:srgbClr val="3D26C5"/>
+                        <a:srgbClr val="EA7BB3"/>
                       </a:solidFill>
                       <a:prstDash val="solid"/>
                     </a:lnR>
                     <a:lnT w="9525" cap="flat" cmpd="sng" algn="ctr">
                       <a:solidFill>
-                        <a:srgbClr val="3D26C5"/>
+                        <a:srgbClr val="EA7BB3"/>
                       </a:solidFill>
                       <a:prstDash val="solid"/>
                     </a:lnT>
                     <a:lnB w="9525" cap="flat" cmpd="sng" algn="ctr">
                       <a:solidFill>
-                        <a:srgbClr val="3D26C5"/>
+                        <a:srgbClr val="EA7BB3"/>
                       </a:solidFill>
                       <a:prstDash val="solid"/>
                     </a:lnB>
                     <a:solidFill>
-                      <a:srgbClr val="3D26C5"/>
+                      <a:srgbClr val="EA7BB3"/>
                     </a:solidFill>
                   </a:tcPr>
                 </a:tc>
@@ -4305,7 +4544,7 @@
                       <a:r>
                         <a:rPr sz="1400" b="1">
                           <a:solidFill>
-                            <a:srgbClr val="FFFFFF"/>
+                            <a:srgbClr val="26231F"/>
                           </a:solidFill>
                         </a:rPr>
                         <a:t>만기일</a:t>
@@ -4315,30 +4554,30 @@
                   <a:tcPr anchor="ctr" marL="73152" marR="73152">
                     <a:lnL w="9525" cap="flat" cmpd="sng" algn="ctr">
                       <a:solidFill>
-                        <a:srgbClr val="3D26C5"/>
+                        <a:srgbClr val="EA7BB3"/>
                       </a:solidFill>
                       <a:prstDash val="solid"/>
                     </a:lnL>
                     <a:lnR w="9525" cap="flat" cmpd="sng" algn="ctr">
                       <a:solidFill>
-                        <a:srgbClr val="3D26C5"/>
+                        <a:srgbClr val="EA7BB3"/>
                       </a:solidFill>
                       <a:prstDash val="solid"/>
                     </a:lnR>
                     <a:lnT w="9525" cap="flat" cmpd="sng" algn="ctr">
                       <a:solidFill>
-                        <a:srgbClr val="3D26C5"/>
+                        <a:srgbClr val="EA7BB3"/>
                       </a:solidFill>
                       <a:prstDash val="solid"/>
                     </a:lnT>
                     <a:lnB w="9525" cap="flat" cmpd="sng" algn="ctr">
                       <a:solidFill>
-                        <a:srgbClr val="3D26C5"/>
+                        <a:srgbClr val="EA7BB3"/>
                       </a:solidFill>
                       <a:prstDash val="solid"/>
                     </a:lnB>
                     <a:solidFill>
-                      <a:srgbClr val="3D26C5"/>
+                      <a:srgbClr val="EA7BB3"/>
                     </a:solidFill>
                   </a:tcPr>
                 </a:tc>
@@ -4351,7 +4590,7 @@
                       <a:r>
                         <a:rPr sz="1400" b="1">
                           <a:solidFill>
-                            <a:srgbClr val="FFFFFF"/>
+                            <a:srgbClr val="26231F"/>
                           </a:solidFill>
                         </a:rPr>
                         <a:t>월 보험료</a:t>
@@ -4361,30 +4600,30 @@
                   <a:tcPr anchor="ctr" marL="73152" marR="73152">
                     <a:lnL w="9525" cap="flat" cmpd="sng" algn="ctr">
                       <a:solidFill>
-                        <a:srgbClr val="3D26C5"/>
+                        <a:srgbClr val="EA7BB3"/>
                       </a:solidFill>
                       <a:prstDash val="solid"/>
                     </a:lnL>
                     <a:lnR w="9525" cap="flat" cmpd="sng" algn="ctr">
                       <a:solidFill>
-                        <a:srgbClr val="3D26C5"/>
+                        <a:srgbClr val="EA7BB3"/>
                       </a:solidFill>
                       <a:prstDash val="solid"/>
                     </a:lnR>
                     <a:lnT w="9525" cap="flat" cmpd="sng" algn="ctr">
                       <a:solidFill>
-                        <a:srgbClr val="3D26C5"/>
+                        <a:srgbClr val="EA7BB3"/>
                       </a:solidFill>
                       <a:prstDash val="solid"/>
                     </a:lnT>
                     <a:lnB w="9525" cap="flat" cmpd="sng" algn="ctr">
                       <a:solidFill>
-                        <a:srgbClr val="3D26C5"/>
+                        <a:srgbClr val="EA7BB3"/>
                       </a:solidFill>
                       <a:prstDash val="solid"/>
                     </a:lnB>
                     <a:solidFill>
-                      <a:srgbClr val="3D26C5"/>
+                      <a:srgbClr val="EA7BB3"/>
                     </a:solidFill>
                   </a:tcPr>
                 </a:tc>
@@ -4399,7 +4638,7 @@
                       <a:r>
                         <a:rPr sz="1400" b="0">
                           <a:solidFill>
-                            <a:srgbClr val="2B2B2B"/>
+                            <a:srgbClr val="26231F"/>
                           </a:solidFill>
                         </a:rPr>
                         <a:t/>
@@ -4409,25 +4648,25 @@
                   <a:tcPr anchor="ctr" marL="73152" marR="73152">
                     <a:lnL w="9525" cap="flat" cmpd="sng" algn="ctr">
                       <a:solidFill>
-                        <a:srgbClr val="D7D1FA"/>
+                        <a:srgbClr val="FAD1E6"/>
                       </a:solidFill>
                       <a:prstDash val="solid"/>
                     </a:lnL>
                     <a:lnR w="9525" cap="flat" cmpd="sng" algn="ctr">
                       <a:solidFill>
-                        <a:srgbClr val="D7D1FA"/>
+                        <a:srgbClr val="FAD1E6"/>
                       </a:solidFill>
                       <a:prstDash val="solid"/>
                     </a:lnR>
                     <a:lnT w="9525" cap="flat" cmpd="sng" algn="ctr">
                       <a:solidFill>
-                        <a:srgbClr val="D7D1FA"/>
+                        <a:srgbClr val="FAD1E6"/>
                       </a:solidFill>
                       <a:prstDash val="solid"/>
                     </a:lnT>
                     <a:lnB w="9525" cap="flat" cmpd="sng" algn="ctr">
                       <a:solidFill>
-                        <a:srgbClr val="D7D1FA"/>
+                        <a:srgbClr val="FAD1E6"/>
                       </a:solidFill>
                       <a:prstDash val="solid"/>
                     </a:lnB>
@@ -4445,7 +4684,7 @@
                       <a:r>
                         <a:rPr sz="1400" b="0">
                           <a:solidFill>
-                            <a:srgbClr val="2B2B2B"/>
+                            <a:srgbClr val="26231F"/>
                           </a:solidFill>
                         </a:rPr>
                         <a:t/>
@@ -4455,25 +4694,25 @@
                   <a:tcPr anchor="ctr" marL="73152" marR="73152">
                     <a:lnL w="9525" cap="flat" cmpd="sng" algn="ctr">
                       <a:solidFill>
-                        <a:srgbClr val="D7D1FA"/>
+                        <a:srgbClr val="FAD1E6"/>
                       </a:solidFill>
                       <a:prstDash val="solid"/>
                     </a:lnL>
                     <a:lnR w="9525" cap="flat" cmpd="sng" algn="ctr">
                       <a:solidFill>
-                        <a:srgbClr val="D7D1FA"/>
+                        <a:srgbClr val="FAD1E6"/>
                       </a:solidFill>
                       <a:prstDash val="solid"/>
                     </a:lnR>
                     <a:lnT w="9525" cap="flat" cmpd="sng" algn="ctr">
                       <a:solidFill>
-                        <a:srgbClr val="D7D1FA"/>
+                        <a:srgbClr val="FAD1E6"/>
                       </a:solidFill>
                       <a:prstDash val="solid"/>
                     </a:lnT>
                     <a:lnB w="9525" cap="flat" cmpd="sng" algn="ctr">
                       <a:solidFill>
-                        <a:srgbClr val="D7D1FA"/>
+                        <a:srgbClr val="FAD1E6"/>
                       </a:solidFill>
                       <a:prstDash val="solid"/>
                     </a:lnB>
@@ -4491,7 +4730,7 @@
                       <a:r>
                         <a:rPr sz="1400" b="0">
                           <a:solidFill>
-                            <a:srgbClr val="2B2B2B"/>
+                            <a:srgbClr val="26231F"/>
                           </a:solidFill>
                         </a:rPr>
                         <a:t/>
@@ -4501,25 +4740,25 @@
                   <a:tcPr anchor="ctr" marL="73152" marR="73152">
                     <a:lnL w="9525" cap="flat" cmpd="sng" algn="ctr">
                       <a:solidFill>
-                        <a:srgbClr val="D7D1FA"/>
+                        <a:srgbClr val="FAD1E6"/>
                       </a:solidFill>
                       <a:prstDash val="solid"/>
                     </a:lnL>
                     <a:lnR w="9525" cap="flat" cmpd="sng" algn="ctr">
                       <a:solidFill>
-                        <a:srgbClr val="D7D1FA"/>
+                        <a:srgbClr val="FAD1E6"/>
                       </a:solidFill>
                       <a:prstDash val="solid"/>
                     </a:lnR>
                     <a:lnT w="9525" cap="flat" cmpd="sng" algn="ctr">
                       <a:solidFill>
-                        <a:srgbClr val="D7D1FA"/>
+                        <a:srgbClr val="FAD1E6"/>
                       </a:solidFill>
                       <a:prstDash val="solid"/>
                     </a:lnT>
                     <a:lnB w="9525" cap="flat" cmpd="sng" algn="ctr">
                       <a:solidFill>
-                        <a:srgbClr val="D7D1FA"/>
+                        <a:srgbClr val="FAD1E6"/>
                       </a:solidFill>
                       <a:prstDash val="solid"/>
                     </a:lnB>
@@ -4537,7 +4776,7 @@
                       <a:r>
                         <a:rPr sz="1400" b="0">
                           <a:solidFill>
-                            <a:srgbClr val="2B2B2B"/>
+                            <a:srgbClr val="26231F"/>
                           </a:solidFill>
                         </a:rPr>
                         <a:t/>
@@ -4547,25 +4786,25 @@
                   <a:tcPr anchor="ctr" marL="73152" marR="73152">
                     <a:lnL w="9525" cap="flat" cmpd="sng" algn="ctr">
                       <a:solidFill>
-                        <a:srgbClr val="D7D1FA"/>
+                        <a:srgbClr val="FAD1E6"/>
                       </a:solidFill>
                       <a:prstDash val="solid"/>
                     </a:lnL>
                     <a:lnR w="9525" cap="flat" cmpd="sng" algn="ctr">
                       <a:solidFill>
-                        <a:srgbClr val="D7D1FA"/>
+                        <a:srgbClr val="FAD1E6"/>
                       </a:solidFill>
                       <a:prstDash val="solid"/>
                     </a:lnR>
                     <a:lnT w="9525" cap="flat" cmpd="sng" algn="ctr">
                       <a:solidFill>
-                        <a:srgbClr val="D7D1FA"/>
+                        <a:srgbClr val="FAD1E6"/>
                       </a:solidFill>
                       <a:prstDash val="solid"/>
                     </a:lnT>
                     <a:lnB w="9525" cap="flat" cmpd="sng" algn="ctr">
                       <a:solidFill>
-                        <a:srgbClr val="D7D1FA"/>
+                        <a:srgbClr val="FAD1E6"/>
                       </a:solidFill>
                       <a:prstDash val="solid"/>
                     </a:lnB>
@@ -4583,7 +4822,7 @@
                       <a:r>
                         <a:rPr sz="1400" b="0">
                           <a:solidFill>
-                            <a:srgbClr val="2B2B2B"/>
+                            <a:srgbClr val="26231F"/>
                           </a:solidFill>
                         </a:rPr>
                         <a:t/>
@@ -4593,25 +4832,25 @@
                   <a:tcPr anchor="ctr" marL="73152" marR="73152">
                     <a:lnL w="9525" cap="flat" cmpd="sng" algn="ctr">
                       <a:solidFill>
-                        <a:srgbClr val="D7D1FA"/>
+                        <a:srgbClr val="FAD1E6"/>
                       </a:solidFill>
                       <a:prstDash val="solid"/>
                     </a:lnL>
                     <a:lnR w="9525" cap="flat" cmpd="sng" algn="ctr">
                       <a:solidFill>
-                        <a:srgbClr val="D7D1FA"/>
+                        <a:srgbClr val="FAD1E6"/>
                       </a:solidFill>
                       <a:prstDash val="solid"/>
                     </a:lnR>
                     <a:lnT w="9525" cap="flat" cmpd="sng" algn="ctr">
                       <a:solidFill>
-                        <a:srgbClr val="D7D1FA"/>
+                        <a:srgbClr val="FAD1E6"/>
                       </a:solidFill>
                       <a:prstDash val="solid"/>
                     </a:lnT>
                     <a:lnB w="9525" cap="flat" cmpd="sng" algn="ctr">
                       <a:solidFill>
-                        <a:srgbClr val="D7D1FA"/>
+                        <a:srgbClr val="FAD1E6"/>
                       </a:solidFill>
                       <a:prstDash val="solid"/>
                     </a:lnB>
@@ -4631,7 +4870,7 @@
                       <a:r>
                         <a:rPr sz="1400" b="0">
                           <a:solidFill>
-                            <a:srgbClr val="2B2B2B"/>
+                            <a:srgbClr val="26231F"/>
                           </a:solidFill>
                         </a:rPr>
                         <a:t/>
@@ -4641,30 +4880,30 @@
                   <a:tcPr anchor="ctr" marL="73152" marR="73152">
                     <a:lnL w="9525" cap="flat" cmpd="sng" algn="ctr">
                       <a:solidFill>
-                        <a:srgbClr val="D7D1FA"/>
+                        <a:srgbClr val="FAD1E6"/>
                       </a:solidFill>
                       <a:prstDash val="solid"/>
                     </a:lnL>
                     <a:lnR w="9525" cap="flat" cmpd="sng" algn="ctr">
                       <a:solidFill>
-                        <a:srgbClr val="D7D1FA"/>
+                        <a:srgbClr val="FAD1E6"/>
                       </a:solidFill>
                       <a:prstDash val="solid"/>
                     </a:lnR>
                     <a:lnT w="9525" cap="flat" cmpd="sng" algn="ctr">
                       <a:solidFill>
-                        <a:srgbClr val="D7D1FA"/>
+                        <a:srgbClr val="FAD1E6"/>
                       </a:solidFill>
                       <a:prstDash val="solid"/>
                     </a:lnT>
                     <a:lnB w="9525" cap="flat" cmpd="sng" algn="ctr">
                       <a:solidFill>
-                        <a:srgbClr val="D7D1FA"/>
+                        <a:srgbClr val="FAD1E6"/>
                       </a:solidFill>
                       <a:prstDash val="solid"/>
                     </a:lnB>
                     <a:solidFill>
-                      <a:srgbClr val="F0EEFC"/>
+                      <a:srgbClr val="FDEAF4"/>
                     </a:solidFill>
                   </a:tcPr>
                 </a:tc>
@@ -4677,7 +4916,7 @@
                       <a:r>
                         <a:rPr sz="1400" b="0">
                           <a:solidFill>
-                            <a:srgbClr val="2B2B2B"/>
+                            <a:srgbClr val="26231F"/>
                           </a:solidFill>
                         </a:rPr>
                         <a:t/>
@@ -4687,30 +4926,30 @@
                   <a:tcPr anchor="ctr" marL="73152" marR="73152">
                     <a:lnL w="9525" cap="flat" cmpd="sng" algn="ctr">
                       <a:solidFill>
-                        <a:srgbClr val="D7D1FA"/>
+                        <a:srgbClr val="FAD1E6"/>
                       </a:solidFill>
                       <a:prstDash val="solid"/>
                     </a:lnL>
                     <a:lnR w="9525" cap="flat" cmpd="sng" algn="ctr">
                       <a:solidFill>
-                        <a:srgbClr val="D7D1FA"/>
+                        <a:srgbClr val="FAD1E6"/>
                       </a:solidFill>
                       <a:prstDash val="solid"/>
                     </a:lnR>
                     <a:lnT w="9525" cap="flat" cmpd="sng" algn="ctr">
                       <a:solidFill>
-                        <a:srgbClr val="D7D1FA"/>
+                        <a:srgbClr val="FAD1E6"/>
                       </a:solidFill>
                       <a:prstDash val="solid"/>
                     </a:lnT>
                     <a:lnB w="9525" cap="flat" cmpd="sng" algn="ctr">
                       <a:solidFill>
-                        <a:srgbClr val="D7D1FA"/>
+                        <a:srgbClr val="FAD1E6"/>
                       </a:solidFill>
                       <a:prstDash val="solid"/>
                     </a:lnB>
                     <a:solidFill>
-                      <a:srgbClr val="F0EEFC"/>
+                      <a:srgbClr val="FDEAF4"/>
                     </a:solidFill>
                   </a:tcPr>
                 </a:tc>
@@ -4723,7 +4962,7 @@
                       <a:r>
                         <a:rPr sz="1400" b="0">
                           <a:solidFill>
-                            <a:srgbClr val="2B2B2B"/>
+                            <a:srgbClr val="26231F"/>
                           </a:solidFill>
                         </a:rPr>
                         <a:t/>
@@ -4733,30 +4972,30 @@
                   <a:tcPr anchor="ctr" marL="73152" marR="73152">
                     <a:lnL w="9525" cap="flat" cmpd="sng" algn="ctr">
                       <a:solidFill>
-                        <a:srgbClr val="D7D1FA"/>
+                        <a:srgbClr val="FAD1E6"/>
                       </a:solidFill>
                       <a:prstDash val="solid"/>
                     </a:lnL>
                     <a:lnR w="9525" cap="flat" cmpd="sng" algn="ctr">
                       <a:solidFill>
-                        <a:srgbClr val="D7D1FA"/>
+                        <a:srgbClr val="FAD1E6"/>
                       </a:solidFill>
                       <a:prstDash val="solid"/>
                     </a:lnR>
                     <a:lnT w="9525" cap="flat" cmpd="sng" algn="ctr">
                       <a:solidFill>
-                        <a:srgbClr val="D7D1FA"/>
+                        <a:srgbClr val="FAD1E6"/>
                       </a:solidFill>
                       <a:prstDash val="solid"/>
                     </a:lnT>
                     <a:lnB w="9525" cap="flat" cmpd="sng" algn="ctr">
                       <a:solidFill>
-                        <a:srgbClr val="D7D1FA"/>
+                        <a:srgbClr val="FAD1E6"/>
                       </a:solidFill>
                       <a:prstDash val="solid"/>
                     </a:lnB>
                     <a:solidFill>
-                      <a:srgbClr val="F0EEFC"/>
+                      <a:srgbClr val="FDEAF4"/>
                     </a:solidFill>
                   </a:tcPr>
                 </a:tc>
@@ -4769,7 +5008,7 @@
                       <a:r>
                         <a:rPr sz="1400" b="0">
                           <a:solidFill>
-                            <a:srgbClr val="2B2B2B"/>
+                            <a:srgbClr val="26231F"/>
                           </a:solidFill>
                         </a:rPr>
                         <a:t/>
@@ -4779,30 +5018,30 @@
                   <a:tcPr anchor="ctr" marL="73152" marR="73152">
                     <a:lnL w="9525" cap="flat" cmpd="sng" algn="ctr">
                       <a:solidFill>
-                        <a:srgbClr val="D7D1FA"/>
+                        <a:srgbClr val="FAD1E6"/>
                       </a:solidFill>
                       <a:prstDash val="solid"/>
                     </a:lnL>
                     <a:lnR w="9525" cap="flat" cmpd="sng" algn="ctr">
                       <a:solidFill>
-                        <a:srgbClr val="D7D1FA"/>
+                        <a:srgbClr val="FAD1E6"/>
                       </a:solidFill>
                       <a:prstDash val="solid"/>
                     </a:lnR>
                     <a:lnT w="9525" cap="flat" cmpd="sng" algn="ctr">
                       <a:solidFill>
-                        <a:srgbClr val="D7D1FA"/>
+                        <a:srgbClr val="FAD1E6"/>
                       </a:solidFill>
                       <a:prstDash val="solid"/>
                     </a:lnT>
                     <a:lnB w="9525" cap="flat" cmpd="sng" algn="ctr">
                       <a:solidFill>
-                        <a:srgbClr val="D7D1FA"/>
+                        <a:srgbClr val="FAD1E6"/>
                       </a:solidFill>
                       <a:prstDash val="solid"/>
                     </a:lnB>
                     <a:solidFill>
-                      <a:srgbClr val="F0EEFC"/>
+                      <a:srgbClr val="FDEAF4"/>
                     </a:solidFill>
                   </a:tcPr>
                 </a:tc>
@@ -4815,7 +5054,7 @@
                       <a:r>
                         <a:rPr sz="1400" b="0">
                           <a:solidFill>
-                            <a:srgbClr val="2B2B2B"/>
+                            <a:srgbClr val="26231F"/>
                           </a:solidFill>
                         </a:rPr>
                         <a:t/>
@@ -4825,30 +5064,30 @@
                   <a:tcPr anchor="ctr" marL="73152" marR="73152">
                     <a:lnL w="9525" cap="flat" cmpd="sng" algn="ctr">
                       <a:solidFill>
-                        <a:srgbClr val="D7D1FA"/>
+                        <a:srgbClr val="FAD1E6"/>
                       </a:solidFill>
                       <a:prstDash val="solid"/>
                     </a:lnL>
                     <a:lnR w="9525" cap="flat" cmpd="sng" algn="ctr">
                       <a:solidFill>
-                        <a:srgbClr val="D7D1FA"/>
+                        <a:srgbClr val="FAD1E6"/>
                       </a:solidFill>
                       <a:prstDash val="solid"/>
                     </a:lnR>
                     <a:lnT w="9525" cap="flat" cmpd="sng" algn="ctr">
                       <a:solidFill>
-                        <a:srgbClr val="D7D1FA"/>
+                        <a:srgbClr val="FAD1E6"/>
                       </a:solidFill>
                       <a:prstDash val="solid"/>
                     </a:lnT>
                     <a:lnB w="9525" cap="flat" cmpd="sng" algn="ctr">
                       <a:solidFill>
-                        <a:srgbClr val="D7D1FA"/>
+                        <a:srgbClr val="FAD1E6"/>
                       </a:solidFill>
                       <a:prstDash val="solid"/>
                     </a:lnB>
                     <a:solidFill>
-                      <a:srgbClr val="F0EEFC"/>
+                      <a:srgbClr val="FDEAF4"/>
                     </a:solidFill>
                   </a:tcPr>
                 </a:tc>
@@ -4863,7 +5102,7 @@
                       <a:r>
                         <a:rPr sz="1400" b="0">
                           <a:solidFill>
-                            <a:srgbClr val="2B2B2B"/>
+                            <a:srgbClr val="26231F"/>
                           </a:solidFill>
                         </a:rPr>
                         <a:t/>
@@ -4873,25 +5112,25 @@
                   <a:tcPr anchor="ctr" marL="73152" marR="73152">
                     <a:lnL w="9525" cap="flat" cmpd="sng" algn="ctr">
                       <a:solidFill>
-                        <a:srgbClr val="D7D1FA"/>
+                        <a:srgbClr val="FAD1E6"/>
                       </a:solidFill>
                       <a:prstDash val="solid"/>
                     </a:lnL>
                     <a:lnR w="9525" cap="flat" cmpd="sng" algn="ctr">
                       <a:solidFill>
-                        <a:srgbClr val="D7D1FA"/>
+                        <a:srgbClr val="FAD1E6"/>
                       </a:solidFill>
                       <a:prstDash val="solid"/>
                     </a:lnR>
                     <a:lnT w="9525" cap="flat" cmpd="sng" algn="ctr">
                       <a:solidFill>
-                        <a:srgbClr val="D7D1FA"/>
+                        <a:srgbClr val="FAD1E6"/>
                       </a:solidFill>
                       <a:prstDash val="solid"/>
                     </a:lnT>
                     <a:lnB w="9525" cap="flat" cmpd="sng" algn="ctr">
                       <a:solidFill>
-                        <a:srgbClr val="D7D1FA"/>
+                        <a:srgbClr val="FAD1E6"/>
                       </a:solidFill>
                       <a:prstDash val="solid"/>
                     </a:lnB>
@@ -4909,7 +5148,7 @@
                       <a:r>
                         <a:rPr sz="1400" b="0">
                           <a:solidFill>
-                            <a:srgbClr val="2B2B2B"/>
+                            <a:srgbClr val="26231F"/>
                           </a:solidFill>
                         </a:rPr>
                         <a:t/>
@@ -4919,25 +5158,25 @@
                   <a:tcPr anchor="ctr" marL="73152" marR="73152">
                     <a:lnL w="9525" cap="flat" cmpd="sng" algn="ctr">
                       <a:solidFill>
-                        <a:srgbClr val="D7D1FA"/>
+                        <a:srgbClr val="FAD1E6"/>
                       </a:solidFill>
                       <a:prstDash val="solid"/>
                     </a:lnL>
                     <a:lnR w="9525" cap="flat" cmpd="sng" algn="ctr">
                       <a:solidFill>
-                        <a:srgbClr val="D7D1FA"/>
+                        <a:srgbClr val="FAD1E6"/>
                       </a:solidFill>
                       <a:prstDash val="solid"/>
                     </a:lnR>
                     <a:lnT w="9525" cap="flat" cmpd="sng" algn="ctr">
                       <a:solidFill>
-                        <a:srgbClr val="D7D1FA"/>
+                        <a:srgbClr val="FAD1E6"/>
                       </a:solidFill>
                       <a:prstDash val="solid"/>
                     </a:lnT>
                     <a:lnB w="9525" cap="flat" cmpd="sng" algn="ctr">
                       <a:solidFill>
-                        <a:srgbClr val="D7D1FA"/>
+                        <a:srgbClr val="FAD1E6"/>
                       </a:solidFill>
                       <a:prstDash val="solid"/>
                     </a:lnB>
@@ -4955,7 +5194,7 @@
                       <a:r>
                         <a:rPr sz="1400" b="0">
                           <a:solidFill>
-                            <a:srgbClr val="2B2B2B"/>
+                            <a:srgbClr val="26231F"/>
                           </a:solidFill>
                         </a:rPr>
                         <a:t/>
@@ -4965,25 +5204,25 @@
                   <a:tcPr anchor="ctr" marL="73152" marR="73152">
                     <a:lnL w="9525" cap="flat" cmpd="sng" algn="ctr">
                       <a:solidFill>
-                        <a:srgbClr val="D7D1FA"/>
+                        <a:srgbClr val="FAD1E6"/>
                       </a:solidFill>
                       <a:prstDash val="solid"/>
                     </a:lnL>
                     <a:lnR w="9525" cap="flat" cmpd="sng" algn="ctr">
                       <a:solidFill>
-                        <a:srgbClr val="D7D1FA"/>
+                        <a:srgbClr val="FAD1E6"/>
                       </a:solidFill>
                       <a:prstDash val="solid"/>
                     </a:lnR>
                     <a:lnT w="9525" cap="flat" cmpd="sng" algn="ctr">
                       <a:solidFill>
-                        <a:srgbClr val="D7D1FA"/>
+                        <a:srgbClr val="FAD1E6"/>
                       </a:solidFill>
                       <a:prstDash val="solid"/>
                     </a:lnT>
                     <a:lnB w="9525" cap="flat" cmpd="sng" algn="ctr">
                       <a:solidFill>
-                        <a:srgbClr val="D7D1FA"/>
+                        <a:srgbClr val="FAD1E6"/>
                       </a:solidFill>
                       <a:prstDash val="solid"/>
                     </a:lnB>
@@ -5001,7 +5240,7 @@
                       <a:r>
                         <a:rPr sz="1400" b="0">
                           <a:solidFill>
-                            <a:srgbClr val="2B2B2B"/>
+                            <a:srgbClr val="26231F"/>
                           </a:solidFill>
                         </a:rPr>
                         <a:t/>
@@ -5011,25 +5250,25 @@
                   <a:tcPr anchor="ctr" marL="73152" marR="73152">
                     <a:lnL w="9525" cap="flat" cmpd="sng" algn="ctr">
                       <a:solidFill>
-                        <a:srgbClr val="D7D1FA"/>
+                        <a:srgbClr val="FAD1E6"/>
                       </a:solidFill>
                       <a:prstDash val="solid"/>
                     </a:lnL>
                     <a:lnR w="9525" cap="flat" cmpd="sng" algn="ctr">
                       <a:solidFill>
-                        <a:srgbClr val="D7D1FA"/>
+                        <a:srgbClr val="FAD1E6"/>
                       </a:solidFill>
                       <a:prstDash val="solid"/>
                     </a:lnR>
                     <a:lnT w="9525" cap="flat" cmpd="sng" algn="ctr">
                       <a:solidFill>
-                        <a:srgbClr val="D7D1FA"/>
+                        <a:srgbClr val="FAD1E6"/>
                       </a:solidFill>
                       <a:prstDash val="solid"/>
                     </a:lnT>
                     <a:lnB w="9525" cap="flat" cmpd="sng" algn="ctr">
                       <a:solidFill>
-                        <a:srgbClr val="D7D1FA"/>
+                        <a:srgbClr val="FAD1E6"/>
                       </a:solidFill>
                       <a:prstDash val="solid"/>
                     </a:lnB>
@@ -5047,7 +5286,7 @@
                       <a:r>
                         <a:rPr sz="1400" b="0">
                           <a:solidFill>
-                            <a:srgbClr val="2B2B2B"/>
+                            <a:srgbClr val="26231F"/>
                           </a:solidFill>
                         </a:rPr>
                         <a:t/>
@@ -5057,25 +5296,25 @@
                   <a:tcPr anchor="ctr" marL="73152" marR="73152">
                     <a:lnL w="9525" cap="flat" cmpd="sng" algn="ctr">
                       <a:solidFill>
-                        <a:srgbClr val="D7D1FA"/>
+                        <a:srgbClr val="FAD1E6"/>
                       </a:solidFill>
                       <a:prstDash val="solid"/>
                     </a:lnL>
                     <a:lnR w="9525" cap="flat" cmpd="sng" algn="ctr">
                       <a:solidFill>
-                        <a:srgbClr val="D7D1FA"/>
+                        <a:srgbClr val="FAD1E6"/>
                       </a:solidFill>
                       <a:prstDash val="solid"/>
                     </a:lnR>
                     <a:lnT w="9525" cap="flat" cmpd="sng" algn="ctr">
                       <a:solidFill>
-                        <a:srgbClr val="D7D1FA"/>
+                        <a:srgbClr val="FAD1E6"/>
                       </a:solidFill>
                       <a:prstDash val="solid"/>
                     </a:lnT>
                     <a:lnB w="9525" cap="flat" cmpd="sng" algn="ctr">
                       <a:solidFill>
-                        <a:srgbClr val="D7D1FA"/>
+                        <a:srgbClr val="FAD1E6"/>
                       </a:solidFill>
                       <a:prstDash val="solid"/>
                     </a:lnB>
@@ -5095,7 +5334,7 @@
                       <a:r>
                         <a:rPr sz="1400" b="0">
                           <a:solidFill>
-                            <a:srgbClr val="2B2B2B"/>
+                            <a:srgbClr val="26231F"/>
                           </a:solidFill>
                         </a:rPr>
                         <a:t/>
@@ -5105,30 +5344,30 @@
                   <a:tcPr anchor="ctr" marL="73152" marR="73152">
                     <a:lnL w="9525" cap="flat" cmpd="sng" algn="ctr">
                       <a:solidFill>
-                        <a:srgbClr val="D7D1FA"/>
+                        <a:srgbClr val="FAD1E6"/>
                       </a:solidFill>
                       <a:prstDash val="solid"/>
                     </a:lnL>
                     <a:lnR w="9525" cap="flat" cmpd="sng" algn="ctr">
                       <a:solidFill>
-                        <a:srgbClr val="D7D1FA"/>
+                        <a:srgbClr val="FAD1E6"/>
                       </a:solidFill>
                       <a:prstDash val="solid"/>
                     </a:lnR>
                     <a:lnT w="9525" cap="flat" cmpd="sng" algn="ctr">
                       <a:solidFill>
-                        <a:srgbClr val="D7D1FA"/>
+                        <a:srgbClr val="FAD1E6"/>
                       </a:solidFill>
                       <a:prstDash val="solid"/>
                     </a:lnT>
                     <a:lnB w="9525" cap="flat" cmpd="sng" algn="ctr">
                       <a:solidFill>
-                        <a:srgbClr val="D7D1FA"/>
+                        <a:srgbClr val="FAD1E6"/>
                       </a:solidFill>
                       <a:prstDash val="solid"/>
                     </a:lnB>
                     <a:solidFill>
-                      <a:srgbClr val="F0EEFC"/>
+                      <a:srgbClr val="FDEAF4"/>
                     </a:solidFill>
                   </a:tcPr>
                 </a:tc>
@@ -5141,7 +5380,7 @@
                       <a:r>
                         <a:rPr sz="1400" b="0">
                           <a:solidFill>
-                            <a:srgbClr val="2B2B2B"/>
+                            <a:srgbClr val="26231F"/>
                           </a:solidFill>
                         </a:rPr>
                         <a:t/>
@@ -5151,30 +5390,30 @@
                   <a:tcPr anchor="ctr" marL="73152" marR="73152">
                     <a:lnL w="9525" cap="flat" cmpd="sng" algn="ctr">
                       <a:solidFill>
-                        <a:srgbClr val="D7D1FA"/>
+                        <a:srgbClr val="FAD1E6"/>
                       </a:solidFill>
                       <a:prstDash val="solid"/>
                     </a:lnL>
                     <a:lnR w="9525" cap="flat" cmpd="sng" algn="ctr">
                       <a:solidFill>
-                        <a:srgbClr val="D7D1FA"/>
+                        <a:srgbClr val="FAD1E6"/>
                       </a:solidFill>
                       <a:prstDash val="solid"/>
                     </a:lnR>
                     <a:lnT w="9525" cap="flat" cmpd="sng" algn="ctr">
                       <a:solidFill>
-                        <a:srgbClr val="D7D1FA"/>
+                        <a:srgbClr val="FAD1E6"/>
                       </a:solidFill>
                       <a:prstDash val="solid"/>
                     </a:lnT>
                     <a:lnB w="9525" cap="flat" cmpd="sng" algn="ctr">
                       <a:solidFill>
-                        <a:srgbClr val="D7D1FA"/>
+                        <a:srgbClr val="FAD1E6"/>
                       </a:solidFill>
                       <a:prstDash val="solid"/>
                     </a:lnB>
                     <a:solidFill>
-                      <a:srgbClr val="F0EEFC"/>
+                      <a:srgbClr val="FDEAF4"/>
                     </a:solidFill>
                   </a:tcPr>
                 </a:tc>
@@ -5187,7 +5426,7 @@
                       <a:r>
                         <a:rPr sz="1400" b="0">
                           <a:solidFill>
-                            <a:srgbClr val="2B2B2B"/>
+                            <a:srgbClr val="26231F"/>
                           </a:solidFill>
                         </a:rPr>
                         <a:t/>
@@ -5197,30 +5436,30 @@
                   <a:tcPr anchor="ctr" marL="73152" marR="73152">
                     <a:lnL w="9525" cap="flat" cmpd="sng" algn="ctr">
                       <a:solidFill>
-                        <a:srgbClr val="D7D1FA"/>
+                        <a:srgbClr val="FAD1E6"/>
                       </a:solidFill>
                       <a:prstDash val="solid"/>
                     </a:lnL>
                     <a:lnR w="9525" cap="flat" cmpd="sng" algn="ctr">
                       <a:solidFill>
-                        <a:srgbClr val="D7D1FA"/>
+                        <a:srgbClr val="FAD1E6"/>
                       </a:solidFill>
                       <a:prstDash val="solid"/>
                     </a:lnR>
                     <a:lnT w="9525" cap="flat" cmpd="sng" algn="ctr">
                       <a:solidFill>
-                        <a:srgbClr val="D7D1FA"/>
+                        <a:srgbClr val="FAD1E6"/>
                       </a:solidFill>
                       <a:prstDash val="solid"/>
                     </a:lnT>
                     <a:lnB w="9525" cap="flat" cmpd="sng" algn="ctr">
                       <a:solidFill>
-                        <a:srgbClr val="D7D1FA"/>
+                        <a:srgbClr val="FAD1E6"/>
                       </a:solidFill>
                       <a:prstDash val="solid"/>
                     </a:lnB>
                     <a:solidFill>
-                      <a:srgbClr val="F0EEFC"/>
+                      <a:srgbClr val="FDEAF4"/>
                     </a:solidFill>
                   </a:tcPr>
                 </a:tc>
@@ -5233,7 +5472,7 @@
                       <a:r>
                         <a:rPr sz="1400" b="0">
                           <a:solidFill>
-                            <a:srgbClr val="2B2B2B"/>
+                            <a:srgbClr val="26231F"/>
                           </a:solidFill>
                         </a:rPr>
                         <a:t/>
@@ -5243,30 +5482,30 @@
                   <a:tcPr anchor="ctr" marL="73152" marR="73152">
                     <a:lnL w="9525" cap="flat" cmpd="sng" algn="ctr">
                       <a:solidFill>
-                        <a:srgbClr val="D7D1FA"/>
+                        <a:srgbClr val="FAD1E6"/>
                       </a:solidFill>
                       <a:prstDash val="solid"/>
                     </a:lnL>
                     <a:lnR w="9525" cap="flat" cmpd="sng" algn="ctr">
                       <a:solidFill>
-                        <a:srgbClr val="D7D1FA"/>
+                        <a:srgbClr val="FAD1E6"/>
                       </a:solidFill>
                       <a:prstDash val="solid"/>
                     </a:lnR>
                     <a:lnT w="9525" cap="flat" cmpd="sng" algn="ctr">
                       <a:solidFill>
-                        <a:srgbClr val="D7D1FA"/>
+                        <a:srgbClr val="FAD1E6"/>
                       </a:solidFill>
                       <a:prstDash val="solid"/>
                     </a:lnT>
                     <a:lnB w="9525" cap="flat" cmpd="sng" algn="ctr">
                       <a:solidFill>
-                        <a:srgbClr val="D7D1FA"/>
+                        <a:srgbClr val="FAD1E6"/>
                       </a:solidFill>
                       <a:prstDash val="solid"/>
                     </a:lnB>
                     <a:solidFill>
-                      <a:srgbClr val="F0EEFC"/>
+                      <a:srgbClr val="FDEAF4"/>
                     </a:solidFill>
                   </a:tcPr>
                 </a:tc>
@@ -5279,7 +5518,7 @@
                       <a:r>
                         <a:rPr sz="1400" b="0">
                           <a:solidFill>
-                            <a:srgbClr val="2B2B2B"/>
+                            <a:srgbClr val="26231F"/>
                           </a:solidFill>
                         </a:rPr>
                         <a:t/>
@@ -5289,30 +5528,30 @@
                   <a:tcPr anchor="ctr" marL="73152" marR="73152">
                     <a:lnL w="9525" cap="flat" cmpd="sng" algn="ctr">
                       <a:solidFill>
-                        <a:srgbClr val="D7D1FA"/>
+                        <a:srgbClr val="FAD1E6"/>
                       </a:solidFill>
                       <a:prstDash val="solid"/>
                     </a:lnL>
                     <a:lnR w="9525" cap="flat" cmpd="sng" algn="ctr">
                       <a:solidFill>
-                        <a:srgbClr val="D7D1FA"/>
+                        <a:srgbClr val="FAD1E6"/>
                       </a:solidFill>
                       <a:prstDash val="solid"/>
                     </a:lnR>
                     <a:lnT w="9525" cap="flat" cmpd="sng" algn="ctr">
                       <a:solidFill>
-                        <a:srgbClr val="D7D1FA"/>
+                        <a:srgbClr val="FAD1E6"/>
                       </a:solidFill>
                       <a:prstDash val="solid"/>
                     </a:lnT>
                     <a:lnB w="9525" cap="flat" cmpd="sng" algn="ctr">
                       <a:solidFill>
-                        <a:srgbClr val="D7D1FA"/>
+                        <a:srgbClr val="FAD1E6"/>
                       </a:solidFill>
                       <a:prstDash val="solid"/>
                     </a:lnB>
                     <a:solidFill>
-                      <a:srgbClr val="F0EEFC"/>
+                      <a:srgbClr val="FDEAF4"/>
                     </a:solidFill>
                   </a:tcPr>
                 </a:tc>
@@ -5327,7 +5566,7 @@
                       <a:r>
                         <a:rPr sz="1400" b="0">
                           <a:solidFill>
-                            <a:srgbClr val="2B2B2B"/>
+                            <a:srgbClr val="26231F"/>
                           </a:solidFill>
                         </a:rPr>
                         <a:t/>
@@ -5337,25 +5576,25 @@
                   <a:tcPr anchor="ctr" marL="73152" marR="73152">
                     <a:lnL w="9525" cap="flat" cmpd="sng" algn="ctr">
                       <a:solidFill>
-                        <a:srgbClr val="D7D1FA"/>
+                        <a:srgbClr val="FAD1E6"/>
                       </a:solidFill>
                       <a:prstDash val="solid"/>
                     </a:lnL>
                     <a:lnR w="9525" cap="flat" cmpd="sng" algn="ctr">
                       <a:solidFill>
-                        <a:srgbClr val="D7D1FA"/>
+                        <a:srgbClr val="FAD1E6"/>
                       </a:solidFill>
                       <a:prstDash val="solid"/>
                     </a:lnR>
                     <a:lnT w="9525" cap="flat" cmpd="sng" algn="ctr">
                       <a:solidFill>
-                        <a:srgbClr val="D7D1FA"/>
+                        <a:srgbClr val="FAD1E6"/>
                       </a:solidFill>
                       <a:prstDash val="solid"/>
                     </a:lnT>
                     <a:lnB w="9525" cap="flat" cmpd="sng" algn="ctr">
                       <a:solidFill>
-                        <a:srgbClr val="D7D1FA"/>
+                        <a:srgbClr val="FAD1E6"/>
                       </a:solidFill>
                       <a:prstDash val="solid"/>
                     </a:lnB>
@@ -5373,7 +5612,7 @@
                       <a:r>
                         <a:rPr sz="1400" b="0">
                           <a:solidFill>
-                            <a:srgbClr val="2B2B2B"/>
+                            <a:srgbClr val="26231F"/>
                           </a:solidFill>
                         </a:rPr>
                         <a:t/>
@@ -5383,25 +5622,25 @@
                   <a:tcPr anchor="ctr" marL="73152" marR="73152">
                     <a:lnL w="9525" cap="flat" cmpd="sng" algn="ctr">
                       <a:solidFill>
-                        <a:srgbClr val="D7D1FA"/>
+                        <a:srgbClr val="FAD1E6"/>
                       </a:solidFill>
                       <a:prstDash val="solid"/>
                     </a:lnL>
                     <a:lnR w="9525" cap="flat" cmpd="sng" algn="ctr">
                       <a:solidFill>
-                        <a:srgbClr val="D7D1FA"/>
+                        <a:srgbClr val="FAD1E6"/>
                       </a:solidFill>
                       <a:prstDash val="solid"/>
                     </a:lnR>
                     <a:lnT w="9525" cap="flat" cmpd="sng" algn="ctr">
                       <a:solidFill>
-                        <a:srgbClr val="D7D1FA"/>
+                        <a:srgbClr val="FAD1E6"/>
                       </a:solidFill>
                       <a:prstDash val="solid"/>
                     </a:lnT>
                     <a:lnB w="9525" cap="flat" cmpd="sng" algn="ctr">
                       <a:solidFill>
-                        <a:srgbClr val="D7D1FA"/>
+                        <a:srgbClr val="FAD1E6"/>
                       </a:solidFill>
                       <a:prstDash val="solid"/>
                     </a:lnB>
@@ -5419,7 +5658,7 @@
                       <a:r>
                         <a:rPr sz="1400" b="0">
                           <a:solidFill>
-                            <a:srgbClr val="2B2B2B"/>
+                            <a:srgbClr val="26231F"/>
                           </a:solidFill>
                         </a:rPr>
                         <a:t/>
@@ -5429,25 +5668,25 @@
                   <a:tcPr anchor="ctr" marL="73152" marR="73152">
                     <a:lnL w="9525" cap="flat" cmpd="sng" algn="ctr">
                       <a:solidFill>
-                        <a:srgbClr val="D7D1FA"/>
+                        <a:srgbClr val="FAD1E6"/>
                       </a:solidFill>
                       <a:prstDash val="solid"/>
                     </a:lnL>
                     <a:lnR w="9525" cap="flat" cmpd="sng" algn="ctr">
                       <a:solidFill>
-                        <a:srgbClr val="D7D1FA"/>
+                        <a:srgbClr val="FAD1E6"/>
                       </a:solidFill>
                       <a:prstDash val="solid"/>
                     </a:lnR>
                     <a:lnT w="9525" cap="flat" cmpd="sng" algn="ctr">
                       <a:solidFill>
-                        <a:srgbClr val="D7D1FA"/>
+                        <a:srgbClr val="FAD1E6"/>
                       </a:solidFill>
                       <a:prstDash val="solid"/>
                     </a:lnT>
                     <a:lnB w="9525" cap="flat" cmpd="sng" algn="ctr">
                       <a:solidFill>
-                        <a:srgbClr val="D7D1FA"/>
+                        <a:srgbClr val="FAD1E6"/>
                       </a:solidFill>
                       <a:prstDash val="solid"/>
                     </a:lnB>
@@ -5465,7 +5704,7 @@
                       <a:r>
                         <a:rPr sz="1400" b="0">
                           <a:solidFill>
-                            <a:srgbClr val="2B2B2B"/>
+                            <a:srgbClr val="26231F"/>
                           </a:solidFill>
                         </a:rPr>
                         <a:t/>
@@ -5475,25 +5714,25 @@
                   <a:tcPr anchor="ctr" marL="73152" marR="73152">
                     <a:lnL w="9525" cap="flat" cmpd="sng" algn="ctr">
                       <a:solidFill>
-                        <a:srgbClr val="D7D1FA"/>
+                        <a:srgbClr val="FAD1E6"/>
                       </a:solidFill>
                       <a:prstDash val="solid"/>
                     </a:lnL>
                     <a:lnR w="9525" cap="flat" cmpd="sng" algn="ctr">
                       <a:solidFill>
-                        <a:srgbClr val="D7D1FA"/>
+                        <a:srgbClr val="FAD1E6"/>
                       </a:solidFill>
                       <a:prstDash val="solid"/>
                     </a:lnR>
                     <a:lnT w="9525" cap="flat" cmpd="sng" algn="ctr">
                       <a:solidFill>
-                        <a:srgbClr val="D7D1FA"/>
+                        <a:srgbClr val="FAD1E6"/>
                       </a:solidFill>
                       <a:prstDash val="solid"/>
                     </a:lnT>
                     <a:lnB w="9525" cap="flat" cmpd="sng" algn="ctr">
                       <a:solidFill>
-                        <a:srgbClr val="D7D1FA"/>
+                        <a:srgbClr val="FAD1E6"/>
                       </a:solidFill>
                       <a:prstDash val="solid"/>
                     </a:lnB>
@@ -5511,7 +5750,7 @@
                       <a:r>
                         <a:rPr sz="1400" b="0">
                           <a:solidFill>
-                            <a:srgbClr val="2B2B2B"/>
+                            <a:srgbClr val="26231F"/>
                           </a:solidFill>
                         </a:rPr>
                         <a:t/>
@@ -5521,25 +5760,25 @@
                   <a:tcPr anchor="ctr" marL="73152" marR="73152">
                     <a:lnL w="9525" cap="flat" cmpd="sng" algn="ctr">
                       <a:solidFill>
-                        <a:srgbClr val="D7D1FA"/>
+                        <a:srgbClr val="FAD1E6"/>
                       </a:solidFill>
                       <a:prstDash val="solid"/>
                     </a:lnL>
                     <a:lnR w="9525" cap="flat" cmpd="sng" algn="ctr">
                       <a:solidFill>
-                        <a:srgbClr val="D7D1FA"/>
+                        <a:srgbClr val="FAD1E6"/>
                       </a:solidFill>
                       <a:prstDash val="solid"/>
                     </a:lnR>
                     <a:lnT w="9525" cap="flat" cmpd="sng" algn="ctr">
                       <a:solidFill>
-                        <a:srgbClr val="D7D1FA"/>
+                        <a:srgbClr val="FAD1E6"/>
                       </a:solidFill>
                       <a:prstDash val="solid"/>
                     </a:lnT>
                     <a:lnB w="9525" cap="flat" cmpd="sng" algn="ctr">
                       <a:solidFill>
-                        <a:srgbClr val="D7D1FA"/>
+                        <a:srgbClr val="FAD1E6"/>
                       </a:solidFill>
                       <a:prstDash val="solid"/>
                     </a:lnB>
@@ -5559,7 +5798,7 @@
                       <a:r>
                         <a:rPr sz="1400" b="0">
                           <a:solidFill>
-                            <a:srgbClr val="2B2B2B"/>
+                            <a:srgbClr val="26231F"/>
                           </a:solidFill>
                         </a:rPr>
                         <a:t/>
@@ -5569,30 +5808,30 @@
                   <a:tcPr anchor="ctr" marL="73152" marR="73152">
                     <a:lnL w="9525" cap="flat" cmpd="sng" algn="ctr">
                       <a:solidFill>
-                        <a:srgbClr val="D7D1FA"/>
+                        <a:srgbClr val="FAD1E6"/>
                       </a:solidFill>
                       <a:prstDash val="solid"/>
                     </a:lnL>
                     <a:lnR w="9525" cap="flat" cmpd="sng" algn="ctr">
                       <a:solidFill>
-                        <a:srgbClr val="D7D1FA"/>
+                        <a:srgbClr val="FAD1E6"/>
                       </a:solidFill>
                       <a:prstDash val="solid"/>
                     </a:lnR>
                     <a:lnT w="9525" cap="flat" cmpd="sng" algn="ctr">
                       <a:solidFill>
-                        <a:srgbClr val="D7D1FA"/>
+                        <a:srgbClr val="FAD1E6"/>
                       </a:solidFill>
                       <a:prstDash val="solid"/>
                     </a:lnT>
                     <a:lnB w="9525" cap="flat" cmpd="sng" algn="ctr">
                       <a:solidFill>
-                        <a:srgbClr val="D7D1FA"/>
+                        <a:srgbClr val="FAD1E6"/>
                       </a:solidFill>
                       <a:prstDash val="solid"/>
                     </a:lnB>
                     <a:solidFill>
-                      <a:srgbClr val="F0EEFC"/>
+                      <a:srgbClr val="FDEAF4"/>
                     </a:solidFill>
                   </a:tcPr>
                 </a:tc>
@@ -5605,7 +5844,7 @@
                       <a:r>
                         <a:rPr sz="1400" b="0">
                           <a:solidFill>
-                            <a:srgbClr val="2B2B2B"/>
+                            <a:srgbClr val="26231F"/>
                           </a:solidFill>
                         </a:rPr>
                         <a:t/>
@@ -5615,30 +5854,30 @@
                   <a:tcPr anchor="ctr" marL="73152" marR="73152">
                     <a:lnL w="9525" cap="flat" cmpd="sng" algn="ctr">
                       <a:solidFill>
-                        <a:srgbClr val="D7D1FA"/>
+                        <a:srgbClr val="FAD1E6"/>
                       </a:solidFill>
                       <a:prstDash val="solid"/>
                     </a:lnL>
                     <a:lnR w="9525" cap="flat" cmpd="sng" algn="ctr">
                       <a:solidFill>
-                        <a:srgbClr val="D7D1FA"/>
+                        <a:srgbClr val="FAD1E6"/>
                       </a:solidFill>
                       <a:prstDash val="solid"/>
                     </a:lnR>
                     <a:lnT w="9525" cap="flat" cmpd="sng" algn="ctr">
                       <a:solidFill>
-                        <a:srgbClr val="D7D1FA"/>
+                        <a:srgbClr val="FAD1E6"/>
                       </a:solidFill>
                       <a:prstDash val="solid"/>
                     </a:lnT>
                     <a:lnB w="9525" cap="flat" cmpd="sng" algn="ctr">
                       <a:solidFill>
-                        <a:srgbClr val="D7D1FA"/>
+                        <a:srgbClr val="FAD1E6"/>
                       </a:solidFill>
                       <a:prstDash val="solid"/>
                     </a:lnB>
                     <a:solidFill>
-                      <a:srgbClr val="F0EEFC"/>
+                      <a:srgbClr val="FDEAF4"/>
                     </a:solidFill>
                   </a:tcPr>
                 </a:tc>
@@ -5651,7 +5890,7 @@
                       <a:r>
                         <a:rPr sz="1400" b="0">
                           <a:solidFill>
-                            <a:srgbClr val="2B2B2B"/>
+                            <a:srgbClr val="26231F"/>
                           </a:solidFill>
                         </a:rPr>
                         <a:t/>
@@ -5661,30 +5900,30 @@
                   <a:tcPr anchor="ctr" marL="73152" marR="73152">
                     <a:lnL w="9525" cap="flat" cmpd="sng" algn="ctr">
                       <a:solidFill>
-                        <a:srgbClr val="D7D1FA"/>
+                        <a:srgbClr val="FAD1E6"/>
                       </a:solidFill>
                       <a:prstDash val="solid"/>
                     </a:lnL>
                     <a:lnR w="9525" cap="flat" cmpd="sng" algn="ctr">
                       <a:solidFill>
-                        <a:srgbClr val="D7D1FA"/>
+                        <a:srgbClr val="FAD1E6"/>
                       </a:solidFill>
                       <a:prstDash val="solid"/>
                     </a:lnR>
                     <a:lnT w="9525" cap="flat" cmpd="sng" algn="ctr">
                       <a:solidFill>
-                        <a:srgbClr val="D7D1FA"/>
+                        <a:srgbClr val="FAD1E6"/>
                       </a:solidFill>
                       <a:prstDash val="solid"/>
                     </a:lnT>
                     <a:lnB w="9525" cap="flat" cmpd="sng" algn="ctr">
                       <a:solidFill>
-                        <a:srgbClr val="D7D1FA"/>
+                        <a:srgbClr val="FAD1E6"/>
                       </a:solidFill>
                       <a:prstDash val="solid"/>
                     </a:lnB>
                     <a:solidFill>
-                      <a:srgbClr val="F0EEFC"/>
+                      <a:srgbClr val="FDEAF4"/>
                     </a:solidFill>
                   </a:tcPr>
                 </a:tc>
@@ -5697,7 +5936,7 @@
                       <a:r>
                         <a:rPr sz="1400" b="0">
                           <a:solidFill>
-                            <a:srgbClr val="2B2B2B"/>
+                            <a:srgbClr val="26231F"/>
                           </a:solidFill>
                         </a:rPr>
                         <a:t/>
@@ -5707,30 +5946,30 @@
                   <a:tcPr anchor="ctr" marL="73152" marR="73152">
                     <a:lnL w="9525" cap="flat" cmpd="sng" algn="ctr">
                       <a:solidFill>
-                        <a:srgbClr val="D7D1FA"/>
+                        <a:srgbClr val="FAD1E6"/>
                       </a:solidFill>
                       <a:prstDash val="solid"/>
                     </a:lnL>
                     <a:lnR w="9525" cap="flat" cmpd="sng" algn="ctr">
                       <a:solidFill>
-                        <a:srgbClr val="D7D1FA"/>
+                        <a:srgbClr val="FAD1E6"/>
                       </a:solidFill>
                       <a:prstDash val="solid"/>
                     </a:lnR>
                     <a:lnT w="9525" cap="flat" cmpd="sng" algn="ctr">
                       <a:solidFill>
-                        <a:srgbClr val="D7D1FA"/>
+                        <a:srgbClr val="FAD1E6"/>
                       </a:solidFill>
                       <a:prstDash val="solid"/>
                     </a:lnT>
                     <a:lnB w="9525" cap="flat" cmpd="sng" algn="ctr">
                       <a:solidFill>
-                        <a:srgbClr val="D7D1FA"/>
+                        <a:srgbClr val="FAD1E6"/>
                       </a:solidFill>
                       <a:prstDash val="solid"/>
                     </a:lnB>
                     <a:solidFill>
-                      <a:srgbClr val="F0EEFC"/>
+                      <a:srgbClr val="FDEAF4"/>
                     </a:solidFill>
                   </a:tcPr>
                 </a:tc>
@@ -5743,7 +5982,7 @@
                       <a:r>
                         <a:rPr sz="1400" b="0">
                           <a:solidFill>
-                            <a:srgbClr val="2B2B2B"/>
+                            <a:srgbClr val="26231F"/>
                           </a:solidFill>
                         </a:rPr>
                         <a:t/>
@@ -5753,30 +5992,30 @@
                   <a:tcPr anchor="ctr" marL="73152" marR="73152">
                     <a:lnL w="9525" cap="flat" cmpd="sng" algn="ctr">
                       <a:solidFill>
-                        <a:srgbClr val="D7D1FA"/>
+                        <a:srgbClr val="FAD1E6"/>
                       </a:solidFill>
                       <a:prstDash val="solid"/>
                     </a:lnL>
                     <a:lnR w="9525" cap="flat" cmpd="sng" algn="ctr">
                       <a:solidFill>
-                        <a:srgbClr val="D7D1FA"/>
+                        <a:srgbClr val="FAD1E6"/>
                       </a:solidFill>
                       <a:prstDash val="solid"/>
                     </a:lnR>
                     <a:lnT w="9525" cap="flat" cmpd="sng" algn="ctr">
                       <a:solidFill>
-                        <a:srgbClr val="D7D1FA"/>
+                        <a:srgbClr val="FAD1E6"/>
                       </a:solidFill>
                       <a:prstDash val="solid"/>
                     </a:lnT>
                     <a:lnB w="9525" cap="flat" cmpd="sng" algn="ctr">
                       <a:solidFill>
-                        <a:srgbClr val="D7D1FA"/>
+                        <a:srgbClr val="FAD1E6"/>
                       </a:solidFill>
                       <a:prstDash val="solid"/>
                     </a:lnB>
                     <a:solidFill>
-                      <a:srgbClr val="F0EEFC"/>
+                      <a:srgbClr val="FDEAF4"/>
                     </a:solidFill>
                   </a:tcPr>
                 </a:tc>
@@ -5799,7 +6038,7 @@
     <p:bg>
       <p:bgPr>
         <a:solidFill>
-          <a:srgbClr val="3D26C5"/>
+          <a:srgbClr val="FDEAF4"/>
         </a:solidFill>
         <a:effectLst/>
       </p:bgPr>
@@ -5819,16 +6058,81 @@
         </p:nvSpPr>
         <p:spPr>
           <a:xfrm>
-            <a:off x="274320" y="274320"/>
-            <a:ext cx="11643055" cy="6309360"/>
-          </a:xfrm>
-          <a:prstGeom prst="roundRect">
-            <a:avLst>
-              <a:gd name="adj" fmla="val 3500"/>
-            </a:avLst>
+            <a:off x="640080" y="6400800"/>
+            <a:ext cx="10911535" cy="10972"/>
+          </a:xfrm>
+          <a:prstGeom prst="rect">
+            <a:avLst/>
           </a:prstGeom>
           <a:solidFill>
-            <a:srgbClr val="FFFFFF"/>
+            <a:srgbClr val="26231F"/>
+          </a:solidFill>
+          <a:ln>
+            <a:noFill/>
+          </a:ln>
+        </p:spPr>
+        <p:txBody>
+          <a:bodyPr rtlCol="0" anchor="ctr"/>
+          <a:lstStyle/>
+          <a:p>
+            <a:pPr algn="ctr"/>
+          </a:p>
+        </p:txBody>
+      </p:sp>
+      <p:sp>
+        <p:nvSpPr>
+          <p:cNvPr id="4" name="하단 라벨"/>
+          <p:cNvSpPr txBox="1"/>
+          <p:nvPr/>
+        </p:nvSpPr>
+        <p:spPr>
+          <a:xfrm>
+            <a:off x="640080" y="6437376"/>
+            <a:ext cx="5486400" cy="274320"/>
+          </a:xfrm>
+          <a:prstGeom prst="rect">
+            <a:avLst/>
+          </a:prstGeom>
+          <a:noFill/>
+        </p:spPr>
+        <p:txBody>
+          <a:bodyPr wrap="square" lIns="54864" rIns="54864" tIns="27432" bIns="27432" anchor="ctr">
+            <a:noAutofit/>
+          </a:bodyPr>
+          <a:lstStyle/>
+          <a:p>
+            <a:pPr algn="l">
+              <a:lnSpc>
+                <a:spcPct val="115000"/>
+              </a:lnSpc>
+            </a:pPr>
+            <a:r>
+              <a:rPr sz="900" b="1" i="0" spc="250">
+                <a:solidFill>
+                  <a:srgbClr val="26231F"/>
+                </a:solidFill>
+              </a:rPr>
+              <a:t>INSURANCE CHECK</a:t>
+            </a:r>
+          </a:p>
+        </p:txBody>
+      </p:sp>
+      <p:sp>
+        <p:nvSpPr>
+          <p:cNvPr id="5" name="포인트"/>
+          <p:cNvSpPr/>
+          <p:nvPr/>
+        </p:nvSpPr>
+        <p:spPr>
+          <a:xfrm>
+            <a:off x="11213287" y="6473952"/>
+            <a:ext cx="219456" cy="219456"/>
+          </a:xfrm>
+          <a:prstGeom prst="mathPlus">
+            <a:avLst/>
+          </a:prstGeom>
+          <a:solidFill>
+            <a:srgbClr val="EA7BB3"/>
           </a:solidFill>
           <a:ln>
             <a:noFill/>
@@ -5854,8 +6158,8 @@
         </p:nvSpPr>
         <p:spPr>
           <a:xfrm>
-            <a:off x="731520" y="548640"/>
-            <a:ext cx="9448495" cy="868680"/>
+            <a:off x="640080" y="502920"/>
+            <a:ext cx="10911535" cy="914400"/>
           </a:xfrm>
         </p:spPr>
         <p:txBody>
@@ -5872,7 +6176,7 @@
             <a:r>
               <a:rPr sz="3000" b="1" i="0">
                 <a:solidFill>
-                  <a:srgbClr val="1D115F"/>
+                  <a:srgbClr val="26231F"/>
                 </a:solidFill>
               </a:rPr>
               <a:t>보장 항목 체크</a:t>
@@ -5882,15 +6186,15 @@
       </p:sp>
       <p:graphicFrame>
         <p:nvGraphicFramePr>
-          <p:cNvPr id="4" name="표"/>
+          <p:cNvPr id="6" name="표"/>
           <p:cNvGraphicFramePr>
             <a:graphicFrameLocks noGrp="1"/>
           </p:cNvGraphicFramePr>
           <p:nvPr/>
         </p:nvGraphicFramePr>
         <p:xfrm>
-          <a:off x="731520" y="1600200"/>
-          <a:ext cx="10728654" cy="4773168"/>
+          <a:off x="640080" y="1600200"/>
+          <a:ext cx="10911534" cy="4773168"/>
         </p:xfrm>
         <a:graphic>
           <a:graphicData uri="http://schemas.openxmlformats.org/drawingml/2006/table">
@@ -5900,9 +6204,9 @@
               </a:tblPr>
               <a:tblGrid>
                 <a:gridCol w="3657600"/>
-                <a:gridCol w="2357018"/>
-                <a:gridCol w="2357018"/>
-                <a:gridCol w="2357018"/>
+                <a:gridCol w="2417978"/>
+                <a:gridCol w="2417978"/>
+                <a:gridCol w="2417978"/>
               </a:tblGrid>
               <a:tr h="530352">
                 <a:tc>
@@ -5914,7 +6218,7 @@
                       <a:r>
                         <a:rPr sz="1400" b="1">
                           <a:solidFill>
-                            <a:srgbClr val="FFFFFF"/>
+                            <a:srgbClr val="26231F"/>
                           </a:solidFill>
                         </a:rPr>
                         <a:t>보장 항목</a:t>
@@ -5924,30 +6228,30 @@
                   <a:tcPr anchor="ctr" marL="73152" marR="73152">
                     <a:lnL w="9525" cap="flat" cmpd="sng" algn="ctr">
                       <a:solidFill>
-                        <a:srgbClr val="3D26C5"/>
+                        <a:srgbClr val="EA7BB3"/>
                       </a:solidFill>
                       <a:prstDash val="solid"/>
                     </a:lnL>
                     <a:lnR w="9525" cap="flat" cmpd="sng" algn="ctr">
                       <a:solidFill>
-                        <a:srgbClr val="3D26C5"/>
+                        <a:srgbClr val="EA7BB3"/>
                       </a:solidFill>
                       <a:prstDash val="solid"/>
                     </a:lnR>
                     <a:lnT w="9525" cap="flat" cmpd="sng" algn="ctr">
                       <a:solidFill>
-                        <a:srgbClr val="3D26C5"/>
+                        <a:srgbClr val="EA7BB3"/>
                       </a:solidFill>
                       <a:prstDash val="solid"/>
                     </a:lnT>
                     <a:lnB w="9525" cap="flat" cmpd="sng" algn="ctr">
                       <a:solidFill>
-                        <a:srgbClr val="3D26C5"/>
+                        <a:srgbClr val="EA7BB3"/>
                       </a:solidFill>
                       <a:prstDash val="solid"/>
                     </a:lnB>
                     <a:solidFill>
-                      <a:srgbClr val="3D26C5"/>
+                      <a:srgbClr val="EA7BB3"/>
                     </a:solidFill>
                   </a:tcPr>
                 </a:tc>
@@ -5960,7 +6264,7 @@
                       <a:r>
                         <a:rPr sz="1400" b="1">
                           <a:solidFill>
-                            <a:srgbClr val="FFFFFF"/>
+                            <a:srgbClr val="26231F"/>
                           </a:solidFill>
                         </a:rPr>
                         <a:t>가입 확인</a:t>
@@ -5970,30 +6274,30 @@
                   <a:tcPr anchor="ctr" marL="73152" marR="73152">
                     <a:lnL w="9525" cap="flat" cmpd="sng" algn="ctr">
                       <a:solidFill>
-                        <a:srgbClr val="3D26C5"/>
+                        <a:srgbClr val="EA7BB3"/>
                       </a:solidFill>
                       <a:prstDash val="solid"/>
                     </a:lnL>
                     <a:lnR w="9525" cap="flat" cmpd="sng" algn="ctr">
                       <a:solidFill>
-                        <a:srgbClr val="3D26C5"/>
+                        <a:srgbClr val="EA7BB3"/>
                       </a:solidFill>
                       <a:prstDash val="solid"/>
                     </a:lnR>
                     <a:lnT w="9525" cap="flat" cmpd="sng" algn="ctr">
                       <a:solidFill>
-                        <a:srgbClr val="3D26C5"/>
+                        <a:srgbClr val="EA7BB3"/>
                       </a:solidFill>
                       <a:prstDash val="solid"/>
                     </a:lnT>
                     <a:lnB w="9525" cap="flat" cmpd="sng" algn="ctr">
                       <a:solidFill>
-                        <a:srgbClr val="3D26C5"/>
+                        <a:srgbClr val="EA7BB3"/>
                       </a:solidFill>
                       <a:prstDash val="solid"/>
                     </a:lnB>
                     <a:solidFill>
-                      <a:srgbClr val="3D26C5"/>
+                      <a:srgbClr val="EA7BB3"/>
                     </a:solidFill>
                   </a:tcPr>
                 </a:tc>
@@ -6006,7 +6310,7 @@
                       <a:r>
                         <a:rPr sz="1400" b="1">
                           <a:solidFill>
-                            <a:srgbClr val="FFFFFF"/>
+                            <a:srgbClr val="26231F"/>
                           </a:solidFill>
                         </a:rPr>
                         <a:t>확인 필요</a:t>
@@ -6016,30 +6320,30 @@
                   <a:tcPr anchor="ctr" marL="73152" marR="73152">
                     <a:lnL w="9525" cap="flat" cmpd="sng" algn="ctr">
                       <a:solidFill>
-                        <a:srgbClr val="3D26C5"/>
+                        <a:srgbClr val="EA7BB3"/>
                       </a:solidFill>
                       <a:prstDash val="solid"/>
                     </a:lnL>
                     <a:lnR w="9525" cap="flat" cmpd="sng" algn="ctr">
                       <a:solidFill>
-                        <a:srgbClr val="3D26C5"/>
+                        <a:srgbClr val="EA7BB3"/>
                       </a:solidFill>
                       <a:prstDash val="solid"/>
                     </a:lnR>
                     <a:lnT w="9525" cap="flat" cmpd="sng" algn="ctr">
                       <a:solidFill>
-                        <a:srgbClr val="3D26C5"/>
+                        <a:srgbClr val="EA7BB3"/>
                       </a:solidFill>
                       <a:prstDash val="solid"/>
                     </a:lnT>
                     <a:lnB w="9525" cap="flat" cmpd="sng" algn="ctr">
                       <a:solidFill>
-                        <a:srgbClr val="3D26C5"/>
+                        <a:srgbClr val="EA7BB3"/>
                       </a:solidFill>
                       <a:prstDash val="solid"/>
                     </a:lnB>
                     <a:solidFill>
-                      <a:srgbClr val="3D26C5"/>
+                      <a:srgbClr val="EA7BB3"/>
                     </a:solidFill>
                   </a:tcPr>
                 </a:tc>
@@ -6052,7 +6356,7 @@
                       <a:r>
                         <a:rPr sz="1400" b="1">
                           <a:solidFill>
-                            <a:srgbClr val="FFFFFF"/>
+                            <a:srgbClr val="26231F"/>
                           </a:solidFill>
                         </a:rPr>
                         <a:t>해당 없음</a:t>
@@ -6062,30 +6366,30 @@
                   <a:tcPr anchor="ctr" marL="73152" marR="73152">
                     <a:lnL w="9525" cap="flat" cmpd="sng" algn="ctr">
                       <a:solidFill>
-                        <a:srgbClr val="3D26C5"/>
+                        <a:srgbClr val="EA7BB3"/>
                       </a:solidFill>
                       <a:prstDash val="solid"/>
                     </a:lnL>
                     <a:lnR w="9525" cap="flat" cmpd="sng" algn="ctr">
                       <a:solidFill>
-                        <a:srgbClr val="3D26C5"/>
+                        <a:srgbClr val="EA7BB3"/>
                       </a:solidFill>
                       <a:prstDash val="solid"/>
                     </a:lnR>
                     <a:lnT w="9525" cap="flat" cmpd="sng" algn="ctr">
                       <a:solidFill>
-                        <a:srgbClr val="3D26C5"/>
+                        <a:srgbClr val="EA7BB3"/>
                       </a:solidFill>
                       <a:prstDash val="solid"/>
                     </a:lnT>
                     <a:lnB w="9525" cap="flat" cmpd="sng" algn="ctr">
                       <a:solidFill>
-                        <a:srgbClr val="3D26C5"/>
+                        <a:srgbClr val="EA7BB3"/>
                       </a:solidFill>
                       <a:prstDash val="solid"/>
                     </a:lnB>
                     <a:solidFill>
-                      <a:srgbClr val="3D26C5"/>
+                      <a:srgbClr val="EA7BB3"/>
                     </a:solidFill>
                   </a:tcPr>
                 </a:tc>
@@ -6100,7 +6404,7 @@
                       <a:r>
                         <a:rPr sz="1400" b="1">
                           <a:solidFill>
-                            <a:srgbClr val="1D115F"/>
+                            <a:srgbClr val="492738"/>
                           </a:solidFill>
                         </a:rPr>
                         <a:t>사망·재해</a:t>
@@ -6110,30 +6414,30 @@
                   <a:tcPr anchor="ctr" marL="73152" marR="73152">
                     <a:lnL w="9525" cap="flat" cmpd="sng" algn="ctr">
                       <a:solidFill>
-                        <a:srgbClr val="D7D1FA"/>
+                        <a:srgbClr val="FAD1E6"/>
                       </a:solidFill>
                       <a:prstDash val="solid"/>
                     </a:lnL>
                     <a:lnR w="9525" cap="flat" cmpd="sng" algn="ctr">
                       <a:solidFill>
-                        <a:srgbClr val="D7D1FA"/>
+                        <a:srgbClr val="FAD1E6"/>
                       </a:solidFill>
                       <a:prstDash val="solid"/>
                     </a:lnR>
                     <a:lnT w="9525" cap="flat" cmpd="sng" algn="ctr">
                       <a:solidFill>
-                        <a:srgbClr val="D7D1FA"/>
+                        <a:srgbClr val="FAD1E6"/>
                       </a:solidFill>
                       <a:prstDash val="solid"/>
                     </a:lnT>
                     <a:lnB w="9525" cap="flat" cmpd="sng" algn="ctr">
                       <a:solidFill>
-                        <a:srgbClr val="D7D1FA"/>
+                        <a:srgbClr val="FAD1E6"/>
                       </a:solidFill>
                       <a:prstDash val="solid"/>
                     </a:lnB>
                     <a:solidFill>
-                      <a:srgbClr val="D7D1FA"/>
+                      <a:srgbClr val="FAD1E6"/>
                     </a:solidFill>
                   </a:tcPr>
                 </a:tc>
@@ -6146,7 +6450,7 @@
                       <a:r>
                         <a:rPr sz="1400" b="0">
                           <a:solidFill>
-                            <a:srgbClr val="2B2B2B"/>
+                            <a:srgbClr val="26231F"/>
                           </a:solidFill>
                         </a:rPr>
                         <a:t>□</a:t>
@@ -6156,25 +6460,25 @@
                   <a:tcPr anchor="ctr" marL="73152" marR="73152">
                     <a:lnL w="9525" cap="flat" cmpd="sng" algn="ctr">
                       <a:solidFill>
-                        <a:srgbClr val="D7D1FA"/>
+                        <a:srgbClr val="FAD1E6"/>
                       </a:solidFill>
                       <a:prstDash val="solid"/>
                     </a:lnL>
                     <a:lnR w="9525" cap="flat" cmpd="sng" algn="ctr">
                       <a:solidFill>
-                        <a:srgbClr val="D7D1FA"/>
+                        <a:srgbClr val="FAD1E6"/>
                       </a:solidFill>
                       <a:prstDash val="solid"/>
                     </a:lnR>
                     <a:lnT w="9525" cap="flat" cmpd="sng" algn="ctr">
                       <a:solidFill>
-                        <a:srgbClr val="D7D1FA"/>
+                        <a:srgbClr val="FAD1E6"/>
                       </a:solidFill>
                       <a:prstDash val="solid"/>
                     </a:lnT>
                     <a:lnB w="9525" cap="flat" cmpd="sng" algn="ctr">
                       <a:solidFill>
-                        <a:srgbClr val="D7D1FA"/>
+                        <a:srgbClr val="FAD1E6"/>
                       </a:solidFill>
                       <a:prstDash val="solid"/>
                     </a:lnB>
@@ -6192,7 +6496,7 @@
                       <a:r>
                         <a:rPr sz="1400" b="0">
                           <a:solidFill>
-                            <a:srgbClr val="2B2B2B"/>
+                            <a:srgbClr val="26231F"/>
                           </a:solidFill>
                         </a:rPr>
                         <a:t>□</a:t>
@@ -6202,25 +6506,25 @@
                   <a:tcPr anchor="ctr" marL="73152" marR="73152">
                     <a:lnL w="9525" cap="flat" cmpd="sng" algn="ctr">
                       <a:solidFill>
-                        <a:srgbClr val="D7D1FA"/>
+                        <a:srgbClr val="FAD1E6"/>
                       </a:solidFill>
                       <a:prstDash val="solid"/>
                     </a:lnL>
                     <a:lnR w="9525" cap="flat" cmpd="sng" algn="ctr">
                       <a:solidFill>
-                        <a:srgbClr val="D7D1FA"/>
+                        <a:srgbClr val="FAD1E6"/>
                       </a:solidFill>
                       <a:prstDash val="solid"/>
                     </a:lnR>
                     <a:lnT w="9525" cap="flat" cmpd="sng" algn="ctr">
                       <a:solidFill>
-                        <a:srgbClr val="D7D1FA"/>
+                        <a:srgbClr val="FAD1E6"/>
                       </a:solidFill>
                       <a:prstDash val="solid"/>
                     </a:lnT>
                     <a:lnB w="9525" cap="flat" cmpd="sng" algn="ctr">
                       <a:solidFill>
-                        <a:srgbClr val="D7D1FA"/>
+                        <a:srgbClr val="FAD1E6"/>
                       </a:solidFill>
                       <a:prstDash val="solid"/>
                     </a:lnB>
@@ -6238,7 +6542,7 @@
                       <a:r>
                         <a:rPr sz="1400" b="0">
                           <a:solidFill>
-                            <a:srgbClr val="2B2B2B"/>
+                            <a:srgbClr val="26231F"/>
                           </a:solidFill>
                         </a:rPr>
                         <a:t>□</a:t>
@@ -6248,25 +6552,25 @@
                   <a:tcPr anchor="ctr" marL="73152" marR="73152">
                     <a:lnL w="9525" cap="flat" cmpd="sng" algn="ctr">
                       <a:solidFill>
-                        <a:srgbClr val="D7D1FA"/>
+                        <a:srgbClr val="FAD1E6"/>
                       </a:solidFill>
                       <a:prstDash val="solid"/>
                     </a:lnL>
                     <a:lnR w="9525" cap="flat" cmpd="sng" algn="ctr">
                       <a:solidFill>
-                        <a:srgbClr val="D7D1FA"/>
+                        <a:srgbClr val="FAD1E6"/>
                       </a:solidFill>
                       <a:prstDash val="solid"/>
                     </a:lnR>
                     <a:lnT w="9525" cap="flat" cmpd="sng" algn="ctr">
                       <a:solidFill>
-                        <a:srgbClr val="D7D1FA"/>
+                        <a:srgbClr val="FAD1E6"/>
                       </a:solidFill>
                       <a:prstDash val="solid"/>
                     </a:lnT>
                     <a:lnB w="9525" cap="flat" cmpd="sng" algn="ctr">
                       <a:solidFill>
-                        <a:srgbClr val="D7D1FA"/>
+                        <a:srgbClr val="FAD1E6"/>
                       </a:solidFill>
                       <a:prstDash val="solid"/>
                     </a:lnB>
@@ -6286,7 +6590,7 @@
                       <a:r>
                         <a:rPr sz="1400" b="1">
                           <a:solidFill>
-                            <a:srgbClr val="1D115F"/>
+                            <a:srgbClr val="492738"/>
                           </a:solidFill>
                         </a:rPr>
                         <a:t>질병 진단</a:t>
@@ -6296,30 +6600,30 @@
                   <a:tcPr anchor="ctr" marL="73152" marR="73152">
                     <a:lnL w="9525" cap="flat" cmpd="sng" algn="ctr">
                       <a:solidFill>
-                        <a:srgbClr val="D7D1FA"/>
+                        <a:srgbClr val="FAD1E6"/>
                       </a:solidFill>
                       <a:prstDash val="solid"/>
                     </a:lnL>
                     <a:lnR w="9525" cap="flat" cmpd="sng" algn="ctr">
                       <a:solidFill>
-                        <a:srgbClr val="D7D1FA"/>
+                        <a:srgbClr val="FAD1E6"/>
                       </a:solidFill>
                       <a:prstDash val="solid"/>
                     </a:lnR>
                     <a:lnT w="9525" cap="flat" cmpd="sng" algn="ctr">
                       <a:solidFill>
-                        <a:srgbClr val="D7D1FA"/>
+                        <a:srgbClr val="FAD1E6"/>
                       </a:solidFill>
                       <a:prstDash val="solid"/>
                     </a:lnT>
                     <a:lnB w="9525" cap="flat" cmpd="sng" algn="ctr">
                       <a:solidFill>
-                        <a:srgbClr val="D7D1FA"/>
+                        <a:srgbClr val="FAD1E6"/>
                       </a:solidFill>
                       <a:prstDash val="solid"/>
                     </a:lnB>
                     <a:solidFill>
-                      <a:srgbClr val="D7D1FA"/>
+                      <a:srgbClr val="FAD1E6"/>
                     </a:solidFill>
                   </a:tcPr>
                 </a:tc>
@@ -6332,7 +6636,7 @@
                       <a:r>
                         <a:rPr sz="1400" b="0">
                           <a:solidFill>
-                            <a:srgbClr val="2B2B2B"/>
+                            <a:srgbClr val="26231F"/>
                           </a:solidFill>
                         </a:rPr>
                         <a:t>□</a:t>
@@ -6342,30 +6646,30 @@
                   <a:tcPr anchor="ctr" marL="73152" marR="73152">
                     <a:lnL w="9525" cap="flat" cmpd="sng" algn="ctr">
                       <a:solidFill>
-                        <a:srgbClr val="D7D1FA"/>
+                        <a:srgbClr val="FAD1E6"/>
                       </a:solidFill>
                       <a:prstDash val="solid"/>
                     </a:lnL>
                     <a:lnR w="9525" cap="flat" cmpd="sng" algn="ctr">
                       <a:solidFill>
-                        <a:srgbClr val="D7D1FA"/>
+                        <a:srgbClr val="FAD1E6"/>
                       </a:solidFill>
                       <a:prstDash val="solid"/>
                     </a:lnR>
                     <a:lnT w="9525" cap="flat" cmpd="sng" algn="ctr">
                       <a:solidFill>
-                        <a:srgbClr val="D7D1FA"/>
+                        <a:srgbClr val="FAD1E6"/>
                       </a:solidFill>
                       <a:prstDash val="solid"/>
                     </a:lnT>
                     <a:lnB w="9525" cap="flat" cmpd="sng" algn="ctr">
                       <a:solidFill>
-                        <a:srgbClr val="D7D1FA"/>
+                        <a:srgbClr val="FAD1E6"/>
                       </a:solidFill>
                       <a:prstDash val="solid"/>
                     </a:lnB>
                     <a:solidFill>
-                      <a:srgbClr val="F0EEFC"/>
+                      <a:srgbClr val="FDEAF4"/>
                     </a:solidFill>
                   </a:tcPr>
                 </a:tc>
@@ -6378,7 +6682,7 @@
                       <a:r>
                         <a:rPr sz="1400" b="0">
                           <a:solidFill>
-                            <a:srgbClr val="2B2B2B"/>
+                            <a:srgbClr val="26231F"/>
                           </a:solidFill>
                         </a:rPr>
                         <a:t>□</a:t>
@@ -6388,30 +6692,30 @@
                   <a:tcPr anchor="ctr" marL="73152" marR="73152">
                     <a:lnL w="9525" cap="flat" cmpd="sng" algn="ctr">
                       <a:solidFill>
-                        <a:srgbClr val="D7D1FA"/>
+                        <a:srgbClr val="FAD1E6"/>
                       </a:solidFill>
                       <a:prstDash val="solid"/>
                     </a:lnL>
                     <a:lnR w="9525" cap="flat" cmpd="sng" algn="ctr">
                       <a:solidFill>
-                        <a:srgbClr val="D7D1FA"/>
+                        <a:srgbClr val="FAD1E6"/>
                       </a:solidFill>
                       <a:prstDash val="solid"/>
                     </a:lnR>
                     <a:lnT w="9525" cap="flat" cmpd="sng" algn="ctr">
                       <a:solidFill>
-                        <a:srgbClr val="D7D1FA"/>
+                        <a:srgbClr val="FAD1E6"/>
                       </a:solidFill>
                       <a:prstDash val="solid"/>
                     </a:lnT>
                     <a:lnB w="9525" cap="flat" cmpd="sng" algn="ctr">
                       <a:solidFill>
-                        <a:srgbClr val="D7D1FA"/>
+                        <a:srgbClr val="FAD1E6"/>
                       </a:solidFill>
                       <a:prstDash val="solid"/>
                     </a:lnB>
                     <a:solidFill>
-                      <a:srgbClr val="F0EEFC"/>
+                      <a:srgbClr val="FDEAF4"/>
                     </a:solidFill>
                   </a:tcPr>
                 </a:tc>
@@ -6424,7 +6728,7 @@
                       <a:r>
                         <a:rPr sz="1400" b="0">
                           <a:solidFill>
-                            <a:srgbClr val="2B2B2B"/>
+                            <a:srgbClr val="26231F"/>
                           </a:solidFill>
                         </a:rPr>
                         <a:t>□</a:t>
@@ -6434,30 +6738,30 @@
                   <a:tcPr anchor="ctr" marL="73152" marR="73152">
                     <a:lnL w="9525" cap="flat" cmpd="sng" algn="ctr">
                       <a:solidFill>
-                        <a:srgbClr val="D7D1FA"/>
+                        <a:srgbClr val="FAD1E6"/>
                       </a:solidFill>
                       <a:prstDash val="solid"/>
                     </a:lnL>
                     <a:lnR w="9525" cap="flat" cmpd="sng" algn="ctr">
                       <a:solidFill>
-                        <a:srgbClr val="D7D1FA"/>
+                        <a:srgbClr val="FAD1E6"/>
                       </a:solidFill>
                       <a:prstDash val="solid"/>
                     </a:lnR>
                     <a:lnT w="9525" cap="flat" cmpd="sng" algn="ctr">
                       <a:solidFill>
-                        <a:srgbClr val="D7D1FA"/>
+                        <a:srgbClr val="FAD1E6"/>
                       </a:solidFill>
                       <a:prstDash val="solid"/>
                     </a:lnT>
                     <a:lnB w="9525" cap="flat" cmpd="sng" algn="ctr">
                       <a:solidFill>
-                        <a:srgbClr val="D7D1FA"/>
+                        <a:srgbClr val="FAD1E6"/>
                       </a:solidFill>
                       <a:prstDash val="solid"/>
                     </a:lnB>
                     <a:solidFill>
-                      <a:srgbClr val="F0EEFC"/>
+                      <a:srgbClr val="FDEAF4"/>
                     </a:solidFill>
                   </a:tcPr>
                 </a:tc>
@@ -6472,7 +6776,7 @@
                       <a:r>
                         <a:rPr sz="1400" b="1">
                           <a:solidFill>
-                            <a:srgbClr val="1D115F"/>
+                            <a:srgbClr val="492738"/>
                           </a:solidFill>
                         </a:rPr>
                         <a:t>암</a:t>
@@ -6482,30 +6786,30 @@
                   <a:tcPr anchor="ctr" marL="73152" marR="73152">
                     <a:lnL w="9525" cap="flat" cmpd="sng" algn="ctr">
                       <a:solidFill>
-                        <a:srgbClr val="D7D1FA"/>
+                        <a:srgbClr val="FAD1E6"/>
                       </a:solidFill>
                       <a:prstDash val="solid"/>
                     </a:lnL>
                     <a:lnR w="9525" cap="flat" cmpd="sng" algn="ctr">
                       <a:solidFill>
-                        <a:srgbClr val="D7D1FA"/>
+                        <a:srgbClr val="FAD1E6"/>
                       </a:solidFill>
                       <a:prstDash val="solid"/>
                     </a:lnR>
                     <a:lnT w="9525" cap="flat" cmpd="sng" algn="ctr">
                       <a:solidFill>
-                        <a:srgbClr val="D7D1FA"/>
+                        <a:srgbClr val="FAD1E6"/>
                       </a:solidFill>
                       <a:prstDash val="solid"/>
                     </a:lnT>
                     <a:lnB w="9525" cap="flat" cmpd="sng" algn="ctr">
                       <a:solidFill>
-                        <a:srgbClr val="D7D1FA"/>
+                        <a:srgbClr val="FAD1E6"/>
                       </a:solidFill>
                       <a:prstDash val="solid"/>
                     </a:lnB>
                     <a:solidFill>
-                      <a:srgbClr val="D7D1FA"/>
+                      <a:srgbClr val="FAD1E6"/>
                     </a:solidFill>
                   </a:tcPr>
                 </a:tc>
@@ -6518,7 +6822,7 @@
                       <a:r>
                         <a:rPr sz="1400" b="0">
                           <a:solidFill>
-                            <a:srgbClr val="2B2B2B"/>
+                            <a:srgbClr val="26231F"/>
                           </a:solidFill>
                         </a:rPr>
                         <a:t>□</a:t>
@@ -6528,25 +6832,25 @@
                   <a:tcPr anchor="ctr" marL="73152" marR="73152">
                     <a:lnL w="9525" cap="flat" cmpd="sng" algn="ctr">
                       <a:solidFill>
-                        <a:srgbClr val="D7D1FA"/>
+                        <a:srgbClr val="FAD1E6"/>
                       </a:solidFill>
                       <a:prstDash val="solid"/>
                     </a:lnL>
                     <a:lnR w="9525" cap="flat" cmpd="sng" algn="ctr">
                       <a:solidFill>
-                        <a:srgbClr val="D7D1FA"/>
+                        <a:srgbClr val="FAD1E6"/>
                       </a:solidFill>
                       <a:prstDash val="solid"/>
                     </a:lnR>
                     <a:lnT w="9525" cap="flat" cmpd="sng" algn="ctr">
                       <a:solidFill>
-                        <a:srgbClr val="D7D1FA"/>
+                        <a:srgbClr val="FAD1E6"/>
                       </a:solidFill>
                       <a:prstDash val="solid"/>
                     </a:lnT>
                     <a:lnB w="9525" cap="flat" cmpd="sng" algn="ctr">
                       <a:solidFill>
-                        <a:srgbClr val="D7D1FA"/>
+                        <a:srgbClr val="FAD1E6"/>
                       </a:solidFill>
                       <a:prstDash val="solid"/>
                     </a:lnB>
@@ -6564,7 +6868,7 @@
                       <a:r>
                         <a:rPr sz="1400" b="0">
                           <a:solidFill>
-                            <a:srgbClr val="2B2B2B"/>
+                            <a:srgbClr val="26231F"/>
                           </a:solidFill>
                         </a:rPr>
                         <a:t>□</a:t>
@@ -6574,25 +6878,25 @@
                   <a:tcPr anchor="ctr" marL="73152" marR="73152">
                     <a:lnL w="9525" cap="flat" cmpd="sng" algn="ctr">
                       <a:solidFill>
-                        <a:srgbClr val="D7D1FA"/>
+                        <a:srgbClr val="FAD1E6"/>
                       </a:solidFill>
                       <a:prstDash val="solid"/>
                     </a:lnL>
                     <a:lnR w="9525" cap="flat" cmpd="sng" algn="ctr">
                       <a:solidFill>
-                        <a:srgbClr val="D7D1FA"/>
+                        <a:srgbClr val="FAD1E6"/>
                       </a:solidFill>
                       <a:prstDash val="solid"/>
                     </a:lnR>
                     <a:lnT w="9525" cap="flat" cmpd="sng" algn="ctr">
                       <a:solidFill>
-                        <a:srgbClr val="D7D1FA"/>
+                        <a:srgbClr val="FAD1E6"/>
                       </a:solidFill>
                       <a:prstDash val="solid"/>
                     </a:lnT>
                     <a:lnB w="9525" cap="flat" cmpd="sng" algn="ctr">
                       <a:solidFill>
-                        <a:srgbClr val="D7D1FA"/>
+                        <a:srgbClr val="FAD1E6"/>
                       </a:solidFill>
                       <a:prstDash val="solid"/>
                     </a:lnB>
@@ -6610,7 +6914,7 @@
                       <a:r>
                         <a:rPr sz="1400" b="0">
                           <a:solidFill>
-                            <a:srgbClr val="2B2B2B"/>
+                            <a:srgbClr val="26231F"/>
                           </a:solidFill>
                         </a:rPr>
                         <a:t>□</a:t>
@@ -6620,25 +6924,25 @@
                   <a:tcPr anchor="ctr" marL="73152" marR="73152">
                     <a:lnL w="9525" cap="flat" cmpd="sng" algn="ctr">
                       <a:solidFill>
-                        <a:srgbClr val="D7D1FA"/>
+                        <a:srgbClr val="FAD1E6"/>
                       </a:solidFill>
                       <a:prstDash val="solid"/>
                     </a:lnL>
                     <a:lnR w="9525" cap="flat" cmpd="sng" algn="ctr">
                       <a:solidFill>
-                        <a:srgbClr val="D7D1FA"/>
+                        <a:srgbClr val="FAD1E6"/>
                       </a:solidFill>
                       <a:prstDash val="solid"/>
                     </a:lnR>
                     <a:lnT w="9525" cap="flat" cmpd="sng" algn="ctr">
                       <a:solidFill>
-                        <a:srgbClr val="D7D1FA"/>
+                        <a:srgbClr val="FAD1E6"/>
                       </a:solidFill>
                       <a:prstDash val="solid"/>
                     </a:lnT>
                     <a:lnB w="9525" cap="flat" cmpd="sng" algn="ctr">
                       <a:solidFill>
-                        <a:srgbClr val="D7D1FA"/>
+                        <a:srgbClr val="FAD1E6"/>
                       </a:solidFill>
                       <a:prstDash val="solid"/>
                     </a:lnB>
@@ -6658,7 +6962,7 @@
                       <a:r>
                         <a:rPr sz="1400" b="1">
                           <a:solidFill>
-                            <a:srgbClr val="1D115F"/>
+                            <a:srgbClr val="492738"/>
                           </a:solidFill>
                         </a:rPr>
                         <a:t>뇌·심장</a:t>
@@ -6668,30 +6972,30 @@
                   <a:tcPr anchor="ctr" marL="73152" marR="73152">
                     <a:lnL w="9525" cap="flat" cmpd="sng" algn="ctr">
                       <a:solidFill>
-                        <a:srgbClr val="D7D1FA"/>
+                        <a:srgbClr val="FAD1E6"/>
                       </a:solidFill>
                       <a:prstDash val="solid"/>
                     </a:lnL>
                     <a:lnR w="9525" cap="flat" cmpd="sng" algn="ctr">
                       <a:solidFill>
-                        <a:srgbClr val="D7D1FA"/>
+                        <a:srgbClr val="FAD1E6"/>
                       </a:solidFill>
                       <a:prstDash val="solid"/>
                     </a:lnR>
                     <a:lnT w="9525" cap="flat" cmpd="sng" algn="ctr">
                       <a:solidFill>
-                        <a:srgbClr val="D7D1FA"/>
+                        <a:srgbClr val="FAD1E6"/>
                       </a:solidFill>
                       <a:prstDash val="solid"/>
                     </a:lnT>
                     <a:lnB w="9525" cap="flat" cmpd="sng" algn="ctr">
                       <a:solidFill>
-                        <a:srgbClr val="D7D1FA"/>
+                        <a:srgbClr val="FAD1E6"/>
                       </a:solidFill>
                       <a:prstDash val="solid"/>
                     </a:lnB>
                     <a:solidFill>
-                      <a:srgbClr val="D7D1FA"/>
+                      <a:srgbClr val="FAD1E6"/>
                     </a:solidFill>
                   </a:tcPr>
                 </a:tc>
@@ -6704,7 +7008,7 @@
                       <a:r>
                         <a:rPr sz="1400" b="0">
                           <a:solidFill>
-                            <a:srgbClr val="2B2B2B"/>
+                            <a:srgbClr val="26231F"/>
                           </a:solidFill>
                         </a:rPr>
                         <a:t>□</a:t>
@@ -6714,30 +7018,30 @@
                   <a:tcPr anchor="ctr" marL="73152" marR="73152">
                     <a:lnL w="9525" cap="flat" cmpd="sng" algn="ctr">
                       <a:solidFill>
-                        <a:srgbClr val="D7D1FA"/>
+                        <a:srgbClr val="FAD1E6"/>
                       </a:solidFill>
                       <a:prstDash val="solid"/>
                     </a:lnL>
                     <a:lnR w="9525" cap="flat" cmpd="sng" algn="ctr">
                       <a:solidFill>
-                        <a:srgbClr val="D7D1FA"/>
+                        <a:srgbClr val="FAD1E6"/>
                       </a:solidFill>
                       <a:prstDash val="solid"/>
                     </a:lnR>
                     <a:lnT w="9525" cap="flat" cmpd="sng" algn="ctr">
                       <a:solidFill>
-                        <a:srgbClr val="D7D1FA"/>
+                        <a:srgbClr val="FAD1E6"/>
                       </a:solidFill>
                       <a:prstDash val="solid"/>
                     </a:lnT>
                     <a:lnB w="9525" cap="flat" cmpd="sng" algn="ctr">
                       <a:solidFill>
-                        <a:srgbClr val="D7D1FA"/>
+                        <a:srgbClr val="FAD1E6"/>
                       </a:solidFill>
                       <a:prstDash val="solid"/>
                     </a:lnB>
                     <a:solidFill>
-                      <a:srgbClr val="F0EEFC"/>
+                      <a:srgbClr val="FDEAF4"/>
                     </a:solidFill>
                   </a:tcPr>
                 </a:tc>
@@ -6750,7 +7054,7 @@
                       <a:r>
                         <a:rPr sz="1400" b="0">
                           <a:solidFill>
-                            <a:srgbClr val="2B2B2B"/>
+                            <a:srgbClr val="26231F"/>
                           </a:solidFill>
                         </a:rPr>
                         <a:t>□</a:t>
@@ -6760,30 +7064,30 @@
                   <a:tcPr anchor="ctr" marL="73152" marR="73152">
                     <a:lnL w="9525" cap="flat" cmpd="sng" algn="ctr">
                       <a:solidFill>
-                        <a:srgbClr val="D7D1FA"/>
+                        <a:srgbClr val="FAD1E6"/>
                       </a:solidFill>
                       <a:prstDash val="solid"/>
                     </a:lnL>
                     <a:lnR w="9525" cap="flat" cmpd="sng" algn="ctr">
                       <a:solidFill>
-                        <a:srgbClr val="D7D1FA"/>
+                        <a:srgbClr val="FAD1E6"/>
                       </a:solidFill>
                       <a:prstDash val="solid"/>
                     </a:lnR>
                     <a:lnT w="9525" cap="flat" cmpd="sng" algn="ctr">
                       <a:solidFill>
-                        <a:srgbClr val="D7D1FA"/>
+                        <a:srgbClr val="FAD1E6"/>
                       </a:solidFill>
                       <a:prstDash val="solid"/>
                     </a:lnT>
                     <a:lnB w="9525" cap="flat" cmpd="sng" algn="ctr">
                       <a:solidFill>
-                        <a:srgbClr val="D7D1FA"/>
+                        <a:srgbClr val="FAD1E6"/>
                       </a:solidFill>
                       <a:prstDash val="solid"/>
                     </a:lnB>
                     <a:solidFill>
-                      <a:srgbClr val="F0EEFC"/>
+                      <a:srgbClr val="FDEAF4"/>
                     </a:solidFill>
                   </a:tcPr>
                 </a:tc>
@@ -6796,7 +7100,7 @@
                       <a:r>
                         <a:rPr sz="1400" b="0">
                           <a:solidFill>
-                            <a:srgbClr val="2B2B2B"/>
+                            <a:srgbClr val="26231F"/>
                           </a:solidFill>
                         </a:rPr>
                         <a:t>□</a:t>
@@ -6806,30 +7110,30 @@
                   <a:tcPr anchor="ctr" marL="73152" marR="73152">
                     <a:lnL w="9525" cap="flat" cmpd="sng" algn="ctr">
                       <a:solidFill>
-                        <a:srgbClr val="D7D1FA"/>
+                        <a:srgbClr val="FAD1E6"/>
                       </a:solidFill>
                       <a:prstDash val="solid"/>
                     </a:lnL>
                     <a:lnR w="9525" cap="flat" cmpd="sng" algn="ctr">
                       <a:solidFill>
-                        <a:srgbClr val="D7D1FA"/>
+                        <a:srgbClr val="FAD1E6"/>
                       </a:solidFill>
                       <a:prstDash val="solid"/>
                     </a:lnR>
                     <a:lnT w="9525" cap="flat" cmpd="sng" algn="ctr">
                       <a:solidFill>
-                        <a:srgbClr val="D7D1FA"/>
+                        <a:srgbClr val="FAD1E6"/>
                       </a:solidFill>
                       <a:prstDash val="solid"/>
                     </a:lnT>
                     <a:lnB w="9525" cap="flat" cmpd="sng" algn="ctr">
                       <a:solidFill>
-                        <a:srgbClr val="D7D1FA"/>
+                        <a:srgbClr val="FAD1E6"/>
                       </a:solidFill>
                       <a:prstDash val="solid"/>
                     </a:lnB>
                     <a:solidFill>
-                      <a:srgbClr val="F0EEFC"/>
+                      <a:srgbClr val="FDEAF4"/>
                     </a:solidFill>
                   </a:tcPr>
                 </a:tc>
@@ -6844,7 +7148,7 @@
                       <a:r>
                         <a:rPr sz="1400" b="1">
                           <a:solidFill>
-                            <a:srgbClr val="1D115F"/>
+                            <a:srgbClr val="492738"/>
                           </a:solidFill>
                         </a:rPr>
                         <a:t>입원·수술</a:t>
@@ -6854,30 +7158,30 @@
                   <a:tcPr anchor="ctr" marL="73152" marR="73152">
                     <a:lnL w="9525" cap="flat" cmpd="sng" algn="ctr">
                       <a:solidFill>
-                        <a:srgbClr val="D7D1FA"/>
+                        <a:srgbClr val="FAD1E6"/>
                       </a:solidFill>
                       <a:prstDash val="solid"/>
                     </a:lnL>
                     <a:lnR w="9525" cap="flat" cmpd="sng" algn="ctr">
                       <a:solidFill>
-                        <a:srgbClr val="D7D1FA"/>
+                        <a:srgbClr val="FAD1E6"/>
                       </a:solidFill>
                       <a:prstDash val="solid"/>
                     </a:lnR>
                     <a:lnT w="9525" cap="flat" cmpd="sng" algn="ctr">
                       <a:solidFill>
-                        <a:srgbClr val="D7D1FA"/>
+                        <a:srgbClr val="FAD1E6"/>
                       </a:solidFill>
                       <a:prstDash val="solid"/>
                     </a:lnT>
                     <a:lnB w="9525" cap="flat" cmpd="sng" algn="ctr">
                       <a:solidFill>
-                        <a:srgbClr val="D7D1FA"/>
+                        <a:srgbClr val="FAD1E6"/>
                       </a:solidFill>
                       <a:prstDash val="solid"/>
                     </a:lnB>
                     <a:solidFill>
-                      <a:srgbClr val="D7D1FA"/>
+                      <a:srgbClr val="FAD1E6"/>
                     </a:solidFill>
                   </a:tcPr>
                 </a:tc>
@@ -6890,7 +7194,7 @@
                       <a:r>
                         <a:rPr sz="1400" b="0">
                           <a:solidFill>
-                            <a:srgbClr val="2B2B2B"/>
+                            <a:srgbClr val="26231F"/>
                           </a:solidFill>
                         </a:rPr>
                         <a:t>□</a:t>
@@ -6900,25 +7204,25 @@
                   <a:tcPr anchor="ctr" marL="73152" marR="73152">
                     <a:lnL w="9525" cap="flat" cmpd="sng" algn="ctr">
                       <a:solidFill>
-                        <a:srgbClr val="D7D1FA"/>
+                        <a:srgbClr val="FAD1E6"/>
                       </a:solidFill>
                       <a:prstDash val="solid"/>
                     </a:lnL>
                     <a:lnR w="9525" cap="flat" cmpd="sng" algn="ctr">
                       <a:solidFill>
-                        <a:srgbClr val="D7D1FA"/>
+                        <a:srgbClr val="FAD1E6"/>
                       </a:solidFill>
                       <a:prstDash val="solid"/>
                     </a:lnR>
                     <a:lnT w="9525" cap="flat" cmpd="sng" algn="ctr">
                       <a:solidFill>
-                        <a:srgbClr val="D7D1FA"/>
+                        <a:srgbClr val="FAD1E6"/>
                       </a:solidFill>
                       <a:prstDash val="solid"/>
                     </a:lnT>
                     <a:lnB w="9525" cap="flat" cmpd="sng" algn="ctr">
                       <a:solidFill>
-                        <a:srgbClr val="D7D1FA"/>
+                        <a:srgbClr val="FAD1E6"/>
                       </a:solidFill>
                       <a:prstDash val="solid"/>
                     </a:lnB>
@@ -6936,7 +7240,7 @@
                       <a:r>
                         <a:rPr sz="1400" b="0">
                           <a:solidFill>
-                            <a:srgbClr val="2B2B2B"/>
+                            <a:srgbClr val="26231F"/>
                           </a:solidFill>
                         </a:rPr>
                         <a:t>□</a:t>
@@ -6946,25 +7250,25 @@
                   <a:tcPr anchor="ctr" marL="73152" marR="73152">
                     <a:lnL w="9525" cap="flat" cmpd="sng" algn="ctr">
                       <a:solidFill>
-                        <a:srgbClr val="D7D1FA"/>
+                        <a:srgbClr val="FAD1E6"/>
                       </a:solidFill>
                       <a:prstDash val="solid"/>
                     </a:lnL>
                     <a:lnR w="9525" cap="flat" cmpd="sng" algn="ctr">
                       <a:solidFill>
-                        <a:srgbClr val="D7D1FA"/>
+                        <a:srgbClr val="FAD1E6"/>
                       </a:solidFill>
                       <a:prstDash val="solid"/>
                     </a:lnR>
                     <a:lnT w="9525" cap="flat" cmpd="sng" algn="ctr">
                       <a:solidFill>
-                        <a:srgbClr val="D7D1FA"/>
+                        <a:srgbClr val="FAD1E6"/>
                       </a:solidFill>
                       <a:prstDash val="solid"/>
                     </a:lnT>
                     <a:lnB w="9525" cap="flat" cmpd="sng" algn="ctr">
                       <a:solidFill>
-                        <a:srgbClr val="D7D1FA"/>
+                        <a:srgbClr val="FAD1E6"/>
                       </a:solidFill>
                       <a:prstDash val="solid"/>
                     </a:lnB>
@@ -6982,7 +7286,7 @@
                       <a:r>
                         <a:rPr sz="1400" b="0">
                           <a:solidFill>
-                            <a:srgbClr val="2B2B2B"/>
+                            <a:srgbClr val="26231F"/>
                           </a:solidFill>
                         </a:rPr>
                         <a:t>□</a:t>
@@ -6992,25 +7296,25 @@
                   <a:tcPr anchor="ctr" marL="73152" marR="73152">
                     <a:lnL w="9525" cap="flat" cmpd="sng" algn="ctr">
                       <a:solidFill>
-                        <a:srgbClr val="D7D1FA"/>
+                        <a:srgbClr val="FAD1E6"/>
                       </a:solidFill>
                       <a:prstDash val="solid"/>
                     </a:lnL>
                     <a:lnR w="9525" cap="flat" cmpd="sng" algn="ctr">
                       <a:solidFill>
-                        <a:srgbClr val="D7D1FA"/>
+                        <a:srgbClr val="FAD1E6"/>
                       </a:solidFill>
                       <a:prstDash val="solid"/>
                     </a:lnR>
                     <a:lnT w="9525" cap="flat" cmpd="sng" algn="ctr">
                       <a:solidFill>
-                        <a:srgbClr val="D7D1FA"/>
+                        <a:srgbClr val="FAD1E6"/>
                       </a:solidFill>
                       <a:prstDash val="solid"/>
                     </a:lnT>
                     <a:lnB w="9525" cap="flat" cmpd="sng" algn="ctr">
                       <a:solidFill>
-                        <a:srgbClr val="D7D1FA"/>
+                        <a:srgbClr val="FAD1E6"/>
                       </a:solidFill>
                       <a:prstDash val="solid"/>
                     </a:lnB>
@@ -7030,7 +7334,7 @@
                       <a:r>
                         <a:rPr sz="1400" b="1">
                           <a:solidFill>
-                            <a:srgbClr val="1D115F"/>
+                            <a:srgbClr val="492738"/>
                           </a:solidFill>
                         </a:rPr>
                         <a:t>상해</a:t>
@@ -7040,30 +7344,30 @@
                   <a:tcPr anchor="ctr" marL="73152" marR="73152">
                     <a:lnL w="9525" cap="flat" cmpd="sng" algn="ctr">
                       <a:solidFill>
-                        <a:srgbClr val="D7D1FA"/>
+                        <a:srgbClr val="FAD1E6"/>
                       </a:solidFill>
                       <a:prstDash val="solid"/>
                     </a:lnL>
                     <a:lnR w="9525" cap="flat" cmpd="sng" algn="ctr">
                       <a:solidFill>
-                        <a:srgbClr val="D7D1FA"/>
+                        <a:srgbClr val="FAD1E6"/>
                       </a:solidFill>
                       <a:prstDash val="solid"/>
                     </a:lnR>
                     <a:lnT w="9525" cap="flat" cmpd="sng" algn="ctr">
                       <a:solidFill>
-                        <a:srgbClr val="D7D1FA"/>
+                        <a:srgbClr val="FAD1E6"/>
                       </a:solidFill>
                       <a:prstDash val="solid"/>
                     </a:lnT>
                     <a:lnB w="9525" cap="flat" cmpd="sng" algn="ctr">
                       <a:solidFill>
-                        <a:srgbClr val="D7D1FA"/>
+                        <a:srgbClr val="FAD1E6"/>
                       </a:solidFill>
                       <a:prstDash val="solid"/>
                     </a:lnB>
                     <a:solidFill>
-                      <a:srgbClr val="D7D1FA"/>
+                      <a:srgbClr val="FAD1E6"/>
                     </a:solidFill>
                   </a:tcPr>
                 </a:tc>
@@ -7076,7 +7380,7 @@
                       <a:r>
                         <a:rPr sz="1400" b="0">
                           <a:solidFill>
-                            <a:srgbClr val="2B2B2B"/>
+                            <a:srgbClr val="26231F"/>
                           </a:solidFill>
                         </a:rPr>
                         <a:t>□</a:t>
@@ -7086,30 +7390,30 @@
                   <a:tcPr anchor="ctr" marL="73152" marR="73152">
                     <a:lnL w="9525" cap="flat" cmpd="sng" algn="ctr">
                       <a:solidFill>
-                        <a:srgbClr val="D7D1FA"/>
+                        <a:srgbClr val="FAD1E6"/>
                       </a:solidFill>
                       <a:prstDash val="solid"/>
                     </a:lnL>
                     <a:lnR w="9525" cap="flat" cmpd="sng" algn="ctr">
                       <a:solidFill>
-                        <a:srgbClr val="D7D1FA"/>
+                        <a:srgbClr val="FAD1E6"/>
                       </a:solidFill>
                       <a:prstDash val="solid"/>
                     </a:lnR>
                     <a:lnT w="9525" cap="flat" cmpd="sng" algn="ctr">
                       <a:solidFill>
-                        <a:srgbClr val="D7D1FA"/>
+                        <a:srgbClr val="FAD1E6"/>
                       </a:solidFill>
                       <a:prstDash val="solid"/>
                     </a:lnT>
                     <a:lnB w="9525" cap="flat" cmpd="sng" algn="ctr">
                       <a:solidFill>
-                        <a:srgbClr val="D7D1FA"/>
+                        <a:srgbClr val="FAD1E6"/>
                       </a:solidFill>
                       <a:prstDash val="solid"/>
                     </a:lnB>
                     <a:solidFill>
-                      <a:srgbClr val="F0EEFC"/>
+                      <a:srgbClr val="FDEAF4"/>
                     </a:solidFill>
                   </a:tcPr>
                 </a:tc>
@@ -7122,7 +7426,7 @@
                       <a:r>
                         <a:rPr sz="1400" b="0">
                           <a:solidFill>
-                            <a:srgbClr val="2B2B2B"/>
+                            <a:srgbClr val="26231F"/>
                           </a:solidFill>
                         </a:rPr>
                         <a:t>□</a:t>
@@ -7132,30 +7436,30 @@
                   <a:tcPr anchor="ctr" marL="73152" marR="73152">
                     <a:lnL w="9525" cap="flat" cmpd="sng" algn="ctr">
                       <a:solidFill>
-                        <a:srgbClr val="D7D1FA"/>
+                        <a:srgbClr val="FAD1E6"/>
                       </a:solidFill>
                       <a:prstDash val="solid"/>
                     </a:lnL>
                     <a:lnR w="9525" cap="flat" cmpd="sng" algn="ctr">
                       <a:solidFill>
-                        <a:srgbClr val="D7D1FA"/>
+                        <a:srgbClr val="FAD1E6"/>
                       </a:solidFill>
                       <a:prstDash val="solid"/>
                     </a:lnR>
                     <a:lnT w="9525" cap="flat" cmpd="sng" algn="ctr">
                       <a:solidFill>
-                        <a:srgbClr val="D7D1FA"/>
+                        <a:srgbClr val="FAD1E6"/>
                       </a:solidFill>
                       <a:prstDash val="solid"/>
                     </a:lnT>
                     <a:lnB w="9525" cap="flat" cmpd="sng" algn="ctr">
                       <a:solidFill>
-                        <a:srgbClr val="D7D1FA"/>
+                        <a:srgbClr val="FAD1E6"/>
                       </a:solidFill>
                       <a:prstDash val="solid"/>
                     </a:lnB>
                     <a:solidFill>
-                      <a:srgbClr val="F0EEFC"/>
+                      <a:srgbClr val="FDEAF4"/>
                     </a:solidFill>
                   </a:tcPr>
                 </a:tc>
@@ -7168,7 +7472,7 @@
                       <a:r>
                         <a:rPr sz="1400" b="0">
                           <a:solidFill>
-                            <a:srgbClr val="2B2B2B"/>
+                            <a:srgbClr val="26231F"/>
                           </a:solidFill>
                         </a:rPr>
                         <a:t>□</a:t>
@@ -7178,30 +7482,30 @@
                   <a:tcPr anchor="ctr" marL="73152" marR="73152">
                     <a:lnL w="9525" cap="flat" cmpd="sng" algn="ctr">
                       <a:solidFill>
-                        <a:srgbClr val="D7D1FA"/>
+                        <a:srgbClr val="FAD1E6"/>
                       </a:solidFill>
                       <a:prstDash val="solid"/>
                     </a:lnL>
                     <a:lnR w="9525" cap="flat" cmpd="sng" algn="ctr">
                       <a:solidFill>
-                        <a:srgbClr val="D7D1FA"/>
+                        <a:srgbClr val="FAD1E6"/>
                       </a:solidFill>
                       <a:prstDash val="solid"/>
                     </a:lnR>
                     <a:lnT w="9525" cap="flat" cmpd="sng" algn="ctr">
                       <a:solidFill>
-                        <a:srgbClr val="D7D1FA"/>
+                        <a:srgbClr val="FAD1E6"/>
                       </a:solidFill>
                       <a:prstDash val="solid"/>
                     </a:lnT>
                     <a:lnB w="9525" cap="flat" cmpd="sng" algn="ctr">
                       <a:solidFill>
-                        <a:srgbClr val="D7D1FA"/>
+                        <a:srgbClr val="FAD1E6"/>
                       </a:solidFill>
                       <a:prstDash val="solid"/>
                     </a:lnB>
                     <a:solidFill>
-                      <a:srgbClr val="F0EEFC"/>
+                      <a:srgbClr val="FDEAF4"/>
                     </a:solidFill>
                   </a:tcPr>
                 </a:tc>
@@ -7216,7 +7520,7 @@
                       <a:r>
                         <a:rPr sz="1400" b="1">
                           <a:solidFill>
-                            <a:srgbClr val="1D115F"/>
+                            <a:srgbClr val="492738"/>
                           </a:solidFill>
                         </a:rPr>
                         <a:t>실손의료</a:t>
@@ -7226,30 +7530,30 @@
                   <a:tcPr anchor="ctr" marL="73152" marR="73152">
                     <a:lnL w="9525" cap="flat" cmpd="sng" algn="ctr">
                       <a:solidFill>
-                        <a:srgbClr val="D7D1FA"/>
+                        <a:srgbClr val="FAD1E6"/>
                       </a:solidFill>
                       <a:prstDash val="solid"/>
                     </a:lnL>
                     <a:lnR w="9525" cap="flat" cmpd="sng" algn="ctr">
                       <a:solidFill>
-                        <a:srgbClr val="D7D1FA"/>
+                        <a:srgbClr val="FAD1E6"/>
                       </a:solidFill>
                       <a:prstDash val="solid"/>
                     </a:lnR>
                     <a:lnT w="9525" cap="flat" cmpd="sng" algn="ctr">
                       <a:solidFill>
-                        <a:srgbClr val="D7D1FA"/>
+                        <a:srgbClr val="FAD1E6"/>
                       </a:solidFill>
                       <a:prstDash val="solid"/>
                     </a:lnT>
                     <a:lnB w="9525" cap="flat" cmpd="sng" algn="ctr">
                       <a:solidFill>
-                        <a:srgbClr val="D7D1FA"/>
+                        <a:srgbClr val="FAD1E6"/>
                       </a:solidFill>
                       <a:prstDash val="solid"/>
                     </a:lnB>
                     <a:solidFill>
-                      <a:srgbClr val="D7D1FA"/>
+                      <a:srgbClr val="FAD1E6"/>
                     </a:solidFill>
                   </a:tcPr>
                 </a:tc>
@@ -7262,7 +7566,7 @@
                       <a:r>
                         <a:rPr sz="1400" b="0">
                           <a:solidFill>
-                            <a:srgbClr val="2B2B2B"/>
+                            <a:srgbClr val="26231F"/>
                           </a:solidFill>
                         </a:rPr>
                         <a:t>□</a:t>
@@ -7272,25 +7576,25 @@
                   <a:tcPr anchor="ctr" marL="73152" marR="73152">
                     <a:lnL w="9525" cap="flat" cmpd="sng" algn="ctr">
                       <a:solidFill>
-                        <a:srgbClr val="D7D1FA"/>
+                        <a:srgbClr val="FAD1E6"/>
                       </a:solidFill>
                       <a:prstDash val="solid"/>
                     </a:lnL>
                     <a:lnR w="9525" cap="flat" cmpd="sng" algn="ctr">
                       <a:solidFill>
-                        <a:srgbClr val="D7D1FA"/>
+                        <a:srgbClr val="FAD1E6"/>
                       </a:solidFill>
                       <a:prstDash val="solid"/>
                     </a:lnR>
                     <a:lnT w="9525" cap="flat" cmpd="sng" algn="ctr">
                       <a:solidFill>
-                        <a:srgbClr val="D7D1FA"/>
+                        <a:srgbClr val="FAD1E6"/>
                       </a:solidFill>
                       <a:prstDash val="solid"/>
                     </a:lnT>
                     <a:lnB w="9525" cap="flat" cmpd="sng" algn="ctr">
                       <a:solidFill>
-                        <a:srgbClr val="D7D1FA"/>
+                        <a:srgbClr val="FAD1E6"/>
                       </a:solidFill>
                       <a:prstDash val="solid"/>
                     </a:lnB>
@@ -7308,7 +7612,7 @@
                       <a:r>
                         <a:rPr sz="1400" b="0">
                           <a:solidFill>
-                            <a:srgbClr val="2B2B2B"/>
+                            <a:srgbClr val="26231F"/>
                           </a:solidFill>
                         </a:rPr>
                         <a:t>□</a:t>
@@ -7318,25 +7622,25 @@
                   <a:tcPr anchor="ctr" marL="73152" marR="73152">
                     <a:lnL w="9525" cap="flat" cmpd="sng" algn="ctr">
                       <a:solidFill>
-                        <a:srgbClr val="D7D1FA"/>
+                        <a:srgbClr val="FAD1E6"/>
                       </a:solidFill>
                       <a:prstDash val="solid"/>
                     </a:lnL>
                     <a:lnR w="9525" cap="flat" cmpd="sng" algn="ctr">
                       <a:solidFill>
-                        <a:srgbClr val="D7D1FA"/>
+                        <a:srgbClr val="FAD1E6"/>
                       </a:solidFill>
                       <a:prstDash val="solid"/>
                     </a:lnR>
                     <a:lnT w="9525" cap="flat" cmpd="sng" algn="ctr">
                       <a:solidFill>
-                        <a:srgbClr val="D7D1FA"/>
+                        <a:srgbClr val="FAD1E6"/>
                       </a:solidFill>
                       <a:prstDash val="solid"/>
                     </a:lnT>
                     <a:lnB w="9525" cap="flat" cmpd="sng" algn="ctr">
                       <a:solidFill>
-                        <a:srgbClr val="D7D1FA"/>
+                        <a:srgbClr val="FAD1E6"/>
                       </a:solidFill>
                       <a:prstDash val="solid"/>
                     </a:lnB>
@@ -7354,7 +7658,7 @@
                       <a:r>
                         <a:rPr sz="1400" b="0">
                           <a:solidFill>
-                            <a:srgbClr val="2B2B2B"/>
+                            <a:srgbClr val="26231F"/>
                           </a:solidFill>
                         </a:rPr>
                         <a:t>□</a:t>
@@ -7364,25 +7668,25 @@
                   <a:tcPr anchor="ctr" marL="73152" marR="73152">
                     <a:lnL w="9525" cap="flat" cmpd="sng" algn="ctr">
                       <a:solidFill>
-                        <a:srgbClr val="D7D1FA"/>
+                        <a:srgbClr val="FAD1E6"/>
                       </a:solidFill>
                       <a:prstDash val="solid"/>
                     </a:lnL>
                     <a:lnR w="9525" cap="flat" cmpd="sng" algn="ctr">
                       <a:solidFill>
-                        <a:srgbClr val="D7D1FA"/>
+                        <a:srgbClr val="FAD1E6"/>
                       </a:solidFill>
                       <a:prstDash val="solid"/>
                     </a:lnR>
                     <a:lnT w="9525" cap="flat" cmpd="sng" algn="ctr">
                       <a:solidFill>
-                        <a:srgbClr val="D7D1FA"/>
+                        <a:srgbClr val="FAD1E6"/>
                       </a:solidFill>
                       <a:prstDash val="solid"/>
                     </a:lnT>
                     <a:lnB w="9525" cap="flat" cmpd="sng" algn="ctr">
                       <a:solidFill>
-                        <a:srgbClr val="D7D1FA"/>
+                        <a:srgbClr val="FAD1E6"/>
                       </a:solidFill>
                       <a:prstDash val="solid"/>
                     </a:lnB>
@@ -7402,7 +7706,7 @@
                       <a:r>
                         <a:rPr sz="1400" b="1">
                           <a:solidFill>
-                            <a:srgbClr val="1D115F"/>
+                            <a:srgbClr val="492738"/>
                           </a:solidFill>
                         </a:rPr>
                         <a:t>연금·노후자금</a:t>
@@ -7412,30 +7716,30 @@
                   <a:tcPr anchor="ctr" marL="73152" marR="73152">
                     <a:lnL w="9525" cap="flat" cmpd="sng" algn="ctr">
                       <a:solidFill>
-                        <a:srgbClr val="D7D1FA"/>
+                        <a:srgbClr val="FAD1E6"/>
                       </a:solidFill>
                       <a:prstDash val="solid"/>
                     </a:lnL>
                     <a:lnR w="9525" cap="flat" cmpd="sng" algn="ctr">
                       <a:solidFill>
-                        <a:srgbClr val="D7D1FA"/>
+                        <a:srgbClr val="FAD1E6"/>
                       </a:solidFill>
                       <a:prstDash val="solid"/>
                     </a:lnR>
                     <a:lnT w="9525" cap="flat" cmpd="sng" algn="ctr">
                       <a:solidFill>
-                        <a:srgbClr val="D7D1FA"/>
+                        <a:srgbClr val="FAD1E6"/>
                       </a:solidFill>
                       <a:prstDash val="solid"/>
                     </a:lnT>
                     <a:lnB w="9525" cap="flat" cmpd="sng" algn="ctr">
                       <a:solidFill>
-                        <a:srgbClr val="D7D1FA"/>
+                        <a:srgbClr val="FAD1E6"/>
                       </a:solidFill>
                       <a:prstDash val="solid"/>
                     </a:lnB>
                     <a:solidFill>
-                      <a:srgbClr val="D7D1FA"/>
+                      <a:srgbClr val="FAD1E6"/>
                     </a:solidFill>
                   </a:tcPr>
                 </a:tc>
@@ -7448,7 +7752,7 @@
                       <a:r>
                         <a:rPr sz="1400" b="0">
                           <a:solidFill>
-                            <a:srgbClr val="2B2B2B"/>
+                            <a:srgbClr val="26231F"/>
                           </a:solidFill>
                         </a:rPr>
                         <a:t>□</a:t>
@@ -7458,30 +7762,30 @@
                   <a:tcPr anchor="ctr" marL="73152" marR="73152">
                     <a:lnL w="9525" cap="flat" cmpd="sng" algn="ctr">
                       <a:solidFill>
-                        <a:srgbClr val="D7D1FA"/>
+                        <a:srgbClr val="FAD1E6"/>
                       </a:solidFill>
                       <a:prstDash val="solid"/>
                     </a:lnL>
                     <a:lnR w="9525" cap="flat" cmpd="sng" algn="ctr">
                       <a:solidFill>
-                        <a:srgbClr val="D7D1FA"/>
+                        <a:srgbClr val="FAD1E6"/>
                       </a:solidFill>
                       <a:prstDash val="solid"/>
                     </a:lnR>
                     <a:lnT w="9525" cap="flat" cmpd="sng" algn="ctr">
                       <a:solidFill>
-                        <a:srgbClr val="D7D1FA"/>
+                        <a:srgbClr val="FAD1E6"/>
                       </a:solidFill>
                       <a:prstDash val="solid"/>
                     </a:lnT>
                     <a:lnB w="9525" cap="flat" cmpd="sng" algn="ctr">
                       <a:solidFill>
-                        <a:srgbClr val="D7D1FA"/>
+                        <a:srgbClr val="FAD1E6"/>
                       </a:solidFill>
                       <a:prstDash val="solid"/>
                     </a:lnB>
                     <a:solidFill>
-                      <a:srgbClr val="F0EEFC"/>
+                      <a:srgbClr val="FDEAF4"/>
                     </a:solidFill>
                   </a:tcPr>
                 </a:tc>
@@ -7494,7 +7798,7 @@
                       <a:r>
                         <a:rPr sz="1400" b="0">
                           <a:solidFill>
-                            <a:srgbClr val="2B2B2B"/>
+                            <a:srgbClr val="26231F"/>
                           </a:solidFill>
                         </a:rPr>
                         <a:t>□</a:t>
@@ -7504,30 +7808,30 @@
                   <a:tcPr anchor="ctr" marL="73152" marR="73152">
                     <a:lnL w="9525" cap="flat" cmpd="sng" algn="ctr">
                       <a:solidFill>
-                        <a:srgbClr val="D7D1FA"/>
+                        <a:srgbClr val="FAD1E6"/>
                       </a:solidFill>
                       <a:prstDash val="solid"/>
                     </a:lnL>
                     <a:lnR w="9525" cap="flat" cmpd="sng" algn="ctr">
                       <a:solidFill>
-                        <a:srgbClr val="D7D1FA"/>
+                        <a:srgbClr val="FAD1E6"/>
                       </a:solidFill>
                       <a:prstDash val="solid"/>
                     </a:lnR>
                     <a:lnT w="9525" cap="flat" cmpd="sng" algn="ctr">
                       <a:solidFill>
-                        <a:srgbClr val="D7D1FA"/>
+                        <a:srgbClr val="FAD1E6"/>
                       </a:solidFill>
                       <a:prstDash val="solid"/>
                     </a:lnT>
                     <a:lnB w="9525" cap="flat" cmpd="sng" algn="ctr">
                       <a:solidFill>
-                        <a:srgbClr val="D7D1FA"/>
+                        <a:srgbClr val="FAD1E6"/>
                       </a:solidFill>
                       <a:prstDash val="solid"/>
                     </a:lnB>
                     <a:solidFill>
-                      <a:srgbClr val="F0EEFC"/>
+                      <a:srgbClr val="FDEAF4"/>
                     </a:solidFill>
                   </a:tcPr>
                 </a:tc>
@@ -7540,7 +7844,7 @@
                       <a:r>
                         <a:rPr sz="1400" b="0">
                           <a:solidFill>
-                            <a:srgbClr val="2B2B2B"/>
+                            <a:srgbClr val="26231F"/>
                           </a:solidFill>
                         </a:rPr>
                         <a:t>□</a:t>
@@ -7550,30 +7854,30 @@
                   <a:tcPr anchor="ctr" marL="73152" marR="73152">
                     <a:lnL w="9525" cap="flat" cmpd="sng" algn="ctr">
                       <a:solidFill>
-                        <a:srgbClr val="D7D1FA"/>
+                        <a:srgbClr val="FAD1E6"/>
                       </a:solidFill>
                       <a:prstDash val="solid"/>
                     </a:lnL>
                     <a:lnR w="9525" cap="flat" cmpd="sng" algn="ctr">
                       <a:solidFill>
-                        <a:srgbClr val="D7D1FA"/>
+                        <a:srgbClr val="FAD1E6"/>
                       </a:solidFill>
                       <a:prstDash val="solid"/>
                     </a:lnR>
                     <a:lnT w="9525" cap="flat" cmpd="sng" algn="ctr">
                       <a:solidFill>
-                        <a:srgbClr val="D7D1FA"/>
+                        <a:srgbClr val="FAD1E6"/>
                       </a:solidFill>
                       <a:prstDash val="solid"/>
                     </a:lnT>
                     <a:lnB w="9525" cap="flat" cmpd="sng" algn="ctr">
                       <a:solidFill>
-                        <a:srgbClr val="D7D1FA"/>
+                        <a:srgbClr val="FAD1E6"/>
                       </a:solidFill>
                       <a:prstDash val="solid"/>
                     </a:lnB>
                     <a:solidFill>
-                      <a:srgbClr val="F0EEFC"/>
+                      <a:srgbClr val="FDEAF4"/>
                     </a:solidFill>
                   </a:tcPr>
                 </a:tc>
@@ -7596,7 +7900,7 @@
     <p:bg>
       <p:bgPr>
         <a:solidFill>
-          <a:srgbClr val="3D26C5"/>
+          <a:srgbClr val="FDEAF4"/>
         </a:solidFill>
         <a:effectLst/>
       </p:bgPr>
@@ -7616,16 +7920,81 @@
         </p:nvSpPr>
         <p:spPr>
           <a:xfrm>
-            <a:off x="274320" y="274320"/>
-            <a:ext cx="11643055" cy="6309360"/>
-          </a:xfrm>
-          <a:prstGeom prst="roundRect">
-            <a:avLst>
-              <a:gd name="adj" fmla="val 3500"/>
-            </a:avLst>
+            <a:off x="640080" y="6400800"/>
+            <a:ext cx="10911535" cy="10972"/>
+          </a:xfrm>
+          <a:prstGeom prst="rect">
+            <a:avLst/>
           </a:prstGeom>
           <a:solidFill>
-            <a:srgbClr val="FFFFFF"/>
+            <a:srgbClr val="26231F"/>
+          </a:solidFill>
+          <a:ln>
+            <a:noFill/>
+          </a:ln>
+        </p:spPr>
+        <p:txBody>
+          <a:bodyPr rtlCol="0" anchor="ctr"/>
+          <a:lstStyle/>
+          <a:p>
+            <a:pPr algn="ctr"/>
+          </a:p>
+        </p:txBody>
+      </p:sp>
+      <p:sp>
+        <p:nvSpPr>
+          <p:cNvPr id="4" name="하단 라벨"/>
+          <p:cNvSpPr txBox="1"/>
+          <p:nvPr/>
+        </p:nvSpPr>
+        <p:spPr>
+          <a:xfrm>
+            <a:off x="640080" y="6437376"/>
+            <a:ext cx="5486400" cy="274320"/>
+          </a:xfrm>
+          <a:prstGeom prst="rect">
+            <a:avLst/>
+          </a:prstGeom>
+          <a:noFill/>
+        </p:spPr>
+        <p:txBody>
+          <a:bodyPr wrap="square" lIns="54864" rIns="54864" tIns="27432" bIns="27432" anchor="ctr">
+            <a:noAutofit/>
+          </a:bodyPr>
+          <a:lstStyle/>
+          <a:p>
+            <a:pPr algn="l">
+              <a:lnSpc>
+                <a:spcPct val="115000"/>
+              </a:lnSpc>
+            </a:pPr>
+            <a:r>
+              <a:rPr sz="900" b="1" i="0" spc="250">
+                <a:solidFill>
+                  <a:srgbClr val="26231F"/>
+                </a:solidFill>
+              </a:rPr>
+              <a:t>INSURANCE CHECK</a:t>
+            </a:r>
+          </a:p>
+        </p:txBody>
+      </p:sp>
+      <p:sp>
+        <p:nvSpPr>
+          <p:cNvPr id="5" name="포인트"/>
+          <p:cNvSpPr/>
+          <p:nvPr/>
+        </p:nvSpPr>
+        <p:spPr>
+          <a:xfrm>
+            <a:off x="11213287" y="6473952"/>
+            <a:ext cx="219456" cy="219456"/>
+          </a:xfrm>
+          <a:prstGeom prst="mathPlus">
+            <a:avLst/>
+          </a:prstGeom>
+          <a:solidFill>
+            <a:srgbClr val="EA7BB3"/>
           </a:solidFill>
           <a:ln>
             <a:noFill/>
@@ -7651,8 +8020,8 @@
         </p:nvSpPr>
         <p:spPr>
           <a:xfrm>
-            <a:off x="731520" y="548640"/>
-            <a:ext cx="9448495" cy="868680"/>
+            <a:off x="640080" y="502920"/>
+            <a:ext cx="10911535" cy="914400"/>
           </a:xfrm>
         </p:spPr>
         <p:txBody>
@@ -7669,7 +8038,7 @@
             <a:r>
               <a:rPr sz="3000" b="1" i="0">
                 <a:solidFill>
-                  <a:srgbClr val="1D115F"/>
+                  <a:srgbClr val="26231F"/>
                 </a:solidFill>
               </a:rPr>
               <a:t>월 보험료 한눈에</a:t>
@@ -7679,26 +8048,26 @@
       </p:sp>
       <p:sp>
         <p:nvSpPr>
-          <p:cNvPr id="4" name="카드 1"/>
+          <p:cNvPr id="6" name="카드 1"/>
           <p:cNvSpPr/>
           <p:nvPr/>
         </p:nvSpPr>
         <p:spPr>
           <a:xfrm>
-            <a:off x="731520" y="1600200"/>
-            <a:ext cx="3423818" cy="2926080"/>
+            <a:off x="640080" y="1600200"/>
+            <a:ext cx="3484778" cy="2926080"/>
           </a:xfrm>
           <a:prstGeom prst="roundRect">
             <a:avLst>
-              <a:gd name="adj" fmla="val 8000"/>
+              <a:gd name="adj" fmla="val 3000"/>
             </a:avLst>
           </a:prstGeom>
           <a:solidFill>
-            <a:srgbClr val="F0EEFC"/>
+            <a:srgbClr val="FFFFFF"/>
           </a:solidFill>
-          <a:ln w="15875">
+          <a:ln w="9525">
             <a:solidFill>
-              <a:srgbClr val="D7D1FA"/>
+              <a:srgbClr val="FAD1E6"/>
             </a:solidFill>
           </a:ln>
         </p:spPr>
@@ -7712,20 +8081,51 @@
       </p:sp>
       <p:sp>
         <p:nvSpPr>
-          <p:cNvPr id="5" name="번호 1"/>
+          <p:cNvPr id="7" name="위쪽 띠"/>
           <p:cNvSpPr/>
           <p:nvPr/>
         </p:nvSpPr>
         <p:spPr>
           <a:xfrm>
-            <a:off x="914400" y="1783080"/>
-            <a:ext cx="457200" cy="457200"/>
-          </a:xfrm>
-          <a:prstGeom prst="ellipse">
+            <a:off x="649224" y="1609344"/>
+            <a:ext cx="3466490" cy="82296"/>
+          </a:xfrm>
+          <a:prstGeom prst="rect">
             <a:avLst/>
           </a:prstGeom>
           <a:solidFill>
-            <a:srgbClr val="3D26C5"/>
+            <a:srgbClr val="EA7BB3"/>
+          </a:solidFill>
+          <a:ln>
+            <a:noFill/>
+          </a:ln>
+        </p:spPr>
+        <p:txBody>
+          <a:bodyPr rtlCol="0" anchor="ctr"/>
+          <a:lstStyle/>
+          <a:p>
+            <a:pPr algn="ctr"/>
+          </a:p>
+        </p:txBody>
+      </p:sp>
+      <p:sp>
+        <p:nvSpPr>
+          <p:cNvPr id="8" name="번호 1"/>
+          <p:cNvSpPr/>
+          <p:nvPr/>
+        </p:nvSpPr>
+        <p:spPr>
+          <a:xfrm>
+            <a:off x="822959" y="1783080"/>
+            <a:ext cx="457200" cy="457200"/>
+          </a:xfrm>
+          <a:prstGeom prst="roundRect">
+            <a:avLst>
+              <a:gd name="adj" fmla="val 25000"/>
+            </a:avLst>
+          </a:prstGeom>
+          <a:solidFill>
+            <a:srgbClr val="EA7BB3"/>
           </a:solidFill>
           <a:ln>
             <a:noFill/>
@@ -7745,7 +8145,7 @@
             <a:r>
               <a:rPr sz="1600" b="1" i="0">
                 <a:solidFill>
-                  <a:srgbClr val="FFFFFF"/>
+                  <a:srgbClr val="26231F"/>
                 </a:solidFill>
               </a:rPr>
               <a:t>1</a:t>
@@ -7755,14 +8155,14 @@
       </p:sp>
       <p:sp>
         <p:nvSpPr>
-          <p:cNvPr id="6" name="TextBox 5"/>
+          <p:cNvPr id="9" name="TextBox 8"/>
           <p:cNvSpPr txBox="1"/>
           <p:nvPr/>
         </p:nvSpPr>
         <p:spPr>
           <a:xfrm>
-            <a:off x="868680" y="2377440"/>
-            <a:ext cx="3149498" cy="640080"/>
+            <a:off x="777240" y="2377440"/>
+            <a:ext cx="3210458" cy="640080"/>
           </a:xfrm>
           <a:prstGeom prst="rect">
             <a:avLst/>
@@ -7783,7 +8183,7 @@
             <a:r>
               <a:rPr sz="1700" b="1" i="0">
                 <a:solidFill>
-                  <a:srgbClr val="1D115F"/>
+                  <a:srgbClr val="492738"/>
                 </a:solidFill>
               </a:rPr>
               <a:t>월 보험료 합계</a:t>
@@ -7793,14 +8193,14 @@
       </p:sp>
       <p:sp>
         <p:nvSpPr>
-          <p:cNvPr id="7" name="TextBox 6"/>
+          <p:cNvPr id="10" name="TextBox 9"/>
           <p:cNvSpPr txBox="1"/>
           <p:nvPr/>
         </p:nvSpPr>
         <p:spPr>
           <a:xfrm>
-            <a:off x="868680" y="3063240"/>
-            <a:ext cx="3149498" cy="1325880"/>
+            <a:off x="777240" y="3063240"/>
+            <a:ext cx="3210458" cy="1325880"/>
           </a:xfrm>
           <a:prstGeom prst="rect">
             <a:avLst/>
@@ -7821,7 +8221,7 @@
             <a:r>
               <a:rPr sz="3000" b="0" i="0">
                 <a:solidFill>
-                  <a:srgbClr val="2B2B2B"/>
+                  <a:srgbClr val="26231F"/>
                 </a:solidFill>
               </a:rPr>
               <a:t>0원</a:t>
@@ -7831,26 +8231,26 @@
       </p:sp>
       <p:sp>
         <p:nvSpPr>
-          <p:cNvPr id="8" name="카드 2"/>
+          <p:cNvPr id="11" name="카드 2"/>
           <p:cNvSpPr/>
           <p:nvPr/>
         </p:nvSpPr>
         <p:spPr>
           <a:xfrm>
-            <a:off x="4383938" y="1600200"/>
-            <a:ext cx="3423818" cy="2926080"/>
+            <a:off x="4353458" y="1600200"/>
+            <a:ext cx="3484778" cy="2926080"/>
           </a:xfrm>
           <a:prstGeom prst="roundRect">
             <a:avLst>
-              <a:gd name="adj" fmla="val 8000"/>
+              <a:gd name="adj" fmla="val 3000"/>
             </a:avLst>
           </a:prstGeom>
           <a:solidFill>
-            <a:srgbClr val="F0EEFC"/>
+            <a:srgbClr val="FFFFFF"/>
           </a:solidFill>
-          <a:ln w="15875">
+          <a:ln w="9525">
             <a:solidFill>
-              <a:srgbClr val="D7D1FA"/>
+              <a:srgbClr val="FAD1E6"/>
             </a:solidFill>
           </a:ln>
         </p:spPr>
@@ -7864,20 +8264,51 @@
       </p:sp>
       <p:sp>
         <p:nvSpPr>
-          <p:cNvPr id="9" name="번호 2"/>
+          <p:cNvPr id="12" name="위쪽 띠"/>
           <p:cNvSpPr/>
           <p:nvPr/>
         </p:nvSpPr>
         <p:spPr>
           <a:xfrm>
-            <a:off x="4566818" y="1783080"/>
-            <a:ext cx="457200" cy="457200"/>
-          </a:xfrm>
-          <a:prstGeom prst="ellipse">
+            <a:off x="4362602" y="1609344"/>
+            <a:ext cx="3466490" cy="82296"/>
+          </a:xfrm>
+          <a:prstGeom prst="rect">
             <a:avLst/>
           </a:prstGeom>
           <a:solidFill>
-            <a:srgbClr val="3D26C5"/>
+            <a:srgbClr val="EA7BB3"/>
+          </a:solidFill>
+          <a:ln>
+            <a:noFill/>
+          </a:ln>
+        </p:spPr>
+        <p:txBody>
+          <a:bodyPr rtlCol="0" anchor="ctr"/>
+          <a:lstStyle/>
+          <a:p>
+            <a:pPr algn="ctr"/>
+          </a:p>
+        </p:txBody>
+      </p:sp>
+      <p:sp>
+        <p:nvSpPr>
+          <p:cNvPr id="13" name="번호 2"/>
+          <p:cNvSpPr/>
+          <p:nvPr/>
+        </p:nvSpPr>
+        <p:spPr>
+          <a:xfrm>
+            <a:off x="4536338" y="1783080"/>
+            <a:ext cx="457200" cy="457200"/>
+          </a:xfrm>
+          <a:prstGeom prst="roundRect">
+            <a:avLst>
+              <a:gd name="adj" fmla="val 25000"/>
+            </a:avLst>
+          </a:prstGeom>
+          <a:solidFill>
+            <a:srgbClr val="EA7BB3"/>
           </a:solidFill>
           <a:ln>
             <a:noFill/>
@@ -7897,7 +8328,7 @@
             <a:r>
               <a:rPr sz="1600" b="1" i="0">
                 <a:solidFill>
-                  <a:srgbClr val="FFFFFF"/>
+                  <a:srgbClr val="26231F"/>
                 </a:solidFill>
               </a:rPr>
               <a:t>2</a:t>
@@ -7907,14 +8338,14 @@
       </p:sp>
       <p:sp>
         <p:nvSpPr>
-          <p:cNvPr id="10" name="TextBox 9"/>
+          <p:cNvPr id="14" name="TextBox 13"/>
           <p:cNvSpPr txBox="1"/>
           <p:nvPr/>
         </p:nvSpPr>
         <p:spPr>
           <a:xfrm>
-            <a:off x="4521098" y="2377440"/>
-            <a:ext cx="3149498" cy="640080"/>
+            <a:off x="4490618" y="2377440"/>
+            <a:ext cx="3210458" cy="640080"/>
           </a:xfrm>
           <a:prstGeom prst="rect">
             <a:avLst/>
@@ -7935,7 +8366,7 @@
             <a:r>
               <a:rPr sz="1700" b="1" i="0">
                 <a:solidFill>
-                  <a:srgbClr val="1D115F"/>
+                  <a:srgbClr val="492738"/>
                 </a:solidFill>
               </a:rPr>
               <a:t>연 보험료 합계</a:t>
@@ -7945,14 +8376,14 @@
       </p:sp>
       <p:sp>
         <p:nvSpPr>
-          <p:cNvPr id="11" name="TextBox 10"/>
+          <p:cNvPr id="15" name="TextBox 14"/>
           <p:cNvSpPr txBox="1"/>
           <p:nvPr/>
         </p:nvSpPr>
         <p:spPr>
           <a:xfrm>
-            <a:off x="4521098" y="3063240"/>
-            <a:ext cx="3149498" cy="1325880"/>
+            <a:off x="4490618" y="3063240"/>
+            <a:ext cx="3210458" cy="1325880"/>
           </a:xfrm>
           <a:prstGeom prst="rect">
             <a:avLst/>
@@ -7973,7 +8404,7 @@
             <a:r>
               <a:rPr sz="3000" b="0" i="0">
                 <a:solidFill>
-                  <a:srgbClr val="2B2B2B"/>
+                  <a:srgbClr val="26231F"/>
                 </a:solidFill>
               </a:rPr>
               <a:t>0원</a:t>
@@ -7983,26 +8414,26 @@
       </p:sp>
       <p:sp>
         <p:nvSpPr>
-          <p:cNvPr id="12" name="카드 3"/>
+          <p:cNvPr id="16" name="카드 3"/>
           <p:cNvSpPr/>
           <p:nvPr/>
         </p:nvSpPr>
         <p:spPr>
           <a:xfrm>
-            <a:off x="8036356" y="1600200"/>
-            <a:ext cx="3423818" cy="2926080"/>
+            <a:off x="8066836" y="1600200"/>
+            <a:ext cx="3484778" cy="2926080"/>
           </a:xfrm>
           <a:prstGeom prst="roundRect">
             <a:avLst>
-              <a:gd name="adj" fmla="val 8000"/>
+              <a:gd name="adj" fmla="val 3000"/>
             </a:avLst>
           </a:prstGeom>
           <a:solidFill>
-            <a:srgbClr val="F0EEFC"/>
+            <a:srgbClr val="FFFFFF"/>
           </a:solidFill>
-          <a:ln w="15875">
+          <a:ln w="9525">
             <a:solidFill>
-              <a:srgbClr val="D7D1FA"/>
+              <a:srgbClr val="FAD1E6"/>
             </a:solidFill>
           </a:ln>
         </p:spPr>
@@ -8016,20 +8447,51 @@
       </p:sp>
       <p:sp>
         <p:nvSpPr>
-          <p:cNvPr id="13" name="번호 3"/>
+          <p:cNvPr id="17" name="위쪽 띠"/>
           <p:cNvSpPr/>
           <p:nvPr/>
         </p:nvSpPr>
         <p:spPr>
           <a:xfrm>
-            <a:off x="8219236" y="1783080"/>
-            <a:ext cx="457200" cy="457200"/>
-          </a:xfrm>
-          <a:prstGeom prst="ellipse">
+            <a:off x="8075980" y="1609344"/>
+            <a:ext cx="3466490" cy="82296"/>
+          </a:xfrm>
+          <a:prstGeom prst="rect">
             <a:avLst/>
           </a:prstGeom>
           <a:solidFill>
-            <a:srgbClr val="3D26C5"/>
+            <a:srgbClr val="EA7BB3"/>
+          </a:solidFill>
+          <a:ln>
+            <a:noFill/>
+          </a:ln>
+        </p:spPr>
+        <p:txBody>
+          <a:bodyPr rtlCol="0" anchor="ctr"/>
+          <a:lstStyle/>
+          <a:p>
+            <a:pPr algn="ctr"/>
+          </a:p>
+        </p:txBody>
+      </p:sp>
+      <p:sp>
+        <p:nvSpPr>
+          <p:cNvPr id="18" name="번호 3"/>
+          <p:cNvSpPr/>
+          <p:nvPr/>
+        </p:nvSpPr>
+        <p:spPr>
+          <a:xfrm>
+            <a:off x="8249716" y="1783080"/>
+            <a:ext cx="457200" cy="457200"/>
+          </a:xfrm>
+          <a:prstGeom prst="roundRect">
+            <a:avLst>
+              <a:gd name="adj" fmla="val 25000"/>
+            </a:avLst>
+          </a:prstGeom>
+          <a:solidFill>
+            <a:srgbClr val="EA7BB3"/>
           </a:solidFill>
           <a:ln>
             <a:noFill/>
@@ -8049,7 +8511,7 @@
             <a:r>
               <a:rPr sz="1600" b="1" i="0">
                 <a:solidFill>
-                  <a:srgbClr val="FFFFFF"/>
+                  <a:srgbClr val="26231F"/>
                 </a:solidFill>
               </a:rPr>
               <a:t>3</a:t>
@@ -8059,14 +8521,14 @@
       </p:sp>
       <p:sp>
         <p:nvSpPr>
-          <p:cNvPr id="14" name="TextBox 13"/>
+          <p:cNvPr id="19" name="TextBox 18"/>
           <p:cNvSpPr txBox="1"/>
           <p:nvPr/>
         </p:nvSpPr>
         <p:spPr>
           <a:xfrm>
-            <a:off x="8173516" y="2377440"/>
-            <a:ext cx="3149498" cy="640080"/>
+            <a:off x="8203996" y="2377440"/>
+            <a:ext cx="3210458" cy="640080"/>
           </a:xfrm>
           <a:prstGeom prst="rect">
             <a:avLst/>
@@ -8087,7 +8549,7 @@
             <a:r>
               <a:rPr sz="1700" b="1" i="0">
                 <a:solidFill>
-                  <a:srgbClr val="1D115F"/>
+                  <a:srgbClr val="492738"/>
                 </a:solidFill>
               </a:rPr>
               <a:t>월 소득 대비</a:t>
@@ -8097,14 +8559,14 @@
       </p:sp>
       <p:sp>
         <p:nvSpPr>
-          <p:cNvPr id="15" name="TextBox 14"/>
+          <p:cNvPr id="20" name="TextBox 19"/>
           <p:cNvSpPr txBox="1"/>
           <p:nvPr/>
         </p:nvSpPr>
         <p:spPr>
           <a:xfrm>
-            <a:off x="8173516" y="3063240"/>
-            <a:ext cx="3149498" cy="1325880"/>
+            <a:off x="8203996" y="3063240"/>
+            <a:ext cx="3210458" cy="1325880"/>
           </a:xfrm>
           <a:prstGeom prst="rect">
             <a:avLst/>
@@ -8125,7 +8587,7 @@
             <a:r>
               <a:rPr sz="3000" b="0" i="0">
                 <a:solidFill>
-                  <a:srgbClr val="2B2B2B"/>
+                  <a:srgbClr val="26231F"/>
                 </a:solidFill>
               </a:rPr>
               <a:t>0 %</a:t>
@@ -8135,14 +8597,14 @@
       </p:sp>
       <p:sp>
         <p:nvSpPr>
-          <p:cNvPr id="16" name="안내"/>
+          <p:cNvPr id="21" name="안내"/>
           <p:cNvSpPr txBox="1"/>
           <p:nvPr/>
         </p:nvSpPr>
         <p:spPr>
           <a:xfrm>
-            <a:off x="731520" y="4709160"/>
-            <a:ext cx="10728655" cy="365760"/>
+            <a:off x="640080" y="4709160"/>
+            <a:ext cx="10911535" cy="365760"/>
           </a:xfrm>
           <a:prstGeom prst="rect">
             <a:avLst/>
@@ -8185,7 +8647,7 @@
     <p:bg>
       <p:bgPr>
         <a:solidFill>
-          <a:srgbClr val="3D26C5"/>
+          <a:srgbClr val="FDEAF4"/>
         </a:solidFill>
         <a:effectLst/>
       </p:bgPr>
@@ -8205,16 +8667,81 @@
         </p:nvSpPr>
         <p:spPr>
           <a:xfrm>
-            <a:off x="274320" y="274320"/>
-            <a:ext cx="11643055" cy="6309360"/>
-          </a:xfrm>
-          <a:prstGeom prst="roundRect">
-            <a:avLst>
-              <a:gd name="adj" fmla="val 3500"/>
-            </a:avLst>
+            <a:off x="640080" y="6400800"/>
+            <a:ext cx="10911535" cy="10972"/>
+          </a:xfrm>
+          <a:prstGeom prst="rect">
+            <a:avLst/>
           </a:prstGeom>
           <a:solidFill>
-            <a:srgbClr val="FFFFFF"/>
+            <a:srgbClr val="26231F"/>
+          </a:solidFill>
+          <a:ln>
+            <a:noFill/>
+          </a:ln>
+        </p:spPr>
+        <p:txBody>
+          <a:bodyPr rtlCol="0" anchor="ctr"/>
+          <a:lstStyle/>
+          <a:p>
+            <a:pPr algn="ctr"/>
+          </a:p>
+        </p:txBody>
+      </p:sp>
+      <p:sp>
+        <p:nvSpPr>
+          <p:cNvPr id="4" name="하단 라벨"/>
+          <p:cNvSpPr txBox="1"/>
+          <p:nvPr/>
+        </p:nvSpPr>
+        <p:spPr>
+          <a:xfrm>
+            <a:off x="640080" y="6437376"/>
+            <a:ext cx="5486400" cy="274320"/>
+          </a:xfrm>
+          <a:prstGeom prst="rect">
+            <a:avLst/>
+          </a:prstGeom>
+          <a:noFill/>
+        </p:spPr>
+        <p:txBody>
+          <a:bodyPr wrap="square" lIns="54864" rIns="54864" tIns="27432" bIns="27432" anchor="ctr">
+            <a:noAutofit/>
+          </a:bodyPr>
+          <a:lstStyle/>
+          <a:p>
+            <a:pPr algn="l">
+              <a:lnSpc>
+                <a:spcPct val="115000"/>
+              </a:lnSpc>
+            </a:pPr>
+            <a:r>
+              <a:rPr sz="900" b="1" i="0" spc="250">
+                <a:solidFill>
+                  <a:srgbClr val="26231F"/>
+                </a:solidFill>
+              </a:rPr>
+              <a:t>INSURANCE CHECK</a:t>
+            </a:r>
+          </a:p>
+        </p:txBody>
+      </p:sp>
+      <p:sp>
+        <p:nvSpPr>
+          <p:cNvPr id="5" name="포인트"/>
+          <p:cNvSpPr/>
+          <p:nvPr/>
+        </p:nvSpPr>
+        <p:spPr>
+          <a:xfrm>
+            <a:off x="11213287" y="6473952"/>
+            <a:ext cx="219456" cy="219456"/>
+          </a:xfrm>
+          <a:prstGeom prst="mathPlus">
+            <a:avLst/>
+          </a:prstGeom>
+          <a:solidFill>
+            <a:srgbClr val="EA7BB3"/>
           </a:solidFill>
           <a:ln>
             <a:noFill/>
@@ -8240,8 +8767,8 @@
         </p:nvSpPr>
         <p:spPr>
           <a:xfrm>
-            <a:off x="731520" y="548640"/>
-            <a:ext cx="9448495" cy="868680"/>
+            <a:off x="640080" y="502920"/>
+            <a:ext cx="10911535" cy="914400"/>
           </a:xfrm>
         </p:spPr>
         <p:txBody>
@@ -8258,7 +8785,7 @@
             <a:r>
               <a:rPr sz="3000" b="1" i="0">
                 <a:solidFill>
-                  <a:srgbClr val="1D115F"/>
+                  <a:srgbClr val="26231F"/>
                 </a:solidFill>
               </a:rPr>
               <a:t>점검 메모와 다음 할 일</a:t>
@@ -8268,26 +8795,26 @@
       </p:sp>
       <p:sp>
         <p:nvSpPr>
-          <p:cNvPr id="4" name="카드 1"/>
+          <p:cNvPr id="6" name="카드 1"/>
           <p:cNvSpPr/>
           <p:nvPr/>
         </p:nvSpPr>
         <p:spPr>
           <a:xfrm>
-            <a:off x="731520" y="1600200"/>
-            <a:ext cx="3423818" cy="3977639"/>
+            <a:off x="640080" y="1600200"/>
+            <a:ext cx="3484778" cy="3931920"/>
           </a:xfrm>
           <a:prstGeom prst="roundRect">
             <a:avLst>
-              <a:gd name="adj" fmla="val 8000"/>
+              <a:gd name="adj" fmla="val 3000"/>
             </a:avLst>
           </a:prstGeom>
           <a:solidFill>
-            <a:srgbClr val="F0EEFC"/>
+            <a:srgbClr val="FFFFFF"/>
           </a:solidFill>
-          <a:ln w="15875">
+          <a:ln w="9525">
             <a:solidFill>
-              <a:srgbClr val="D7D1FA"/>
+              <a:srgbClr val="FAD1E6"/>
             </a:solidFill>
           </a:ln>
         </p:spPr>
@@ -8301,20 +8828,51 @@
       </p:sp>
       <p:sp>
         <p:nvSpPr>
-          <p:cNvPr id="5" name="번호 1"/>
+          <p:cNvPr id="7" name="위쪽 띠"/>
           <p:cNvSpPr/>
           <p:nvPr/>
         </p:nvSpPr>
         <p:spPr>
           <a:xfrm>
-            <a:off x="914400" y="1783080"/>
-            <a:ext cx="457200" cy="457200"/>
-          </a:xfrm>
-          <a:prstGeom prst="ellipse">
+            <a:off x="649224" y="1609344"/>
+            <a:ext cx="3466490" cy="82296"/>
+          </a:xfrm>
+          <a:prstGeom prst="rect">
             <a:avLst/>
           </a:prstGeom>
           <a:solidFill>
-            <a:srgbClr val="3D26C5"/>
+            <a:srgbClr val="EA7BB3"/>
+          </a:solidFill>
+          <a:ln>
+            <a:noFill/>
+          </a:ln>
+        </p:spPr>
+        <p:txBody>
+          <a:bodyPr rtlCol="0" anchor="ctr"/>
+          <a:lstStyle/>
+          <a:p>
+            <a:pPr algn="ctr"/>
+          </a:p>
+        </p:txBody>
+      </p:sp>
+      <p:sp>
+        <p:nvSpPr>
+          <p:cNvPr id="8" name="번호 1"/>
+          <p:cNvSpPr/>
+          <p:nvPr/>
+        </p:nvSpPr>
+        <p:spPr>
+          <a:xfrm>
+            <a:off x="822959" y="1783080"/>
+            <a:ext cx="457200" cy="457200"/>
+          </a:xfrm>
+          <a:prstGeom prst="roundRect">
+            <a:avLst>
+              <a:gd name="adj" fmla="val 25000"/>
+            </a:avLst>
+          </a:prstGeom>
+          <a:solidFill>
+            <a:srgbClr val="EA7BB3"/>
           </a:solidFill>
           <a:ln>
             <a:noFill/>
@@ -8334,7 +8892,7 @@
             <a:r>
               <a:rPr sz="1600" b="1" i="0">
                 <a:solidFill>
-                  <a:srgbClr val="FFFFFF"/>
+                  <a:srgbClr val="26231F"/>
                 </a:solidFill>
               </a:rPr>
               <a:t>1</a:t>
@@ -8344,14 +8902,14 @@
       </p:sp>
       <p:sp>
         <p:nvSpPr>
-          <p:cNvPr id="6" name="TextBox 5"/>
+          <p:cNvPr id="9" name="TextBox 8"/>
           <p:cNvSpPr txBox="1"/>
           <p:nvPr/>
         </p:nvSpPr>
         <p:spPr>
           <a:xfrm>
-            <a:off x="868680" y="2377440"/>
-            <a:ext cx="3149498" cy="640080"/>
+            <a:off x="777240" y="2377440"/>
+            <a:ext cx="3210458" cy="640080"/>
           </a:xfrm>
           <a:prstGeom prst="rect">
             <a:avLst/>
@@ -8372,7 +8930,7 @@
             <a:r>
               <a:rPr sz="1800" b="1" i="0">
                 <a:solidFill>
-                  <a:srgbClr val="1D115F"/>
+                  <a:srgbClr val="492738"/>
                 </a:solidFill>
               </a:rPr>
               <a:t>확인할 것</a:t>
@@ -8382,14 +8940,14 @@
       </p:sp>
       <p:sp>
         <p:nvSpPr>
-          <p:cNvPr id="7" name="TextBox 6"/>
+          <p:cNvPr id="10" name="TextBox 9"/>
           <p:cNvSpPr txBox="1"/>
           <p:nvPr/>
         </p:nvSpPr>
         <p:spPr>
           <a:xfrm>
-            <a:off x="868680" y="3063240"/>
-            <a:ext cx="3149498" cy="2377439"/>
+            <a:off x="777240" y="3063240"/>
+            <a:ext cx="3210458" cy="2331720"/>
           </a:xfrm>
           <a:prstGeom prst="rect">
             <a:avLst/>
@@ -8410,7 +8968,7 @@
             <a:r>
               <a:rPr sz="1500" b="0" i="0">
                 <a:solidFill>
-                  <a:srgbClr val="2B2B2B"/>
+                  <a:srgbClr val="26231F"/>
                 </a:solidFill>
               </a:rPr>
               <a:t>내용을 입력하세요</a:t>
@@ -8420,26 +8978,26 @@
       </p:sp>
       <p:sp>
         <p:nvSpPr>
-          <p:cNvPr id="8" name="카드 2"/>
+          <p:cNvPr id="11" name="카드 2"/>
           <p:cNvSpPr/>
           <p:nvPr/>
         </p:nvSpPr>
         <p:spPr>
           <a:xfrm>
-            <a:off x="4383938" y="1600200"/>
-            <a:ext cx="3423818" cy="3977639"/>
+            <a:off x="4353458" y="1600200"/>
+            <a:ext cx="3484778" cy="3931920"/>
           </a:xfrm>
           <a:prstGeom prst="roundRect">
             <a:avLst>
-              <a:gd name="adj" fmla="val 8000"/>
+              <a:gd name="adj" fmla="val 3000"/>
             </a:avLst>
           </a:prstGeom>
           <a:solidFill>
-            <a:srgbClr val="F0EEFC"/>
+            <a:srgbClr val="FFFFFF"/>
           </a:solidFill>
-          <a:ln w="15875">
+          <a:ln w="9525">
             <a:solidFill>
-              <a:srgbClr val="D7D1FA"/>
+              <a:srgbClr val="FAD1E6"/>
             </a:solidFill>
           </a:ln>
         </p:spPr>
@@ -8453,20 +9011,51 @@
       </p:sp>
       <p:sp>
         <p:nvSpPr>
-          <p:cNvPr id="9" name="번호 2"/>
+          <p:cNvPr id="12" name="위쪽 띠"/>
           <p:cNvSpPr/>
           <p:nvPr/>
         </p:nvSpPr>
         <p:spPr>
           <a:xfrm>
-            <a:off x="4566818" y="1783080"/>
-            <a:ext cx="457200" cy="457200"/>
-          </a:xfrm>
-          <a:prstGeom prst="ellipse">
+            <a:off x="4362602" y="1609344"/>
+            <a:ext cx="3466490" cy="82296"/>
+          </a:xfrm>
+          <a:prstGeom prst="rect">
             <a:avLst/>
           </a:prstGeom>
           <a:solidFill>
-            <a:srgbClr val="3D26C5"/>
+            <a:srgbClr val="EA7BB3"/>
+          </a:solidFill>
+          <a:ln>
+            <a:noFill/>
+          </a:ln>
+        </p:spPr>
+        <p:txBody>
+          <a:bodyPr rtlCol="0" anchor="ctr"/>
+          <a:lstStyle/>
+          <a:p>
+            <a:pPr algn="ctr"/>
+          </a:p>
+        </p:txBody>
+      </p:sp>
+      <p:sp>
+        <p:nvSpPr>
+          <p:cNvPr id="13" name="번호 2"/>
+          <p:cNvSpPr/>
+          <p:nvPr/>
+        </p:nvSpPr>
+        <p:spPr>
+          <a:xfrm>
+            <a:off x="4536338" y="1783080"/>
+            <a:ext cx="457200" cy="457200"/>
+          </a:xfrm>
+          <a:prstGeom prst="roundRect">
+            <a:avLst>
+              <a:gd name="adj" fmla="val 25000"/>
+            </a:avLst>
+          </a:prstGeom>
+          <a:solidFill>
+            <a:srgbClr val="EA7BB3"/>
           </a:solidFill>
           <a:ln>
             <a:noFill/>
@@ -8486,7 +9075,7 @@
             <a:r>
               <a:rPr sz="1600" b="1" i="0">
                 <a:solidFill>
-                  <a:srgbClr val="FFFFFF"/>
+                  <a:srgbClr val="26231F"/>
                 </a:solidFill>
               </a:rPr>
               <a:t>2</a:t>
@@ -8496,14 +9085,14 @@
       </p:sp>
       <p:sp>
         <p:nvSpPr>
-          <p:cNvPr id="10" name="TextBox 9"/>
+          <p:cNvPr id="14" name="TextBox 13"/>
           <p:cNvSpPr txBox="1"/>
           <p:nvPr/>
         </p:nvSpPr>
         <p:spPr>
           <a:xfrm>
-            <a:off x="4521098" y="2377440"/>
-            <a:ext cx="3149498" cy="640080"/>
+            <a:off x="4490618" y="2377440"/>
+            <a:ext cx="3210458" cy="640080"/>
           </a:xfrm>
           <a:prstGeom prst="rect">
             <a:avLst/>
@@ -8524,7 +9113,7 @@
             <a:r>
               <a:rPr sz="1800" b="1" i="0">
                 <a:solidFill>
-                  <a:srgbClr val="1D115F"/>
+                  <a:srgbClr val="492738"/>
                 </a:solidFill>
               </a:rPr>
               <a:t>문의할 것</a:t>
@@ -8534,14 +9123,14 @@
       </p:sp>
       <p:sp>
         <p:nvSpPr>
-          <p:cNvPr id="11" name="TextBox 10"/>
+          <p:cNvPr id="15" name="TextBox 14"/>
           <p:cNvSpPr txBox="1"/>
           <p:nvPr/>
         </p:nvSpPr>
         <p:spPr>
           <a:xfrm>
-            <a:off x="4521098" y="3063240"/>
-            <a:ext cx="3149498" cy="2377439"/>
+            <a:off x="4490618" y="3063240"/>
+            <a:ext cx="3210458" cy="2331720"/>
           </a:xfrm>
           <a:prstGeom prst="rect">
             <a:avLst/>
@@ -8562,7 +9151,7 @@
             <a:r>
               <a:rPr sz="1500" b="0" i="0">
                 <a:solidFill>
-                  <a:srgbClr val="2B2B2B"/>
+                  <a:srgbClr val="26231F"/>
                 </a:solidFill>
               </a:rPr>
               <a:t>내용을 입력하세요</a:t>
@@ -8572,26 +9161,26 @@
       </p:sp>
       <p:sp>
         <p:nvSpPr>
-          <p:cNvPr id="12" name="카드 3"/>
+          <p:cNvPr id="16" name="카드 3"/>
           <p:cNvSpPr/>
           <p:nvPr/>
         </p:nvSpPr>
         <p:spPr>
           <a:xfrm>
-            <a:off x="8036356" y="1600200"/>
-            <a:ext cx="3423818" cy="3977639"/>
+            <a:off x="8066836" y="1600200"/>
+            <a:ext cx="3484778" cy="3931920"/>
           </a:xfrm>
           <a:prstGeom prst="roundRect">
             <a:avLst>
-              <a:gd name="adj" fmla="val 8000"/>
+              <a:gd name="adj" fmla="val 3000"/>
             </a:avLst>
           </a:prstGeom>
           <a:solidFill>
-            <a:srgbClr val="F0EEFC"/>
+            <a:srgbClr val="FFFFFF"/>
           </a:solidFill>
-          <a:ln w="15875">
+          <a:ln w="9525">
             <a:solidFill>
-              <a:srgbClr val="D7D1FA"/>
+              <a:srgbClr val="FAD1E6"/>
             </a:solidFill>
           </a:ln>
         </p:spPr>
@@ -8605,20 +9194,51 @@
       </p:sp>
       <p:sp>
         <p:nvSpPr>
-          <p:cNvPr id="13" name="번호 3"/>
+          <p:cNvPr id="17" name="위쪽 띠"/>
           <p:cNvSpPr/>
           <p:nvPr/>
         </p:nvSpPr>
         <p:spPr>
           <a:xfrm>
-            <a:off x="8219236" y="1783080"/>
-            <a:ext cx="457200" cy="457200"/>
-          </a:xfrm>
-          <a:prstGeom prst="ellipse">
+            <a:off x="8075980" y="1609344"/>
+            <a:ext cx="3466490" cy="82296"/>
+          </a:xfrm>
+          <a:prstGeom prst="rect">
             <a:avLst/>
           </a:prstGeom>
           <a:solidFill>
-            <a:srgbClr val="3D26C5"/>
+            <a:srgbClr val="EA7BB3"/>
+          </a:solidFill>
+          <a:ln>
+            <a:noFill/>
+          </a:ln>
+        </p:spPr>
+        <p:txBody>
+          <a:bodyPr rtlCol="0" anchor="ctr"/>
+          <a:lstStyle/>
+          <a:p>
+            <a:pPr algn="ctr"/>
+          </a:p>
+        </p:txBody>
+      </p:sp>
+      <p:sp>
+        <p:nvSpPr>
+          <p:cNvPr id="18" name="번호 3"/>
+          <p:cNvSpPr/>
+          <p:nvPr/>
+        </p:nvSpPr>
+        <p:spPr>
+          <a:xfrm>
+            <a:off x="8249716" y="1783080"/>
+            <a:ext cx="457200" cy="457200"/>
+          </a:xfrm>
+          <a:prstGeom prst="roundRect">
+            <a:avLst>
+              <a:gd name="adj" fmla="val 25000"/>
+            </a:avLst>
+          </a:prstGeom>
+          <a:solidFill>
+            <a:srgbClr val="EA7BB3"/>
           </a:solidFill>
           <a:ln>
             <a:noFill/>
@@ -8638,7 +9258,7 @@
             <a:r>
               <a:rPr sz="1600" b="1" i="0">
                 <a:solidFill>
-                  <a:srgbClr val="FFFFFF"/>
+                  <a:srgbClr val="26231F"/>
                 </a:solidFill>
               </a:rPr>
               <a:t>3</a:t>
@@ -8648,14 +9268,14 @@
       </p:sp>
       <p:sp>
         <p:nvSpPr>
-          <p:cNvPr id="14" name="TextBox 13"/>
+          <p:cNvPr id="19" name="TextBox 18"/>
           <p:cNvSpPr txBox="1"/>
           <p:nvPr/>
         </p:nvSpPr>
         <p:spPr>
           <a:xfrm>
-            <a:off x="8173516" y="2377440"/>
-            <a:ext cx="3149498" cy="640080"/>
+            <a:off x="8203996" y="2377440"/>
+            <a:ext cx="3210458" cy="640080"/>
           </a:xfrm>
           <a:prstGeom prst="rect">
             <a:avLst/>
@@ -8676,7 +9296,7 @@
             <a:r>
               <a:rPr sz="1800" b="1" i="0">
                 <a:solidFill>
-                  <a:srgbClr val="1D115F"/>
+                  <a:srgbClr val="492738"/>
                 </a:solidFill>
               </a:rPr>
               <a:t>정리할 날짜</a:t>
@@ -8686,14 +9306,14 @@
       </p:sp>
       <p:sp>
         <p:nvSpPr>
-          <p:cNvPr id="15" name="TextBox 14"/>
+          <p:cNvPr id="20" name="TextBox 19"/>
           <p:cNvSpPr txBox="1"/>
           <p:nvPr/>
         </p:nvSpPr>
         <p:spPr>
           <a:xfrm>
-            <a:off x="8173516" y="3063240"/>
-            <a:ext cx="3149498" cy="2377439"/>
+            <a:off x="8203996" y="3063240"/>
+            <a:ext cx="3210458" cy="2331720"/>
           </a:xfrm>
           <a:prstGeom prst="rect">
             <a:avLst/>
@@ -8714,7 +9334,7 @@
             <a:r>
               <a:rPr sz="1500" b="0" i="0">
                 <a:solidFill>
-                  <a:srgbClr val="2B2B2B"/>
+                  <a:srgbClr val="26231F"/>
                 </a:solidFill>
               </a:rPr>
               <a:t>내용을 입력하세요</a:t>
@@ -8724,14 +9344,14 @@
       </p:sp>
       <p:sp>
         <p:nvSpPr>
-          <p:cNvPr id="16" name="안내 문구"/>
+          <p:cNvPr id="21" name="안내 문구"/>
           <p:cNvSpPr txBox="1"/>
           <p:nvPr/>
         </p:nvSpPr>
         <p:spPr>
           <a:xfrm>
-            <a:off x="731520" y="5669280"/>
-            <a:ext cx="10728655" cy="548640"/>
+            <a:off x="640080" y="5623560"/>
+            <a:ext cx="10911535" cy="548640"/>
           </a:xfrm>
           <a:prstGeom prst="rect">
             <a:avLst/>
@@ -8779,34 +9399,34 @@
         <a:sysClr val="window" lastClr="FFFFFF"/>
       </a:lt1>
       <a:dk2>
-        <a:srgbClr val="1D115F"/>
+        <a:srgbClr val="492738"/>
       </a:dk2>
       <a:lt2>
-        <a:srgbClr val="F0EEFC"/>
+        <a:srgbClr val="FDEAF4"/>
       </a:lt2>
       <a:accent1>
-        <a:srgbClr val="3D26C5"/>
+        <a:srgbClr val="EA7BB3"/>
       </a:accent1>
       <a:accent2>
-        <a:srgbClr val="209DB6"/>
+        <a:srgbClr val="EF9FA1"/>
       </a:accent2>
       <a:accent3>
-        <a:srgbClr val="1D115F"/>
+        <a:srgbClr val="492738"/>
       </a:accent3>
       <a:accent4>
-        <a:srgbClr val="D7D1FA"/>
+        <a:srgbClr val="FAD1E6"/>
       </a:accent4>
       <a:accent5>
-        <a:srgbClr val="2E62BE"/>
+        <a:srgbClr val="EC8DAA"/>
       </a:accent5>
       <a:accent6>
-        <a:srgbClr val="77709F"/>
+        <a:srgbClr val="927D88"/>
       </a:accent6>
       <a:hlink>
-        <a:srgbClr val="3D26C5"/>
+        <a:srgbClr val="EA7BB3"/>
       </a:hlink>
       <a:folHlink>
-        <a:srgbClr val="1D115F"/>
+        <a:srgbClr val="492738"/>
       </a:folHlink>
     </a:clrScheme>
     <a:fontScheme name="Office">
